--- a/day2-deck/decks/Tech Minute - Review.pptx
+++ b/day2-deck/decks/Tech Minute - Review.pptx
@@ -2144,8 +2144,8 @@
         </p:nvSpPr>
         <p:spPr>
           <a:xfrm>
-            <a:off x="457200" y="5961888"/>
-            <a:ext cx="11274552" cy="548640"/>
+            <a:off x="457200" y="6126480"/>
+            <a:ext cx="11274552" cy="364236"/>
           </a:xfrm>
           <a:prstGeom prst="rect">
             <a:avLst/>
@@ -2164,8 +2164,8 @@
         </p:nvSpPr>
         <p:spPr>
           <a:xfrm>
-            <a:off x="658368" y="5980176"/>
-            <a:ext cx="10927080" cy="512064"/>
+            <a:off x="658368" y="6144768"/>
+            <a:ext cx="10927080" cy="327660"/>
           </a:xfrm>
           <a:prstGeom prst="rect">
             <a:avLst/>
@@ -2181,7 +2181,7 @@
               <a:buNone/>
             </a:pPr>
             <a:r>
-              <a:rPr lang="en-US" sz="1600" b="1" dirty="0">
+              <a:rPr lang="en-US" sz="1550" b="1" dirty="0">
                 <a:solidFill>
                   <a:srgbClr val="0B7A4A"/>
                 </a:solidFill>
@@ -2191,7 +2191,7 @@
               </a:rPr>
               <a:t>One minute a day for every tech is worth $37,032 a month, $444,380 a year. No new techs, no new bays.</a:t>
             </a:r>
-            <a:endParaRPr lang="en-US" sz="1600" dirty="0"/>
+            <a:endParaRPr lang="en-US" sz="1550" dirty="0"/>
           </a:p>
         </p:txBody>
       </p:sp>
@@ -2334,7 +2334,7 @@
         <p:spPr>
           <a:xfrm>
             <a:off x="457200" y="1207008"/>
-            <a:ext cx="11274552" cy="4645152"/>
+            <a:ext cx="11274552" cy="4782312"/>
           </a:xfrm>
           <a:prstGeom prst="rect">
             <a:avLst/>
@@ -2588,7 +2588,7 @@
         <p:spPr>
           <a:xfrm>
             <a:off x="658368" y="1700784"/>
-            <a:ext cx="1938528" cy="236668"/>
+            <a:ext cx="1938528" cy="248502"/>
           </a:xfrm>
           <a:prstGeom prst="rect">
             <a:avLst/>
@@ -2626,8 +2626,8 @@
         </p:nvSpPr>
         <p:spPr>
           <a:xfrm>
-            <a:off x="2670048" y="1754034"/>
-            <a:ext cx="1042416" cy="130168"/>
+            <a:off x="2670048" y="1756697"/>
+            <a:ext cx="1042416" cy="136676"/>
           </a:xfrm>
           <a:prstGeom prst="rect">
             <a:avLst/>
@@ -2647,7 +2647,7 @@
         <p:spPr>
           <a:xfrm>
             <a:off x="3767328" y="1700784"/>
-            <a:ext cx="786384" cy="236668"/>
+            <a:ext cx="786384" cy="248502"/>
           </a:xfrm>
           <a:prstGeom prst="rect">
             <a:avLst/>
@@ -2686,7 +2686,7 @@
         <p:spPr>
           <a:xfrm>
             <a:off x="4553712" y="1700784"/>
-            <a:ext cx="566928" cy="236668"/>
+            <a:ext cx="566928" cy="248502"/>
           </a:xfrm>
           <a:prstGeom prst="rect">
             <a:avLst/>
@@ -2725,7 +2725,7 @@
         <p:spPr>
           <a:xfrm>
             <a:off x="5120640" y="1700784"/>
-            <a:ext cx="749808" cy="236668"/>
+            <a:ext cx="749808" cy="248502"/>
           </a:xfrm>
           <a:prstGeom prst="rect">
             <a:avLst/>
@@ -2763,8 +2763,8 @@
         </p:nvSpPr>
         <p:spPr>
           <a:xfrm>
-            <a:off x="658368" y="1937452"/>
-            <a:ext cx="1938528" cy="236668"/>
+            <a:off x="658368" y="1949286"/>
+            <a:ext cx="1938528" cy="248502"/>
           </a:xfrm>
           <a:prstGeom prst="rect">
             <a:avLst/>
@@ -2802,8 +2802,8 @@
         </p:nvSpPr>
         <p:spPr>
           <a:xfrm>
-            <a:off x="2670048" y="1990703"/>
-            <a:ext cx="813746" cy="130168"/>
+            <a:off x="2670048" y="2005199"/>
+            <a:ext cx="813746" cy="136676"/>
           </a:xfrm>
           <a:prstGeom prst="rect">
             <a:avLst/>
@@ -2822,8 +2822,8 @@
         </p:nvSpPr>
         <p:spPr>
           <a:xfrm>
-            <a:off x="3767328" y="1937452"/>
-            <a:ext cx="786384" cy="236668"/>
+            <a:off x="3767328" y="1949286"/>
+            <a:ext cx="786384" cy="248502"/>
           </a:xfrm>
           <a:prstGeom prst="rect">
             <a:avLst/>
@@ -2861,8 +2861,8 @@
         </p:nvSpPr>
         <p:spPr>
           <a:xfrm>
-            <a:off x="4553712" y="1937452"/>
-            <a:ext cx="566928" cy="236668"/>
+            <a:off x="4553712" y="1949286"/>
+            <a:ext cx="566928" cy="248502"/>
           </a:xfrm>
           <a:prstGeom prst="rect">
             <a:avLst/>
@@ -2900,8 +2900,8 @@
         </p:nvSpPr>
         <p:spPr>
           <a:xfrm>
-            <a:off x="5120640" y="1937452"/>
-            <a:ext cx="749808" cy="236668"/>
+            <a:off x="5120640" y="1949286"/>
+            <a:ext cx="749808" cy="248502"/>
           </a:xfrm>
           <a:prstGeom prst="rect">
             <a:avLst/>
@@ -2939,8 +2939,8 @@
         </p:nvSpPr>
         <p:spPr>
           <a:xfrm>
-            <a:off x="658368" y="2174120"/>
-            <a:ext cx="1938528" cy="236668"/>
+            <a:off x="658368" y="2197787"/>
+            <a:ext cx="1938528" cy="248502"/>
           </a:xfrm>
           <a:prstGeom prst="rect">
             <a:avLst/>
@@ -2978,8 +2978,8 @@
         </p:nvSpPr>
         <p:spPr>
           <a:xfrm>
-            <a:off x="2670048" y="2227371"/>
-            <a:ext cx="683623" cy="130168"/>
+            <a:off x="2670048" y="2253700"/>
+            <a:ext cx="683623" cy="136676"/>
           </a:xfrm>
           <a:prstGeom prst="rect">
             <a:avLst/>
@@ -2998,8 +2998,8 @@
         </p:nvSpPr>
         <p:spPr>
           <a:xfrm>
-            <a:off x="3767328" y="2174120"/>
-            <a:ext cx="786384" cy="236668"/>
+            <a:off x="3767328" y="2197787"/>
+            <a:ext cx="786384" cy="248502"/>
           </a:xfrm>
           <a:prstGeom prst="rect">
             <a:avLst/>
@@ -3037,8 +3037,8 @@
         </p:nvSpPr>
         <p:spPr>
           <a:xfrm>
-            <a:off x="4553712" y="2174120"/>
-            <a:ext cx="566928" cy="236668"/>
+            <a:off x="4553712" y="2197787"/>
+            <a:ext cx="566928" cy="248502"/>
           </a:xfrm>
           <a:prstGeom prst="rect">
             <a:avLst/>
@@ -3076,8 +3076,8 @@
         </p:nvSpPr>
         <p:spPr>
           <a:xfrm>
-            <a:off x="5120640" y="2174120"/>
-            <a:ext cx="749808" cy="236668"/>
+            <a:off x="5120640" y="2197787"/>
+            <a:ext cx="749808" cy="248502"/>
           </a:xfrm>
           <a:prstGeom prst="rect">
             <a:avLst/>
@@ -3115,8 +3115,8 @@
         </p:nvSpPr>
         <p:spPr>
           <a:xfrm>
-            <a:off x="658368" y="2410789"/>
-            <a:ext cx="1938528" cy="236668"/>
+            <a:off x="658368" y="2446289"/>
+            <a:ext cx="1938528" cy="248502"/>
           </a:xfrm>
           <a:prstGeom prst="rect">
             <a:avLst/>
@@ -3154,8 +3154,8 @@
         </p:nvSpPr>
         <p:spPr>
           <a:xfrm>
-            <a:off x="2670048" y="2464039"/>
-            <a:ext cx="656778" cy="130168"/>
+            <a:off x="2670048" y="2502202"/>
+            <a:ext cx="656778" cy="136676"/>
           </a:xfrm>
           <a:prstGeom prst="rect">
             <a:avLst/>
@@ -3174,8 +3174,8 @@
         </p:nvSpPr>
         <p:spPr>
           <a:xfrm>
-            <a:off x="3767328" y="2410789"/>
-            <a:ext cx="786384" cy="236668"/>
+            <a:off x="3767328" y="2446289"/>
+            <a:ext cx="786384" cy="248502"/>
           </a:xfrm>
           <a:prstGeom prst="rect">
             <a:avLst/>
@@ -3213,8 +3213,8 @@
         </p:nvSpPr>
         <p:spPr>
           <a:xfrm>
-            <a:off x="4553712" y="2410789"/>
-            <a:ext cx="566928" cy="236668"/>
+            <a:off x="4553712" y="2446289"/>
+            <a:ext cx="566928" cy="248502"/>
           </a:xfrm>
           <a:prstGeom prst="rect">
             <a:avLst/>
@@ -3252,8 +3252,8 @@
         </p:nvSpPr>
         <p:spPr>
           <a:xfrm>
-            <a:off x="5120640" y="2410789"/>
-            <a:ext cx="749808" cy="236668"/>
+            <a:off x="5120640" y="2446289"/>
+            <a:ext cx="749808" cy="248502"/>
           </a:xfrm>
           <a:prstGeom prst="rect">
             <a:avLst/>
@@ -3291,8 +3291,8 @@
         </p:nvSpPr>
         <p:spPr>
           <a:xfrm>
-            <a:off x="658368" y="2647457"/>
-            <a:ext cx="1938528" cy="236668"/>
+            <a:off x="658368" y="2694791"/>
+            <a:ext cx="1938528" cy="248502"/>
           </a:xfrm>
           <a:prstGeom prst="rect">
             <a:avLst/>
@@ -3330,8 +3330,8 @@
         </p:nvSpPr>
         <p:spPr>
           <a:xfrm>
-            <a:off x="2670048" y="2700707"/>
-            <a:ext cx="600457" cy="130168"/>
+            <a:off x="2670048" y="2750703"/>
+            <a:ext cx="600457" cy="136676"/>
           </a:xfrm>
           <a:prstGeom prst="rect">
             <a:avLst/>
@@ -3350,8 +3350,8 @@
         </p:nvSpPr>
         <p:spPr>
           <a:xfrm>
-            <a:off x="3767328" y="2647457"/>
-            <a:ext cx="786384" cy="236668"/>
+            <a:off x="3767328" y="2694791"/>
+            <a:ext cx="786384" cy="248502"/>
           </a:xfrm>
           <a:prstGeom prst="rect">
             <a:avLst/>
@@ -3389,8 +3389,8 @@
         </p:nvSpPr>
         <p:spPr>
           <a:xfrm>
-            <a:off x="4553712" y="2647457"/>
-            <a:ext cx="566928" cy="236668"/>
+            <a:off x="4553712" y="2694791"/>
+            <a:ext cx="566928" cy="248502"/>
           </a:xfrm>
           <a:prstGeom prst="rect">
             <a:avLst/>
@@ -3428,8 +3428,8 @@
         </p:nvSpPr>
         <p:spPr>
           <a:xfrm>
-            <a:off x="5120640" y="2647457"/>
-            <a:ext cx="749808" cy="236668"/>
+            <a:off x="5120640" y="2694791"/>
+            <a:ext cx="749808" cy="248502"/>
           </a:xfrm>
           <a:prstGeom prst="rect">
             <a:avLst/>
@@ -3467,8 +3467,8 @@
         </p:nvSpPr>
         <p:spPr>
           <a:xfrm>
-            <a:off x="658368" y="2884125"/>
-            <a:ext cx="1938528" cy="236668"/>
+            <a:off x="658368" y="2943292"/>
+            <a:ext cx="1938528" cy="248502"/>
           </a:xfrm>
           <a:prstGeom prst="rect">
             <a:avLst/>
@@ -3506,8 +3506,8 @@
         </p:nvSpPr>
         <p:spPr>
           <a:xfrm>
-            <a:off x="2670048" y="2937376"/>
-            <a:ext cx="548891" cy="130168"/>
+            <a:off x="2670048" y="2999205"/>
+            <a:ext cx="548891" cy="136676"/>
           </a:xfrm>
           <a:prstGeom prst="rect">
             <a:avLst/>
@@ -3526,8 +3526,8 @@
         </p:nvSpPr>
         <p:spPr>
           <a:xfrm>
-            <a:off x="3767328" y="2884125"/>
-            <a:ext cx="786384" cy="236668"/>
+            <a:off x="3767328" y="2943292"/>
+            <a:ext cx="786384" cy="248502"/>
           </a:xfrm>
           <a:prstGeom prst="rect">
             <a:avLst/>
@@ -3565,8 +3565,8 @@
         </p:nvSpPr>
         <p:spPr>
           <a:xfrm>
-            <a:off x="4553712" y="2884125"/>
-            <a:ext cx="566928" cy="236668"/>
+            <a:off x="4553712" y="2943292"/>
+            <a:ext cx="566928" cy="248502"/>
           </a:xfrm>
           <a:prstGeom prst="rect">
             <a:avLst/>
@@ -3604,8 +3604,8 @@
         </p:nvSpPr>
         <p:spPr>
           <a:xfrm>
-            <a:off x="5120640" y="2884125"/>
-            <a:ext cx="749808" cy="236668"/>
+            <a:off x="5120640" y="2943292"/>
+            <a:ext cx="749808" cy="248502"/>
           </a:xfrm>
           <a:prstGeom prst="rect">
             <a:avLst/>
@@ -3643,8 +3643,8 @@
         </p:nvSpPr>
         <p:spPr>
           <a:xfrm>
-            <a:off x="658368" y="3120793"/>
-            <a:ext cx="1938528" cy="236668"/>
+            <a:off x="658368" y="3191794"/>
+            <a:ext cx="1938528" cy="248502"/>
           </a:xfrm>
           <a:prstGeom prst="rect">
             <a:avLst/>
@@ -3682,8 +3682,8 @@
         </p:nvSpPr>
         <p:spPr>
           <a:xfrm>
-            <a:off x="2670048" y="3174044"/>
-            <a:ext cx="393176" cy="130168"/>
+            <a:off x="2670048" y="3247707"/>
+            <a:ext cx="393176" cy="136676"/>
           </a:xfrm>
           <a:prstGeom prst="rect">
             <a:avLst/>
@@ -3702,8 +3702,8 @@
         </p:nvSpPr>
         <p:spPr>
           <a:xfrm>
-            <a:off x="3767328" y="3120793"/>
-            <a:ext cx="786384" cy="236668"/>
+            <a:off x="3767328" y="3191794"/>
+            <a:ext cx="786384" cy="248502"/>
           </a:xfrm>
           <a:prstGeom prst="rect">
             <a:avLst/>
@@ -3741,8 +3741,8 @@
         </p:nvSpPr>
         <p:spPr>
           <a:xfrm>
-            <a:off x="4553712" y="3120793"/>
-            <a:ext cx="566928" cy="236668"/>
+            <a:off x="4553712" y="3191794"/>
+            <a:ext cx="566928" cy="248502"/>
           </a:xfrm>
           <a:prstGeom prst="rect">
             <a:avLst/>
@@ -3780,8 +3780,8 @@
         </p:nvSpPr>
         <p:spPr>
           <a:xfrm>
-            <a:off x="5120640" y="3120793"/>
-            <a:ext cx="749808" cy="236668"/>
+            <a:off x="5120640" y="3191794"/>
+            <a:ext cx="749808" cy="248502"/>
           </a:xfrm>
           <a:prstGeom prst="rect">
             <a:avLst/>
@@ -3819,8 +3819,8 @@
         </p:nvSpPr>
         <p:spPr>
           <a:xfrm>
-            <a:off x="658368" y="3357462"/>
-            <a:ext cx="1938528" cy="236668"/>
+            <a:off x="658368" y="3440296"/>
+            <a:ext cx="1938528" cy="248502"/>
           </a:xfrm>
           <a:prstGeom prst="rect">
             <a:avLst/>
@@ -3858,8 +3858,8 @@
         </p:nvSpPr>
         <p:spPr>
           <a:xfrm>
-            <a:off x="2670048" y="3410712"/>
-            <a:ext cx="391366" cy="130168"/>
+            <a:off x="2670048" y="3496208"/>
+            <a:ext cx="391366" cy="136676"/>
           </a:xfrm>
           <a:prstGeom prst="rect">
             <a:avLst/>
@@ -3878,8 +3878,8 @@
         </p:nvSpPr>
         <p:spPr>
           <a:xfrm>
-            <a:off x="3767328" y="3357462"/>
-            <a:ext cx="786384" cy="236668"/>
+            <a:off x="3767328" y="3440296"/>
+            <a:ext cx="786384" cy="248502"/>
           </a:xfrm>
           <a:prstGeom prst="rect">
             <a:avLst/>
@@ -3917,8 +3917,8 @@
         </p:nvSpPr>
         <p:spPr>
           <a:xfrm>
-            <a:off x="4553712" y="3357462"/>
-            <a:ext cx="566928" cy="236668"/>
+            <a:off x="4553712" y="3440296"/>
+            <a:ext cx="566928" cy="248502"/>
           </a:xfrm>
           <a:prstGeom prst="rect">
             <a:avLst/>
@@ -3956,8 +3956,8 @@
         </p:nvSpPr>
         <p:spPr>
           <a:xfrm>
-            <a:off x="5120640" y="3357462"/>
-            <a:ext cx="749808" cy="236668"/>
+            <a:off x="5120640" y="3440296"/>
+            <a:ext cx="749808" cy="248502"/>
           </a:xfrm>
           <a:prstGeom prst="rect">
             <a:avLst/>
@@ -3995,8 +3995,8 @@
         </p:nvSpPr>
         <p:spPr>
           <a:xfrm>
-            <a:off x="658368" y="3594130"/>
-            <a:ext cx="1938528" cy="236668"/>
+            <a:off x="658368" y="3688797"/>
+            <a:ext cx="1938528" cy="248502"/>
           </a:xfrm>
           <a:prstGeom prst="rect">
             <a:avLst/>
@@ -4034,8 +4034,8 @@
         </p:nvSpPr>
         <p:spPr>
           <a:xfrm>
-            <a:off x="2670048" y="3647380"/>
-            <a:ext cx="367379" cy="130168"/>
+            <a:off x="2670048" y="3744710"/>
+            <a:ext cx="367379" cy="136676"/>
           </a:xfrm>
           <a:prstGeom prst="rect">
             <a:avLst/>
@@ -4054,8 +4054,8 @@
         </p:nvSpPr>
         <p:spPr>
           <a:xfrm>
-            <a:off x="3767328" y="3594130"/>
-            <a:ext cx="786384" cy="236668"/>
+            <a:off x="3767328" y="3688797"/>
+            <a:ext cx="786384" cy="248502"/>
           </a:xfrm>
           <a:prstGeom prst="rect">
             <a:avLst/>
@@ -4093,8 +4093,8 @@
         </p:nvSpPr>
         <p:spPr>
           <a:xfrm>
-            <a:off x="4553712" y="3594130"/>
-            <a:ext cx="566928" cy="236668"/>
+            <a:off x="4553712" y="3688797"/>
+            <a:ext cx="566928" cy="248502"/>
           </a:xfrm>
           <a:prstGeom prst="rect">
             <a:avLst/>
@@ -4132,8 +4132,8 @@
         </p:nvSpPr>
         <p:spPr>
           <a:xfrm>
-            <a:off x="5120640" y="3594130"/>
-            <a:ext cx="749808" cy="236668"/>
+            <a:off x="5120640" y="3688797"/>
+            <a:ext cx="749808" cy="248502"/>
           </a:xfrm>
           <a:prstGeom prst="rect">
             <a:avLst/>
@@ -4171,8 +4171,8 @@
         </p:nvSpPr>
         <p:spPr>
           <a:xfrm>
-            <a:off x="658368" y="3830798"/>
-            <a:ext cx="1938528" cy="236668"/>
+            <a:off x="658368" y="3937299"/>
+            <a:ext cx="1938528" cy="248502"/>
           </a:xfrm>
           <a:prstGeom prst="rect">
             <a:avLst/>
@@ -4210,8 +4210,8 @@
         </p:nvSpPr>
         <p:spPr>
           <a:xfrm>
-            <a:off x="2670048" y="3884048"/>
-            <a:ext cx="355248" cy="130168"/>
+            <a:off x="2670048" y="3993212"/>
+            <a:ext cx="355248" cy="136676"/>
           </a:xfrm>
           <a:prstGeom prst="rect">
             <a:avLst/>
@@ -4230,8 +4230,8 @@
         </p:nvSpPr>
         <p:spPr>
           <a:xfrm>
-            <a:off x="3767328" y="3830798"/>
-            <a:ext cx="786384" cy="236668"/>
+            <a:off x="3767328" y="3937299"/>
+            <a:ext cx="786384" cy="248502"/>
           </a:xfrm>
           <a:prstGeom prst="rect">
             <a:avLst/>
@@ -4269,8 +4269,8 @@
         </p:nvSpPr>
         <p:spPr>
           <a:xfrm>
-            <a:off x="4553712" y="3830798"/>
-            <a:ext cx="566928" cy="236668"/>
+            <a:off x="4553712" y="3937299"/>
+            <a:ext cx="566928" cy="248502"/>
           </a:xfrm>
           <a:prstGeom prst="rect">
             <a:avLst/>
@@ -4308,8 +4308,8 @@
         </p:nvSpPr>
         <p:spPr>
           <a:xfrm>
-            <a:off x="5120640" y="3830798"/>
-            <a:ext cx="749808" cy="236668"/>
+            <a:off x="5120640" y="3937299"/>
+            <a:ext cx="749808" cy="248502"/>
           </a:xfrm>
           <a:prstGeom prst="rect">
             <a:avLst/>
@@ -4347,8 +4347,8 @@
         </p:nvSpPr>
         <p:spPr>
           <a:xfrm>
-            <a:off x="658368" y="4067466"/>
-            <a:ext cx="1938528" cy="236668"/>
+            <a:off x="658368" y="4185800"/>
+            <a:ext cx="1938528" cy="248502"/>
           </a:xfrm>
           <a:prstGeom prst="rect">
             <a:avLst/>
@@ -4386,8 +4386,8 @@
         </p:nvSpPr>
         <p:spPr>
           <a:xfrm>
-            <a:off x="2670048" y="4120717"/>
-            <a:ext cx="338665" cy="130168"/>
+            <a:off x="2670048" y="4241713"/>
+            <a:ext cx="338665" cy="136676"/>
           </a:xfrm>
           <a:prstGeom prst="rect">
             <a:avLst/>
@@ -4406,8 +4406,8 @@
         </p:nvSpPr>
         <p:spPr>
           <a:xfrm>
-            <a:off x="3767328" y="4067466"/>
-            <a:ext cx="786384" cy="236668"/>
+            <a:off x="3767328" y="4185800"/>
+            <a:ext cx="786384" cy="248502"/>
           </a:xfrm>
           <a:prstGeom prst="rect">
             <a:avLst/>
@@ -4445,8 +4445,8 @@
         </p:nvSpPr>
         <p:spPr>
           <a:xfrm>
-            <a:off x="4553712" y="4067466"/>
-            <a:ext cx="566928" cy="236668"/>
+            <a:off x="4553712" y="4185800"/>
+            <a:ext cx="566928" cy="248502"/>
           </a:xfrm>
           <a:prstGeom prst="rect">
             <a:avLst/>
@@ -4484,8 +4484,8 @@
         </p:nvSpPr>
         <p:spPr>
           <a:xfrm>
-            <a:off x="5120640" y="4067466"/>
-            <a:ext cx="749808" cy="236668"/>
+            <a:off x="5120640" y="4185800"/>
+            <a:ext cx="749808" cy="248502"/>
           </a:xfrm>
           <a:prstGeom prst="rect">
             <a:avLst/>
@@ -4523,8 +4523,8 @@
         </p:nvSpPr>
         <p:spPr>
           <a:xfrm>
-            <a:off x="658368" y="4304135"/>
-            <a:ext cx="1938528" cy="236668"/>
+            <a:off x="658368" y="4434302"/>
+            <a:ext cx="1938528" cy="248502"/>
           </a:xfrm>
           <a:prstGeom prst="rect">
             <a:avLst/>
@@ -4562,8 +4562,8 @@
         </p:nvSpPr>
         <p:spPr>
           <a:xfrm>
-            <a:off x="2670048" y="4357385"/>
-            <a:ext cx="305679" cy="130168"/>
+            <a:off x="2670048" y="4490215"/>
+            <a:ext cx="305679" cy="136676"/>
           </a:xfrm>
           <a:prstGeom prst="rect">
             <a:avLst/>
@@ -4582,8 +4582,8 @@
         </p:nvSpPr>
         <p:spPr>
           <a:xfrm>
-            <a:off x="3767328" y="4304135"/>
-            <a:ext cx="786384" cy="236668"/>
+            <a:off x="3767328" y="4434302"/>
+            <a:ext cx="786384" cy="248502"/>
           </a:xfrm>
           <a:prstGeom prst="rect">
             <a:avLst/>
@@ -4621,8 +4621,8 @@
         </p:nvSpPr>
         <p:spPr>
           <a:xfrm>
-            <a:off x="4553712" y="4304135"/>
-            <a:ext cx="566928" cy="236668"/>
+            <a:off x="4553712" y="4434302"/>
+            <a:ext cx="566928" cy="248502"/>
           </a:xfrm>
           <a:prstGeom prst="rect">
             <a:avLst/>
@@ -4660,8 +4660,8 @@
         </p:nvSpPr>
         <p:spPr>
           <a:xfrm>
-            <a:off x="5120640" y="4304135"/>
-            <a:ext cx="749808" cy="236668"/>
+            <a:off x="5120640" y="4434302"/>
+            <a:ext cx="749808" cy="248502"/>
           </a:xfrm>
           <a:prstGeom prst="rect">
             <a:avLst/>
@@ -4699,8 +4699,8 @@
         </p:nvSpPr>
         <p:spPr>
           <a:xfrm>
-            <a:off x="658368" y="4540803"/>
-            <a:ext cx="1938528" cy="236668"/>
+            <a:off x="658368" y="4682804"/>
+            <a:ext cx="1938528" cy="248502"/>
           </a:xfrm>
           <a:prstGeom prst="rect">
             <a:avLst/>
@@ -4738,8 +4738,8 @@
         </p:nvSpPr>
         <p:spPr>
           <a:xfrm>
-            <a:off x="2670048" y="4594053"/>
-            <a:ext cx="303009" cy="130168"/>
+            <a:off x="2670048" y="4738717"/>
+            <a:ext cx="303009" cy="136676"/>
           </a:xfrm>
           <a:prstGeom prst="rect">
             <a:avLst/>
@@ -4758,8 +4758,8 @@
         </p:nvSpPr>
         <p:spPr>
           <a:xfrm>
-            <a:off x="3767328" y="4540803"/>
-            <a:ext cx="786384" cy="236668"/>
+            <a:off x="3767328" y="4682804"/>
+            <a:ext cx="786384" cy="248502"/>
           </a:xfrm>
           <a:prstGeom prst="rect">
             <a:avLst/>
@@ -4797,8 +4797,8 @@
         </p:nvSpPr>
         <p:spPr>
           <a:xfrm>
-            <a:off x="4553712" y="4540803"/>
-            <a:ext cx="566928" cy="236668"/>
+            <a:off x="4553712" y="4682804"/>
+            <a:ext cx="566928" cy="248502"/>
           </a:xfrm>
           <a:prstGeom prst="rect">
             <a:avLst/>
@@ -4836,8 +4836,8 @@
         </p:nvSpPr>
         <p:spPr>
           <a:xfrm>
-            <a:off x="5120640" y="4540803"/>
-            <a:ext cx="749808" cy="236668"/>
+            <a:off x="5120640" y="4682804"/>
+            <a:ext cx="749808" cy="248502"/>
           </a:xfrm>
           <a:prstGeom prst="rect">
             <a:avLst/>
@@ -4875,8 +4875,8 @@
         </p:nvSpPr>
         <p:spPr>
           <a:xfrm>
-            <a:off x="658368" y="4777471"/>
-            <a:ext cx="1938528" cy="236668"/>
+            <a:off x="658368" y="4931305"/>
+            <a:ext cx="1938528" cy="248502"/>
           </a:xfrm>
           <a:prstGeom prst="rect">
             <a:avLst/>
@@ -4914,8 +4914,8 @@
         </p:nvSpPr>
         <p:spPr>
           <a:xfrm>
-            <a:off x="2670048" y="4830721"/>
-            <a:ext cx="297134" cy="130168"/>
+            <a:off x="2670048" y="4987218"/>
+            <a:ext cx="297134" cy="136676"/>
           </a:xfrm>
           <a:prstGeom prst="rect">
             <a:avLst/>
@@ -4934,8 +4934,8 @@
         </p:nvSpPr>
         <p:spPr>
           <a:xfrm>
-            <a:off x="3767328" y="4777471"/>
-            <a:ext cx="786384" cy="236668"/>
+            <a:off x="3767328" y="4931305"/>
+            <a:ext cx="786384" cy="248502"/>
           </a:xfrm>
           <a:prstGeom prst="rect">
             <a:avLst/>
@@ -4973,8 +4973,8 @@
         </p:nvSpPr>
         <p:spPr>
           <a:xfrm>
-            <a:off x="4553712" y="4777471"/>
-            <a:ext cx="566928" cy="236668"/>
+            <a:off x="4553712" y="4931305"/>
+            <a:ext cx="566928" cy="248502"/>
           </a:xfrm>
           <a:prstGeom prst="rect">
             <a:avLst/>
@@ -5012,8 +5012,8 @@
         </p:nvSpPr>
         <p:spPr>
           <a:xfrm>
-            <a:off x="5120640" y="4777471"/>
-            <a:ext cx="749808" cy="236668"/>
+            <a:off x="5120640" y="4931305"/>
+            <a:ext cx="749808" cy="248502"/>
           </a:xfrm>
           <a:prstGeom prst="rect">
             <a:avLst/>
@@ -5051,8 +5051,8 @@
         </p:nvSpPr>
         <p:spPr>
           <a:xfrm>
-            <a:off x="658368" y="5014139"/>
-            <a:ext cx="1938528" cy="236668"/>
+            <a:off x="658368" y="5179807"/>
+            <a:ext cx="1938528" cy="248502"/>
           </a:xfrm>
           <a:prstGeom prst="rect">
             <a:avLst/>
@@ -5090,8 +5090,8 @@
         </p:nvSpPr>
         <p:spPr>
           <a:xfrm>
-            <a:off x="2670048" y="5067390"/>
-            <a:ext cx="287796" cy="130168"/>
+            <a:off x="2670048" y="5235720"/>
+            <a:ext cx="287796" cy="136676"/>
           </a:xfrm>
           <a:prstGeom prst="rect">
             <a:avLst/>
@@ -5110,8 +5110,8 @@
         </p:nvSpPr>
         <p:spPr>
           <a:xfrm>
-            <a:off x="3767328" y="5014139"/>
-            <a:ext cx="786384" cy="236668"/>
+            <a:off x="3767328" y="5179807"/>
+            <a:ext cx="786384" cy="248502"/>
           </a:xfrm>
           <a:prstGeom prst="rect">
             <a:avLst/>
@@ -5149,8 +5149,8 @@
         </p:nvSpPr>
         <p:spPr>
           <a:xfrm>
-            <a:off x="4553712" y="5014139"/>
-            <a:ext cx="566928" cy="236668"/>
+            <a:off x="4553712" y="5179807"/>
+            <a:ext cx="566928" cy="248502"/>
           </a:xfrm>
           <a:prstGeom prst="rect">
             <a:avLst/>
@@ -5188,8 +5188,8 @@
         </p:nvSpPr>
         <p:spPr>
           <a:xfrm>
-            <a:off x="5120640" y="5014139"/>
-            <a:ext cx="749808" cy="236668"/>
+            <a:off x="5120640" y="5179807"/>
+            <a:ext cx="749808" cy="248502"/>
           </a:xfrm>
           <a:prstGeom prst="rect">
             <a:avLst/>
@@ -5227,8 +5227,8 @@
         </p:nvSpPr>
         <p:spPr>
           <a:xfrm>
-            <a:off x="658368" y="5250808"/>
-            <a:ext cx="1938528" cy="236668"/>
+            <a:off x="658368" y="5428309"/>
+            <a:ext cx="1938528" cy="248502"/>
           </a:xfrm>
           <a:prstGeom prst="rect">
             <a:avLst/>
@@ -5266,8 +5266,8 @@
         </p:nvSpPr>
         <p:spPr>
           <a:xfrm>
-            <a:off x="2670048" y="5304058"/>
-            <a:ext cx="274938" cy="130168"/>
+            <a:off x="2670048" y="5484222"/>
+            <a:ext cx="274938" cy="136676"/>
           </a:xfrm>
           <a:prstGeom prst="rect">
             <a:avLst/>
@@ -5286,8 +5286,8 @@
         </p:nvSpPr>
         <p:spPr>
           <a:xfrm>
-            <a:off x="3767328" y="5250808"/>
-            <a:ext cx="786384" cy="236668"/>
+            <a:off x="3767328" y="5428309"/>
+            <a:ext cx="786384" cy="248502"/>
           </a:xfrm>
           <a:prstGeom prst="rect">
             <a:avLst/>
@@ -5325,8 +5325,8 @@
         </p:nvSpPr>
         <p:spPr>
           <a:xfrm>
-            <a:off x="4553712" y="5250808"/>
-            <a:ext cx="566928" cy="236668"/>
+            <a:off x="4553712" y="5428309"/>
+            <a:ext cx="566928" cy="248502"/>
           </a:xfrm>
           <a:prstGeom prst="rect">
             <a:avLst/>
@@ -5364,8 +5364,8 @@
         </p:nvSpPr>
         <p:spPr>
           <a:xfrm>
-            <a:off x="5120640" y="5250808"/>
-            <a:ext cx="749808" cy="236668"/>
+            <a:off x="5120640" y="5428309"/>
+            <a:ext cx="749808" cy="248502"/>
           </a:xfrm>
           <a:prstGeom prst="rect">
             <a:avLst/>
@@ -5403,8 +5403,8 @@
         </p:nvSpPr>
         <p:spPr>
           <a:xfrm>
-            <a:off x="658368" y="5487476"/>
-            <a:ext cx="1938528" cy="236668"/>
+            <a:off x="658368" y="5676810"/>
+            <a:ext cx="1938528" cy="248502"/>
           </a:xfrm>
           <a:prstGeom prst="rect">
             <a:avLst/>
@@ -5442,8 +5442,8 @@
         </p:nvSpPr>
         <p:spPr>
           <a:xfrm>
-            <a:off x="2670048" y="5540726"/>
-            <a:ext cx="260210" cy="130168"/>
+            <a:off x="2670048" y="5732723"/>
+            <a:ext cx="260210" cy="136676"/>
           </a:xfrm>
           <a:prstGeom prst="rect">
             <a:avLst/>
@@ -5462,8 +5462,8 @@
         </p:nvSpPr>
         <p:spPr>
           <a:xfrm>
-            <a:off x="3767328" y="5487476"/>
-            <a:ext cx="786384" cy="236668"/>
+            <a:off x="3767328" y="5676810"/>
+            <a:ext cx="786384" cy="248502"/>
           </a:xfrm>
           <a:prstGeom prst="rect">
             <a:avLst/>
@@ -5501,8 +5501,8 @@
         </p:nvSpPr>
         <p:spPr>
           <a:xfrm>
-            <a:off x="4553712" y="5487476"/>
-            <a:ext cx="566928" cy="236668"/>
+            <a:off x="4553712" y="5676810"/>
+            <a:ext cx="566928" cy="248502"/>
           </a:xfrm>
           <a:prstGeom prst="rect">
             <a:avLst/>
@@ -5540,8 +5540,8 @@
         </p:nvSpPr>
         <p:spPr>
           <a:xfrm>
-            <a:off x="5120640" y="5487476"/>
-            <a:ext cx="749808" cy="236668"/>
+            <a:off x="5120640" y="5676810"/>
+            <a:ext cx="749808" cy="248502"/>
           </a:xfrm>
           <a:prstGeom prst="rect">
             <a:avLst/>
@@ -5580,7 +5580,7 @@
         <p:spPr>
           <a:xfrm>
             <a:off x="6208776" y="1700784"/>
-            <a:ext cx="1938528" cy="236668"/>
+            <a:ext cx="1938528" cy="248502"/>
           </a:xfrm>
           <a:prstGeom prst="rect">
             <a:avLst/>
@@ -5618,8 +5618,8 @@
         </p:nvSpPr>
         <p:spPr>
           <a:xfrm>
-            <a:off x="8220456" y="1754034"/>
-            <a:ext cx="246097" cy="130168"/>
+            <a:off x="8220456" y="1756697"/>
+            <a:ext cx="246097" cy="136676"/>
           </a:xfrm>
           <a:prstGeom prst="rect">
             <a:avLst/>
@@ -5639,7 +5639,7 @@
         <p:spPr>
           <a:xfrm>
             <a:off x="9317736" y="1700784"/>
-            <a:ext cx="786384" cy="236668"/>
+            <a:ext cx="786384" cy="248502"/>
           </a:xfrm>
           <a:prstGeom prst="rect">
             <a:avLst/>
@@ -5678,7 +5678,7 @@
         <p:spPr>
           <a:xfrm>
             <a:off x="10104120" y="1700784"/>
-            <a:ext cx="566928" cy="236668"/>
+            <a:ext cx="566928" cy="248502"/>
           </a:xfrm>
           <a:prstGeom prst="rect">
             <a:avLst/>
@@ -5717,7 +5717,7 @@
         <p:spPr>
           <a:xfrm>
             <a:off x="10671048" y="1700784"/>
-            <a:ext cx="749808" cy="236668"/>
+            <a:ext cx="749808" cy="248502"/>
           </a:xfrm>
           <a:prstGeom prst="rect">
             <a:avLst/>
@@ -5755,8 +5755,8 @@
         </p:nvSpPr>
         <p:spPr>
           <a:xfrm>
-            <a:off x="6208776" y="1937452"/>
-            <a:ext cx="1938528" cy="236668"/>
+            <a:off x="6208776" y="1949286"/>
+            <a:ext cx="1938528" cy="248502"/>
           </a:xfrm>
           <a:prstGeom prst="rect">
             <a:avLst/>
@@ -5794,8 +5794,8 @@
         </p:nvSpPr>
         <p:spPr>
           <a:xfrm>
-            <a:off x="8220456" y="1990703"/>
-            <a:ext cx="220598" cy="130168"/>
+            <a:off x="8220456" y="2005199"/>
+            <a:ext cx="220598" cy="136676"/>
           </a:xfrm>
           <a:prstGeom prst="rect">
             <a:avLst/>
@@ -5814,8 +5814,8 @@
         </p:nvSpPr>
         <p:spPr>
           <a:xfrm>
-            <a:off x="9317736" y="1937452"/>
-            <a:ext cx="786384" cy="236668"/>
+            <a:off x="9317736" y="1949286"/>
+            <a:ext cx="786384" cy="248502"/>
           </a:xfrm>
           <a:prstGeom prst="rect">
             <a:avLst/>
@@ -5853,8 +5853,8 @@
         </p:nvSpPr>
         <p:spPr>
           <a:xfrm>
-            <a:off x="10104120" y="1937452"/>
-            <a:ext cx="566928" cy="236668"/>
+            <a:off x="10104120" y="1949286"/>
+            <a:ext cx="566928" cy="248502"/>
           </a:xfrm>
           <a:prstGeom prst="rect">
             <a:avLst/>
@@ -5892,8 +5892,8 @@
         </p:nvSpPr>
         <p:spPr>
           <a:xfrm>
-            <a:off x="10671048" y="1937452"/>
-            <a:ext cx="749808" cy="236668"/>
+            <a:off x="10671048" y="1949286"/>
+            <a:ext cx="749808" cy="248502"/>
           </a:xfrm>
           <a:prstGeom prst="rect">
             <a:avLst/>
@@ -5931,8 +5931,8 @@
         </p:nvSpPr>
         <p:spPr>
           <a:xfrm>
-            <a:off x="6208776" y="2174120"/>
-            <a:ext cx="1938528" cy="236668"/>
+            <a:off x="6208776" y="2197787"/>
+            <a:ext cx="1938528" cy="248502"/>
           </a:xfrm>
           <a:prstGeom prst="rect">
             <a:avLst/>
@@ -5970,8 +5970,8 @@
         </p:nvSpPr>
         <p:spPr>
           <a:xfrm>
-            <a:off x="8220456" y="2227371"/>
-            <a:ext cx="212176" cy="130168"/>
+            <a:off x="8220456" y="2253700"/>
+            <a:ext cx="212176" cy="136676"/>
           </a:xfrm>
           <a:prstGeom prst="rect">
             <a:avLst/>
@@ -5990,8 +5990,8 @@
         </p:nvSpPr>
         <p:spPr>
           <a:xfrm>
-            <a:off x="9317736" y="2174120"/>
-            <a:ext cx="786384" cy="236668"/>
+            <a:off x="9317736" y="2197787"/>
+            <a:ext cx="786384" cy="248502"/>
           </a:xfrm>
           <a:prstGeom prst="rect">
             <a:avLst/>
@@ -6029,8 +6029,8 @@
         </p:nvSpPr>
         <p:spPr>
           <a:xfrm>
-            <a:off x="10104120" y="2174120"/>
-            <a:ext cx="566928" cy="236668"/>
+            <a:off x="10104120" y="2197787"/>
+            <a:ext cx="566928" cy="248502"/>
           </a:xfrm>
           <a:prstGeom prst="rect">
             <a:avLst/>
@@ -6068,8 +6068,8 @@
         </p:nvSpPr>
         <p:spPr>
           <a:xfrm>
-            <a:off x="10671048" y="2174120"/>
-            <a:ext cx="749808" cy="236668"/>
+            <a:off x="10671048" y="2197787"/>
+            <a:ext cx="749808" cy="248502"/>
           </a:xfrm>
           <a:prstGeom prst="rect">
             <a:avLst/>
@@ -6107,8 +6107,8 @@
         </p:nvSpPr>
         <p:spPr>
           <a:xfrm>
-            <a:off x="6208776" y="2410789"/>
-            <a:ext cx="1938528" cy="236668"/>
+            <a:off x="6208776" y="2446289"/>
+            <a:ext cx="1938528" cy="248502"/>
           </a:xfrm>
           <a:prstGeom prst="rect">
             <a:avLst/>
@@ -6146,8 +6146,8 @@
         </p:nvSpPr>
         <p:spPr>
           <a:xfrm>
-            <a:off x="8220456" y="2464039"/>
-            <a:ext cx="203688" cy="130168"/>
+            <a:off x="8220456" y="2502202"/>
+            <a:ext cx="203688" cy="136676"/>
           </a:xfrm>
           <a:prstGeom prst="rect">
             <a:avLst/>
@@ -6166,8 +6166,8 @@
         </p:nvSpPr>
         <p:spPr>
           <a:xfrm>
-            <a:off x="9317736" y="2410789"/>
-            <a:ext cx="786384" cy="236668"/>
+            <a:off x="9317736" y="2446289"/>
+            <a:ext cx="786384" cy="248502"/>
           </a:xfrm>
           <a:prstGeom prst="rect">
             <a:avLst/>
@@ -6205,8 +6205,8 @@
         </p:nvSpPr>
         <p:spPr>
           <a:xfrm>
-            <a:off x="10104120" y="2410789"/>
-            <a:ext cx="566928" cy="236668"/>
+            <a:off x="10104120" y="2446289"/>
+            <a:ext cx="566928" cy="248502"/>
           </a:xfrm>
           <a:prstGeom prst="rect">
             <a:avLst/>
@@ -6244,8 +6244,8 @@
         </p:nvSpPr>
         <p:spPr>
           <a:xfrm>
-            <a:off x="10671048" y="2410789"/>
-            <a:ext cx="749808" cy="236668"/>
+            <a:off x="10671048" y="2446289"/>
+            <a:ext cx="749808" cy="248502"/>
           </a:xfrm>
           <a:prstGeom prst="rect">
             <a:avLst/>
@@ -6283,8 +6283,8 @@
         </p:nvSpPr>
         <p:spPr>
           <a:xfrm>
-            <a:off x="6208776" y="2647457"/>
-            <a:ext cx="1938528" cy="236668"/>
+            <a:off x="6208776" y="2694791"/>
+            <a:ext cx="1938528" cy="248502"/>
           </a:xfrm>
           <a:prstGeom prst="rect">
             <a:avLst/>
@@ -6322,8 +6322,8 @@
         </p:nvSpPr>
         <p:spPr>
           <a:xfrm>
-            <a:off x="8220456" y="2700707"/>
-            <a:ext cx="199671" cy="130168"/>
+            <a:off x="8220456" y="2750703"/>
+            <a:ext cx="199671" cy="136676"/>
           </a:xfrm>
           <a:prstGeom prst="rect">
             <a:avLst/>
@@ -6342,8 +6342,8 @@
         </p:nvSpPr>
         <p:spPr>
           <a:xfrm>
-            <a:off x="9317736" y="2647457"/>
-            <a:ext cx="786384" cy="236668"/>
+            <a:off x="9317736" y="2694791"/>
+            <a:ext cx="786384" cy="248502"/>
           </a:xfrm>
           <a:prstGeom prst="rect">
             <a:avLst/>
@@ -6381,8 +6381,8 @@
         </p:nvSpPr>
         <p:spPr>
           <a:xfrm>
-            <a:off x="10104120" y="2647457"/>
-            <a:ext cx="566928" cy="236668"/>
+            <a:off x="10104120" y="2694791"/>
+            <a:ext cx="566928" cy="248502"/>
           </a:xfrm>
           <a:prstGeom prst="rect">
             <a:avLst/>
@@ -6420,8 +6420,8 @@
         </p:nvSpPr>
         <p:spPr>
           <a:xfrm>
-            <a:off x="10671048" y="2647457"/>
-            <a:ext cx="749808" cy="236668"/>
+            <a:off x="10671048" y="2694791"/>
+            <a:ext cx="749808" cy="248502"/>
           </a:xfrm>
           <a:prstGeom prst="rect">
             <a:avLst/>
@@ -6459,8 +6459,8 @@
         </p:nvSpPr>
         <p:spPr>
           <a:xfrm>
-            <a:off x="6208776" y="2884125"/>
-            <a:ext cx="1938528" cy="236668"/>
+            <a:off x="6208776" y="2943292"/>
+            <a:ext cx="1938528" cy="248502"/>
           </a:xfrm>
           <a:prstGeom prst="rect">
             <a:avLst/>
@@ -6498,8 +6498,8 @@
         </p:nvSpPr>
         <p:spPr>
           <a:xfrm>
-            <a:off x="8220456" y="2937376"/>
-            <a:ext cx="194454" cy="130168"/>
+            <a:off x="8220456" y="2999205"/>
+            <a:ext cx="194454" cy="136676"/>
           </a:xfrm>
           <a:prstGeom prst="rect">
             <a:avLst/>
@@ -6518,8 +6518,8 @@
         </p:nvSpPr>
         <p:spPr>
           <a:xfrm>
-            <a:off x="9317736" y="2884125"/>
-            <a:ext cx="786384" cy="236668"/>
+            <a:off x="9317736" y="2943292"/>
+            <a:ext cx="786384" cy="248502"/>
           </a:xfrm>
           <a:prstGeom prst="rect">
             <a:avLst/>
@@ -6557,8 +6557,8 @@
         </p:nvSpPr>
         <p:spPr>
           <a:xfrm>
-            <a:off x="10104120" y="2884125"/>
-            <a:ext cx="566928" cy="236668"/>
+            <a:off x="10104120" y="2943292"/>
+            <a:ext cx="566928" cy="248502"/>
           </a:xfrm>
           <a:prstGeom prst="rect">
             <a:avLst/>
@@ -6596,8 +6596,8 @@
         </p:nvSpPr>
         <p:spPr>
           <a:xfrm>
-            <a:off x="10671048" y="2884125"/>
-            <a:ext cx="749808" cy="236668"/>
+            <a:off x="10671048" y="2943292"/>
+            <a:ext cx="749808" cy="248502"/>
           </a:xfrm>
           <a:prstGeom prst="rect">
             <a:avLst/>
@@ -6635,8 +6635,8 @@
         </p:nvSpPr>
         <p:spPr>
           <a:xfrm>
-            <a:off x="6208776" y="3120793"/>
-            <a:ext cx="1938528" cy="236668"/>
+            <a:off x="6208776" y="3191794"/>
+            <a:ext cx="1938528" cy="248502"/>
           </a:xfrm>
           <a:prstGeom prst="rect">
             <a:avLst/>
@@ -6674,8 +6674,8 @@
         </p:nvSpPr>
         <p:spPr>
           <a:xfrm>
-            <a:off x="8220456" y="3174044"/>
-            <a:ext cx="181881" cy="130168"/>
+            <a:off x="8220456" y="3247707"/>
+            <a:ext cx="181881" cy="136676"/>
           </a:xfrm>
           <a:prstGeom prst="rect">
             <a:avLst/>
@@ -6694,8 +6694,8 @@
         </p:nvSpPr>
         <p:spPr>
           <a:xfrm>
-            <a:off x="9317736" y="3120793"/>
-            <a:ext cx="786384" cy="236668"/>
+            <a:off x="9317736" y="3191794"/>
+            <a:ext cx="786384" cy="248502"/>
           </a:xfrm>
           <a:prstGeom prst="rect">
             <a:avLst/>
@@ -6733,8 +6733,8 @@
         </p:nvSpPr>
         <p:spPr>
           <a:xfrm>
-            <a:off x="10104120" y="3120793"/>
-            <a:ext cx="566928" cy="236668"/>
+            <a:off x="10104120" y="3191794"/>
+            <a:ext cx="566928" cy="248502"/>
           </a:xfrm>
           <a:prstGeom prst="rect">
             <a:avLst/>
@@ -6772,8 +6772,8 @@
         </p:nvSpPr>
         <p:spPr>
           <a:xfrm>
-            <a:off x="10671048" y="3120793"/>
-            <a:ext cx="749808" cy="236668"/>
+            <a:off x="10671048" y="3191794"/>
+            <a:ext cx="749808" cy="248502"/>
           </a:xfrm>
           <a:prstGeom prst="rect">
             <a:avLst/>
@@ -6811,8 +6811,8 @@
         </p:nvSpPr>
         <p:spPr>
           <a:xfrm>
-            <a:off x="6208776" y="3357462"/>
-            <a:ext cx="1938528" cy="236668"/>
+            <a:off x="6208776" y="3440296"/>
+            <a:ext cx="1938528" cy="248502"/>
           </a:xfrm>
           <a:prstGeom prst="rect">
             <a:avLst/>
@@ -6850,8 +6850,8 @@
         </p:nvSpPr>
         <p:spPr>
           <a:xfrm>
-            <a:off x="8220456" y="3410712"/>
-            <a:ext cx="178186" cy="130168"/>
+            <a:off x="8220456" y="3496208"/>
+            <a:ext cx="178186" cy="136676"/>
           </a:xfrm>
           <a:prstGeom prst="rect">
             <a:avLst/>
@@ -6870,8 +6870,8 @@
         </p:nvSpPr>
         <p:spPr>
           <a:xfrm>
-            <a:off x="9317736" y="3357462"/>
-            <a:ext cx="786384" cy="236668"/>
+            <a:off x="9317736" y="3440296"/>
+            <a:ext cx="786384" cy="248502"/>
           </a:xfrm>
           <a:prstGeom prst="rect">
             <a:avLst/>
@@ -6909,8 +6909,8 @@
         </p:nvSpPr>
         <p:spPr>
           <a:xfrm>
-            <a:off x="10104120" y="3357462"/>
-            <a:ext cx="566928" cy="236668"/>
+            <a:off x="10104120" y="3440296"/>
+            <a:ext cx="566928" cy="248502"/>
           </a:xfrm>
           <a:prstGeom prst="rect">
             <a:avLst/>
@@ -6948,8 +6948,8 @@
         </p:nvSpPr>
         <p:spPr>
           <a:xfrm>
-            <a:off x="10671048" y="3357462"/>
-            <a:ext cx="749808" cy="236668"/>
+            <a:off x="10671048" y="3440296"/>
+            <a:ext cx="749808" cy="248502"/>
           </a:xfrm>
           <a:prstGeom prst="rect">
             <a:avLst/>
@@ -6987,8 +6987,8 @@
         </p:nvSpPr>
         <p:spPr>
           <a:xfrm>
-            <a:off x="6208776" y="3594130"/>
-            <a:ext cx="1938528" cy="236668"/>
+            <a:off x="6208776" y="3688797"/>
+            <a:ext cx="1938528" cy="248502"/>
           </a:xfrm>
           <a:prstGeom prst="rect">
             <a:avLst/>
@@ -7026,8 +7026,8 @@
         </p:nvSpPr>
         <p:spPr>
           <a:xfrm>
-            <a:off x="8220456" y="3647380"/>
-            <a:ext cx="174696" cy="130168"/>
+            <a:off x="8220456" y="3744710"/>
+            <a:ext cx="174696" cy="136676"/>
           </a:xfrm>
           <a:prstGeom prst="rect">
             <a:avLst/>
@@ -7046,8 +7046,8 @@
         </p:nvSpPr>
         <p:spPr>
           <a:xfrm>
-            <a:off x="9317736" y="3594130"/>
-            <a:ext cx="786384" cy="236668"/>
+            <a:off x="9317736" y="3688797"/>
+            <a:ext cx="786384" cy="248502"/>
           </a:xfrm>
           <a:prstGeom prst="rect">
             <a:avLst/>
@@ -7085,8 +7085,8 @@
         </p:nvSpPr>
         <p:spPr>
           <a:xfrm>
-            <a:off x="10104120" y="3594130"/>
-            <a:ext cx="566928" cy="236668"/>
+            <a:off x="10104120" y="3688797"/>
+            <a:ext cx="566928" cy="248502"/>
           </a:xfrm>
           <a:prstGeom prst="rect">
             <a:avLst/>
@@ -7124,8 +7124,8 @@
         </p:nvSpPr>
         <p:spPr>
           <a:xfrm>
-            <a:off x="10671048" y="3594130"/>
-            <a:ext cx="749808" cy="236668"/>
+            <a:off x="10671048" y="3688797"/>
+            <a:ext cx="749808" cy="248502"/>
           </a:xfrm>
           <a:prstGeom prst="rect">
             <a:avLst/>
@@ -7163,8 +7163,8 @@
         </p:nvSpPr>
         <p:spPr>
           <a:xfrm>
-            <a:off x="6208776" y="3830798"/>
-            <a:ext cx="1938528" cy="236668"/>
+            <a:off x="6208776" y="3937299"/>
+            <a:ext cx="1938528" cy="248502"/>
           </a:xfrm>
           <a:prstGeom prst="rect">
             <a:avLst/>
@@ -7202,8 +7202,8 @@
         </p:nvSpPr>
         <p:spPr>
           <a:xfrm>
-            <a:off x="8220456" y="3884048"/>
-            <a:ext cx="174121" cy="130168"/>
+            <a:off x="8220456" y="3993212"/>
+            <a:ext cx="174121" cy="136676"/>
           </a:xfrm>
           <a:prstGeom prst="rect">
             <a:avLst/>
@@ -7222,8 +7222,8 @@
         </p:nvSpPr>
         <p:spPr>
           <a:xfrm>
-            <a:off x="9317736" y="3830798"/>
-            <a:ext cx="786384" cy="236668"/>
+            <a:off x="9317736" y="3937299"/>
+            <a:ext cx="786384" cy="248502"/>
           </a:xfrm>
           <a:prstGeom prst="rect">
             <a:avLst/>
@@ -7261,8 +7261,8 @@
         </p:nvSpPr>
         <p:spPr>
           <a:xfrm>
-            <a:off x="10104120" y="3830798"/>
-            <a:ext cx="566928" cy="236668"/>
+            <a:off x="10104120" y="3937299"/>
+            <a:ext cx="566928" cy="248502"/>
           </a:xfrm>
           <a:prstGeom prst="rect">
             <a:avLst/>
@@ -7300,8 +7300,8 @@
         </p:nvSpPr>
         <p:spPr>
           <a:xfrm>
-            <a:off x="10671048" y="3830798"/>
-            <a:ext cx="749808" cy="236668"/>
+            <a:off x="10671048" y="3937299"/>
+            <a:ext cx="749808" cy="248502"/>
           </a:xfrm>
           <a:prstGeom prst="rect">
             <a:avLst/>
@@ -7339,8 +7339,8 @@
         </p:nvSpPr>
         <p:spPr>
           <a:xfrm>
-            <a:off x="6208776" y="4067466"/>
-            <a:ext cx="1938528" cy="236668"/>
+            <a:off x="6208776" y="4185800"/>
+            <a:ext cx="1938528" cy="248502"/>
           </a:xfrm>
           <a:prstGeom prst="rect">
             <a:avLst/>
@@ -7378,8 +7378,8 @@
         </p:nvSpPr>
         <p:spPr>
           <a:xfrm>
-            <a:off x="8220456" y="4120717"/>
-            <a:ext cx="172098" cy="130168"/>
+            <a:off x="8220456" y="4241713"/>
+            <a:ext cx="172098" cy="136676"/>
           </a:xfrm>
           <a:prstGeom prst="rect">
             <a:avLst/>
@@ -7398,8 +7398,8 @@
         </p:nvSpPr>
         <p:spPr>
           <a:xfrm>
-            <a:off x="9317736" y="4067466"/>
-            <a:ext cx="786384" cy="236668"/>
+            <a:off x="9317736" y="4185800"/>
+            <a:ext cx="786384" cy="248502"/>
           </a:xfrm>
           <a:prstGeom prst="rect">
             <a:avLst/>
@@ -7437,8 +7437,8 @@
         </p:nvSpPr>
         <p:spPr>
           <a:xfrm>
-            <a:off x="10104120" y="4067466"/>
-            <a:ext cx="566928" cy="236668"/>
+            <a:off x="10104120" y="4185800"/>
+            <a:ext cx="566928" cy="248502"/>
           </a:xfrm>
           <a:prstGeom prst="rect">
             <a:avLst/>
@@ -7476,8 +7476,8 @@
         </p:nvSpPr>
         <p:spPr>
           <a:xfrm>
-            <a:off x="10671048" y="4067466"/>
-            <a:ext cx="749808" cy="236668"/>
+            <a:off x="10671048" y="4185800"/>
+            <a:ext cx="749808" cy="248502"/>
           </a:xfrm>
           <a:prstGeom prst="rect">
             <a:avLst/>
@@ -7515,8 +7515,8 @@
         </p:nvSpPr>
         <p:spPr>
           <a:xfrm>
-            <a:off x="6208776" y="4304135"/>
-            <a:ext cx="1938528" cy="236668"/>
+            <a:off x="6208776" y="4434302"/>
+            <a:ext cx="1938528" cy="248502"/>
           </a:xfrm>
           <a:prstGeom prst="rect">
             <a:avLst/>
@@ -7554,8 +7554,8 @@
         </p:nvSpPr>
         <p:spPr>
           <a:xfrm>
-            <a:off x="8220456" y="4357385"/>
-            <a:ext cx="158631" cy="130168"/>
+            <a:off x="8220456" y="4490215"/>
+            <a:ext cx="158631" cy="136676"/>
           </a:xfrm>
           <a:prstGeom prst="rect">
             <a:avLst/>
@@ -7574,8 +7574,8 @@
         </p:nvSpPr>
         <p:spPr>
           <a:xfrm>
-            <a:off x="9317736" y="4304135"/>
-            <a:ext cx="786384" cy="236668"/>
+            <a:off x="9317736" y="4434302"/>
+            <a:ext cx="786384" cy="248502"/>
           </a:xfrm>
           <a:prstGeom prst="rect">
             <a:avLst/>
@@ -7613,8 +7613,8 @@
         </p:nvSpPr>
         <p:spPr>
           <a:xfrm>
-            <a:off x="10104120" y="4304135"/>
-            <a:ext cx="566928" cy="236668"/>
+            <a:off x="10104120" y="4434302"/>
+            <a:ext cx="566928" cy="248502"/>
           </a:xfrm>
           <a:prstGeom prst="rect">
             <a:avLst/>
@@ -7652,8 +7652,8 @@
         </p:nvSpPr>
         <p:spPr>
           <a:xfrm>
-            <a:off x="10671048" y="4304135"/>
-            <a:ext cx="749808" cy="236668"/>
+            <a:off x="10671048" y="4434302"/>
+            <a:ext cx="749808" cy="248502"/>
           </a:xfrm>
           <a:prstGeom prst="rect">
             <a:avLst/>
@@ -7691,8 +7691,8 @@
         </p:nvSpPr>
         <p:spPr>
           <a:xfrm>
-            <a:off x="6208776" y="4540803"/>
-            <a:ext cx="1938528" cy="236668"/>
+            <a:off x="6208776" y="4682804"/>
+            <a:ext cx="1938528" cy="248502"/>
           </a:xfrm>
           <a:prstGeom prst="rect">
             <a:avLst/>
@@ -7730,8 +7730,8 @@
         </p:nvSpPr>
         <p:spPr>
           <a:xfrm>
-            <a:off x="8220456" y="4594053"/>
-            <a:ext cx="156929" cy="130168"/>
+            <a:off x="8220456" y="4738717"/>
+            <a:ext cx="156929" cy="136676"/>
           </a:xfrm>
           <a:prstGeom prst="rect">
             <a:avLst/>
@@ -7750,8 +7750,8 @@
         </p:nvSpPr>
         <p:spPr>
           <a:xfrm>
-            <a:off x="9317736" y="4540803"/>
-            <a:ext cx="786384" cy="236668"/>
+            <a:off x="9317736" y="4682804"/>
+            <a:ext cx="786384" cy="248502"/>
           </a:xfrm>
           <a:prstGeom prst="rect">
             <a:avLst/>
@@ -7789,8 +7789,8 @@
         </p:nvSpPr>
         <p:spPr>
           <a:xfrm>
-            <a:off x="10104120" y="4540803"/>
-            <a:ext cx="566928" cy="236668"/>
+            <a:off x="10104120" y="4682804"/>
+            <a:ext cx="566928" cy="248502"/>
           </a:xfrm>
           <a:prstGeom prst="rect">
             <a:avLst/>
@@ -7828,8 +7828,8 @@
         </p:nvSpPr>
         <p:spPr>
           <a:xfrm>
-            <a:off x="10671048" y="4540803"/>
-            <a:ext cx="749808" cy="236668"/>
+            <a:off x="10671048" y="4682804"/>
+            <a:ext cx="749808" cy="248502"/>
           </a:xfrm>
           <a:prstGeom prst="rect">
             <a:avLst/>
@@ -7867,8 +7867,8 @@
         </p:nvSpPr>
         <p:spPr>
           <a:xfrm>
-            <a:off x="6208776" y="4777471"/>
-            <a:ext cx="1938528" cy="236668"/>
+            <a:off x="6208776" y="4931305"/>
+            <a:ext cx="1938528" cy="248502"/>
           </a:xfrm>
           <a:prstGeom prst="rect">
             <a:avLst/>
@@ -7906,8 +7906,8 @@
         </p:nvSpPr>
         <p:spPr>
           <a:xfrm>
-            <a:off x="8220456" y="4830721"/>
-            <a:ext cx="127568" cy="130168"/>
+            <a:off x="8220456" y="4987218"/>
+            <a:ext cx="127568" cy="136676"/>
           </a:xfrm>
           <a:prstGeom prst="rect">
             <a:avLst/>
@@ -7926,8 +7926,8 @@
         </p:nvSpPr>
         <p:spPr>
           <a:xfrm>
-            <a:off x="9317736" y="4777471"/>
-            <a:ext cx="786384" cy="236668"/>
+            <a:off x="9317736" y="4931305"/>
+            <a:ext cx="786384" cy="248502"/>
           </a:xfrm>
           <a:prstGeom prst="rect">
             <a:avLst/>
@@ -7965,8 +7965,8 @@
         </p:nvSpPr>
         <p:spPr>
           <a:xfrm>
-            <a:off x="10104120" y="4777471"/>
-            <a:ext cx="566928" cy="236668"/>
+            <a:off x="10104120" y="4931305"/>
+            <a:ext cx="566928" cy="248502"/>
           </a:xfrm>
           <a:prstGeom prst="rect">
             <a:avLst/>
@@ -8004,8 +8004,8 @@
         </p:nvSpPr>
         <p:spPr>
           <a:xfrm>
-            <a:off x="10671048" y="4777471"/>
-            <a:ext cx="749808" cy="236668"/>
+            <a:off x="10671048" y="4931305"/>
+            <a:ext cx="749808" cy="248502"/>
           </a:xfrm>
           <a:prstGeom prst="rect">
             <a:avLst/>
@@ -8043,8 +8043,8 @@
         </p:nvSpPr>
         <p:spPr>
           <a:xfrm>
-            <a:off x="6208776" y="5014139"/>
-            <a:ext cx="1938528" cy="236668"/>
+            <a:off x="6208776" y="5179807"/>
+            <a:ext cx="1938528" cy="248502"/>
           </a:xfrm>
           <a:prstGeom prst="rect">
             <a:avLst/>
@@ -8082,8 +8082,8 @@
         </p:nvSpPr>
         <p:spPr>
           <a:xfrm>
-            <a:off x="8220456" y="5067390"/>
-            <a:ext cx="104440" cy="130168"/>
+            <a:off x="8220456" y="5235720"/>
+            <a:ext cx="104440" cy="136676"/>
           </a:xfrm>
           <a:prstGeom prst="rect">
             <a:avLst/>
@@ -8102,8 +8102,8 @@
         </p:nvSpPr>
         <p:spPr>
           <a:xfrm>
-            <a:off x="9317736" y="5014139"/>
-            <a:ext cx="786384" cy="236668"/>
+            <a:off x="9317736" y="5179807"/>
+            <a:ext cx="786384" cy="248502"/>
           </a:xfrm>
           <a:prstGeom prst="rect">
             <a:avLst/>
@@ -8141,8 +8141,8 @@
         </p:nvSpPr>
         <p:spPr>
           <a:xfrm>
-            <a:off x="10104120" y="5014139"/>
-            <a:ext cx="566928" cy="236668"/>
+            <a:off x="10104120" y="5179807"/>
+            <a:ext cx="566928" cy="248502"/>
           </a:xfrm>
           <a:prstGeom prst="rect">
             <a:avLst/>
@@ -8180,8 +8180,8 @@
         </p:nvSpPr>
         <p:spPr>
           <a:xfrm>
-            <a:off x="10671048" y="5014139"/>
-            <a:ext cx="749808" cy="236668"/>
+            <a:off x="10671048" y="5179807"/>
+            <a:ext cx="749808" cy="248502"/>
           </a:xfrm>
           <a:prstGeom prst="rect">
             <a:avLst/>
@@ -8219,8 +8219,8 @@
         </p:nvSpPr>
         <p:spPr>
           <a:xfrm>
-            <a:off x="6208776" y="5250808"/>
-            <a:ext cx="1938528" cy="236668"/>
+            <a:off x="6208776" y="5428309"/>
+            <a:ext cx="1938528" cy="248502"/>
           </a:xfrm>
           <a:prstGeom prst="rect">
             <a:avLst/>
@@ -8258,8 +8258,8 @@
         </p:nvSpPr>
         <p:spPr>
           <a:xfrm>
-            <a:off x="8220456" y="5304058"/>
-            <a:ext cx="83338" cy="130168"/>
+            <a:off x="8220456" y="5484222"/>
+            <a:ext cx="83338" cy="136676"/>
           </a:xfrm>
           <a:prstGeom prst="rect">
             <a:avLst/>
@@ -8278,8 +8278,8 @@
         </p:nvSpPr>
         <p:spPr>
           <a:xfrm>
-            <a:off x="9317736" y="5250808"/>
-            <a:ext cx="786384" cy="236668"/>
+            <a:off x="9317736" y="5428309"/>
+            <a:ext cx="786384" cy="248502"/>
           </a:xfrm>
           <a:prstGeom prst="rect">
             <a:avLst/>
@@ -8317,8 +8317,8 @@
         </p:nvSpPr>
         <p:spPr>
           <a:xfrm>
-            <a:off x="10104120" y="5250808"/>
-            <a:ext cx="566928" cy="236668"/>
+            <a:off x="10104120" y="5428309"/>
+            <a:ext cx="566928" cy="248502"/>
           </a:xfrm>
           <a:prstGeom prst="rect">
             <a:avLst/>
@@ -8356,8 +8356,8 @@
         </p:nvSpPr>
         <p:spPr>
           <a:xfrm>
-            <a:off x="10671048" y="5250808"/>
-            <a:ext cx="749808" cy="236668"/>
+            <a:off x="10671048" y="5428309"/>
+            <a:ext cx="749808" cy="248502"/>
           </a:xfrm>
           <a:prstGeom prst="rect">
             <a:avLst/>
@@ -8395,8 +8395,8 @@
         </p:nvSpPr>
         <p:spPr>
           <a:xfrm>
-            <a:off x="457200" y="5961888"/>
-            <a:ext cx="11274552" cy="548640"/>
+            <a:off x="457200" y="6126480"/>
+            <a:ext cx="11274552" cy="341376"/>
           </a:xfrm>
           <a:prstGeom prst="rect">
             <a:avLst/>
@@ -8415,8 +8415,8 @@
         </p:nvSpPr>
         <p:spPr>
           <a:xfrm>
-            <a:off x="658368" y="5980176"/>
-            <a:ext cx="10927080" cy="512064"/>
+            <a:off x="658368" y="6144768"/>
+            <a:ext cx="10927080" cy="304800"/>
           </a:xfrm>
           <a:prstGeom prst="rect">
             <a:avLst/>
@@ -8432,7 +8432,7 @@
               <a:buNone/>
             </a:pPr>
             <a:r>
-              <a:rPr lang="en-US" sz="1600" b="1" dirty="0">
+              <a:rPr lang="en-US" sz="1400" b="1" dirty="0">
                 <a:solidFill>
                   <a:srgbClr val="0B2C4A"/>
                 </a:solidFill>
@@ -8440,9 +8440,9 @@
                 <a:ea typeface="Inter" pitchFamily="34" charset="-122"/>
                 <a:cs typeface="Inter" pitchFamily="34" charset="-120"/>
               </a:rPr>
-              <a:t>One minute a day per tech: TOYOTA HENDERSON $43,256 a year. VOLVO techs are worth the most per minute at $4.99.</a:t>
-            </a:r>
-            <a:endParaRPr lang="en-US" sz="1600" dirty="0"/>
+              <a:t>One minute a day per tech: Toyota Henderson $43,256 a year. Volvo techs are worth the most per minute at $4.99.</a:t>
+            </a:r>
+            <a:endParaRPr lang="en-US" sz="1400" dirty="0"/>
           </a:p>
         </p:txBody>
       </p:sp>

--- a/day2-deck/decks/Tech Minute - Review.pptx
+++ b/day2-deck/decks/Tech Minute - Review.pptx
@@ -503,7 +503,7 @@
           <a:p>
             <a:r>
               <a:rPr lang="en-US" dirty="0"/>
-              <a:t>Source: Value of a minute = each store's counted technicians' labor gross + parts gross per sold hour, divided by 60 (Qlik - Closed Repair Orders, all pay types, same rates as the proficiency opportunity slides). Tech-days = counted techs' paid hours (ADP) / 8 per day. Assumes each minute saved becomes a minute of flagged work. 583 counted technicians, same-store, INEOS excluded. Month = Dec 25, 2025 - Oct 9, 2026 / 9.49; year = month x 12.Talk track: staged parts delivered to the bay (Roundtable: 'Stage parts, deliver and retrieve'), dispatch with the next job ready, fast MPI approvals, tools and keys where they belong. Ten minutes a day is less than two parts-counter trips.
+              <a:t>Source: Value of a minute = each store's counted technicians' labor gross + parts gross per sold hour, divided by 60 (Qlik - Closed Repair Orders, all pay types, same rates as the proficiency opportunity slides). Tech-days = counted techs' worked hours (ADP) / 8 per day. Assumes each minute saved becomes a minute of flagged work. 583 counted technicians, same-store, INEOS excluded. Month = Dec 25, 2025 - Oct 9, 2026 / 9.49; year = month x 12.Talk track: staged parts delivered to the bay (Roundtable: 'Stage parts, deliver and retrieve'), dispatch with the next job ready, fast MPI approvals, tools and keys where they belong. Ten minutes a day is less than two parts-counter trips.
 Assumption to say out loud: a minute saved only counts if it turns into flagged time, so the store needs the work waiting.</a:t>
             </a:r>
             <a:endParaRPr lang="en-US" dirty="0"/>
@@ -592,7 +592,7 @@
           <a:p>
             <a:r>
               <a:rPr lang="en-US" dirty="0"/>
-              <a:t>Source: Value of a minute = each store's counted technicians' labor gross + parts gross per sold hour, divided by 60 (Qlik - Closed Repair Orders, all pay types, same rates as the proficiency opportunity slides). Tech-days = counted techs' paid hours (ADP) / 8 per day. Assumes each minute saved becomes a minute of flagged work. 583 counted technicians, same-store, INEOS excluded. Month = Dec 25, 2025 - Oct 9, 2026 / 9.49; year = month x 12. A year = one minute a day for every counted tech at the store, for a year. Per min = gross per tech minute.</a:t>
+              <a:t>Source: Value of a minute = each store's counted technicians' labor gross + parts gross per sold hour, divided by 60 (Qlik - Closed Repair Orders, all pay types, same rates as the proficiency opportunity slides). Tech-days = counted techs' worked hours (ADP) / 8 per day. Assumes each minute saved becomes a minute of flagged work. 583 counted technicians, same-store, INEOS excluded. Month = Dec 25, 2025 - Oct 9, 2026 / 9.49; year = month x 12. A year = one minute a day for every counted tech at the store, for a year. Per min = gross per tech minute.</a:t>
             </a:r>
             <a:endParaRPr lang="en-US" dirty="0"/>
           </a:p>

--- a/day2-deck/decks/Tech Minute - Review.pptx
+++ b/day2-deck/decks/Tech Minute - Review.pptx
@@ -1619,7 +1619,7 @@
                           <a:ea typeface="Inter" pitchFamily="34" charset="-122"/>
                           <a:cs typeface="Inter" pitchFamily="34" charset="-120"/>
                         </a:rPr>
-                        <a:t>$37,032</a:t>
+                        <a:t>$37K</a:t>
                       </a:r>
                       <a:endParaRPr lang="en-US" sz="2000" dirty="0">
                         <a:latin typeface="Inter" charset="0"/>
@@ -1663,7 +1663,7 @@
                           <a:ea typeface="Inter" pitchFamily="34" charset="-122"/>
                           <a:cs typeface="Inter" pitchFamily="34" charset="-120"/>
                         </a:rPr>
-                        <a:t>$444,380</a:t>
+                        <a:t>$444K</a:t>
                       </a:r>
                       <a:endParaRPr lang="en-US" sz="2000" dirty="0">
                         <a:latin typeface="Inter" charset="0"/>
@@ -1753,7 +1753,7 @@
                           <a:ea typeface="Inter" pitchFamily="34" charset="-122"/>
                           <a:cs typeface="Inter" pitchFamily="34" charset="-120"/>
                         </a:rPr>
-                        <a:t>$185,159</a:t>
+                        <a:t>$185K</a:t>
                       </a:r>
                       <a:endParaRPr lang="en-US" sz="2000" dirty="0">
                         <a:latin typeface="Inter" charset="0"/>
@@ -1797,7 +1797,7 @@
                           <a:ea typeface="Inter" pitchFamily="34" charset="-122"/>
                           <a:cs typeface="Inter" pitchFamily="34" charset="-120"/>
                         </a:rPr>
-                        <a:t>$2,221,902</a:t>
+                        <a:t>$2.22M</a:t>
                       </a:r>
                       <a:endParaRPr lang="en-US" sz="2000" dirty="0">
                         <a:latin typeface="Inter" charset="0"/>
@@ -1887,7 +1887,7 @@
                           <a:ea typeface="Inter" pitchFamily="34" charset="-122"/>
                           <a:cs typeface="Inter" pitchFamily="34" charset="-120"/>
                         </a:rPr>
-                        <a:t>$370,317</a:t>
+                        <a:t>$370K</a:t>
                       </a:r>
                       <a:endParaRPr lang="en-US" sz="2000" dirty="0">
                         <a:latin typeface="Inter" charset="0"/>
@@ -1931,7 +1931,7 @@
                           <a:ea typeface="Inter" pitchFamily="34" charset="-122"/>
                           <a:cs typeface="Inter" pitchFamily="34" charset="-120"/>
                         </a:rPr>
-                        <a:t>$4,443,804</a:t>
+                        <a:t>$4.44M</a:t>
                       </a:r>
                       <a:endParaRPr lang="en-US" sz="2000" dirty="0">
                         <a:latin typeface="Inter" charset="0"/>
@@ -2021,7 +2021,7 @@
                           <a:ea typeface="Inter" pitchFamily="34" charset="-122"/>
                           <a:cs typeface="Inter" pitchFamily="34" charset="-120"/>
                         </a:rPr>
-                        <a:t>$555,476</a:t>
+                        <a:t>$555K</a:t>
                       </a:r>
                       <a:endParaRPr lang="en-US" sz="2000" dirty="0">
                         <a:latin typeface="Inter" charset="0"/>
@@ -2065,7 +2065,7 @@
                           <a:ea typeface="Inter" pitchFamily="34" charset="-122"/>
                           <a:cs typeface="Inter" pitchFamily="34" charset="-120"/>
                         </a:rPr>
-                        <a:t>$6,665,706</a:t>
+                        <a:t>$6.67M</a:t>
                       </a:r>
                       <a:endParaRPr lang="en-US" sz="2000" dirty="0">
                         <a:latin typeface="Inter" charset="0"/>
@@ -2369,17 +2369,6 @@
             <a:pPr algn="r" indent="0" marL="0">
               <a:buNone/>
             </a:pPr>
-            <a:r>
-              <a:rPr lang="en-US" sz="1400" b="1" dirty="0">
-                <a:solidFill>
-                  <a:srgbClr val="595959"/>
-                </a:solidFill>
-                <a:latin typeface="Inter" pitchFamily="34" charset="0"/>
-                <a:ea typeface="Inter" pitchFamily="34" charset="-122"/>
-                <a:cs typeface="Inter" pitchFamily="34" charset="-120"/>
-              </a:rPr>
-              <a:t>A year</a:t>
-            </a:r>
             <a:endParaRPr lang="en-US" sz="1400" dirty="0"/>
           </a:p>
         </p:txBody>
@@ -2486,17 +2475,6 @@
             <a:pPr algn="r" indent="0" marL="0">
               <a:buNone/>
             </a:pPr>
-            <a:r>
-              <a:rPr lang="en-US" sz="1400" b="1" dirty="0">
-                <a:solidFill>
-                  <a:srgbClr val="595959"/>
-                </a:solidFill>
-                <a:latin typeface="Inter" pitchFamily="34" charset="0"/>
-                <a:ea typeface="Inter" pitchFamily="34" charset="-122"/>
-                <a:cs typeface="Inter" pitchFamily="34" charset="-120"/>
-              </a:rPr>
-              <a:t>A year</a:t>
-            </a:r>
             <a:endParaRPr lang="en-US" sz="1400" dirty="0"/>
           </a:p>
         </p:txBody>
@@ -2665,13 +2643,13 @@
             <a:r>
               <a:rPr lang="en-US" sz="1300" b="1" dirty="0">
                 <a:solidFill>
-                  <a:srgbClr val="0B2C4A"/>
-                </a:solidFill>
-                <a:latin typeface="Inter" pitchFamily="34" charset="0"/>
-                <a:ea typeface="Inter" pitchFamily="34" charset="-122"/>
-                <a:cs typeface="Inter" pitchFamily="34" charset="-120"/>
-              </a:rPr>
-              <a:t>$43,256</a:t>
+                  <a:srgbClr val="1A1A1A"/>
+                </a:solidFill>
+                <a:latin typeface="Inter" pitchFamily="34" charset="0"/>
+                <a:ea typeface="Inter" pitchFamily="34" charset="-122"/>
+                <a:cs typeface="Inter" pitchFamily="34" charset="-120"/>
+              </a:rPr>
+              <a:t>$43.3K</a:t>
             </a:r>
             <a:endParaRPr lang="en-US" sz="1300" dirty="0"/>
           </a:p>
@@ -2841,13 +2819,13 @@
             <a:r>
               <a:rPr lang="en-US" sz="1300" b="1" dirty="0">
                 <a:solidFill>
-                  <a:srgbClr val="0B2C4A"/>
-                </a:solidFill>
-                <a:latin typeface="Inter" pitchFamily="34" charset="0"/>
-                <a:ea typeface="Inter" pitchFamily="34" charset="-122"/>
-                <a:cs typeface="Inter" pitchFamily="34" charset="-120"/>
-              </a:rPr>
-              <a:t>$33,767</a:t>
+                  <a:srgbClr val="1A1A1A"/>
+                </a:solidFill>
+                <a:latin typeface="Inter" pitchFamily="34" charset="0"/>
+                <a:ea typeface="Inter" pitchFamily="34" charset="-122"/>
+                <a:cs typeface="Inter" pitchFamily="34" charset="-120"/>
+              </a:rPr>
+              <a:t>$33.8K</a:t>
             </a:r>
             <a:endParaRPr lang="en-US" sz="1300" dirty="0"/>
           </a:p>
@@ -3017,13 +2995,13 @@
             <a:r>
               <a:rPr lang="en-US" sz="1300" b="1" dirty="0">
                 <a:solidFill>
-                  <a:srgbClr val="0B2C4A"/>
-                </a:solidFill>
-                <a:latin typeface="Inter" pitchFamily="34" charset="0"/>
-                <a:ea typeface="Inter" pitchFamily="34" charset="-122"/>
-                <a:cs typeface="Inter" pitchFamily="34" charset="-120"/>
-              </a:rPr>
-              <a:t>$28,367</a:t>
+                  <a:srgbClr val="1A1A1A"/>
+                </a:solidFill>
+                <a:latin typeface="Inter" pitchFamily="34" charset="0"/>
+                <a:ea typeface="Inter" pitchFamily="34" charset="-122"/>
+                <a:cs typeface="Inter" pitchFamily="34" charset="-120"/>
+              </a:rPr>
+              <a:t>$28.4K</a:t>
             </a:r>
             <a:endParaRPr lang="en-US" sz="1300" dirty="0"/>
           </a:p>
@@ -3193,13 +3171,13 @@
             <a:r>
               <a:rPr lang="en-US" sz="1300" b="1" dirty="0">
                 <a:solidFill>
-                  <a:srgbClr val="0B2C4A"/>
-                </a:solidFill>
-                <a:latin typeface="Inter" pitchFamily="34" charset="0"/>
-                <a:ea typeface="Inter" pitchFamily="34" charset="-122"/>
-                <a:cs typeface="Inter" pitchFamily="34" charset="-120"/>
-              </a:rPr>
-              <a:t>$27,253</a:t>
+                  <a:srgbClr val="1A1A1A"/>
+                </a:solidFill>
+                <a:latin typeface="Inter" pitchFamily="34" charset="0"/>
+                <a:ea typeface="Inter" pitchFamily="34" charset="-122"/>
+                <a:cs typeface="Inter" pitchFamily="34" charset="-120"/>
+              </a:rPr>
+              <a:t>$27.3K</a:t>
             </a:r>
             <a:endParaRPr lang="en-US" sz="1300" dirty="0"/>
           </a:p>
@@ -3369,13 +3347,13 @@
             <a:r>
               <a:rPr lang="en-US" sz="1300" b="1" dirty="0">
                 <a:solidFill>
-                  <a:srgbClr val="0B2C4A"/>
-                </a:solidFill>
-                <a:latin typeface="Inter" pitchFamily="34" charset="0"/>
-                <a:ea typeface="Inter" pitchFamily="34" charset="-122"/>
-                <a:cs typeface="Inter" pitchFamily="34" charset="-120"/>
-              </a:rPr>
-              <a:t>$24,916</a:t>
+                  <a:srgbClr val="1A1A1A"/>
+                </a:solidFill>
+                <a:latin typeface="Inter" pitchFamily="34" charset="0"/>
+                <a:ea typeface="Inter" pitchFamily="34" charset="-122"/>
+                <a:cs typeface="Inter" pitchFamily="34" charset="-120"/>
+              </a:rPr>
+              <a:t>$24.9K</a:t>
             </a:r>
             <a:endParaRPr lang="en-US" sz="1300" dirty="0"/>
           </a:p>
@@ -3545,13 +3523,13 @@
             <a:r>
               <a:rPr lang="en-US" sz="1300" b="1" dirty="0">
                 <a:solidFill>
-                  <a:srgbClr val="0B2C4A"/>
-                </a:solidFill>
-                <a:latin typeface="Inter" pitchFamily="34" charset="0"/>
-                <a:ea typeface="Inter" pitchFamily="34" charset="-122"/>
-                <a:cs typeface="Inter" pitchFamily="34" charset="-120"/>
-              </a:rPr>
-              <a:t>$22,777</a:t>
+                  <a:srgbClr val="1A1A1A"/>
+                </a:solidFill>
+                <a:latin typeface="Inter" pitchFamily="34" charset="0"/>
+                <a:ea typeface="Inter" pitchFamily="34" charset="-122"/>
+                <a:cs typeface="Inter" pitchFamily="34" charset="-120"/>
+              </a:rPr>
+              <a:t>$22.8K</a:t>
             </a:r>
             <a:endParaRPr lang="en-US" sz="1300" dirty="0"/>
           </a:p>
@@ -3721,13 +3699,13 @@
             <a:r>
               <a:rPr lang="en-US" sz="1300" b="1" dirty="0">
                 <a:solidFill>
-                  <a:srgbClr val="0B2C4A"/>
-                </a:solidFill>
-                <a:latin typeface="Inter" pitchFamily="34" charset="0"/>
-                <a:ea typeface="Inter" pitchFamily="34" charset="-122"/>
-                <a:cs typeface="Inter" pitchFamily="34" charset="-120"/>
-              </a:rPr>
-              <a:t>$16,315</a:t>
+                  <a:srgbClr val="1A1A1A"/>
+                </a:solidFill>
+                <a:latin typeface="Inter" pitchFamily="34" charset="0"/>
+                <a:ea typeface="Inter" pitchFamily="34" charset="-122"/>
+                <a:cs typeface="Inter" pitchFamily="34" charset="-120"/>
+              </a:rPr>
+              <a:t>$16.3K</a:t>
             </a:r>
             <a:endParaRPr lang="en-US" sz="1300" dirty="0"/>
           </a:p>
@@ -3897,13 +3875,13 @@
             <a:r>
               <a:rPr lang="en-US" sz="1300" b="1" dirty="0">
                 <a:solidFill>
-                  <a:srgbClr val="0B2C4A"/>
-                </a:solidFill>
-                <a:latin typeface="Inter" pitchFamily="34" charset="0"/>
-                <a:ea typeface="Inter" pitchFamily="34" charset="-122"/>
-                <a:cs typeface="Inter" pitchFamily="34" charset="-120"/>
-              </a:rPr>
-              <a:t>$16,240</a:t>
+                  <a:srgbClr val="1A1A1A"/>
+                </a:solidFill>
+                <a:latin typeface="Inter" pitchFamily="34" charset="0"/>
+                <a:ea typeface="Inter" pitchFamily="34" charset="-122"/>
+                <a:cs typeface="Inter" pitchFamily="34" charset="-120"/>
+              </a:rPr>
+              <a:t>$16.2K</a:t>
             </a:r>
             <a:endParaRPr lang="en-US" sz="1300" dirty="0"/>
           </a:p>
@@ -4073,13 +4051,13 @@
             <a:r>
               <a:rPr lang="en-US" sz="1300" b="1" dirty="0">
                 <a:solidFill>
-                  <a:srgbClr val="0B2C4A"/>
-                </a:solidFill>
-                <a:latin typeface="Inter" pitchFamily="34" charset="0"/>
-                <a:ea typeface="Inter" pitchFamily="34" charset="-122"/>
-                <a:cs typeface="Inter" pitchFamily="34" charset="-120"/>
-              </a:rPr>
-              <a:t>$15,245</a:t>
+                  <a:srgbClr val="1A1A1A"/>
+                </a:solidFill>
+                <a:latin typeface="Inter" pitchFamily="34" charset="0"/>
+                <a:ea typeface="Inter" pitchFamily="34" charset="-122"/>
+                <a:cs typeface="Inter" pitchFamily="34" charset="-120"/>
+              </a:rPr>
+              <a:t>$15.2K</a:t>
             </a:r>
             <a:endParaRPr lang="en-US" sz="1300" dirty="0"/>
           </a:p>
@@ -4249,13 +4227,13 @@
             <a:r>
               <a:rPr lang="en-US" sz="1300" b="1" dirty="0">
                 <a:solidFill>
-                  <a:srgbClr val="0B2C4A"/>
-                </a:solidFill>
-                <a:latin typeface="Inter" pitchFamily="34" charset="0"/>
-                <a:ea typeface="Inter" pitchFamily="34" charset="-122"/>
-                <a:cs typeface="Inter" pitchFamily="34" charset="-120"/>
-              </a:rPr>
-              <a:t>$14,741</a:t>
+                  <a:srgbClr val="1A1A1A"/>
+                </a:solidFill>
+                <a:latin typeface="Inter" pitchFamily="34" charset="0"/>
+                <a:ea typeface="Inter" pitchFamily="34" charset="-122"/>
+                <a:cs typeface="Inter" pitchFamily="34" charset="-120"/>
+              </a:rPr>
+              <a:t>$14.7K</a:t>
             </a:r>
             <a:endParaRPr lang="en-US" sz="1300" dirty="0"/>
           </a:p>
@@ -4425,13 +4403,13 @@
             <a:r>
               <a:rPr lang="en-US" sz="1300" b="1" dirty="0">
                 <a:solidFill>
-                  <a:srgbClr val="0B2C4A"/>
-                </a:solidFill>
-                <a:latin typeface="Inter" pitchFamily="34" charset="0"/>
-                <a:ea typeface="Inter" pitchFamily="34" charset="-122"/>
-                <a:cs typeface="Inter" pitchFamily="34" charset="-120"/>
-              </a:rPr>
-              <a:t>$14,053</a:t>
+                  <a:srgbClr val="1A1A1A"/>
+                </a:solidFill>
+                <a:latin typeface="Inter" pitchFamily="34" charset="0"/>
+                <a:ea typeface="Inter" pitchFamily="34" charset="-122"/>
+                <a:cs typeface="Inter" pitchFamily="34" charset="-120"/>
+              </a:rPr>
+              <a:t>$14.1K</a:t>
             </a:r>
             <a:endParaRPr lang="en-US" sz="1300" dirty="0"/>
           </a:p>
@@ -4601,13 +4579,13 @@
             <a:r>
               <a:rPr lang="en-US" sz="1300" b="1" dirty="0">
                 <a:solidFill>
-                  <a:srgbClr val="0B2C4A"/>
-                </a:solidFill>
-                <a:latin typeface="Inter" pitchFamily="34" charset="0"/>
-                <a:ea typeface="Inter" pitchFamily="34" charset="-122"/>
-                <a:cs typeface="Inter" pitchFamily="34" charset="-120"/>
-              </a:rPr>
-              <a:t>$12,684</a:t>
+                  <a:srgbClr val="1A1A1A"/>
+                </a:solidFill>
+                <a:latin typeface="Inter" pitchFamily="34" charset="0"/>
+                <a:ea typeface="Inter" pitchFamily="34" charset="-122"/>
+                <a:cs typeface="Inter" pitchFamily="34" charset="-120"/>
+              </a:rPr>
+              <a:t>$12.7K</a:t>
             </a:r>
             <a:endParaRPr lang="en-US" sz="1300" dirty="0"/>
           </a:p>
@@ -4777,13 +4755,13 @@
             <a:r>
               <a:rPr lang="en-US" sz="1300" b="1" dirty="0">
                 <a:solidFill>
-                  <a:srgbClr val="0B2C4A"/>
-                </a:solidFill>
-                <a:latin typeface="Inter" pitchFamily="34" charset="0"/>
-                <a:ea typeface="Inter" pitchFamily="34" charset="-122"/>
-                <a:cs typeface="Inter" pitchFamily="34" charset="-120"/>
-              </a:rPr>
-              <a:t>$12,574</a:t>
+                  <a:srgbClr val="1A1A1A"/>
+                </a:solidFill>
+                <a:latin typeface="Inter" pitchFamily="34" charset="0"/>
+                <a:ea typeface="Inter" pitchFamily="34" charset="-122"/>
+                <a:cs typeface="Inter" pitchFamily="34" charset="-120"/>
+              </a:rPr>
+              <a:t>$12.6K</a:t>
             </a:r>
             <a:endParaRPr lang="en-US" sz="1300" dirty="0"/>
           </a:p>
@@ -4953,13 +4931,13 @@
             <a:r>
               <a:rPr lang="en-US" sz="1300" b="1" dirty="0">
                 <a:solidFill>
-                  <a:srgbClr val="0B2C4A"/>
-                </a:solidFill>
-                <a:latin typeface="Inter" pitchFamily="34" charset="0"/>
-                <a:ea typeface="Inter" pitchFamily="34" charset="-122"/>
-                <a:cs typeface="Inter" pitchFamily="34" charset="-120"/>
-              </a:rPr>
-              <a:t>$12,330</a:t>
+                  <a:srgbClr val="1A1A1A"/>
+                </a:solidFill>
+                <a:latin typeface="Inter" pitchFamily="34" charset="0"/>
+                <a:ea typeface="Inter" pitchFamily="34" charset="-122"/>
+                <a:cs typeface="Inter" pitchFamily="34" charset="-120"/>
+              </a:rPr>
+              <a:t>$12.3K</a:t>
             </a:r>
             <a:endParaRPr lang="en-US" sz="1300" dirty="0"/>
           </a:p>
@@ -5129,13 +5107,13 @@
             <a:r>
               <a:rPr lang="en-US" sz="1300" b="1" dirty="0">
                 <a:solidFill>
-                  <a:srgbClr val="0B2C4A"/>
-                </a:solidFill>
-                <a:latin typeface="Inter" pitchFamily="34" charset="0"/>
-                <a:ea typeface="Inter" pitchFamily="34" charset="-122"/>
-                <a:cs typeface="Inter" pitchFamily="34" charset="-120"/>
-              </a:rPr>
-              <a:t>$11,942</a:t>
+                  <a:srgbClr val="1A1A1A"/>
+                </a:solidFill>
+                <a:latin typeface="Inter" pitchFamily="34" charset="0"/>
+                <a:ea typeface="Inter" pitchFamily="34" charset="-122"/>
+                <a:cs typeface="Inter" pitchFamily="34" charset="-120"/>
+              </a:rPr>
+              <a:t>$11.9K</a:t>
             </a:r>
             <a:endParaRPr lang="en-US" sz="1300" dirty="0"/>
           </a:p>
@@ -5305,13 +5283,13 @@
             <a:r>
               <a:rPr lang="en-US" sz="1300" b="1" dirty="0">
                 <a:solidFill>
-                  <a:srgbClr val="0B2C4A"/>
-                </a:solidFill>
-                <a:latin typeface="Inter" pitchFamily="34" charset="0"/>
-                <a:ea typeface="Inter" pitchFamily="34" charset="-122"/>
-                <a:cs typeface="Inter" pitchFamily="34" charset="-120"/>
-              </a:rPr>
-              <a:t>$11,409</a:t>
+                  <a:srgbClr val="1A1A1A"/>
+                </a:solidFill>
+                <a:latin typeface="Inter" pitchFamily="34" charset="0"/>
+                <a:ea typeface="Inter" pitchFamily="34" charset="-122"/>
+                <a:cs typeface="Inter" pitchFamily="34" charset="-120"/>
+              </a:rPr>
+              <a:t>$11.4K</a:t>
             </a:r>
             <a:endParaRPr lang="en-US" sz="1300" dirty="0"/>
           </a:p>
@@ -5481,13 +5459,13 @@
             <a:r>
               <a:rPr lang="en-US" sz="1300" b="1" dirty="0">
                 <a:solidFill>
-                  <a:srgbClr val="0B2C4A"/>
-                </a:solidFill>
-                <a:latin typeface="Inter" pitchFamily="34" charset="0"/>
-                <a:ea typeface="Inter" pitchFamily="34" charset="-122"/>
-                <a:cs typeface="Inter" pitchFamily="34" charset="-120"/>
-              </a:rPr>
-              <a:t>$10,798</a:t>
+                  <a:srgbClr val="1A1A1A"/>
+                </a:solidFill>
+                <a:latin typeface="Inter" pitchFamily="34" charset="0"/>
+                <a:ea typeface="Inter" pitchFamily="34" charset="-122"/>
+                <a:cs typeface="Inter" pitchFamily="34" charset="-120"/>
+              </a:rPr>
+              <a:t>$10.8K</a:t>
             </a:r>
             <a:endParaRPr lang="en-US" sz="1300" dirty="0"/>
           </a:p>
@@ -5657,13 +5635,13 @@
             <a:r>
               <a:rPr lang="en-US" sz="1300" b="1" dirty="0">
                 <a:solidFill>
-                  <a:srgbClr val="0B2C4A"/>
-                </a:solidFill>
-                <a:latin typeface="Inter" pitchFamily="34" charset="0"/>
-                <a:ea typeface="Inter" pitchFamily="34" charset="-122"/>
-                <a:cs typeface="Inter" pitchFamily="34" charset="-120"/>
-              </a:rPr>
-              <a:t>$10,212</a:t>
+                  <a:srgbClr val="1A1A1A"/>
+                </a:solidFill>
+                <a:latin typeface="Inter" pitchFamily="34" charset="0"/>
+                <a:ea typeface="Inter" pitchFamily="34" charset="-122"/>
+                <a:cs typeface="Inter" pitchFamily="34" charset="-120"/>
+              </a:rPr>
+              <a:t>$10.2K</a:t>
             </a:r>
             <a:endParaRPr lang="en-US" sz="1300" dirty="0"/>
           </a:p>
@@ -5833,13 +5811,13 @@
             <a:r>
               <a:rPr lang="en-US" sz="1300" b="1" dirty="0">
                 <a:solidFill>
-                  <a:srgbClr val="0B2C4A"/>
-                </a:solidFill>
-                <a:latin typeface="Inter" pitchFamily="34" charset="0"/>
-                <a:ea typeface="Inter" pitchFamily="34" charset="-122"/>
-                <a:cs typeface="Inter" pitchFamily="34" charset="-120"/>
-              </a:rPr>
-              <a:t>$9,154</a:t>
+                  <a:srgbClr val="1A1A1A"/>
+                </a:solidFill>
+                <a:latin typeface="Inter" pitchFamily="34" charset="0"/>
+                <a:ea typeface="Inter" pitchFamily="34" charset="-122"/>
+                <a:cs typeface="Inter" pitchFamily="34" charset="-120"/>
+              </a:rPr>
+              <a:t>$9.2K</a:t>
             </a:r>
             <a:endParaRPr lang="en-US" sz="1300" dirty="0"/>
           </a:p>
@@ -6009,13 +5987,13 @@
             <a:r>
               <a:rPr lang="en-US" sz="1300" b="1" dirty="0">
                 <a:solidFill>
-                  <a:srgbClr val="0B2C4A"/>
-                </a:solidFill>
-                <a:latin typeface="Inter" pitchFamily="34" charset="0"/>
-                <a:ea typeface="Inter" pitchFamily="34" charset="-122"/>
-                <a:cs typeface="Inter" pitchFamily="34" charset="-120"/>
-              </a:rPr>
-              <a:t>$8,804</a:t>
+                  <a:srgbClr val="1A1A1A"/>
+                </a:solidFill>
+                <a:latin typeface="Inter" pitchFamily="34" charset="0"/>
+                <a:ea typeface="Inter" pitchFamily="34" charset="-122"/>
+                <a:cs typeface="Inter" pitchFamily="34" charset="-120"/>
+              </a:rPr>
+              <a:t>$8.8K</a:t>
             </a:r>
             <a:endParaRPr lang="en-US" sz="1300" dirty="0"/>
           </a:p>
@@ -6185,13 +6163,13 @@
             <a:r>
               <a:rPr lang="en-US" sz="1300" b="1" dirty="0">
                 <a:solidFill>
-                  <a:srgbClr val="0B2C4A"/>
-                </a:solidFill>
-                <a:latin typeface="Inter" pitchFamily="34" charset="0"/>
-                <a:ea typeface="Inter" pitchFamily="34" charset="-122"/>
-                <a:cs typeface="Inter" pitchFamily="34" charset="-120"/>
-              </a:rPr>
-              <a:t>$8,452</a:t>
+                  <a:srgbClr val="1A1A1A"/>
+                </a:solidFill>
+                <a:latin typeface="Inter" pitchFamily="34" charset="0"/>
+                <a:ea typeface="Inter" pitchFamily="34" charset="-122"/>
+                <a:cs typeface="Inter" pitchFamily="34" charset="-120"/>
+              </a:rPr>
+              <a:t>$8.5K</a:t>
             </a:r>
             <a:endParaRPr lang="en-US" sz="1300" dirty="0"/>
           </a:p>
@@ -6361,13 +6339,13 @@
             <a:r>
               <a:rPr lang="en-US" sz="1300" b="1" dirty="0">
                 <a:solidFill>
-                  <a:srgbClr val="0B2C4A"/>
-                </a:solidFill>
-                <a:latin typeface="Inter" pitchFamily="34" charset="0"/>
-                <a:ea typeface="Inter" pitchFamily="34" charset="-122"/>
-                <a:cs typeface="Inter" pitchFamily="34" charset="-120"/>
-              </a:rPr>
-              <a:t>$8,285</a:t>
+                  <a:srgbClr val="1A1A1A"/>
+                </a:solidFill>
+                <a:latin typeface="Inter" pitchFamily="34" charset="0"/>
+                <a:ea typeface="Inter" pitchFamily="34" charset="-122"/>
+                <a:cs typeface="Inter" pitchFamily="34" charset="-120"/>
+              </a:rPr>
+              <a:t>$8.3K</a:t>
             </a:r>
             <a:endParaRPr lang="en-US" sz="1300" dirty="0"/>
           </a:p>
@@ -6537,13 +6515,13 @@
             <a:r>
               <a:rPr lang="en-US" sz="1300" b="1" dirty="0">
                 <a:solidFill>
-                  <a:srgbClr val="0B2C4A"/>
-                </a:solidFill>
-                <a:latin typeface="Inter" pitchFamily="34" charset="0"/>
-                <a:ea typeface="Inter" pitchFamily="34" charset="-122"/>
-                <a:cs typeface="Inter" pitchFamily="34" charset="-120"/>
-              </a:rPr>
-              <a:t>$8,069</a:t>
+                  <a:srgbClr val="1A1A1A"/>
+                </a:solidFill>
+                <a:latin typeface="Inter" pitchFamily="34" charset="0"/>
+                <a:ea typeface="Inter" pitchFamily="34" charset="-122"/>
+                <a:cs typeface="Inter" pitchFamily="34" charset="-120"/>
+              </a:rPr>
+              <a:t>$8.1K</a:t>
             </a:r>
             <a:endParaRPr lang="en-US" sz="1300" dirty="0"/>
           </a:p>
@@ -6713,13 +6691,13 @@
             <a:r>
               <a:rPr lang="en-US" sz="1300" b="1" dirty="0">
                 <a:solidFill>
-                  <a:srgbClr val="0B2C4A"/>
-                </a:solidFill>
-                <a:latin typeface="Inter" pitchFamily="34" charset="0"/>
-                <a:ea typeface="Inter" pitchFamily="34" charset="-122"/>
-                <a:cs typeface="Inter" pitchFamily="34" charset="-120"/>
-              </a:rPr>
-              <a:t>$7,547</a:t>
+                  <a:srgbClr val="1A1A1A"/>
+                </a:solidFill>
+                <a:latin typeface="Inter" pitchFamily="34" charset="0"/>
+                <a:ea typeface="Inter" pitchFamily="34" charset="-122"/>
+                <a:cs typeface="Inter" pitchFamily="34" charset="-120"/>
+              </a:rPr>
+              <a:t>$7.5K</a:t>
             </a:r>
             <a:endParaRPr lang="en-US" sz="1300" dirty="0"/>
           </a:p>
@@ -6889,13 +6867,13 @@
             <a:r>
               <a:rPr lang="en-US" sz="1300" b="1" dirty="0">
                 <a:solidFill>
-                  <a:srgbClr val="0B2C4A"/>
-                </a:solidFill>
-                <a:latin typeface="Inter" pitchFamily="34" charset="0"/>
-                <a:ea typeface="Inter" pitchFamily="34" charset="-122"/>
-                <a:cs typeface="Inter" pitchFamily="34" charset="-120"/>
-              </a:rPr>
-              <a:t>$7,394</a:t>
+                  <a:srgbClr val="1A1A1A"/>
+                </a:solidFill>
+                <a:latin typeface="Inter" pitchFamily="34" charset="0"/>
+                <a:ea typeface="Inter" pitchFamily="34" charset="-122"/>
+                <a:cs typeface="Inter" pitchFamily="34" charset="-120"/>
+              </a:rPr>
+              <a:t>$7.4K</a:t>
             </a:r>
             <a:endParaRPr lang="en-US" sz="1300" dirty="0"/>
           </a:p>
@@ -7065,13 +7043,13 @@
             <a:r>
               <a:rPr lang="en-US" sz="1300" b="1" dirty="0">
                 <a:solidFill>
-                  <a:srgbClr val="0B2C4A"/>
-                </a:solidFill>
-                <a:latin typeface="Inter" pitchFamily="34" charset="0"/>
-                <a:ea typeface="Inter" pitchFamily="34" charset="-122"/>
-                <a:cs typeface="Inter" pitchFamily="34" charset="-120"/>
-              </a:rPr>
-              <a:t>$7,249</a:t>
+                  <a:srgbClr val="1A1A1A"/>
+                </a:solidFill>
+                <a:latin typeface="Inter" pitchFamily="34" charset="0"/>
+                <a:ea typeface="Inter" pitchFamily="34" charset="-122"/>
+                <a:cs typeface="Inter" pitchFamily="34" charset="-120"/>
+              </a:rPr>
+              <a:t>$7.2K</a:t>
             </a:r>
             <a:endParaRPr lang="en-US" sz="1300" dirty="0"/>
           </a:p>
@@ -7241,13 +7219,13 @@
             <a:r>
               <a:rPr lang="en-US" sz="1300" b="1" dirty="0">
                 <a:solidFill>
-                  <a:srgbClr val="0B2C4A"/>
-                </a:solidFill>
-                <a:latin typeface="Inter" pitchFamily="34" charset="0"/>
-                <a:ea typeface="Inter" pitchFamily="34" charset="-122"/>
-                <a:cs typeface="Inter" pitchFamily="34" charset="-120"/>
-              </a:rPr>
-              <a:t>$7,225</a:t>
+                  <a:srgbClr val="1A1A1A"/>
+                </a:solidFill>
+                <a:latin typeface="Inter" pitchFamily="34" charset="0"/>
+                <a:ea typeface="Inter" pitchFamily="34" charset="-122"/>
+                <a:cs typeface="Inter" pitchFamily="34" charset="-120"/>
+              </a:rPr>
+              <a:t>$7.2K</a:t>
             </a:r>
             <a:endParaRPr lang="en-US" sz="1300" dirty="0"/>
           </a:p>
@@ -7417,13 +7395,13 @@
             <a:r>
               <a:rPr lang="en-US" sz="1300" b="1" dirty="0">
                 <a:solidFill>
-                  <a:srgbClr val="0B2C4A"/>
-                </a:solidFill>
-                <a:latin typeface="Inter" pitchFamily="34" charset="0"/>
-                <a:ea typeface="Inter" pitchFamily="34" charset="-122"/>
-                <a:cs typeface="Inter" pitchFamily="34" charset="-120"/>
-              </a:rPr>
-              <a:t>$7,141</a:t>
+                  <a:srgbClr val="1A1A1A"/>
+                </a:solidFill>
+                <a:latin typeface="Inter" pitchFamily="34" charset="0"/>
+                <a:ea typeface="Inter" pitchFamily="34" charset="-122"/>
+                <a:cs typeface="Inter" pitchFamily="34" charset="-120"/>
+              </a:rPr>
+              <a:t>$7.1K</a:t>
             </a:r>
             <a:endParaRPr lang="en-US" sz="1300" dirty="0"/>
           </a:p>
@@ -7593,13 +7571,13 @@
             <a:r>
               <a:rPr lang="en-US" sz="1300" b="1" dirty="0">
                 <a:solidFill>
-                  <a:srgbClr val="0B2C4A"/>
-                </a:solidFill>
-                <a:latin typeface="Inter" pitchFamily="34" charset="0"/>
-                <a:ea typeface="Inter" pitchFamily="34" charset="-122"/>
-                <a:cs typeface="Inter" pitchFamily="34" charset="-120"/>
-              </a:rPr>
-              <a:t>$6,583</a:t>
+                  <a:srgbClr val="1A1A1A"/>
+                </a:solidFill>
+                <a:latin typeface="Inter" pitchFamily="34" charset="0"/>
+                <a:ea typeface="Inter" pitchFamily="34" charset="-122"/>
+                <a:cs typeface="Inter" pitchFamily="34" charset="-120"/>
+              </a:rPr>
+              <a:t>$6.6K</a:t>
             </a:r>
             <a:endParaRPr lang="en-US" sz="1300" dirty="0"/>
           </a:p>
@@ -7769,13 +7747,13 @@
             <a:r>
               <a:rPr lang="en-US" sz="1300" b="1" dirty="0">
                 <a:solidFill>
-                  <a:srgbClr val="0B2C4A"/>
-                </a:solidFill>
-                <a:latin typeface="Inter" pitchFamily="34" charset="0"/>
-                <a:ea typeface="Inter" pitchFamily="34" charset="-122"/>
-                <a:cs typeface="Inter" pitchFamily="34" charset="-120"/>
-              </a:rPr>
-              <a:t>$6,512</a:t>
+                  <a:srgbClr val="1A1A1A"/>
+                </a:solidFill>
+                <a:latin typeface="Inter" pitchFamily="34" charset="0"/>
+                <a:ea typeface="Inter" pitchFamily="34" charset="-122"/>
+                <a:cs typeface="Inter" pitchFamily="34" charset="-120"/>
+              </a:rPr>
+              <a:t>$6.5K</a:t>
             </a:r>
             <a:endParaRPr lang="en-US" sz="1300" dirty="0"/>
           </a:p>
@@ -7945,13 +7923,13 @@
             <a:r>
               <a:rPr lang="en-US" sz="1300" b="1" dirty="0">
                 <a:solidFill>
-                  <a:srgbClr val="0B2C4A"/>
-                </a:solidFill>
-                <a:latin typeface="Inter" pitchFamily="34" charset="0"/>
-                <a:ea typeface="Inter" pitchFamily="34" charset="-122"/>
-                <a:cs typeface="Inter" pitchFamily="34" charset="-120"/>
-              </a:rPr>
-              <a:t>$5,294</a:t>
+                  <a:srgbClr val="1A1A1A"/>
+                </a:solidFill>
+                <a:latin typeface="Inter" pitchFamily="34" charset="0"/>
+                <a:ea typeface="Inter" pitchFamily="34" charset="-122"/>
+                <a:cs typeface="Inter" pitchFamily="34" charset="-120"/>
+              </a:rPr>
+              <a:t>$5.3K</a:t>
             </a:r>
             <a:endParaRPr lang="en-US" sz="1300" dirty="0"/>
           </a:p>
@@ -8121,13 +8099,13 @@
             <a:r>
               <a:rPr lang="en-US" sz="1300" b="1" dirty="0">
                 <a:solidFill>
-                  <a:srgbClr val="0B2C4A"/>
-                </a:solidFill>
-                <a:latin typeface="Inter" pitchFamily="34" charset="0"/>
-                <a:ea typeface="Inter" pitchFamily="34" charset="-122"/>
-                <a:cs typeface="Inter" pitchFamily="34" charset="-120"/>
-              </a:rPr>
-              <a:t>$4,334</a:t>
+                  <a:srgbClr val="1A1A1A"/>
+                </a:solidFill>
+                <a:latin typeface="Inter" pitchFamily="34" charset="0"/>
+                <a:ea typeface="Inter" pitchFamily="34" charset="-122"/>
+                <a:cs typeface="Inter" pitchFamily="34" charset="-120"/>
+              </a:rPr>
+              <a:t>$4.3K</a:t>
             </a:r>
             <a:endParaRPr lang="en-US" sz="1300" dirty="0"/>
           </a:p>
@@ -8297,13 +8275,13 @@
             <a:r>
               <a:rPr lang="en-US" sz="1300" b="1" dirty="0">
                 <a:solidFill>
-                  <a:srgbClr val="0B2C4A"/>
-                </a:solidFill>
-                <a:latin typeface="Inter" pitchFamily="34" charset="0"/>
-                <a:ea typeface="Inter" pitchFamily="34" charset="-122"/>
-                <a:cs typeface="Inter" pitchFamily="34" charset="-120"/>
-              </a:rPr>
-              <a:t>$3,458</a:t>
+                  <a:srgbClr val="1A1A1A"/>
+                </a:solidFill>
+                <a:latin typeface="Inter" pitchFamily="34" charset="0"/>
+                <a:ea typeface="Inter" pitchFamily="34" charset="-122"/>
+                <a:cs typeface="Inter" pitchFamily="34" charset="-120"/>
+              </a:rPr>
+              <a:t>$3.5K</a:t>
             </a:r>
             <a:endParaRPr lang="en-US" sz="1300" dirty="0"/>
           </a:p>

--- a/day2-deck/decks/Tech Minute - Review.pptx
+++ b/day2-deck/decks/Tech Minute - Review.pptx
@@ -2353,7 +2353,7 @@
         </p:nvSpPr>
         <p:spPr>
           <a:xfrm>
-            <a:off x="3767328" y="1316736"/>
+            <a:off x="3813048" y="1316736"/>
             <a:ext cx="786384" cy="329184"/>
           </a:xfrm>
           <a:prstGeom prst="rect">
@@ -2381,7 +2381,7 @@
         </p:nvSpPr>
         <p:spPr>
           <a:xfrm>
-            <a:off x="4553712" y="1316736"/>
+            <a:off x="4599432" y="1316736"/>
             <a:ext cx="566928" cy="329184"/>
           </a:xfrm>
           <a:prstGeom prst="rect">
@@ -2420,7 +2420,7 @@
         </p:nvSpPr>
         <p:spPr>
           <a:xfrm>
-            <a:off x="5120640" y="1316736"/>
+            <a:off x="5166360" y="1316736"/>
             <a:ext cx="749808" cy="329184"/>
           </a:xfrm>
           <a:prstGeom prst="rect">
@@ -2459,7 +2459,7 @@
         </p:nvSpPr>
         <p:spPr>
           <a:xfrm>
-            <a:off x="9317736" y="1316736"/>
+            <a:off x="9363456" y="1316736"/>
             <a:ext cx="786384" cy="329184"/>
           </a:xfrm>
           <a:prstGeom prst="rect">
@@ -2487,7 +2487,7 @@
         </p:nvSpPr>
         <p:spPr>
           <a:xfrm>
-            <a:off x="10104120" y="1316736"/>
+            <a:off x="10149840" y="1316736"/>
             <a:ext cx="566928" cy="329184"/>
           </a:xfrm>
           <a:prstGeom prst="rect">
@@ -2526,7 +2526,7 @@
         </p:nvSpPr>
         <p:spPr>
           <a:xfrm>
-            <a:off x="10671048" y="1316736"/>
+            <a:off x="10716768" y="1316736"/>
             <a:ext cx="749808" cy="329184"/>
           </a:xfrm>
           <a:prstGeom prst="rect">
@@ -2566,7 +2566,46 @@
         <p:spPr>
           <a:xfrm>
             <a:off x="658368" y="1700784"/>
-            <a:ext cx="1938528" cy="248502"/>
+            <a:ext cx="310896" cy="248502"/>
+          </a:xfrm>
+          <a:prstGeom prst="rect">
+            <a:avLst/>
+          </a:prstGeom>
+          <a:noFill/>
+          <a:ln/>
+        </p:spPr>
+        <p:txBody>
+          <a:bodyPr wrap="square" lIns="0" tIns="0" rIns="0" bIns="0" rtlCol="0" anchor="ctr"/>
+          <a:lstStyle/>
+          <a:p>
+            <a:pPr algn="r" indent="0" marL="0">
+              <a:buNone/>
+            </a:pPr>
+            <a:r>
+              <a:rPr lang="en-US" sz="1200" dirty="0">
+                <a:solidFill>
+                  <a:srgbClr val="9AA3AD"/>
+                </a:solidFill>
+                <a:latin typeface="Inter" pitchFamily="34" charset="0"/>
+                <a:ea typeface="Inter" pitchFamily="34" charset="-122"/>
+                <a:cs typeface="Inter" pitchFamily="34" charset="-120"/>
+              </a:rPr>
+              <a:t>1</a:t>
+            </a:r>
+            <a:endParaRPr lang="en-US" sz="1200" dirty="0"/>
+          </a:p>
+        </p:txBody>
+      </p:sp>
+      <p:sp>
+        <p:nvSpPr>
+          <p:cNvPr id="13" name="Text 11"/>
+          <p:cNvSpPr txBox="1"/>
+          <p:nvPr/>
+        </p:nvSpPr>
+        <p:spPr>
+          <a:xfrm>
+            <a:off x="1014984" y="1700784"/>
+            <a:ext cx="1783080" cy="248502"/>
           </a:xfrm>
           <a:prstGeom prst="rect">
             <a:avLst/>
@@ -2598,14 +2637,14 @@
       </p:sp>
       <p:sp>
         <p:nvSpPr>
-          <p:cNvPr id="13" name="Shape 11"/>
+          <p:cNvPr id="14" name="Shape 12"/>
           <p:cNvSpPr/>
           <p:nvPr/>
         </p:nvSpPr>
         <p:spPr>
           <a:xfrm>
-            <a:off x="2670048" y="1756697"/>
-            <a:ext cx="1042416" cy="136676"/>
+            <a:off x="2871216" y="1756697"/>
+            <a:ext cx="886968" cy="136676"/>
           </a:xfrm>
           <a:prstGeom prst="rect">
             <a:avLst/>
@@ -2618,13 +2657,13 @@
       </p:sp>
       <p:sp>
         <p:nvSpPr>
-          <p:cNvPr id="14" name="Text 12"/>
-          <p:cNvSpPr txBox="1"/>
-          <p:nvPr/>
-        </p:nvSpPr>
-        <p:spPr>
-          <a:xfrm>
-            <a:off x="3767328" y="1700784"/>
+          <p:cNvPr id="15" name="Text 13"/>
+          <p:cNvSpPr txBox="1"/>
+          <p:nvPr/>
+        </p:nvSpPr>
+        <p:spPr>
+          <a:xfrm>
+            <a:off x="3813048" y="1700784"/>
             <a:ext cx="786384" cy="248502"/>
           </a:xfrm>
           <a:prstGeom prst="rect">
@@ -2657,13 +2696,13 @@
       </p:sp>
       <p:sp>
         <p:nvSpPr>
-          <p:cNvPr id="15" name="Text 13"/>
-          <p:cNvSpPr txBox="1"/>
-          <p:nvPr/>
-        </p:nvSpPr>
-        <p:spPr>
-          <a:xfrm>
-            <a:off x="4553712" y="1700784"/>
+          <p:cNvPr id="16" name="Text 14"/>
+          <p:cNvSpPr txBox="1"/>
+          <p:nvPr/>
+        </p:nvSpPr>
+        <p:spPr>
+          <a:xfrm>
+            <a:off x="4599432" y="1700784"/>
             <a:ext cx="566928" cy="248502"/>
           </a:xfrm>
           <a:prstGeom prst="rect">
@@ -2696,13 +2735,13 @@
       </p:sp>
       <p:sp>
         <p:nvSpPr>
-          <p:cNvPr id="16" name="Text 14"/>
-          <p:cNvSpPr txBox="1"/>
-          <p:nvPr/>
-        </p:nvSpPr>
-        <p:spPr>
-          <a:xfrm>
-            <a:off x="5120640" y="1700784"/>
+          <p:cNvPr id="17" name="Text 15"/>
+          <p:cNvSpPr txBox="1"/>
+          <p:nvPr/>
+        </p:nvSpPr>
+        <p:spPr>
+          <a:xfrm>
+            <a:off x="5166360" y="1700784"/>
             <a:ext cx="749808" cy="248502"/>
           </a:xfrm>
           <a:prstGeom prst="rect">
@@ -2735,14 +2774,53 @@
       </p:sp>
       <p:sp>
         <p:nvSpPr>
-          <p:cNvPr id="17" name="Text 15"/>
+          <p:cNvPr id="18" name="Text 16"/>
           <p:cNvSpPr txBox="1"/>
           <p:nvPr/>
         </p:nvSpPr>
         <p:spPr>
           <a:xfrm>
             <a:off x="658368" y="1949286"/>
-            <a:ext cx="1938528" cy="248502"/>
+            <a:ext cx="310896" cy="248502"/>
+          </a:xfrm>
+          <a:prstGeom prst="rect">
+            <a:avLst/>
+          </a:prstGeom>
+          <a:noFill/>
+          <a:ln/>
+        </p:spPr>
+        <p:txBody>
+          <a:bodyPr wrap="square" lIns="0" tIns="0" rIns="0" bIns="0" rtlCol="0" anchor="ctr"/>
+          <a:lstStyle/>
+          <a:p>
+            <a:pPr algn="r" indent="0" marL="0">
+              <a:buNone/>
+            </a:pPr>
+            <a:r>
+              <a:rPr lang="en-US" sz="1200" dirty="0">
+                <a:solidFill>
+                  <a:srgbClr val="9AA3AD"/>
+                </a:solidFill>
+                <a:latin typeface="Inter" pitchFamily="34" charset="0"/>
+                <a:ea typeface="Inter" pitchFamily="34" charset="-122"/>
+                <a:cs typeface="Inter" pitchFamily="34" charset="-120"/>
+              </a:rPr>
+              <a:t>2</a:t>
+            </a:r>
+            <a:endParaRPr lang="en-US" sz="1200" dirty="0"/>
+          </a:p>
+        </p:txBody>
+      </p:sp>
+      <p:sp>
+        <p:nvSpPr>
+          <p:cNvPr id="19" name="Text 17"/>
+          <p:cNvSpPr txBox="1"/>
+          <p:nvPr/>
+        </p:nvSpPr>
+        <p:spPr>
+          <a:xfrm>
+            <a:off x="1014984" y="1949286"/>
+            <a:ext cx="1783080" cy="248502"/>
           </a:xfrm>
           <a:prstGeom prst="rect">
             <a:avLst/>
@@ -2774,14 +2852,14 @@
       </p:sp>
       <p:sp>
         <p:nvSpPr>
-          <p:cNvPr id="18" name="Shape 16"/>
+          <p:cNvPr id="20" name="Shape 18"/>
           <p:cNvSpPr/>
           <p:nvPr/>
         </p:nvSpPr>
         <p:spPr>
           <a:xfrm>
-            <a:off x="2670048" y="2005199"/>
-            <a:ext cx="813746" cy="136676"/>
+            <a:off x="2871216" y="2005199"/>
+            <a:ext cx="692398" cy="136676"/>
           </a:xfrm>
           <a:prstGeom prst="rect">
             <a:avLst/>
@@ -2794,13 +2872,13 @@
       </p:sp>
       <p:sp>
         <p:nvSpPr>
-          <p:cNvPr id="19" name="Text 17"/>
-          <p:cNvSpPr txBox="1"/>
-          <p:nvPr/>
-        </p:nvSpPr>
-        <p:spPr>
-          <a:xfrm>
-            <a:off x="3767328" y="1949286"/>
+          <p:cNvPr id="21" name="Text 19"/>
+          <p:cNvSpPr txBox="1"/>
+          <p:nvPr/>
+        </p:nvSpPr>
+        <p:spPr>
+          <a:xfrm>
+            <a:off x="3813048" y="1949286"/>
             <a:ext cx="786384" cy="248502"/>
           </a:xfrm>
           <a:prstGeom prst="rect">
@@ -2833,13 +2911,13 @@
       </p:sp>
       <p:sp>
         <p:nvSpPr>
-          <p:cNvPr id="20" name="Text 18"/>
-          <p:cNvSpPr txBox="1"/>
-          <p:nvPr/>
-        </p:nvSpPr>
-        <p:spPr>
-          <a:xfrm>
-            <a:off x="4553712" y="1949286"/>
+          <p:cNvPr id="22" name="Text 20"/>
+          <p:cNvSpPr txBox="1"/>
+          <p:nvPr/>
+        </p:nvSpPr>
+        <p:spPr>
+          <a:xfrm>
+            <a:off x="4599432" y="1949286"/>
             <a:ext cx="566928" cy="248502"/>
           </a:xfrm>
           <a:prstGeom prst="rect">
@@ -2872,13 +2950,13 @@
       </p:sp>
       <p:sp>
         <p:nvSpPr>
-          <p:cNvPr id="21" name="Text 19"/>
-          <p:cNvSpPr txBox="1"/>
-          <p:nvPr/>
-        </p:nvSpPr>
-        <p:spPr>
-          <a:xfrm>
-            <a:off x="5120640" y="1949286"/>
+          <p:cNvPr id="23" name="Text 21"/>
+          <p:cNvSpPr txBox="1"/>
+          <p:nvPr/>
+        </p:nvSpPr>
+        <p:spPr>
+          <a:xfrm>
+            <a:off x="5166360" y="1949286"/>
             <a:ext cx="749808" cy="248502"/>
           </a:xfrm>
           <a:prstGeom prst="rect">
@@ -2911,14 +2989,53 @@
       </p:sp>
       <p:sp>
         <p:nvSpPr>
-          <p:cNvPr id="22" name="Text 20"/>
+          <p:cNvPr id="24" name="Text 22"/>
           <p:cNvSpPr txBox="1"/>
           <p:nvPr/>
         </p:nvSpPr>
         <p:spPr>
           <a:xfrm>
             <a:off x="658368" y="2197787"/>
-            <a:ext cx="1938528" cy="248502"/>
+            <a:ext cx="310896" cy="248502"/>
+          </a:xfrm>
+          <a:prstGeom prst="rect">
+            <a:avLst/>
+          </a:prstGeom>
+          <a:noFill/>
+          <a:ln/>
+        </p:spPr>
+        <p:txBody>
+          <a:bodyPr wrap="square" lIns="0" tIns="0" rIns="0" bIns="0" rtlCol="0" anchor="ctr"/>
+          <a:lstStyle/>
+          <a:p>
+            <a:pPr algn="r" indent="0" marL="0">
+              <a:buNone/>
+            </a:pPr>
+            <a:r>
+              <a:rPr lang="en-US" sz="1200" dirty="0">
+                <a:solidFill>
+                  <a:srgbClr val="9AA3AD"/>
+                </a:solidFill>
+                <a:latin typeface="Inter" pitchFamily="34" charset="0"/>
+                <a:ea typeface="Inter" pitchFamily="34" charset="-122"/>
+                <a:cs typeface="Inter" pitchFamily="34" charset="-120"/>
+              </a:rPr>
+              <a:t>3</a:t>
+            </a:r>
+            <a:endParaRPr lang="en-US" sz="1200" dirty="0"/>
+          </a:p>
+        </p:txBody>
+      </p:sp>
+      <p:sp>
+        <p:nvSpPr>
+          <p:cNvPr id="25" name="Text 23"/>
+          <p:cNvSpPr txBox="1"/>
+          <p:nvPr/>
+        </p:nvSpPr>
+        <p:spPr>
+          <a:xfrm>
+            <a:off x="1014984" y="2197787"/>
+            <a:ext cx="1783080" cy="248502"/>
           </a:xfrm>
           <a:prstGeom prst="rect">
             <a:avLst/>
@@ -2950,14 +3067,14 @@
       </p:sp>
       <p:sp>
         <p:nvSpPr>
-          <p:cNvPr id="23" name="Shape 21"/>
+          <p:cNvPr id="26" name="Shape 24"/>
           <p:cNvSpPr/>
           <p:nvPr/>
         </p:nvSpPr>
         <p:spPr>
           <a:xfrm>
-            <a:off x="2670048" y="2253700"/>
-            <a:ext cx="683623" cy="136676"/>
+            <a:off x="2871216" y="2253700"/>
+            <a:ext cx="581679" cy="136676"/>
           </a:xfrm>
           <a:prstGeom prst="rect">
             <a:avLst/>
@@ -2970,13 +3087,13 @@
       </p:sp>
       <p:sp>
         <p:nvSpPr>
-          <p:cNvPr id="24" name="Text 22"/>
-          <p:cNvSpPr txBox="1"/>
-          <p:nvPr/>
-        </p:nvSpPr>
-        <p:spPr>
-          <a:xfrm>
-            <a:off x="3767328" y="2197787"/>
+          <p:cNvPr id="27" name="Text 25"/>
+          <p:cNvSpPr txBox="1"/>
+          <p:nvPr/>
+        </p:nvSpPr>
+        <p:spPr>
+          <a:xfrm>
+            <a:off x="3813048" y="2197787"/>
             <a:ext cx="786384" cy="248502"/>
           </a:xfrm>
           <a:prstGeom prst="rect">
@@ -3009,13 +3126,13 @@
       </p:sp>
       <p:sp>
         <p:nvSpPr>
-          <p:cNvPr id="25" name="Text 23"/>
-          <p:cNvSpPr txBox="1"/>
-          <p:nvPr/>
-        </p:nvSpPr>
-        <p:spPr>
-          <a:xfrm>
-            <a:off x="4553712" y="2197787"/>
+          <p:cNvPr id="28" name="Text 26"/>
+          <p:cNvSpPr txBox="1"/>
+          <p:nvPr/>
+        </p:nvSpPr>
+        <p:spPr>
+          <a:xfrm>
+            <a:off x="4599432" y="2197787"/>
             <a:ext cx="566928" cy="248502"/>
           </a:xfrm>
           <a:prstGeom prst="rect">
@@ -3048,13 +3165,13 @@
       </p:sp>
       <p:sp>
         <p:nvSpPr>
-          <p:cNvPr id="26" name="Text 24"/>
-          <p:cNvSpPr txBox="1"/>
-          <p:nvPr/>
-        </p:nvSpPr>
-        <p:spPr>
-          <a:xfrm>
-            <a:off x="5120640" y="2197787"/>
+          <p:cNvPr id="29" name="Text 27"/>
+          <p:cNvSpPr txBox="1"/>
+          <p:nvPr/>
+        </p:nvSpPr>
+        <p:spPr>
+          <a:xfrm>
+            <a:off x="5166360" y="2197787"/>
             <a:ext cx="749808" cy="248502"/>
           </a:xfrm>
           <a:prstGeom prst="rect">
@@ -3087,14 +3204,53 @@
       </p:sp>
       <p:sp>
         <p:nvSpPr>
-          <p:cNvPr id="27" name="Text 25"/>
+          <p:cNvPr id="30" name="Text 28"/>
           <p:cNvSpPr txBox="1"/>
           <p:nvPr/>
         </p:nvSpPr>
         <p:spPr>
           <a:xfrm>
             <a:off x="658368" y="2446289"/>
-            <a:ext cx="1938528" cy="248502"/>
+            <a:ext cx="310896" cy="248502"/>
+          </a:xfrm>
+          <a:prstGeom prst="rect">
+            <a:avLst/>
+          </a:prstGeom>
+          <a:noFill/>
+          <a:ln/>
+        </p:spPr>
+        <p:txBody>
+          <a:bodyPr wrap="square" lIns="0" tIns="0" rIns="0" bIns="0" rtlCol="0" anchor="ctr"/>
+          <a:lstStyle/>
+          <a:p>
+            <a:pPr algn="r" indent="0" marL="0">
+              <a:buNone/>
+            </a:pPr>
+            <a:r>
+              <a:rPr lang="en-US" sz="1200" dirty="0">
+                <a:solidFill>
+                  <a:srgbClr val="9AA3AD"/>
+                </a:solidFill>
+                <a:latin typeface="Inter" pitchFamily="34" charset="0"/>
+                <a:ea typeface="Inter" pitchFamily="34" charset="-122"/>
+                <a:cs typeface="Inter" pitchFamily="34" charset="-120"/>
+              </a:rPr>
+              <a:t>4</a:t>
+            </a:r>
+            <a:endParaRPr lang="en-US" sz="1200" dirty="0"/>
+          </a:p>
+        </p:txBody>
+      </p:sp>
+      <p:sp>
+        <p:nvSpPr>
+          <p:cNvPr id="31" name="Text 29"/>
+          <p:cNvSpPr txBox="1"/>
+          <p:nvPr/>
+        </p:nvSpPr>
+        <p:spPr>
+          <a:xfrm>
+            <a:off x="1014984" y="2446289"/>
+            <a:ext cx="1783080" cy="248502"/>
           </a:xfrm>
           <a:prstGeom prst="rect">
             <a:avLst/>
@@ -3126,14 +3282,14 @@
       </p:sp>
       <p:sp>
         <p:nvSpPr>
-          <p:cNvPr id="28" name="Shape 26"/>
+          <p:cNvPr id="32" name="Shape 30"/>
           <p:cNvSpPr/>
           <p:nvPr/>
         </p:nvSpPr>
         <p:spPr>
           <a:xfrm>
-            <a:off x="2670048" y="2502202"/>
-            <a:ext cx="656778" cy="136676"/>
+            <a:off x="2871216" y="2502202"/>
+            <a:ext cx="558837" cy="136676"/>
           </a:xfrm>
           <a:prstGeom prst="rect">
             <a:avLst/>
@@ -3146,13 +3302,13 @@
       </p:sp>
       <p:sp>
         <p:nvSpPr>
-          <p:cNvPr id="29" name="Text 27"/>
-          <p:cNvSpPr txBox="1"/>
-          <p:nvPr/>
-        </p:nvSpPr>
-        <p:spPr>
-          <a:xfrm>
-            <a:off x="3767328" y="2446289"/>
+          <p:cNvPr id="33" name="Text 31"/>
+          <p:cNvSpPr txBox="1"/>
+          <p:nvPr/>
+        </p:nvSpPr>
+        <p:spPr>
+          <a:xfrm>
+            <a:off x="3813048" y="2446289"/>
             <a:ext cx="786384" cy="248502"/>
           </a:xfrm>
           <a:prstGeom prst="rect">
@@ -3185,13 +3341,13 @@
       </p:sp>
       <p:sp>
         <p:nvSpPr>
-          <p:cNvPr id="30" name="Text 28"/>
-          <p:cNvSpPr txBox="1"/>
-          <p:nvPr/>
-        </p:nvSpPr>
-        <p:spPr>
-          <a:xfrm>
-            <a:off x="4553712" y="2446289"/>
+          <p:cNvPr id="34" name="Text 32"/>
+          <p:cNvSpPr txBox="1"/>
+          <p:nvPr/>
+        </p:nvSpPr>
+        <p:spPr>
+          <a:xfrm>
+            <a:off x="4599432" y="2446289"/>
             <a:ext cx="566928" cy="248502"/>
           </a:xfrm>
           <a:prstGeom prst="rect">
@@ -3224,13 +3380,13 @@
       </p:sp>
       <p:sp>
         <p:nvSpPr>
-          <p:cNvPr id="31" name="Text 29"/>
-          <p:cNvSpPr txBox="1"/>
-          <p:nvPr/>
-        </p:nvSpPr>
-        <p:spPr>
-          <a:xfrm>
-            <a:off x="5120640" y="2446289"/>
+          <p:cNvPr id="35" name="Text 33"/>
+          <p:cNvSpPr txBox="1"/>
+          <p:nvPr/>
+        </p:nvSpPr>
+        <p:spPr>
+          <a:xfrm>
+            <a:off x="5166360" y="2446289"/>
             <a:ext cx="749808" cy="248502"/>
           </a:xfrm>
           <a:prstGeom prst="rect">
@@ -3263,14 +3419,53 @@
       </p:sp>
       <p:sp>
         <p:nvSpPr>
-          <p:cNvPr id="32" name="Text 30"/>
+          <p:cNvPr id="36" name="Text 34"/>
           <p:cNvSpPr txBox="1"/>
           <p:nvPr/>
         </p:nvSpPr>
         <p:spPr>
           <a:xfrm>
             <a:off x="658368" y="2694791"/>
-            <a:ext cx="1938528" cy="248502"/>
+            <a:ext cx="310896" cy="248502"/>
+          </a:xfrm>
+          <a:prstGeom prst="rect">
+            <a:avLst/>
+          </a:prstGeom>
+          <a:noFill/>
+          <a:ln/>
+        </p:spPr>
+        <p:txBody>
+          <a:bodyPr wrap="square" lIns="0" tIns="0" rIns="0" bIns="0" rtlCol="0" anchor="ctr"/>
+          <a:lstStyle/>
+          <a:p>
+            <a:pPr algn="r" indent="0" marL="0">
+              <a:buNone/>
+            </a:pPr>
+            <a:r>
+              <a:rPr lang="en-US" sz="1200" dirty="0">
+                <a:solidFill>
+                  <a:srgbClr val="9AA3AD"/>
+                </a:solidFill>
+                <a:latin typeface="Inter" pitchFamily="34" charset="0"/>
+                <a:ea typeface="Inter" pitchFamily="34" charset="-122"/>
+                <a:cs typeface="Inter" pitchFamily="34" charset="-120"/>
+              </a:rPr>
+              <a:t>5</a:t>
+            </a:r>
+            <a:endParaRPr lang="en-US" sz="1200" dirty="0"/>
+          </a:p>
+        </p:txBody>
+      </p:sp>
+      <p:sp>
+        <p:nvSpPr>
+          <p:cNvPr id="37" name="Text 35"/>
+          <p:cNvSpPr txBox="1"/>
+          <p:nvPr/>
+        </p:nvSpPr>
+        <p:spPr>
+          <a:xfrm>
+            <a:off x="1014984" y="2694791"/>
+            <a:ext cx="1783080" cy="248502"/>
           </a:xfrm>
           <a:prstGeom prst="rect">
             <a:avLst/>
@@ -3302,14 +3497,14 @@
       </p:sp>
       <p:sp>
         <p:nvSpPr>
-          <p:cNvPr id="33" name="Shape 31"/>
+          <p:cNvPr id="38" name="Shape 36"/>
           <p:cNvSpPr/>
           <p:nvPr/>
         </p:nvSpPr>
         <p:spPr>
           <a:xfrm>
-            <a:off x="2670048" y="2750703"/>
-            <a:ext cx="600457" cy="136676"/>
+            <a:off x="2871216" y="2750703"/>
+            <a:ext cx="510915" cy="136676"/>
           </a:xfrm>
           <a:prstGeom prst="rect">
             <a:avLst/>
@@ -3322,13 +3517,13 @@
       </p:sp>
       <p:sp>
         <p:nvSpPr>
-          <p:cNvPr id="34" name="Text 32"/>
-          <p:cNvSpPr txBox="1"/>
-          <p:nvPr/>
-        </p:nvSpPr>
-        <p:spPr>
-          <a:xfrm>
-            <a:off x="3767328" y="2694791"/>
+          <p:cNvPr id="39" name="Text 37"/>
+          <p:cNvSpPr txBox="1"/>
+          <p:nvPr/>
+        </p:nvSpPr>
+        <p:spPr>
+          <a:xfrm>
+            <a:off x="3813048" y="2694791"/>
             <a:ext cx="786384" cy="248502"/>
           </a:xfrm>
           <a:prstGeom prst="rect">
@@ -3361,13 +3556,13 @@
       </p:sp>
       <p:sp>
         <p:nvSpPr>
-          <p:cNvPr id="35" name="Text 33"/>
-          <p:cNvSpPr txBox="1"/>
-          <p:nvPr/>
-        </p:nvSpPr>
-        <p:spPr>
-          <a:xfrm>
-            <a:off x="4553712" y="2694791"/>
+          <p:cNvPr id="40" name="Text 38"/>
+          <p:cNvSpPr txBox="1"/>
+          <p:nvPr/>
+        </p:nvSpPr>
+        <p:spPr>
+          <a:xfrm>
+            <a:off x="4599432" y="2694791"/>
             <a:ext cx="566928" cy="248502"/>
           </a:xfrm>
           <a:prstGeom prst="rect">
@@ -3400,13 +3595,13 @@
       </p:sp>
       <p:sp>
         <p:nvSpPr>
-          <p:cNvPr id="36" name="Text 34"/>
-          <p:cNvSpPr txBox="1"/>
-          <p:nvPr/>
-        </p:nvSpPr>
-        <p:spPr>
-          <a:xfrm>
-            <a:off x="5120640" y="2694791"/>
+          <p:cNvPr id="41" name="Text 39"/>
+          <p:cNvSpPr txBox="1"/>
+          <p:nvPr/>
+        </p:nvSpPr>
+        <p:spPr>
+          <a:xfrm>
+            <a:off x="5166360" y="2694791"/>
             <a:ext cx="749808" cy="248502"/>
           </a:xfrm>
           <a:prstGeom prst="rect">
@@ -3439,14 +3634,53 @@
       </p:sp>
       <p:sp>
         <p:nvSpPr>
-          <p:cNvPr id="37" name="Text 35"/>
+          <p:cNvPr id="42" name="Text 40"/>
           <p:cNvSpPr txBox="1"/>
           <p:nvPr/>
         </p:nvSpPr>
         <p:spPr>
           <a:xfrm>
             <a:off x="658368" y="2943292"/>
-            <a:ext cx="1938528" cy="248502"/>
+            <a:ext cx="310896" cy="248502"/>
+          </a:xfrm>
+          <a:prstGeom prst="rect">
+            <a:avLst/>
+          </a:prstGeom>
+          <a:noFill/>
+          <a:ln/>
+        </p:spPr>
+        <p:txBody>
+          <a:bodyPr wrap="square" lIns="0" tIns="0" rIns="0" bIns="0" rtlCol="0" anchor="ctr"/>
+          <a:lstStyle/>
+          <a:p>
+            <a:pPr algn="r" indent="0" marL="0">
+              <a:buNone/>
+            </a:pPr>
+            <a:r>
+              <a:rPr lang="en-US" sz="1200" dirty="0">
+                <a:solidFill>
+                  <a:srgbClr val="9AA3AD"/>
+                </a:solidFill>
+                <a:latin typeface="Inter" pitchFamily="34" charset="0"/>
+                <a:ea typeface="Inter" pitchFamily="34" charset="-122"/>
+                <a:cs typeface="Inter" pitchFamily="34" charset="-120"/>
+              </a:rPr>
+              <a:t>6</a:t>
+            </a:r>
+            <a:endParaRPr lang="en-US" sz="1200" dirty="0"/>
+          </a:p>
+        </p:txBody>
+      </p:sp>
+      <p:sp>
+        <p:nvSpPr>
+          <p:cNvPr id="43" name="Text 41"/>
+          <p:cNvSpPr txBox="1"/>
+          <p:nvPr/>
+        </p:nvSpPr>
+        <p:spPr>
+          <a:xfrm>
+            <a:off x="1014984" y="2943292"/>
+            <a:ext cx="1783080" cy="248502"/>
           </a:xfrm>
           <a:prstGeom prst="rect">
             <a:avLst/>
@@ -3478,14 +3712,14 @@
       </p:sp>
       <p:sp>
         <p:nvSpPr>
-          <p:cNvPr id="38" name="Shape 36"/>
+          <p:cNvPr id="44" name="Shape 42"/>
           <p:cNvSpPr/>
           <p:nvPr/>
         </p:nvSpPr>
         <p:spPr>
           <a:xfrm>
-            <a:off x="2670048" y="2999205"/>
-            <a:ext cx="548891" cy="136676"/>
+            <a:off x="2871216" y="2999205"/>
+            <a:ext cx="467039" cy="136676"/>
           </a:xfrm>
           <a:prstGeom prst="rect">
             <a:avLst/>
@@ -3498,13 +3732,13 @@
       </p:sp>
       <p:sp>
         <p:nvSpPr>
-          <p:cNvPr id="39" name="Text 37"/>
-          <p:cNvSpPr txBox="1"/>
-          <p:nvPr/>
-        </p:nvSpPr>
-        <p:spPr>
-          <a:xfrm>
-            <a:off x="3767328" y="2943292"/>
+          <p:cNvPr id="45" name="Text 43"/>
+          <p:cNvSpPr txBox="1"/>
+          <p:nvPr/>
+        </p:nvSpPr>
+        <p:spPr>
+          <a:xfrm>
+            <a:off x="3813048" y="2943292"/>
             <a:ext cx="786384" cy="248502"/>
           </a:xfrm>
           <a:prstGeom prst="rect">
@@ -3537,13 +3771,13 @@
       </p:sp>
       <p:sp>
         <p:nvSpPr>
-          <p:cNvPr id="40" name="Text 38"/>
-          <p:cNvSpPr txBox="1"/>
-          <p:nvPr/>
-        </p:nvSpPr>
-        <p:spPr>
-          <a:xfrm>
-            <a:off x="4553712" y="2943292"/>
+          <p:cNvPr id="46" name="Text 44"/>
+          <p:cNvSpPr txBox="1"/>
+          <p:nvPr/>
+        </p:nvSpPr>
+        <p:spPr>
+          <a:xfrm>
+            <a:off x="4599432" y="2943292"/>
             <a:ext cx="566928" cy="248502"/>
           </a:xfrm>
           <a:prstGeom prst="rect">
@@ -3576,13 +3810,13 @@
       </p:sp>
       <p:sp>
         <p:nvSpPr>
-          <p:cNvPr id="41" name="Text 39"/>
-          <p:cNvSpPr txBox="1"/>
-          <p:nvPr/>
-        </p:nvSpPr>
-        <p:spPr>
-          <a:xfrm>
-            <a:off x="5120640" y="2943292"/>
+          <p:cNvPr id="47" name="Text 45"/>
+          <p:cNvSpPr txBox="1"/>
+          <p:nvPr/>
+        </p:nvSpPr>
+        <p:spPr>
+          <a:xfrm>
+            <a:off x="5166360" y="2943292"/>
             <a:ext cx="749808" cy="248502"/>
           </a:xfrm>
           <a:prstGeom prst="rect">
@@ -3615,14 +3849,53 @@
       </p:sp>
       <p:sp>
         <p:nvSpPr>
-          <p:cNvPr id="42" name="Text 40"/>
+          <p:cNvPr id="48" name="Text 46"/>
           <p:cNvSpPr txBox="1"/>
           <p:nvPr/>
         </p:nvSpPr>
         <p:spPr>
           <a:xfrm>
             <a:off x="658368" y="3191794"/>
-            <a:ext cx="1938528" cy="248502"/>
+            <a:ext cx="310896" cy="248502"/>
+          </a:xfrm>
+          <a:prstGeom prst="rect">
+            <a:avLst/>
+          </a:prstGeom>
+          <a:noFill/>
+          <a:ln/>
+        </p:spPr>
+        <p:txBody>
+          <a:bodyPr wrap="square" lIns="0" tIns="0" rIns="0" bIns="0" rtlCol="0" anchor="ctr"/>
+          <a:lstStyle/>
+          <a:p>
+            <a:pPr algn="r" indent="0" marL="0">
+              <a:buNone/>
+            </a:pPr>
+            <a:r>
+              <a:rPr lang="en-US" sz="1200" dirty="0">
+                <a:solidFill>
+                  <a:srgbClr val="9AA3AD"/>
+                </a:solidFill>
+                <a:latin typeface="Inter" pitchFamily="34" charset="0"/>
+                <a:ea typeface="Inter" pitchFamily="34" charset="-122"/>
+                <a:cs typeface="Inter" pitchFamily="34" charset="-120"/>
+              </a:rPr>
+              <a:t>7</a:t>
+            </a:r>
+            <a:endParaRPr lang="en-US" sz="1200" dirty="0"/>
+          </a:p>
+        </p:txBody>
+      </p:sp>
+      <p:sp>
+        <p:nvSpPr>
+          <p:cNvPr id="49" name="Text 47"/>
+          <p:cNvSpPr txBox="1"/>
+          <p:nvPr/>
+        </p:nvSpPr>
+        <p:spPr>
+          <a:xfrm>
+            <a:off x="1014984" y="3191794"/>
+            <a:ext cx="1783080" cy="248502"/>
           </a:xfrm>
           <a:prstGeom prst="rect">
             <a:avLst/>
@@ -3654,14 +3927,14 @@
       </p:sp>
       <p:sp>
         <p:nvSpPr>
-          <p:cNvPr id="43" name="Shape 41"/>
+          <p:cNvPr id="50" name="Shape 48"/>
           <p:cNvSpPr/>
           <p:nvPr/>
         </p:nvSpPr>
         <p:spPr>
           <a:xfrm>
-            <a:off x="2670048" y="3247707"/>
-            <a:ext cx="393176" cy="136676"/>
+            <a:off x="2871216" y="3247707"/>
+            <a:ext cx="334545" cy="136676"/>
           </a:xfrm>
           <a:prstGeom prst="rect">
             <a:avLst/>
@@ -3674,13 +3947,13 @@
       </p:sp>
       <p:sp>
         <p:nvSpPr>
-          <p:cNvPr id="44" name="Text 42"/>
-          <p:cNvSpPr txBox="1"/>
-          <p:nvPr/>
-        </p:nvSpPr>
-        <p:spPr>
-          <a:xfrm>
-            <a:off x="3767328" y="3191794"/>
+          <p:cNvPr id="51" name="Text 49"/>
+          <p:cNvSpPr txBox="1"/>
+          <p:nvPr/>
+        </p:nvSpPr>
+        <p:spPr>
+          <a:xfrm>
+            <a:off x="3813048" y="3191794"/>
             <a:ext cx="786384" cy="248502"/>
           </a:xfrm>
           <a:prstGeom prst="rect">
@@ -3713,13 +3986,13 @@
       </p:sp>
       <p:sp>
         <p:nvSpPr>
-          <p:cNvPr id="45" name="Text 43"/>
-          <p:cNvSpPr txBox="1"/>
-          <p:nvPr/>
-        </p:nvSpPr>
-        <p:spPr>
-          <a:xfrm>
-            <a:off x="4553712" y="3191794"/>
+          <p:cNvPr id="52" name="Text 50"/>
+          <p:cNvSpPr txBox="1"/>
+          <p:nvPr/>
+        </p:nvSpPr>
+        <p:spPr>
+          <a:xfrm>
+            <a:off x="4599432" y="3191794"/>
             <a:ext cx="566928" cy="248502"/>
           </a:xfrm>
           <a:prstGeom prst="rect">
@@ -3752,13 +4025,13 @@
       </p:sp>
       <p:sp>
         <p:nvSpPr>
-          <p:cNvPr id="46" name="Text 44"/>
-          <p:cNvSpPr txBox="1"/>
-          <p:nvPr/>
-        </p:nvSpPr>
-        <p:spPr>
-          <a:xfrm>
-            <a:off x="5120640" y="3191794"/>
+          <p:cNvPr id="53" name="Text 51"/>
+          <p:cNvSpPr txBox="1"/>
+          <p:nvPr/>
+        </p:nvSpPr>
+        <p:spPr>
+          <a:xfrm>
+            <a:off x="5166360" y="3191794"/>
             <a:ext cx="749808" cy="248502"/>
           </a:xfrm>
           <a:prstGeom prst="rect">
@@ -3791,14 +4064,53 @@
       </p:sp>
       <p:sp>
         <p:nvSpPr>
-          <p:cNvPr id="47" name="Text 45"/>
+          <p:cNvPr id="54" name="Text 52"/>
           <p:cNvSpPr txBox="1"/>
           <p:nvPr/>
         </p:nvSpPr>
         <p:spPr>
           <a:xfrm>
             <a:off x="658368" y="3440296"/>
-            <a:ext cx="1938528" cy="248502"/>
+            <a:ext cx="310896" cy="248502"/>
+          </a:xfrm>
+          <a:prstGeom prst="rect">
+            <a:avLst/>
+          </a:prstGeom>
+          <a:noFill/>
+          <a:ln/>
+        </p:spPr>
+        <p:txBody>
+          <a:bodyPr wrap="square" lIns="0" tIns="0" rIns="0" bIns="0" rtlCol="0" anchor="ctr"/>
+          <a:lstStyle/>
+          <a:p>
+            <a:pPr algn="r" indent="0" marL="0">
+              <a:buNone/>
+            </a:pPr>
+            <a:r>
+              <a:rPr lang="en-US" sz="1200" dirty="0">
+                <a:solidFill>
+                  <a:srgbClr val="9AA3AD"/>
+                </a:solidFill>
+                <a:latin typeface="Inter" pitchFamily="34" charset="0"/>
+                <a:ea typeface="Inter" pitchFamily="34" charset="-122"/>
+                <a:cs typeface="Inter" pitchFamily="34" charset="-120"/>
+              </a:rPr>
+              <a:t>8</a:t>
+            </a:r>
+            <a:endParaRPr lang="en-US" sz="1200" dirty="0"/>
+          </a:p>
+        </p:txBody>
+      </p:sp>
+      <p:sp>
+        <p:nvSpPr>
+          <p:cNvPr id="55" name="Text 53"/>
+          <p:cNvSpPr txBox="1"/>
+          <p:nvPr/>
+        </p:nvSpPr>
+        <p:spPr>
+          <a:xfrm>
+            <a:off x="1014984" y="3440296"/>
+            <a:ext cx="1783080" cy="248502"/>
           </a:xfrm>
           <a:prstGeom prst="rect">
             <a:avLst/>
@@ -3830,14 +4142,14 @@
       </p:sp>
       <p:sp>
         <p:nvSpPr>
-          <p:cNvPr id="48" name="Shape 46"/>
+          <p:cNvPr id="56" name="Shape 54"/>
           <p:cNvSpPr/>
           <p:nvPr/>
         </p:nvSpPr>
         <p:spPr>
           <a:xfrm>
-            <a:off x="2670048" y="3496208"/>
-            <a:ext cx="391366" cy="136676"/>
+            <a:off x="2871216" y="3496208"/>
+            <a:ext cx="333005" cy="136676"/>
           </a:xfrm>
           <a:prstGeom prst="rect">
             <a:avLst/>
@@ -3850,13 +4162,13 @@
       </p:sp>
       <p:sp>
         <p:nvSpPr>
-          <p:cNvPr id="49" name="Text 47"/>
-          <p:cNvSpPr txBox="1"/>
-          <p:nvPr/>
-        </p:nvSpPr>
-        <p:spPr>
-          <a:xfrm>
-            <a:off x="3767328" y="3440296"/>
+          <p:cNvPr id="57" name="Text 55"/>
+          <p:cNvSpPr txBox="1"/>
+          <p:nvPr/>
+        </p:nvSpPr>
+        <p:spPr>
+          <a:xfrm>
+            <a:off x="3813048" y="3440296"/>
             <a:ext cx="786384" cy="248502"/>
           </a:xfrm>
           <a:prstGeom prst="rect">
@@ -3889,13 +4201,13 @@
       </p:sp>
       <p:sp>
         <p:nvSpPr>
-          <p:cNvPr id="50" name="Text 48"/>
-          <p:cNvSpPr txBox="1"/>
-          <p:nvPr/>
-        </p:nvSpPr>
-        <p:spPr>
-          <a:xfrm>
-            <a:off x="4553712" y="3440296"/>
+          <p:cNvPr id="58" name="Text 56"/>
+          <p:cNvSpPr txBox="1"/>
+          <p:nvPr/>
+        </p:nvSpPr>
+        <p:spPr>
+          <a:xfrm>
+            <a:off x="4599432" y="3440296"/>
             <a:ext cx="566928" cy="248502"/>
           </a:xfrm>
           <a:prstGeom prst="rect">
@@ -3928,13 +4240,13 @@
       </p:sp>
       <p:sp>
         <p:nvSpPr>
-          <p:cNvPr id="51" name="Text 49"/>
-          <p:cNvSpPr txBox="1"/>
-          <p:nvPr/>
-        </p:nvSpPr>
-        <p:spPr>
-          <a:xfrm>
-            <a:off x="5120640" y="3440296"/>
+          <p:cNvPr id="59" name="Text 57"/>
+          <p:cNvSpPr txBox="1"/>
+          <p:nvPr/>
+        </p:nvSpPr>
+        <p:spPr>
+          <a:xfrm>
+            <a:off x="5166360" y="3440296"/>
             <a:ext cx="749808" cy="248502"/>
           </a:xfrm>
           <a:prstGeom prst="rect">
@@ -3967,14 +4279,53 @@
       </p:sp>
       <p:sp>
         <p:nvSpPr>
-          <p:cNvPr id="52" name="Text 50"/>
+          <p:cNvPr id="60" name="Text 58"/>
           <p:cNvSpPr txBox="1"/>
           <p:nvPr/>
         </p:nvSpPr>
         <p:spPr>
           <a:xfrm>
             <a:off x="658368" y="3688797"/>
-            <a:ext cx="1938528" cy="248502"/>
+            <a:ext cx="310896" cy="248502"/>
+          </a:xfrm>
+          <a:prstGeom prst="rect">
+            <a:avLst/>
+          </a:prstGeom>
+          <a:noFill/>
+          <a:ln/>
+        </p:spPr>
+        <p:txBody>
+          <a:bodyPr wrap="square" lIns="0" tIns="0" rIns="0" bIns="0" rtlCol="0" anchor="ctr"/>
+          <a:lstStyle/>
+          <a:p>
+            <a:pPr algn="r" indent="0" marL="0">
+              <a:buNone/>
+            </a:pPr>
+            <a:r>
+              <a:rPr lang="en-US" sz="1200" dirty="0">
+                <a:solidFill>
+                  <a:srgbClr val="9AA3AD"/>
+                </a:solidFill>
+                <a:latin typeface="Inter" pitchFamily="34" charset="0"/>
+                <a:ea typeface="Inter" pitchFamily="34" charset="-122"/>
+                <a:cs typeface="Inter" pitchFamily="34" charset="-120"/>
+              </a:rPr>
+              <a:t>9</a:t>
+            </a:r>
+            <a:endParaRPr lang="en-US" sz="1200" dirty="0"/>
+          </a:p>
+        </p:txBody>
+      </p:sp>
+      <p:sp>
+        <p:nvSpPr>
+          <p:cNvPr id="61" name="Text 59"/>
+          <p:cNvSpPr txBox="1"/>
+          <p:nvPr/>
+        </p:nvSpPr>
+        <p:spPr>
+          <a:xfrm>
+            <a:off x="1014984" y="3688797"/>
+            <a:ext cx="1783080" cy="248502"/>
           </a:xfrm>
           <a:prstGeom prst="rect">
             <a:avLst/>
@@ -4006,14 +4357,14 @@
       </p:sp>
       <p:sp>
         <p:nvSpPr>
-          <p:cNvPr id="53" name="Shape 51"/>
+          <p:cNvPr id="62" name="Shape 60"/>
           <p:cNvSpPr/>
           <p:nvPr/>
         </p:nvSpPr>
         <p:spPr>
           <a:xfrm>
-            <a:off x="2670048" y="3744710"/>
-            <a:ext cx="367379" cy="136676"/>
+            <a:off x="2871216" y="3744710"/>
+            <a:ext cx="312594" cy="136676"/>
           </a:xfrm>
           <a:prstGeom prst="rect">
             <a:avLst/>
@@ -4026,13 +4377,13 @@
       </p:sp>
       <p:sp>
         <p:nvSpPr>
-          <p:cNvPr id="54" name="Text 52"/>
-          <p:cNvSpPr txBox="1"/>
-          <p:nvPr/>
-        </p:nvSpPr>
-        <p:spPr>
-          <a:xfrm>
-            <a:off x="3767328" y="3688797"/>
+          <p:cNvPr id="63" name="Text 61"/>
+          <p:cNvSpPr txBox="1"/>
+          <p:nvPr/>
+        </p:nvSpPr>
+        <p:spPr>
+          <a:xfrm>
+            <a:off x="3813048" y="3688797"/>
             <a:ext cx="786384" cy="248502"/>
           </a:xfrm>
           <a:prstGeom prst="rect">
@@ -4065,13 +4416,13 @@
       </p:sp>
       <p:sp>
         <p:nvSpPr>
-          <p:cNvPr id="55" name="Text 53"/>
-          <p:cNvSpPr txBox="1"/>
-          <p:nvPr/>
-        </p:nvSpPr>
-        <p:spPr>
-          <a:xfrm>
-            <a:off x="4553712" y="3688797"/>
+          <p:cNvPr id="64" name="Text 62"/>
+          <p:cNvSpPr txBox="1"/>
+          <p:nvPr/>
+        </p:nvSpPr>
+        <p:spPr>
+          <a:xfrm>
+            <a:off x="4599432" y="3688797"/>
             <a:ext cx="566928" cy="248502"/>
           </a:xfrm>
           <a:prstGeom prst="rect">
@@ -4104,13 +4455,13 @@
       </p:sp>
       <p:sp>
         <p:nvSpPr>
-          <p:cNvPr id="56" name="Text 54"/>
-          <p:cNvSpPr txBox="1"/>
-          <p:nvPr/>
-        </p:nvSpPr>
-        <p:spPr>
-          <a:xfrm>
-            <a:off x="5120640" y="3688797"/>
+          <p:cNvPr id="65" name="Text 63"/>
+          <p:cNvSpPr txBox="1"/>
+          <p:nvPr/>
+        </p:nvSpPr>
+        <p:spPr>
+          <a:xfrm>
+            <a:off x="5166360" y="3688797"/>
             <a:ext cx="749808" cy="248502"/>
           </a:xfrm>
           <a:prstGeom prst="rect">
@@ -4143,14 +4494,53 @@
       </p:sp>
       <p:sp>
         <p:nvSpPr>
-          <p:cNvPr id="57" name="Text 55"/>
+          <p:cNvPr id="66" name="Text 64"/>
           <p:cNvSpPr txBox="1"/>
           <p:nvPr/>
         </p:nvSpPr>
         <p:spPr>
           <a:xfrm>
             <a:off x="658368" y="3937299"/>
-            <a:ext cx="1938528" cy="248502"/>
+            <a:ext cx="310896" cy="248502"/>
+          </a:xfrm>
+          <a:prstGeom prst="rect">
+            <a:avLst/>
+          </a:prstGeom>
+          <a:noFill/>
+          <a:ln/>
+        </p:spPr>
+        <p:txBody>
+          <a:bodyPr wrap="square" lIns="0" tIns="0" rIns="0" bIns="0" rtlCol="0" anchor="ctr"/>
+          <a:lstStyle/>
+          <a:p>
+            <a:pPr algn="r" indent="0" marL="0">
+              <a:buNone/>
+            </a:pPr>
+            <a:r>
+              <a:rPr lang="en-US" sz="1200" dirty="0">
+                <a:solidFill>
+                  <a:srgbClr val="9AA3AD"/>
+                </a:solidFill>
+                <a:latin typeface="Inter" pitchFamily="34" charset="0"/>
+                <a:ea typeface="Inter" pitchFamily="34" charset="-122"/>
+                <a:cs typeface="Inter" pitchFamily="34" charset="-120"/>
+              </a:rPr>
+              <a:t>10</a:t>
+            </a:r>
+            <a:endParaRPr lang="en-US" sz="1200" dirty="0"/>
+          </a:p>
+        </p:txBody>
+      </p:sp>
+      <p:sp>
+        <p:nvSpPr>
+          <p:cNvPr id="67" name="Text 65"/>
+          <p:cNvSpPr txBox="1"/>
+          <p:nvPr/>
+        </p:nvSpPr>
+        <p:spPr>
+          <a:xfrm>
+            <a:off x="1014984" y="3937299"/>
+            <a:ext cx="1783080" cy="248502"/>
           </a:xfrm>
           <a:prstGeom prst="rect">
             <a:avLst/>
@@ -4182,14 +4572,14 @@
       </p:sp>
       <p:sp>
         <p:nvSpPr>
-          <p:cNvPr id="58" name="Shape 56"/>
+          <p:cNvPr id="68" name="Shape 66"/>
           <p:cNvSpPr/>
           <p:nvPr/>
         </p:nvSpPr>
         <p:spPr>
           <a:xfrm>
-            <a:off x="2670048" y="3993212"/>
-            <a:ext cx="355248" cy="136676"/>
+            <a:off x="2871216" y="3993212"/>
+            <a:ext cx="302272" cy="136676"/>
           </a:xfrm>
           <a:prstGeom prst="rect">
             <a:avLst/>
@@ -4202,13 +4592,13 @@
       </p:sp>
       <p:sp>
         <p:nvSpPr>
-          <p:cNvPr id="59" name="Text 57"/>
-          <p:cNvSpPr txBox="1"/>
-          <p:nvPr/>
-        </p:nvSpPr>
-        <p:spPr>
-          <a:xfrm>
-            <a:off x="3767328" y="3937299"/>
+          <p:cNvPr id="69" name="Text 67"/>
+          <p:cNvSpPr txBox="1"/>
+          <p:nvPr/>
+        </p:nvSpPr>
+        <p:spPr>
+          <a:xfrm>
+            <a:off x="3813048" y="3937299"/>
             <a:ext cx="786384" cy="248502"/>
           </a:xfrm>
           <a:prstGeom prst="rect">
@@ -4241,13 +4631,13 @@
       </p:sp>
       <p:sp>
         <p:nvSpPr>
-          <p:cNvPr id="60" name="Text 58"/>
-          <p:cNvSpPr txBox="1"/>
-          <p:nvPr/>
-        </p:nvSpPr>
-        <p:spPr>
-          <a:xfrm>
-            <a:off x="4553712" y="3937299"/>
+          <p:cNvPr id="70" name="Text 68"/>
+          <p:cNvSpPr txBox="1"/>
+          <p:nvPr/>
+        </p:nvSpPr>
+        <p:spPr>
+          <a:xfrm>
+            <a:off x="4599432" y="3937299"/>
             <a:ext cx="566928" cy="248502"/>
           </a:xfrm>
           <a:prstGeom prst="rect">
@@ -4280,13 +4670,13 @@
       </p:sp>
       <p:sp>
         <p:nvSpPr>
-          <p:cNvPr id="61" name="Text 59"/>
-          <p:cNvSpPr txBox="1"/>
-          <p:nvPr/>
-        </p:nvSpPr>
-        <p:spPr>
-          <a:xfrm>
-            <a:off x="5120640" y="3937299"/>
+          <p:cNvPr id="71" name="Text 69"/>
+          <p:cNvSpPr txBox="1"/>
+          <p:nvPr/>
+        </p:nvSpPr>
+        <p:spPr>
+          <a:xfrm>
+            <a:off x="5166360" y="3937299"/>
             <a:ext cx="749808" cy="248502"/>
           </a:xfrm>
           <a:prstGeom prst="rect">
@@ -4319,14 +4709,53 @@
       </p:sp>
       <p:sp>
         <p:nvSpPr>
-          <p:cNvPr id="62" name="Text 60"/>
+          <p:cNvPr id="72" name="Text 70"/>
           <p:cNvSpPr txBox="1"/>
           <p:nvPr/>
         </p:nvSpPr>
         <p:spPr>
           <a:xfrm>
             <a:off x="658368" y="4185800"/>
-            <a:ext cx="1938528" cy="248502"/>
+            <a:ext cx="310896" cy="248502"/>
+          </a:xfrm>
+          <a:prstGeom prst="rect">
+            <a:avLst/>
+          </a:prstGeom>
+          <a:noFill/>
+          <a:ln/>
+        </p:spPr>
+        <p:txBody>
+          <a:bodyPr wrap="square" lIns="0" tIns="0" rIns="0" bIns="0" rtlCol="0" anchor="ctr"/>
+          <a:lstStyle/>
+          <a:p>
+            <a:pPr algn="r" indent="0" marL="0">
+              <a:buNone/>
+            </a:pPr>
+            <a:r>
+              <a:rPr lang="en-US" sz="1200" dirty="0">
+                <a:solidFill>
+                  <a:srgbClr val="9AA3AD"/>
+                </a:solidFill>
+                <a:latin typeface="Inter" pitchFamily="34" charset="0"/>
+                <a:ea typeface="Inter" pitchFamily="34" charset="-122"/>
+                <a:cs typeface="Inter" pitchFamily="34" charset="-120"/>
+              </a:rPr>
+              <a:t>11</a:t>
+            </a:r>
+            <a:endParaRPr lang="en-US" sz="1200" dirty="0"/>
+          </a:p>
+        </p:txBody>
+      </p:sp>
+      <p:sp>
+        <p:nvSpPr>
+          <p:cNvPr id="73" name="Text 71"/>
+          <p:cNvSpPr txBox="1"/>
+          <p:nvPr/>
+        </p:nvSpPr>
+        <p:spPr>
+          <a:xfrm>
+            <a:off x="1014984" y="4185800"/>
+            <a:ext cx="1783080" cy="248502"/>
           </a:xfrm>
           <a:prstGeom prst="rect">
             <a:avLst/>
@@ -4358,14 +4787,14 @@
       </p:sp>
       <p:sp>
         <p:nvSpPr>
-          <p:cNvPr id="63" name="Shape 61"/>
+          <p:cNvPr id="74" name="Shape 72"/>
           <p:cNvSpPr/>
           <p:nvPr/>
         </p:nvSpPr>
         <p:spPr>
           <a:xfrm>
-            <a:off x="2670048" y="4241713"/>
-            <a:ext cx="338665" cy="136676"/>
+            <a:off x="2871216" y="4241713"/>
+            <a:ext cx="288162" cy="136676"/>
           </a:xfrm>
           <a:prstGeom prst="rect">
             <a:avLst/>
@@ -4378,13 +4807,13 @@
       </p:sp>
       <p:sp>
         <p:nvSpPr>
-          <p:cNvPr id="64" name="Text 62"/>
-          <p:cNvSpPr txBox="1"/>
-          <p:nvPr/>
-        </p:nvSpPr>
-        <p:spPr>
-          <a:xfrm>
-            <a:off x="3767328" y="4185800"/>
+          <p:cNvPr id="75" name="Text 73"/>
+          <p:cNvSpPr txBox="1"/>
+          <p:nvPr/>
+        </p:nvSpPr>
+        <p:spPr>
+          <a:xfrm>
+            <a:off x="3813048" y="4185800"/>
             <a:ext cx="786384" cy="248502"/>
           </a:xfrm>
           <a:prstGeom prst="rect">
@@ -4417,13 +4846,13 @@
       </p:sp>
       <p:sp>
         <p:nvSpPr>
-          <p:cNvPr id="65" name="Text 63"/>
-          <p:cNvSpPr txBox="1"/>
-          <p:nvPr/>
-        </p:nvSpPr>
-        <p:spPr>
-          <a:xfrm>
-            <a:off x="4553712" y="4185800"/>
+          <p:cNvPr id="76" name="Text 74"/>
+          <p:cNvSpPr txBox="1"/>
+          <p:nvPr/>
+        </p:nvSpPr>
+        <p:spPr>
+          <a:xfrm>
+            <a:off x="4599432" y="4185800"/>
             <a:ext cx="566928" cy="248502"/>
           </a:xfrm>
           <a:prstGeom prst="rect">
@@ -4456,13 +4885,13 @@
       </p:sp>
       <p:sp>
         <p:nvSpPr>
-          <p:cNvPr id="66" name="Text 64"/>
-          <p:cNvSpPr txBox="1"/>
-          <p:nvPr/>
-        </p:nvSpPr>
-        <p:spPr>
-          <a:xfrm>
-            <a:off x="5120640" y="4185800"/>
+          <p:cNvPr id="77" name="Text 75"/>
+          <p:cNvSpPr txBox="1"/>
+          <p:nvPr/>
+        </p:nvSpPr>
+        <p:spPr>
+          <a:xfrm>
+            <a:off x="5166360" y="4185800"/>
             <a:ext cx="749808" cy="248502"/>
           </a:xfrm>
           <a:prstGeom prst="rect">
@@ -4495,14 +4924,53 @@
       </p:sp>
       <p:sp>
         <p:nvSpPr>
-          <p:cNvPr id="67" name="Text 65"/>
+          <p:cNvPr id="78" name="Text 76"/>
           <p:cNvSpPr txBox="1"/>
           <p:nvPr/>
         </p:nvSpPr>
         <p:spPr>
           <a:xfrm>
             <a:off x="658368" y="4434302"/>
-            <a:ext cx="1938528" cy="248502"/>
+            <a:ext cx="310896" cy="248502"/>
+          </a:xfrm>
+          <a:prstGeom prst="rect">
+            <a:avLst/>
+          </a:prstGeom>
+          <a:noFill/>
+          <a:ln/>
+        </p:spPr>
+        <p:txBody>
+          <a:bodyPr wrap="square" lIns="0" tIns="0" rIns="0" bIns="0" rtlCol="0" anchor="ctr"/>
+          <a:lstStyle/>
+          <a:p>
+            <a:pPr algn="r" indent="0" marL="0">
+              <a:buNone/>
+            </a:pPr>
+            <a:r>
+              <a:rPr lang="en-US" sz="1200" dirty="0">
+                <a:solidFill>
+                  <a:srgbClr val="9AA3AD"/>
+                </a:solidFill>
+                <a:latin typeface="Inter" pitchFamily="34" charset="0"/>
+                <a:ea typeface="Inter" pitchFamily="34" charset="-122"/>
+                <a:cs typeface="Inter" pitchFamily="34" charset="-120"/>
+              </a:rPr>
+              <a:t>12</a:t>
+            </a:r>
+            <a:endParaRPr lang="en-US" sz="1200" dirty="0"/>
+          </a:p>
+        </p:txBody>
+      </p:sp>
+      <p:sp>
+        <p:nvSpPr>
+          <p:cNvPr id="79" name="Text 77"/>
+          <p:cNvSpPr txBox="1"/>
+          <p:nvPr/>
+        </p:nvSpPr>
+        <p:spPr>
+          <a:xfrm>
+            <a:off x="1014984" y="4434302"/>
+            <a:ext cx="1783080" cy="248502"/>
           </a:xfrm>
           <a:prstGeom prst="rect">
             <a:avLst/>
@@ -4534,14 +5002,14 @@
       </p:sp>
       <p:sp>
         <p:nvSpPr>
-          <p:cNvPr id="68" name="Shape 66"/>
+          <p:cNvPr id="80" name="Shape 78"/>
           <p:cNvSpPr/>
           <p:nvPr/>
         </p:nvSpPr>
         <p:spPr>
           <a:xfrm>
-            <a:off x="2670048" y="4490215"/>
-            <a:ext cx="305679" cy="136676"/>
+            <a:off x="2871216" y="4490215"/>
+            <a:ext cx="260095" cy="136676"/>
           </a:xfrm>
           <a:prstGeom prst="rect">
             <a:avLst/>
@@ -4554,13 +5022,13 @@
       </p:sp>
       <p:sp>
         <p:nvSpPr>
-          <p:cNvPr id="69" name="Text 67"/>
-          <p:cNvSpPr txBox="1"/>
-          <p:nvPr/>
-        </p:nvSpPr>
-        <p:spPr>
-          <a:xfrm>
-            <a:off x="3767328" y="4434302"/>
+          <p:cNvPr id="81" name="Text 79"/>
+          <p:cNvSpPr txBox="1"/>
+          <p:nvPr/>
+        </p:nvSpPr>
+        <p:spPr>
+          <a:xfrm>
+            <a:off x="3813048" y="4434302"/>
             <a:ext cx="786384" cy="248502"/>
           </a:xfrm>
           <a:prstGeom prst="rect">
@@ -4593,13 +5061,13 @@
       </p:sp>
       <p:sp>
         <p:nvSpPr>
-          <p:cNvPr id="70" name="Text 68"/>
-          <p:cNvSpPr txBox="1"/>
-          <p:nvPr/>
-        </p:nvSpPr>
-        <p:spPr>
-          <a:xfrm>
-            <a:off x="4553712" y="4434302"/>
+          <p:cNvPr id="82" name="Text 80"/>
+          <p:cNvSpPr txBox="1"/>
+          <p:nvPr/>
+        </p:nvSpPr>
+        <p:spPr>
+          <a:xfrm>
+            <a:off x="4599432" y="4434302"/>
             <a:ext cx="566928" cy="248502"/>
           </a:xfrm>
           <a:prstGeom prst="rect">
@@ -4632,13 +5100,13 @@
       </p:sp>
       <p:sp>
         <p:nvSpPr>
-          <p:cNvPr id="71" name="Text 69"/>
-          <p:cNvSpPr txBox="1"/>
-          <p:nvPr/>
-        </p:nvSpPr>
-        <p:spPr>
-          <a:xfrm>
-            <a:off x="5120640" y="4434302"/>
+          <p:cNvPr id="83" name="Text 81"/>
+          <p:cNvSpPr txBox="1"/>
+          <p:nvPr/>
+        </p:nvSpPr>
+        <p:spPr>
+          <a:xfrm>
+            <a:off x="5166360" y="4434302"/>
             <a:ext cx="749808" cy="248502"/>
           </a:xfrm>
           <a:prstGeom prst="rect">
@@ -4671,14 +5139,53 @@
       </p:sp>
       <p:sp>
         <p:nvSpPr>
-          <p:cNvPr id="72" name="Text 70"/>
+          <p:cNvPr id="84" name="Text 82"/>
           <p:cNvSpPr txBox="1"/>
           <p:nvPr/>
         </p:nvSpPr>
         <p:spPr>
           <a:xfrm>
             <a:off x="658368" y="4682804"/>
-            <a:ext cx="1938528" cy="248502"/>
+            <a:ext cx="310896" cy="248502"/>
+          </a:xfrm>
+          <a:prstGeom prst="rect">
+            <a:avLst/>
+          </a:prstGeom>
+          <a:noFill/>
+          <a:ln/>
+        </p:spPr>
+        <p:txBody>
+          <a:bodyPr wrap="square" lIns="0" tIns="0" rIns="0" bIns="0" rtlCol="0" anchor="ctr"/>
+          <a:lstStyle/>
+          <a:p>
+            <a:pPr algn="r" indent="0" marL="0">
+              <a:buNone/>
+            </a:pPr>
+            <a:r>
+              <a:rPr lang="en-US" sz="1200" dirty="0">
+                <a:solidFill>
+                  <a:srgbClr val="9AA3AD"/>
+                </a:solidFill>
+                <a:latin typeface="Inter" pitchFamily="34" charset="0"/>
+                <a:ea typeface="Inter" pitchFamily="34" charset="-122"/>
+                <a:cs typeface="Inter" pitchFamily="34" charset="-120"/>
+              </a:rPr>
+              <a:t>13</a:t>
+            </a:r>
+            <a:endParaRPr lang="en-US" sz="1200" dirty="0"/>
+          </a:p>
+        </p:txBody>
+      </p:sp>
+      <p:sp>
+        <p:nvSpPr>
+          <p:cNvPr id="85" name="Text 83"/>
+          <p:cNvSpPr txBox="1"/>
+          <p:nvPr/>
+        </p:nvSpPr>
+        <p:spPr>
+          <a:xfrm>
+            <a:off x="1014984" y="4682804"/>
+            <a:ext cx="1783080" cy="248502"/>
           </a:xfrm>
           <a:prstGeom prst="rect">
             <a:avLst/>
@@ -4710,14 +5217,14 @@
       </p:sp>
       <p:sp>
         <p:nvSpPr>
-          <p:cNvPr id="73" name="Shape 71"/>
+          <p:cNvPr id="86" name="Shape 84"/>
           <p:cNvSpPr/>
           <p:nvPr/>
         </p:nvSpPr>
         <p:spPr>
           <a:xfrm>
-            <a:off x="2670048" y="4738717"/>
-            <a:ext cx="303009" cy="136676"/>
+            <a:off x="2871216" y="4738717"/>
+            <a:ext cx="257823" cy="136676"/>
           </a:xfrm>
           <a:prstGeom prst="rect">
             <a:avLst/>
@@ -4730,13 +5237,13 @@
       </p:sp>
       <p:sp>
         <p:nvSpPr>
-          <p:cNvPr id="74" name="Text 72"/>
-          <p:cNvSpPr txBox="1"/>
-          <p:nvPr/>
-        </p:nvSpPr>
-        <p:spPr>
-          <a:xfrm>
-            <a:off x="3767328" y="4682804"/>
+          <p:cNvPr id="87" name="Text 85"/>
+          <p:cNvSpPr txBox="1"/>
+          <p:nvPr/>
+        </p:nvSpPr>
+        <p:spPr>
+          <a:xfrm>
+            <a:off x="3813048" y="4682804"/>
             <a:ext cx="786384" cy="248502"/>
           </a:xfrm>
           <a:prstGeom prst="rect">
@@ -4769,13 +5276,13 @@
       </p:sp>
       <p:sp>
         <p:nvSpPr>
-          <p:cNvPr id="75" name="Text 73"/>
-          <p:cNvSpPr txBox="1"/>
-          <p:nvPr/>
-        </p:nvSpPr>
-        <p:spPr>
-          <a:xfrm>
-            <a:off x="4553712" y="4682804"/>
+          <p:cNvPr id="88" name="Text 86"/>
+          <p:cNvSpPr txBox="1"/>
+          <p:nvPr/>
+        </p:nvSpPr>
+        <p:spPr>
+          <a:xfrm>
+            <a:off x="4599432" y="4682804"/>
             <a:ext cx="566928" cy="248502"/>
           </a:xfrm>
           <a:prstGeom prst="rect">
@@ -4808,13 +5315,13 @@
       </p:sp>
       <p:sp>
         <p:nvSpPr>
-          <p:cNvPr id="76" name="Text 74"/>
-          <p:cNvSpPr txBox="1"/>
-          <p:nvPr/>
-        </p:nvSpPr>
-        <p:spPr>
-          <a:xfrm>
-            <a:off x="5120640" y="4682804"/>
+          <p:cNvPr id="89" name="Text 87"/>
+          <p:cNvSpPr txBox="1"/>
+          <p:nvPr/>
+        </p:nvSpPr>
+        <p:spPr>
+          <a:xfrm>
+            <a:off x="5166360" y="4682804"/>
             <a:ext cx="749808" cy="248502"/>
           </a:xfrm>
           <a:prstGeom prst="rect">
@@ -4847,14 +5354,53 @@
       </p:sp>
       <p:sp>
         <p:nvSpPr>
-          <p:cNvPr id="77" name="Text 75"/>
+          <p:cNvPr id="90" name="Text 88"/>
           <p:cNvSpPr txBox="1"/>
           <p:nvPr/>
         </p:nvSpPr>
         <p:spPr>
           <a:xfrm>
             <a:off x="658368" y="4931305"/>
-            <a:ext cx="1938528" cy="248502"/>
+            <a:ext cx="310896" cy="248502"/>
+          </a:xfrm>
+          <a:prstGeom prst="rect">
+            <a:avLst/>
+          </a:prstGeom>
+          <a:noFill/>
+          <a:ln/>
+        </p:spPr>
+        <p:txBody>
+          <a:bodyPr wrap="square" lIns="0" tIns="0" rIns="0" bIns="0" rtlCol="0" anchor="ctr"/>
+          <a:lstStyle/>
+          <a:p>
+            <a:pPr algn="r" indent="0" marL="0">
+              <a:buNone/>
+            </a:pPr>
+            <a:r>
+              <a:rPr lang="en-US" sz="1200" dirty="0">
+                <a:solidFill>
+                  <a:srgbClr val="9AA3AD"/>
+                </a:solidFill>
+                <a:latin typeface="Inter" pitchFamily="34" charset="0"/>
+                <a:ea typeface="Inter" pitchFamily="34" charset="-122"/>
+                <a:cs typeface="Inter" pitchFamily="34" charset="-120"/>
+              </a:rPr>
+              <a:t>14</a:t>
+            </a:r>
+            <a:endParaRPr lang="en-US" sz="1200" dirty="0"/>
+          </a:p>
+        </p:txBody>
+      </p:sp>
+      <p:sp>
+        <p:nvSpPr>
+          <p:cNvPr id="91" name="Text 89"/>
+          <p:cNvSpPr txBox="1"/>
+          <p:nvPr/>
+        </p:nvSpPr>
+        <p:spPr>
+          <a:xfrm>
+            <a:off x="1014984" y="4931305"/>
+            <a:ext cx="1783080" cy="248502"/>
           </a:xfrm>
           <a:prstGeom prst="rect">
             <a:avLst/>
@@ -4886,14 +5432,14 @@
       </p:sp>
       <p:sp>
         <p:nvSpPr>
-          <p:cNvPr id="78" name="Shape 76"/>
+          <p:cNvPr id="92" name="Shape 90"/>
           <p:cNvSpPr/>
           <p:nvPr/>
         </p:nvSpPr>
         <p:spPr>
           <a:xfrm>
-            <a:off x="2670048" y="4987218"/>
-            <a:ext cx="297134" cy="136676"/>
+            <a:off x="2871216" y="4987218"/>
+            <a:ext cx="252824" cy="136676"/>
           </a:xfrm>
           <a:prstGeom prst="rect">
             <a:avLst/>
@@ -4906,13 +5452,13 @@
       </p:sp>
       <p:sp>
         <p:nvSpPr>
-          <p:cNvPr id="79" name="Text 77"/>
-          <p:cNvSpPr txBox="1"/>
-          <p:nvPr/>
-        </p:nvSpPr>
-        <p:spPr>
-          <a:xfrm>
-            <a:off x="3767328" y="4931305"/>
+          <p:cNvPr id="93" name="Text 91"/>
+          <p:cNvSpPr txBox="1"/>
+          <p:nvPr/>
+        </p:nvSpPr>
+        <p:spPr>
+          <a:xfrm>
+            <a:off x="3813048" y="4931305"/>
             <a:ext cx="786384" cy="248502"/>
           </a:xfrm>
           <a:prstGeom prst="rect">
@@ -4945,13 +5491,13 @@
       </p:sp>
       <p:sp>
         <p:nvSpPr>
-          <p:cNvPr id="80" name="Text 78"/>
-          <p:cNvSpPr txBox="1"/>
-          <p:nvPr/>
-        </p:nvSpPr>
-        <p:spPr>
-          <a:xfrm>
-            <a:off x="4553712" y="4931305"/>
+          <p:cNvPr id="94" name="Text 92"/>
+          <p:cNvSpPr txBox="1"/>
+          <p:nvPr/>
+        </p:nvSpPr>
+        <p:spPr>
+          <a:xfrm>
+            <a:off x="4599432" y="4931305"/>
             <a:ext cx="566928" cy="248502"/>
           </a:xfrm>
           <a:prstGeom prst="rect">
@@ -4984,13 +5530,13 @@
       </p:sp>
       <p:sp>
         <p:nvSpPr>
-          <p:cNvPr id="81" name="Text 79"/>
-          <p:cNvSpPr txBox="1"/>
-          <p:nvPr/>
-        </p:nvSpPr>
-        <p:spPr>
-          <a:xfrm>
-            <a:off x="5120640" y="4931305"/>
+          <p:cNvPr id="95" name="Text 93"/>
+          <p:cNvSpPr txBox="1"/>
+          <p:nvPr/>
+        </p:nvSpPr>
+        <p:spPr>
+          <a:xfrm>
+            <a:off x="5166360" y="4931305"/>
             <a:ext cx="749808" cy="248502"/>
           </a:xfrm>
           <a:prstGeom prst="rect">
@@ -5023,14 +5569,53 @@
       </p:sp>
       <p:sp>
         <p:nvSpPr>
-          <p:cNvPr id="82" name="Text 80"/>
+          <p:cNvPr id="96" name="Text 94"/>
           <p:cNvSpPr txBox="1"/>
           <p:nvPr/>
         </p:nvSpPr>
         <p:spPr>
           <a:xfrm>
             <a:off x="658368" y="5179807"/>
-            <a:ext cx="1938528" cy="248502"/>
+            <a:ext cx="310896" cy="248502"/>
+          </a:xfrm>
+          <a:prstGeom prst="rect">
+            <a:avLst/>
+          </a:prstGeom>
+          <a:noFill/>
+          <a:ln/>
+        </p:spPr>
+        <p:txBody>
+          <a:bodyPr wrap="square" lIns="0" tIns="0" rIns="0" bIns="0" rtlCol="0" anchor="ctr"/>
+          <a:lstStyle/>
+          <a:p>
+            <a:pPr algn="r" indent="0" marL="0">
+              <a:buNone/>
+            </a:pPr>
+            <a:r>
+              <a:rPr lang="en-US" sz="1200" dirty="0">
+                <a:solidFill>
+                  <a:srgbClr val="9AA3AD"/>
+                </a:solidFill>
+                <a:latin typeface="Inter" pitchFamily="34" charset="0"/>
+                <a:ea typeface="Inter" pitchFamily="34" charset="-122"/>
+                <a:cs typeface="Inter" pitchFamily="34" charset="-120"/>
+              </a:rPr>
+              <a:t>15</a:t>
+            </a:r>
+            <a:endParaRPr lang="en-US" sz="1200" dirty="0"/>
+          </a:p>
+        </p:txBody>
+      </p:sp>
+      <p:sp>
+        <p:nvSpPr>
+          <p:cNvPr id="97" name="Text 95"/>
+          <p:cNvSpPr txBox="1"/>
+          <p:nvPr/>
+        </p:nvSpPr>
+        <p:spPr>
+          <a:xfrm>
+            <a:off x="1014984" y="5179807"/>
+            <a:ext cx="1783080" cy="248502"/>
           </a:xfrm>
           <a:prstGeom prst="rect">
             <a:avLst/>
@@ -5062,14 +5647,14 @@
       </p:sp>
       <p:sp>
         <p:nvSpPr>
-          <p:cNvPr id="83" name="Shape 81"/>
+          <p:cNvPr id="98" name="Shape 96"/>
           <p:cNvSpPr/>
           <p:nvPr/>
         </p:nvSpPr>
         <p:spPr>
           <a:xfrm>
-            <a:off x="2670048" y="5235720"/>
-            <a:ext cx="287796" cy="136676"/>
+            <a:off x="2871216" y="5235720"/>
+            <a:ext cx="244879" cy="136676"/>
           </a:xfrm>
           <a:prstGeom prst="rect">
             <a:avLst/>
@@ -5082,13 +5667,13 @@
       </p:sp>
       <p:sp>
         <p:nvSpPr>
-          <p:cNvPr id="84" name="Text 82"/>
-          <p:cNvSpPr txBox="1"/>
-          <p:nvPr/>
-        </p:nvSpPr>
-        <p:spPr>
-          <a:xfrm>
-            <a:off x="3767328" y="5179807"/>
+          <p:cNvPr id="99" name="Text 97"/>
+          <p:cNvSpPr txBox="1"/>
+          <p:nvPr/>
+        </p:nvSpPr>
+        <p:spPr>
+          <a:xfrm>
+            <a:off x="3813048" y="5179807"/>
             <a:ext cx="786384" cy="248502"/>
           </a:xfrm>
           <a:prstGeom prst="rect">
@@ -5121,13 +5706,13 @@
       </p:sp>
       <p:sp>
         <p:nvSpPr>
-          <p:cNvPr id="85" name="Text 83"/>
-          <p:cNvSpPr txBox="1"/>
-          <p:nvPr/>
-        </p:nvSpPr>
-        <p:spPr>
-          <a:xfrm>
-            <a:off x="4553712" y="5179807"/>
+          <p:cNvPr id="100" name="Text 98"/>
+          <p:cNvSpPr txBox="1"/>
+          <p:nvPr/>
+        </p:nvSpPr>
+        <p:spPr>
+          <a:xfrm>
+            <a:off x="4599432" y="5179807"/>
             <a:ext cx="566928" cy="248502"/>
           </a:xfrm>
           <a:prstGeom prst="rect">
@@ -5160,13 +5745,13 @@
       </p:sp>
       <p:sp>
         <p:nvSpPr>
-          <p:cNvPr id="86" name="Text 84"/>
-          <p:cNvSpPr txBox="1"/>
-          <p:nvPr/>
-        </p:nvSpPr>
-        <p:spPr>
-          <a:xfrm>
-            <a:off x="5120640" y="5179807"/>
+          <p:cNvPr id="101" name="Text 99"/>
+          <p:cNvSpPr txBox="1"/>
+          <p:nvPr/>
+        </p:nvSpPr>
+        <p:spPr>
+          <a:xfrm>
+            <a:off x="5166360" y="5179807"/>
             <a:ext cx="749808" cy="248502"/>
           </a:xfrm>
           <a:prstGeom prst="rect">
@@ -5199,14 +5784,53 @@
       </p:sp>
       <p:sp>
         <p:nvSpPr>
-          <p:cNvPr id="87" name="Text 85"/>
+          <p:cNvPr id="102" name="Text 100"/>
           <p:cNvSpPr txBox="1"/>
           <p:nvPr/>
         </p:nvSpPr>
         <p:spPr>
           <a:xfrm>
             <a:off x="658368" y="5428309"/>
-            <a:ext cx="1938528" cy="248502"/>
+            <a:ext cx="310896" cy="248502"/>
+          </a:xfrm>
+          <a:prstGeom prst="rect">
+            <a:avLst/>
+          </a:prstGeom>
+          <a:noFill/>
+          <a:ln/>
+        </p:spPr>
+        <p:txBody>
+          <a:bodyPr wrap="square" lIns="0" tIns="0" rIns="0" bIns="0" rtlCol="0" anchor="ctr"/>
+          <a:lstStyle/>
+          <a:p>
+            <a:pPr algn="r" indent="0" marL="0">
+              <a:buNone/>
+            </a:pPr>
+            <a:r>
+              <a:rPr lang="en-US" sz="1200" dirty="0">
+                <a:solidFill>
+                  <a:srgbClr val="9AA3AD"/>
+                </a:solidFill>
+                <a:latin typeface="Inter" pitchFamily="34" charset="0"/>
+                <a:ea typeface="Inter" pitchFamily="34" charset="-122"/>
+                <a:cs typeface="Inter" pitchFamily="34" charset="-120"/>
+              </a:rPr>
+              <a:t>16</a:t>
+            </a:r>
+            <a:endParaRPr lang="en-US" sz="1200" dirty="0"/>
+          </a:p>
+        </p:txBody>
+      </p:sp>
+      <p:sp>
+        <p:nvSpPr>
+          <p:cNvPr id="103" name="Text 101"/>
+          <p:cNvSpPr txBox="1"/>
+          <p:nvPr/>
+        </p:nvSpPr>
+        <p:spPr>
+          <a:xfrm>
+            <a:off x="1014984" y="5428309"/>
+            <a:ext cx="1783080" cy="248502"/>
           </a:xfrm>
           <a:prstGeom prst="rect">
             <a:avLst/>
@@ -5238,14 +5862,14 @@
       </p:sp>
       <p:sp>
         <p:nvSpPr>
-          <p:cNvPr id="88" name="Shape 86"/>
+          <p:cNvPr id="104" name="Shape 102"/>
           <p:cNvSpPr/>
           <p:nvPr/>
         </p:nvSpPr>
         <p:spPr>
           <a:xfrm>
-            <a:off x="2670048" y="5484222"/>
-            <a:ext cx="274938" cy="136676"/>
+            <a:off x="2871216" y="5484222"/>
+            <a:ext cx="233938" cy="136676"/>
           </a:xfrm>
           <a:prstGeom prst="rect">
             <a:avLst/>
@@ -5258,13 +5882,13 @@
       </p:sp>
       <p:sp>
         <p:nvSpPr>
-          <p:cNvPr id="89" name="Text 87"/>
-          <p:cNvSpPr txBox="1"/>
-          <p:nvPr/>
-        </p:nvSpPr>
-        <p:spPr>
-          <a:xfrm>
-            <a:off x="3767328" y="5428309"/>
+          <p:cNvPr id="105" name="Text 103"/>
+          <p:cNvSpPr txBox="1"/>
+          <p:nvPr/>
+        </p:nvSpPr>
+        <p:spPr>
+          <a:xfrm>
+            <a:off x="3813048" y="5428309"/>
             <a:ext cx="786384" cy="248502"/>
           </a:xfrm>
           <a:prstGeom prst="rect">
@@ -5297,13 +5921,13 @@
       </p:sp>
       <p:sp>
         <p:nvSpPr>
-          <p:cNvPr id="90" name="Text 88"/>
-          <p:cNvSpPr txBox="1"/>
-          <p:nvPr/>
-        </p:nvSpPr>
-        <p:spPr>
-          <a:xfrm>
-            <a:off x="4553712" y="5428309"/>
+          <p:cNvPr id="106" name="Text 104"/>
+          <p:cNvSpPr txBox="1"/>
+          <p:nvPr/>
+        </p:nvSpPr>
+        <p:spPr>
+          <a:xfrm>
+            <a:off x="4599432" y="5428309"/>
             <a:ext cx="566928" cy="248502"/>
           </a:xfrm>
           <a:prstGeom prst="rect">
@@ -5336,13 +5960,13 @@
       </p:sp>
       <p:sp>
         <p:nvSpPr>
-          <p:cNvPr id="91" name="Text 89"/>
-          <p:cNvSpPr txBox="1"/>
-          <p:nvPr/>
-        </p:nvSpPr>
-        <p:spPr>
-          <a:xfrm>
-            <a:off x="5120640" y="5428309"/>
+          <p:cNvPr id="107" name="Text 105"/>
+          <p:cNvSpPr txBox="1"/>
+          <p:nvPr/>
+        </p:nvSpPr>
+        <p:spPr>
+          <a:xfrm>
+            <a:off x="5166360" y="5428309"/>
             <a:ext cx="749808" cy="248502"/>
           </a:xfrm>
           <a:prstGeom prst="rect">
@@ -5375,14 +5999,53 @@
       </p:sp>
       <p:sp>
         <p:nvSpPr>
-          <p:cNvPr id="92" name="Text 90"/>
+          <p:cNvPr id="108" name="Text 106"/>
           <p:cNvSpPr txBox="1"/>
           <p:nvPr/>
         </p:nvSpPr>
         <p:spPr>
           <a:xfrm>
             <a:off x="658368" y="5676810"/>
-            <a:ext cx="1938528" cy="248502"/>
+            <a:ext cx="310896" cy="248502"/>
+          </a:xfrm>
+          <a:prstGeom prst="rect">
+            <a:avLst/>
+          </a:prstGeom>
+          <a:noFill/>
+          <a:ln/>
+        </p:spPr>
+        <p:txBody>
+          <a:bodyPr wrap="square" lIns="0" tIns="0" rIns="0" bIns="0" rtlCol="0" anchor="ctr"/>
+          <a:lstStyle/>
+          <a:p>
+            <a:pPr algn="r" indent="0" marL="0">
+              <a:buNone/>
+            </a:pPr>
+            <a:r>
+              <a:rPr lang="en-US" sz="1200" dirty="0">
+                <a:solidFill>
+                  <a:srgbClr val="9AA3AD"/>
+                </a:solidFill>
+                <a:latin typeface="Inter" pitchFamily="34" charset="0"/>
+                <a:ea typeface="Inter" pitchFamily="34" charset="-122"/>
+                <a:cs typeface="Inter" pitchFamily="34" charset="-120"/>
+              </a:rPr>
+              <a:t>17</a:t>
+            </a:r>
+            <a:endParaRPr lang="en-US" sz="1200" dirty="0"/>
+          </a:p>
+        </p:txBody>
+      </p:sp>
+      <p:sp>
+        <p:nvSpPr>
+          <p:cNvPr id="109" name="Text 107"/>
+          <p:cNvSpPr txBox="1"/>
+          <p:nvPr/>
+        </p:nvSpPr>
+        <p:spPr>
+          <a:xfrm>
+            <a:off x="1014984" y="5676810"/>
+            <a:ext cx="1783080" cy="248502"/>
           </a:xfrm>
           <a:prstGeom prst="rect">
             <a:avLst/>
@@ -5414,14 +6077,14 @@
       </p:sp>
       <p:sp>
         <p:nvSpPr>
-          <p:cNvPr id="93" name="Shape 91"/>
+          <p:cNvPr id="110" name="Shape 108"/>
           <p:cNvSpPr/>
           <p:nvPr/>
         </p:nvSpPr>
         <p:spPr>
           <a:xfrm>
-            <a:off x="2670048" y="5732723"/>
-            <a:ext cx="260210" cy="136676"/>
+            <a:off x="2871216" y="5732723"/>
+            <a:ext cx="221407" cy="136676"/>
           </a:xfrm>
           <a:prstGeom prst="rect">
             <a:avLst/>
@@ -5434,13 +6097,13 @@
       </p:sp>
       <p:sp>
         <p:nvSpPr>
-          <p:cNvPr id="94" name="Text 92"/>
-          <p:cNvSpPr txBox="1"/>
-          <p:nvPr/>
-        </p:nvSpPr>
-        <p:spPr>
-          <a:xfrm>
-            <a:off x="3767328" y="5676810"/>
+          <p:cNvPr id="111" name="Text 109"/>
+          <p:cNvSpPr txBox="1"/>
+          <p:nvPr/>
+        </p:nvSpPr>
+        <p:spPr>
+          <a:xfrm>
+            <a:off x="3813048" y="5676810"/>
             <a:ext cx="786384" cy="248502"/>
           </a:xfrm>
           <a:prstGeom prst="rect">
@@ -5473,13 +6136,13 @@
       </p:sp>
       <p:sp>
         <p:nvSpPr>
-          <p:cNvPr id="95" name="Text 93"/>
-          <p:cNvSpPr txBox="1"/>
-          <p:nvPr/>
-        </p:nvSpPr>
-        <p:spPr>
-          <a:xfrm>
-            <a:off x="4553712" y="5676810"/>
+          <p:cNvPr id="112" name="Text 110"/>
+          <p:cNvSpPr txBox="1"/>
+          <p:nvPr/>
+        </p:nvSpPr>
+        <p:spPr>
+          <a:xfrm>
+            <a:off x="4599432" y="5676810"/>
             <a:ext cx="566928" cy="248502"/>
           </a:xfrm>
           <a:prstGeom prst="rect">
@@ -5512,13 +6175,13 @@
       </p:sp>
       <p:sp>
         <p:nvSpPr>
-          <p:cNvPr id="96" name="Text 94"/>
-          <p:cNvSpPr txBox="1"/>
-          <p:nvPr/>
-        </p:nvSpPr>
-        <p:spPr>
-          <a:xfrm>
-            <a:off x="5120640" y="5676810"/>
+          <p:cNvPr id="113" name="Text 111"/>
+          <p:cNvSpPr txBox="1"/>
+          <p:nvPr/>
+        </p:nvSpPr>
+        <p:spPr>
+          <a:xfrm>
+            <a:off x="5166360" y="5676810"/>
             <a:ext cx="749808" cy="248502"/>
           </a:xfrm>
           <a:prstGeom prst="rect">
@@ -5551,14 +6214,53 @@
       </p:sp>
       <p:sp>
         <p:nvSpPr>
-          <p:cNvPr id="97" name="Text 95"/>
+          <p:cNvPr id="114" name="Text 112"/>
           <p:cNvSpPr txBox="1"/>
           <p:nvPr/>
         </p:nvSpPr>
         <p:spPr>
           <a:xfrm>
             <a:off x="6208776" y="1700784"/>
-            <a:ext cx="1938528" cy="248502"/>
+            <a:ext cx="310896" cy="248502"/>
+          </a:xfrm>
+          <a:prstGeom prst="rect">
+            <a:avLst/>
+          </a:prstGeom>
+          <a:noFill/>
+          <a:ln/>
+        </p:spPr>
+        <p:txBody>
+          <a:bodyPr wrap="square" lIns="0" tIns="0" rIns="0" bIns="0" rtlCol="0" anchor="ctr"/>
+          <a:lstStyle/>
+          <a:p>
+            <a:pPr algn="r" indent="0" marL="0">
+              <a:buNone/>
+            </a:pPr>
+            <a:r>
+              <a:rPr lang="en-US" sz="1200" dirty="0">
+                <a:solidFill>
+                  <a:srgbClr val="9AA3AD"/>
+                </a:solidFill>
+                <a:latin typeface="Inter" pitchFamily="34" charset="0"/>
+                <a:ea typeface="Inter" pitchFamily="34" charset="-122"/>
+                <a:cs typeface="Inter" pitchFamily="34" charset="-120"/>
+              </a:rPr>
+              <a:t>18</a:t>
+            </a:r>
+            <a:endParaRPr lang="en-US" sz="1200" dirty="0"/>
+          </a:p>
+        </p:txBody>
+      </p:sp>
+      <p:sp>
+        <p:nvSpPr>
+          <p:cNvPr id="115" name="Text 113"/>
+          <p:cNvSpPr txBox="1"/>
+          <p:nvPr/>
+        </p:nvSpPr>
+        <p:spPr>
+          <a:xfrm>
+            <a:off x="6565392" y="1700784"/>
+            <a:ext cx="1783080" cy="248502"/>
           </a:xfrm>
           <a:prstGeom prst="rect">
             <a:avLst/>
@@ -5590,14 +6292,14 @@
       </p:sp>
       <p:sp>
         <p:nvSpPr>
-          <p:cNvPr id="98" name="Shape 96"/>
+          <p:cNvPr id="116" name="Shape 114"/>
           <p:cNvSpPr/>
           <p:nvPr/>
         </p:nvSpPr>
         <p:spPr>
           <a:xfrm>
-            <a:off x="8220456" y="1756697"/>
-            <a:ext cx="246097" cy="136676"/>
+            <a:off x="8421624" y="1756697"/>
+            <a:ext cx="209398" cy="136676"/>
           </a:xfrm>
           <a:prstGeom prst="rect">
             <a:avLst/>
@@ -5610,13 +6312,13 @@
       </p:sp>
       <p:sp>
         <p:nvSpPr>
-          <p:cNvPr id="99" name="Text 97"/>
-          <p:cNvSpPr txBox="1"/>
-          <p:nvPr/>
-        </p:nvSpPr>
-        <p:spPr>
-          <a:xfrm>
-            <a:off x="9317736" y="1700784"/>
+          <p:cNvPr id="117" name="Text 115"/>
+          <p:cNvSpPr txBox="1"/>
+          <p:nvPr/>
+        </p:nvSpPr>
+        <p:spPr>
+          <a:xfrm>
+            <a:off x="9363456" y="1700784"/>
             <a:ext cx="786384" cy="248502"/>
           </a:xfrm>
           <a:prstGeom prst="rect">
@@ -5649,13 +6351,13 @@
       </p:sp>
       <p:sp>
         <p:nvSpPr>
-          <p:cNvPr id="100" name="Text 98"/>
-          <p:cNvSpPr txBox="1"/>
-          <p:nvPr/>
-        </p:nvSpPr>
-        <p:spPr>
-          <a:xfrm>
-            <a:off x="10104120" y="1700784"/>
+          <p:cNvPr id="118" name="Text 116"/>
+          <p:cNvSpPr txBox="1"/>
+          <p:nvPr/>
+        </p:nvSpPr>
+        <p:spPr>
+          <a:xfrm>
+            <a:off x="10149840" y="1700784"/>
             <a:ext cx="566928" cy="248502"/>
           </a:xfrm>
           <a:prstGeom prst="rect">
@@ -5688,13 +6390,13 @@
       </p:sp>
       <p:sp>
         <p:nvSpPr>
-          <p:cNvPr id="101" name="Text 99"/>
-          <p:cNvSpPr txBox="1"/>
-          <p:nvPr/>
-        </p:nvSpPr>
-        <p:spPr>
-          <a:xfrm>
-            <a:off x="10671048" y="1700784"/>
+          <p:cNvPr id="119" name="Text 117"/>
+          <p:cNvSpPr txBox="1"/>
+          <p:nvPr/>
+        </p:nvSpPr>
+        <p:spPr>
+          <a:xfrm>
+            <a:off x="10716768" y="1700784"/>
             <a:ext cx="749808" cy="248502"/>
           </a:xfrm>
           <a:prstGeom prst="rect">
@@ -5727,14 +6429,53 @@
       </p:sp>
       <p:sp>
         <p:nvSpPr>
-          <p:cNvPr id="102" name="Text 100"/>
+          <p:cNvPr id="120" name="Text 118"/>
           <p:cNvSpPr txBox="1"/>
           <p:nvPr/>
         </p:nvSpPr>
         <p:spPr>
           <a:xfrm>
             <a:off x="6208776" y="1949286"/>
-            <a:ext cx="1938528" cy="248502"/>
+            <a:ext cx="310896" cy="248502"/>
+          </a:xfrm>
+          <a:prstGeom prst="rect">
+            <a:avLst/>
+          </a:prstGeom>
+          <a:noFill/>
+          <a:ln/>
+        </p:spPr>
+        <p:txBody>
+          <a:bodyPr wrap="square" lIns="0" tIns="0" rIns="0" bIns="0" rtlCol="0" anchor="ctr"/>
+          <a:lstStyle/>
+          <a:p>
+            <a:pPr algn="r" indent="0" marL="0">
+              <a:buNone/>
+            </a:pPr>
+            <a:r>
+              <a:rPr lang="en-US" sz="1200" dirty="0">
+                <a:solidFill>
+                  <a:srgbClr val="9AA3AD"/>
+                </a:solidFill>
+                <a:latin typeface="Inter" pitchFamily="34" charset="0"/>
+                <a:ea typeface="Inter" pitchFamily="34" charset="-122"/>
+                <a:cs typeface="Inter" pitchFamily="34" charset="-120"/>
+              </a:rPr>
+              <a:t>19</a:t>
+            </a:r>
+            <a:endParaRPr lang="en-US" sz="1200" dirty="0"/>
+          </a:p>
+        </p:txBody>
+      </p:sp>
+      <p:sp>
+        <p:nvSpPr>
+          <p:cNvPr id="121" name="Text 119"/>
+          <p:cNvSpPr txBox="1"/>
+          <p:nvPr/>
+        </p:nvSpPr>
+        <p:spPr>
+          <a:xfrm>
+            <a:off x="6565392" y="1949286"/>
+            <a:ext cx="1783080" cy="248502"/>
           </a:xfrm>
           <a:prstGeom prst="rect">
             <a:avLst/>
@@ -5766,14 +6507,14 @@
       </p:sp>
       <p:sp>
         <p:nvSpPr>
-          <p:cNvPr id="103" name="Shape 101"/>
+          <p:cNvPr id="122" name="Shape 120"/>
           <p:cNvSpPr/>
           <p:nvPr/>
         </p:nvSpPr>
         <p:spPr>
           <a:xfrm>
-            <a:off x="8220456" y="2005199"/>
-            <a:ext cx="220598" cy="136676"/>
+            <a:off x="8421624" y="2005199"/>
+            <a:ext cx="187702" cy="136676"/>
           </a:xfrm>
           <a:prstGeom prst="rect">
             <a:avLst/>
@@ -5786,13 +6527,13 @@
       </p:sp>
       <p:sp>
         <p:nvSpPr>
-          <p:cNvPr id="104" name="Text 102"/>
-          <p:cNvSpPr txBox="1"/>
-          <p:nvPr/>
-        </p:nvSpPr>
-        <p:spPr>
-          <a:xfrm>
-            <a:off x="9317736" y="1949286"/>
+          <p:cNvPr id="123" name="Text 121"/>
+          <p:cNvSpPr txBox="1"/>
+          <p:nvPr/>
+        </p:nvSpPr>
+        <p:spPr>
+          <a:xfrm>
+            <a:off x="9363456" y="1949286"/>
             <a:ext cx="786384" cy="248502"/>
           </a:xfrm>
           <a:prstGeom prst="rect">
@@ -5825,13 +6566,13 @@
       </p:sp>
       <p:sp>
         <p:nvSpPr>
-          <p:cNvPr id="105" name="Text 103"/>
-          <p:cNvSpPr txBox="1"/>
-          <p:nvPr/>
-        </p:nvSpPr>
-        <p:spPr>
-          <a:xfrm>
-            <a:off x="10104120" y="1949286"/>
+          <p:cNvPr id="124" name="Text 122"/>
+          <p:cNvSpPr txBox="1"/>
+          <p:nvPr/>
+        </p:nvSpPr>
+        <p:spPr>
+          <a:xfrm>
+            <a:off x="10149840" y="1949286"/>
             <a:ext cx="566928" cy="248502"/>
           </a:xfrm>
           <a:prstGeom prst="rect">
@@ -5864,13 +6605,13 @@
       </p:sp>
       <p:sp>
         <p:nvSpPr>
-          <p:cNvPr id="106" name="Text 104"/>
-          <p:cNvSpPr txBox="1"/>
-          <p:nvPr/>
-        </p:nvSpPr>
-        <p:spPr>
-          <a:xfrm>
-            <a:off x="10671048" y="1949286"/>
+          <p:cNvPr id="125" name="Text 123"/>
+          <p:cNvSpPr txBox="1"/>
+          <p:nvPr/>
+        </p:nvSpPr>
+        <p:spPr>
+          <a:xfrm>
+            <a:off x="10716768" y="1949286"/>
             <a:ext cx="749808" cy="248502"/>
           </a:xfrm>
           <a:prstGeom prst="rect">
@@ -5903,14 +6644,53 @@
       </p:sp>
       <p:sp>
         <p:nvSpPr>
-          <p:cNvPr id="107" name="Text 105"/>
+          <p:cNvPr id="126" name="Text 124"/>
           <p:cNvSpPr txBox="1"/>
           <p:nvPr/>
         </p:nvSpPr>
         <p:spPr>
           <a:xfrm>
             <a:off x="6208776" y="2197787"/>
-            <a:ext cx="1938528" cy="248502"/>
+            <a:ext cx="310896" cy="248502"/>
+          </a:xfrm>
+          <a:prstGeom prst="rect">
+            <a:avLst/>
+          </a:prstGeom>
+          <a:noFill/>
+          <a:ln/>
+        </p:spPr>
+        <p:txBody>
+          <a:bodyPr wrap="square" lIns="0" tIns="0" rIns="0" bIns="0" rtlCol="0" anchor="ctr"/>
+          <a:lstStyle/>
+          <a:p>
+            <a:pPr algn="r" indent="0" marL="0">
+              <a:buNone/>
+            </a:pPr>
+            <a:r>
+              <a:rPr lang="en-US" sz="1200" dirty="0">
+                <a:solidFill>
+                  <a:srgbClr val="9AA3AD"/>
+                </a:solidFill>
+                <a:latin typeface="Inter" pitchFamily="34" charset="0"/>
+                <a:ea typeface="Inter" pitchFamily="34" charset="-122"/>
+                <a:cs typeface="Inter" pitchFamily="34" charset="-120"/>
+              </a:rPr>
+              <a:t>20</a:t>
+            </a:r>
+            <a:endParaRPr lang="en-US" sz="1200" dirty="0"/>
+          </a:p>
+        </p:txBody>
+      </p:sp>
+      <p:sp>
+        <p:nvSpPr>
+          <p:cNvPr id="127" name="Text 125"/>
+          <p:cNvSpPr txBox="1"/>
+          <p:nvPr/>
+        </p:nvSpPr>
+        <p:spPr>
+          <a:xfrm>
+            <a:off x="6565392" y="2197787"/>
+            <a:ext cx="1783080" cy="248502"/>
           </a:xfrm>
           <a:prstGeom prst="rect">
             <a:avLst/>
@@ -5942,14 +6722,14 @@
       </p:sp>
       <p:sp>
         <p:nvSpPr>
-          <p:cNvPr id="108" name="Shape 106"/>
+          <p:cNvPr id="128" name="Shape 126"/>
           <p:cNvSpPr/>
           <p:nvPr/>
         </p:nvSpPr>
         <p:spPr>
           <a:xfrm>
-            <a:off x="8220456" y="2253700"/>
-            <a:ext cx="212176" cy="136676"/>
+            <a:off x="8421624" y="2253700"/>
+            <a:ext cx="180536" cy="136676"/>
           </a:xfrm>
           <a:prstGeom prst="rect">
             <a:avLst/>
@@ -5962,13 +6742,13 @@
       </p:sp>
       <p:sp>
         <p:nvSpPr>
-          <p:cNvPr id="109" name="Text 107"/>
-          <p:cNvSpPr txBox="1"/>
-          <p:nvPr/>
-        </p:nvSpPr>
-        <p:spPr>
-          <a:xfrm>
-            <a:off x="9317736" y="2197787"/>
+          <p:cNvPr id="129" name="Text 127"/>
+          <p:cNvSpPr txBox="1"/>
+          <p:nvPr/>
+        </p:nvSpPr>
+        <p:spPr>
+          <a:xfrm>
+            <a:off x="9363456" y="2197787"/>
             <a:ext cx="786384" cy="248502"/>
           </a:xfrm>
           <a:prstGeom prst="rect">
@@ -6001,13 +6781,13 @@
       </p:sp>
       <p:sp>
         <p:nvSpPr>
-          <p:cNvPr id="110" name="Text 108"/>
-          <p:cNvSpPr txBox="1"/>
-          <p:nvPr/>
-        </p:nvSpPr>
-        <p:spPr>
-          <a:xfrm>
-            <a:off x="10104120" y="2197787"/>
+          <p:cNvPr id="130" name="Text 128"/>
+          <p:cNvSpPr txBox="1"/>
+          <p:nvPr/>
+        </p:nvSpPr>
+        <p:spPr>
+          <a:xfrm>
+            <a:off x="10149840" y="2197787"/>
             <a:ext cx="566928" cy="248502"/>
           </a:xfrm>
           <a:prstGeom prst="rect">
@@ -6040,13 +6820,13 @@
       </p:sp>
       <p:sp>
         <p:nvSpPr>
-          <p:cNvPr id="111" name="Text 109"/>
-          <p:cNvSpPr txBox="1"/>
-          <p:nvPr/>
-        </p:nvSpPr>
-        <p:spPr>
-          <a:xfrm>
-            <a:off x="10671048" y="2197787"/>
+          <p:cNvPr id="131" name="Text 129"/>
+          <p:cNvSpPr txBox="1"/>
+          <p:nvPr/>
+        </p:nvSpPr>
+        <p:spPr>
+          <a:xfrm>
+            <a:off x="10716768" y="2197787"/>
             <a:ext cx="749808" cy="248502"/>
           </a:xfrm>
           <a:prstGeom prst="rect">
@@ -6079,14 +6859,53 @@
       </p:sp>
       <p:sp>
         <p:nvSpPr>
-          <p:cNvPr id="112" name="Text 110"/>
+          <p:cNvPr id="132" name="Text 130"/>
           <p:cNvSpPr txBox="1"/>
           <p:nvPr/>
         </p:nvSpPr>
         <p:spPr>
           <a:xfrm>
             <a:off x="6208776" y="2446289"/>
-            <a:ext cx="1938528" cy="248502"/>
+            <a:ext cx="310896" cy="248502"/>
+          </a:xfrm>
+          <a:prstGeom prst="rect">
+            <a:avLst/>
+          </a:prstGeom>
+          <a:noFill/>
+          <a:ln/>
+        </p:spPr>
+        <p:txBody>
+          <a:bodyPr wrap="square" lIns="0" tIns="0" rIns="0" bIns="0" rtlCol="0" anchor="ctr"/>
+          <a:lstStyle/>
+          <a:p>
+            <a:pPr algn="r" indent="0" marL="0">
+              <a:buNone/>
+            </a:pPr>
+            <a:r>
+              <a:rPr lang="en-US" sz="1200" dirty="0">
+                <a:solidFill>
+                  <a:srgbClr val="9AA3AD"/>
+                </a:solidFill>
+                <a:latin typeface="Inter" pitchFamily="34" charset="0"/>
+                <a:ea typeface="Inter" pitchFamily="34" charset="-122"/>
+                <a:cs typeface="Inter" pitchFamily="34" charset="-120"/>
+              </a:rPr>
+              <a:t>21</a:t>
+            </a:r>
+            <a:endParaRPr lang="en-US" sz="1200" dirty="0"/>
+          </a:p>
+        </p:txBody>
+      </p:sp>
+      <p:sp>
+        <p:nvSpPr>
+          <p:cNvPr id="133" name="Text 131"/>
+          <p:cNvSpPr txBox="1"/>
+          <p:nvPr/>
+        </p:nvSpPr>
+        <p:spPr>
+          <a:xfrm>
+            <a:off x="6565392" y="2446289"/>
+            <a:ext cx="1783080" cy="248502"/>
           </a:xfrm>
           <a:prstGeom prst="rect">
             <a:avLst/>
@@ -6118,14 +6937,14 @@
       </p:sp>
       <p:sp>
         <p:nvSpPr>
-          <p:cNvPr id="113" name="Shape 111"/>
+          <p:cNvPr id="134" name="Shape 132"/>
           <p:cNvSpPr/>
           <p:nvPr/>
         </p:nvSpPr>
         <p:spPr>
           <a:xfrm>
-            <a:off x="8220456" y="2502202"/>
-            <a:ext cx="203688" cy="136676"/>
+            <a:off x="8421624" y="2502202"/>
+            <a:ext cx="173314" cy="136676"/>
           </a:xfrm>
           <a:prstGeom prst="rect">
             <a:avLst/>
@@ -6138,13 +6957,13 @@
       </p:sp>
       <p:sp>
         <p:nvSpPr>
-          <p:cNvPr id="114" name="Text 112"/>
-          <p:cNvSpPr txBox="1"/>
-          <p:nvPr/>
-        </p:nvSpPr>
-        <p:spPr>
-          <a:xfrm>
-            <a:off x="9317736" y="2446289"/>
+          <p:cNvPr id="135" name="Text 133"/>
+          <p:cNvSpPr txBox="1"/>
+          <p:nvPr/>
+        </p:nvSpPr>
+        <p:spPr>
+          <a:xfrm>
+            <a:off x="9363456" y="2446289"/>
             <a:ext cx="786384" cy="248502"/>
           </a:xfrm>
           <a:prstGeom prst="rect">
@@ -6177,13 +6996,13 @@
       </p:sp>
       <p:sp>
         <p:nvSpPr>
-          <p:cNvPr id="115" name="Text 113"/>
-          <p:cNvSpPr txBox="1"/>
-          <p:nvPr/>
-        </p:nvSpPr>
-        <p:spPr>
-          <a:xfrm>
-            <a:off x="10104120" y="2446289"/>
+          <p:cNvPr id="136" name="Text 134"/>
+          <p:cNvSpPr txBox="1"/>
+          <p:nvPr/>
+        </p:nvSpPr>
+        <p:spPr>
+          <a:xfrm>
+            <a:off x="10149840" y="2446289"/>
             <a:ext cx="566928" cy="248502"/>
           </a:xfrm>
           <a:prstGeom prst="rect">
@@ -6216,13 +7035,13 @@
       </p:sp>
       <p:sp>
         <p:nvSpPr>
-          <p:cNvPr id="116" name="Text 114"/>
-          <p:cNvSpPr txBox="1"/>
-          <p:nvPr/>
-        </p:nvSpPr>
-        <p:spPr>
-          <a:xfrm>
-            <a:off x="10671048" y="2446289"/>
+          <p:cNvPr id="137" name="Text 135"/>
+          <p:cNvSpPr txBox="1"/>
+          <p:nvPr/>
+        </p:nvSpPr>
+        <p:spPr>
+          <a:xfrm>
+            <a:off x="10716768" y="2446289"/>
             <a:ext cx="749808" cy="248502"/>
           </a:xfrm>
           <a:prstGeom prst="rect">
@@ -6255,14 +7074,53 @@
       </p:sp>
       <p:sp>
         <p:nvSpPr>
-          <p:cNvPr id="117" name="Text 115"/>
+          <p:cNvPr id="138" name="Text 136"/>
           <p:cNvSpPr txBox="1"/>
           <p:nvPr/>
         </p:nvSpPr>
         <p:spPr>
           <a:xfrm>
             <a:off x="6208776" y="2694791"/>
-            <a:ext cx="1938528" cy="248502"/>
+            <a:ext cx="310896" cy="248502"/>
+          </a:xfrm>
+          <a:prstGeom prst="rect">
+            <a:avLst/>
+          </a:prstGeom>
+          <a:noFill/>
+          <a:ln/>
+        </p:spPr>
+        <p:txBody>
+          <a:bodyPr wrap="square" lIns="0" tIns="0" rIns="0" bIns="0" rtlCol="0" anchor="ctr"/>
+          <a:lstStyle/>
+          <a:p>
+            <a:pPr algn="r" indent="0" marL="0">
+              <a:buNone/>
+            </a:pPr>
+            <a:r>
+              <a:rPr lang="en-US" sz="1200" dirty="0">
+                <a:solidFill>
+                  <a:srgbClr val="9AA3AD"/>
+                </a:solidFill>
+                <a:latin typeface="Inter" pitchFamily="34" charset="0"/>
+                <a:ea typeface="Inter" pitchFamily="34" charset="-122"/>
+                <a:cs typeface="Inter" pitchFamily="34" charset="-120"/>
+              </a:rPr>
+              <a:t>22</a:t>
+            </a:r>
+            <a:endParaRPr lang="en-US" sz="1200" dirty="0"/>
+          </a:p>
+        </p:txBody>
+      </p:sp>
+      <p:sp>
+        <p:nvSpPr>
+          <p:cNvPr id="139" name="Text 137"/>
+          <p:cNvSpPr txBox="1"/>
+          <p:nvPr/>
+        </p:nvSpPr>
+        <p:spPr>
+          <a:xfrm>
+            <a:off x="6565392" y="2694791"/>
+            <a:ext cx="1783080" cy="248502"/>
           </a:xfrm>
           <a:prstGeom prst="rect">
             <a:avLst/>
@@ -6294,14 +7152,14 @@
       </p:sp>
       <p:sp>
         <p:nvSpPr>
-          <p:cNvPr id="118" name="Shape 116"/>
+          <p:cNvPr id="140" name="Shape 138"/>
           <p:cNvSpPr/>
           <p:nvPr/>
         </p:nvSpPr>
         <p:spPr>
           <a:xfrm>
-            <a:off x="8220456" y="2750703"/>
-            <a:ext cx="199671" cy="136676"/>
+            <a:off x="8421624" y="2750703"/>
+            <a:ext cx="169896" cy="136676"/>
           </a:xfrm>
           <a:prstGeom prst="rect">
             <a:avLst/>
@@ -6314,13 +7172,13 @@
       </p:sp>
       <p:sp>
         <p:nvSpPr>
-          <p:cNvPr id="119" name="Text 117"/>
-          <p:cNvSpPr txBox="1"/>
-          <p:nvPr/>
-        </p:nvSpPr>
-        <p:spPr>
-          <a:xfrm>
-            <a:off x="9317736" y="2694791"/>
+          <p:cNvPr id="141" name="Text 139"/>
+          <p:cNvSpPr txBox="1"/>
+          <p:nvPr/>
+        </p:nvSpPr>
+        <p:spPr>
+          <a:xfrm>
+            <a:off x="9363456" y="2694791"/>
             <a:ext cx="786384" cy="248502"/>
           </a:xfrm>
           <a:prstGeom prst="rect">
@@ -6353,13 +7211,13 @@
       </p:sp>
       <p:sp>
         <p:nvSpPr>
-          <p:cNvPr id="120" name="Text 118"/>
-          <p:cNvSpPr txBox="1"/>
-          <p:nvPr/>
-        </p:nvSpPr>
-        <p:spPr>
-          <a:xfrm>
-            <a:off x="10104120" y="2694791"/>
+          <p:cNvPr id="142" name="Text 140"/>
+          <p:cNvSpPr txBox="1"/>
+          <p:nvPr/>
+        </p:nvSpPr>
+        <p:spPr>
+          <a:xfrm>
+            <a:off x="10149840" y="2694791"/>
             <a:ext cx="566928" cy="248502"/>
           </a:xfrm>
           <a:prstGeom prst="rect">
@@ -6392,13 +7250,13 @@
       </p:sp>
       <p:sp>
         <p:nvSpPr>
-          <p:cNvPr id="121" name="Text 119"/>
-          <p:cNvSpPr txBox="1"/>
-          <p:nvPr/>
-        </p:nvSpPr>
-        <p:spPr>
-          <a:xfrm>
-            <a:off x="10671048" y="2694791"/>
+          <p:cNvPr id="143" name="Text 141"/>
+          <p:cNvSpPr txBox="1"/>
+          <p:nvPr/>
+        </p:nvSpPr>
+        <p:spPr>
+          <a:xfrm>
+            <a:off x="10716768" y="2694791"/>
             <a:ext cx="749808" cy="248502"/>
           </a:xfrm>
           <a:prstGeom prst="rect">
@@ -6431,14 +7289,53 @@
       </p:sp>
       <p:sp>
         <p:nvSpPr>
-          <p:cNvPr id="122" name="Text 120"/>
+          <p:cNvPr id="144" name="Text 142"/>
           <p:cNvSpPr txBox="1"/>
           <p:nvPr/>
         </p:nvSpPr>
         <p:spPr>
           <a:xfrm>
             <a:off x="6208776" y="2943292"/>
-            <a:ext cx="1938528" cy="248502"/>
+            <a:ext cx="310896" cy="248502"/>
+          </a:xfrm>
+          <a:prstGeom prst="rect">
+            <a:avLst/>
+          </a:prstGeom>
+          <a:noFill/>
+          <a:ln/>
+        </p:spPr>
+        <p:txBody>
+          <a:bodyPr wrap="square" lIns="0" tIns="0" rIns="0" bIns="0" rtlCol="0" anchor="ctr"/>
+          <a:lstStyle/>
+          <a:p>
+            <a:pPr algn="r" indent="0" marL="0">
+              <a:buNone/>
+            </a:pPr>
+            <a:r>
+              <a:rPr lang="en-US" sz="1200" dirty="0">
+                <a:solidFill>
+                  <a:srgbClr val="9AA3AD"/>
+                </a:solidFill>
+                <a:latin typeface="Inter" pitchFamily="34" charset="0"/>
+                <a:ea typeface="Inter" pitchFamily="34" charset="-122"/>
+                <a:cs typeface="Inter" pitchFamily="34" charset="-120"/>
+              </a:rPr>
+              <a:t>23</a:t>
+            </a:r>
+            <a:endParaRPr lang="en-US" sz="1200" dirty="0"/>
+          </a:p>
+        </p:txBody>
+      </p:sp>
+      <p:sp>
+        <p:nvSpPr>
+          <p:cNvPr id="145" name="Text 143"/>
+          <p:cNvSpPr txBox="1"/>
+          <p:nvPr/>
+        </p:nvSpPr>
+        <p:spPr>
+          <a:xfrm>
+            <a:off x="6565392" y="2943292"/>
+            <a:ext cx="1783080" cy="248502"/>
           </a:xfrm>
           <a:prstGeom prst="rect">
             <a:avLst/>
@@ -6470,14 +7367,14 @@
       </p:sp>
       <p:sp>
         <p:nvSpPr>
-          <p:cNvPr id="123" name="Shape 121"/>
+          <p:cNvPr id="146" name="Shape 144"/>
           <p:cNvSpPr/>
           <p:nvPr/>
         </p:nvSpPr>
         <p:spPr>
           <a:xfrm>
-            <a:off x="8220456" y="2999205"/>
-            <a:ext cx="194454" cy="136676"/>
+            <a:off x="8421624" y="2999205"/>
+            <a:ext cx="165457" cy="136676"/>
           </a:xfrm>
           <a:prstGeom prst="rect">
             <a:avLst/>
@@ -6490,13 +7387,13 @@
       </p:sp>
       <p:sp>
         <p:nvSpPr>
-          <p:cNvPr id="124" name="Text 122"/>
-          <p:cNvSpPr txBox="1"/>
-          <p:nvPr/>
-        </p:nvSpPr>
-        <p:spPr>
-          <a:xfrm>
-            <a:off x="9317736" y="2943292"/>
+          <p:cNvPr id="147" name="Text 145"/>
+          <p:cNvSpPr txBox="1"/>
+          <p:nvPr/>
+        </p:nvSpPr>
+        <p:spPr>
+          <a:xfrm>
+            <a:off x="9363456" y="2943292"/>
             <a:ext cx="786384" cy="248502"/>
           </a:xfrm>
           <a:prstGeom prst="rect">
@@ -6529,13 +7426,13 @@
       </p:sp>
       <p:sp>
         <p:nvSpPr>
-          <p:cNvPr id="125" name="Text 123"/>
-          <p:cNvSpPr txBox="1"/>
-          <p:nvPr/>
-        </p:nvSpPr>
-        <p:spPr>
-          <a:xfrm>
-            <a:off x="10104120" y="2943292"/>
+          <p:cNvPr id="148" name="Text 146"/>
+          <p:cNvSpPr txBox="1"/>
+          <p:nvPr/>
+        </p:nvSpPr>
+        <p:spPr>
+          <a:xfrm>
+            <a:off x="10149840" y="2943292"/>
             <a:ext cx="566928" cy="248502"/>
           </a:xfrm>
           <a:prstGeom prst="rect">
@@ -6568,13 +7465,13 @@
       </p:sp>
       <p:sp>
         <p:nvSpPr>
-          <p:cNvPr id="126" name="Text 124"/>
-          <p:cNvSpPr txBox="1"/>
-          <p:nvPr/>
-        </p:nvSpPr>
-        <p:spPr>
-          <a:xfrm>
-            <a:off x="10671048" y="2943292"/>
+          <p:cNvPr id="149" name="Text 147"/>
+          <p:cNvSpPr txBox="1"/>
+          <p:nvPr/>
+        </p:nvSpPr>
+        <p:spPr>
+          <a:xfrm>
+            <a:off x="10716768" y="2943292"/>
             <a:ext cx="749808" cy="248502"/>
           </a:xfrm>
           <a:prstGeom prst="rect">
@@ -6607,14 +7504,53 @@
       </p:sp>
       <p:sp>
         <p:nvSpPr>
-          <p:cNvPr id="127" name="Text 125"/>
+          <p:cNvPr id="150" name="Text 148"/>
           <p:cNvSpPr txBox="1"/>
           <p:nvPr/>
         </p:nvSpPr>
         <p:spPr>
           <a:xfrm>
             <a:off x="6208776" y="3191794"/>
-            <a:ext cx="1938528" cy="248502"/>
+            <a:ext cx="310896" cy="248502"/>
+          </a:xfrm>
+          <a:prstGeom prst="rect">
+            <a:avLst/>
+          </a:prstGeom>
+          <a:noFill/>
+          <a:ln/>
+        </p:spPr>
+        <p:txBody>
+          <a:bodyPr wrap="square" lIns="0" tIns="0" rIns="0" bIns="0" rtlCol="0" anchor="ctr"/>
+          <a:lstStyle/>
+          <a:p>
+            <a:pPr algn="r" indent="0" marL="0">
+              <a:buNone/>
+            </a:pPr>
+            <a:r>
+              <a:rPr lang="en-US" sz="1200" dirty="0">
+                <a:solidFill>
+                  <a:srgbClr val="9AA3AD"/>
+                </a:solidFill>
+                <a:latin typeface="Inter" pitchFamily="34" charset="0"/>
+                <a:ea typeface="Inter" pitchFamily="34" charset="-122"/>
+                <a:cs typeface="Inter" pitchFamily="34" charset="-120"/>
+              </a:rPr>
+              <a:t>24</a:t>
+            </a:r>
+            <a:endParaRPr lang="en-US" sz="1200" dirty="0"/>
+          </a:p>
+        </p:txBody>
+      </p:sp>
+      <p:sp>
+        <p:nvSpPr>
+          <p:cNvPr id="151" name="Text 149"/>
+          <p:cNvSpPr txBox="1"/>
+          <p:nvPr/>
+        </p:nvSpPr>
+        <p:spPr>
+          <a:xfrm>
+            <a:off x="6565392" y="3191794"/>
+            <a:ext cx="1783080" cy="248502"/>
           </a:xfrm>
           <a:prstGeom prst="rect">
             <a:avLst/>
@@ -6646,14 +7582,14 @@
       </p:sp>
       <p:sp>
         <p:nvSpPr>
-          <p:cNvPr id="128" name="Shape 126"/>
+          <p:cNvPr id="152" name="Shape 150"/>
           <p:cNvSpPr/>
           <p:nvPr/>
         </p:nvSpPr>
         <p:spPr>
           <a:xfrm>
-            <a:off x="8220456" y="3247707"/>
-            <a:ext cx="181881" cy="136676"/>
+            <a:off x="8421624" y="3247707"/>
+            <a:ext cx="154758" cy="136676"/>
           </a:xfrm>
           <a:prstGeom prst="rect">
             <a:avLst/>
@@ -6666,13 +7602,13 @@
       </p:sp>
       <p:sp>
         <p:nvSpPr>
-          <p:cNvPr id="129" name="Text 127"/>
-          <p:cNvSpPr txBox="1"/>
-          <p:nvPr/>
-        </p:nvSpPr>
-        <p:spPr>
-          <a:xfrm>
-            <a:off x="9317736" y="3191794"/>
+          <p:cNvPr id="153" name="Text 151"/>
+          <p:cNvSpPr txBox="1"/>
+          <p:nvPr/>
+        </p:nvSpPr>
+        <p:spPr>
+          <a:xfrm>
+            <a:off x="9363456" y="3191794"/>
             <a:ext cx="786384" cy="248502"/>
           </a:xfrm>
           <a:prstGeom prst="rect">
@@ -6705,13 +7641,13 @@
       </p:sp>
       <p:sp>
         <p:nvSpPr>
-          <p:cNvPr id="130" name="Text 128"/>
-          <p:cNvSpPr txBox="1"/>
-          <p:nvPr/>
-        </p:nvSpPr>
-        <p:spPr>
-          <a:xfrm>
-            <a:off x="10104120" y="3191794"/>
+          <p:cNvPr id="154" name="Text 152"/>
+          <p:cNvSpPr txBox="1"/>
+          <p:nvPr/>
+        </p:nvSpPr>
+        <p:spPr>
+          <a:xfrm>
+            <a:off x="10149840" y="3191794"/>
             <a:ext cx="566928" cy="248502"/>
           </a:xfrm>
           <a:prstGeom prst="rect">
@@ -6744,13 +7680,13 @@
       </p:sp>
       <p:sp>
         <p:nvSpPr>
-          <p:cNvPr id="131" name="Text 129"/>
-          <p:cNvSpPr txBox="1"/>
-          <p:nvPr/>
-        </p:nvSpPr>
-        <p:spPr>
-          <a:xfrm>
-            <a:off x="10671048" y="3191794"/>
+          <p:cNvPr id="155" name="Text 153"/>
+          <p:cNvSpPr txBox="1"/>
+          <p:nvPr/>
+        </p:nvSpPr>
+        <p:spPr>
+          <a:xfrm>
+            <a:off x="10716768" y="3191794"/>
             <a:ext cx="749808" cy="248502"/>
           </a:xfrm>
           <a:prstGeom prst="rect">
@@ -6783,14 +7719,53 @@
       </p:sp>
       <p:sp>
         <p:nvSpPr>
-          <p:cNvPr id="132" name="Text 130"/>
+          <p:cNvPr id="156" name="Text 154"/>
           <p:cNvSpPr txBox="1"/>
           <p:nvPr/>
         </p:nvSpPr>
         <p:spPr>
           <a:xfrm>
             <a:off x="6208776" y="3440296"/>
-            <a:ext cx="1938528" cy="248502"/>
+            <a:ext cx="310896" cy="248502"/>
+          </a:xfrm>
+          <a:prstGeom prst="rect">
+            <a:avLst/>
+          </a:prstGeom>
+          <a:noFill/>
+          <a:ln/>
+        </p:spPr>
+        <p:txBody>
+          <a:bodyPr wrap="square" lIns="0" tIns="0" rIns="0" bIns="0" rtlCol="0" anchor="ctr"/>
+          <a:lstStyle/>
+          <a:p>
+            <a:pPr algn="r" indent="0" marL="0">
+              <a:buNone/>
+            </a:pPr>
+            <a:r>
+              <a:rPr lang="en-US" sz="1200" dirty="0">
+                <a:solidFill>
+                  <a:srgbClr val="9AA3AD"/>
+                </a:solidFill>
+                <a:latin typeface="Inter" pitchFamily="34" charset="0"/>
+                <a:ea typeface="Inter" pitchFamily="34" charset="-122"/>
+                <a:cs typeface="Inter" pitchFamily="34" charset="-120"/>
+              </a:rPr>
+              <a:t>25</a:t>
+            </a:r>
+            <a:endParaRPr lang="en-US" sz="1200" dirty="0"/>
+          </a:p>
+        </p:txBody>
+      </p:sp>
+      <p:sp>
+        <p:nvSpPr>
+          <p:cNvPr id="157" name="Text 155"/>
+          <p:cNvSpPr txBox="1"/>
+          <p:nvPr/>
+        </p:nvSpPr>
+        <p:spPr>
+          <a:xfrm>
+            <a:off x="6565392" y="3440296"/>
+            <a:ext cx="1783080" cy="248502"/>
           </a:xfrm>
           <a:prstGeom prst="rect">
             <a:avLst/>
@@ -6822,14 +7797,14 @@
       </p:sp>
       <p:sp>
         <p:nvSpPr>
-          <p:cNvPr id="133" name="Shape 131"/>
+          <p:cNvPr id="158" name="Shape 156"/>
           <p:cNvSpPr/>
           <p:nvPr/>
         </p:nvSpPr>
         <p:spPr>
           <a:xfrm>
-            <a:off x="8220456" y="3496208"/>
-            <a:ext cx="178186" cy="136676"/>
+            <a:off x="8421624" y="3496208"/>
+            <a:ext cx="151615" cy="136676"/>
           </a:xfrm>
           <a:prstGeom prst="rect">
             <a:avLst/>
@@ -6842,13 +7817,13 @@
       </p:sp>
       <p:sp>
         <p:nvSpPr>
-          <p:cNvPr id="134" name="Text 132"/>
-          <p:cNvSpPr txBox="1"/>
-          <p:nvPr/>
-        </p:nvSpPr>
-        <p:spPr>
-          <a:xfrm>
-            <a:off x="9317736" y="3440296"/>
+          <p:cNvPr id="159" name="Text 157"/>
+          <p:cNvSpPr txBox="1"/>
+          <p:nvPr/>
+        </p:nvSpPr>
+        <p:spPr>
+          <a:xfrm>
+            <a:off x="9363456" y="3440296"/>
             <a:ext cx="786384" cy="248502"/>
           </a:xfrm>
           <a:prstGeom prst="rect">
@@ -6881,13 +7856,13 @@
       </p:sp>
       <p:sp>
         <p:nvSpPr>
-          <p:cNvPr id="135" name="Text 133"/>
-          <p:cNvSpPr txBox="1"/>
-          <p:nvPr/>
-        </p:nvSpPr>
-        <p:spPr>
-          <a:xfrm>
-            <a:off x="10104120" y="3440296"/>
+          <p:cNvPr id="160" name="Text 158"/>
+          <p:cNvSpPr txBox="1"/>
+          <p:nvPr/>
+        </p:nvSpPr>
+        <p:spPr>
+          <a:xfrm>
+            <a:off x="10149840" y="3440296"/>
             <a:ext cx="566928" cy="248502"/>
           </a:xfrm>
           <a:prstGeom prst="rect">
@@ -6920,13 +7895,13 @@
       </p:sp>
       <p:sp>
         <p:nvSpPr>
-          <p:cNvPr id="136" name="Text 134"/>
-          <p:cNvSpPr txBox="1"/>
-          <p:nvPr/>
-        </p:nvSpPr>
-        <p:spPr>
-          <a:xfrm>
-            <a:off x="10671048" y="3440296"/>
+          <p:cNvPr id="161" name="Text 159"/>
+          <p:cNvSpPr txBox="1"/>
+          <p:nvPr/>
+        </p:nvSpPr>
+        <p:spPr>
+          <a:xfrm>
+            <a:off x="10716768" y="3440296"/>
             <a:ext cx="749808" cy="248502"/>
           </a:xfrm>
           <a:prstGeom prst="rect">
@@ -6959,14 +7934,53 @@
       </p:sp>
       <p:sp>
         <p:nvSpPr>
-          <p:cNvPr id="137" name="Text 135"/>
+          <p:cNvPr id="162" name="Text 160"/>
           <p:cNvSpPr txBox="1"/>
           <p:nvPr/>
         </p:nvSpPr>
         <p:spPr>
           <a:xfrm>
             <a:off x="6208776" y="3688797"/>
-            <a:ext cx="1938528" cy="248502"/>
+            <a:ext cx="310896" cy="248502"/>
+          </a:xfrm>
+          <a:prstGeom prst="rect">
+            <a:avLst/>
+          </a:prstGeom>
+          <a:noFill/>
+          <a:ln/>
+        </p:spPr>
+        <p:txBody>
+          <a:bodyPr wrap="square" lIns="0" tIns="0" rIns="0" bIns="0" rtlCol="0" anchor="ctr"/>
+          <a:lstStyle/>
+          <a:p>
+            <a:pPr algn="r" indent="0" marL="0">
+              <a:buNone/>
+            </a:pPr>
+            <a:r>
+              <a:rPr lang="en-US" sz="1200" dirty="0">
+                <a:solidFill>
+                  <a:srgbClr val="9AA3AD"/>
+                </a:solidFill>
+                <a:latin typeface="Inter" pitchFamily="34" charset="0"/>
+                <a:ea typeface="Inter" pitchFamily="34" charset="-122"/>
+                <a:cs typeface="Inter" pitchFamily="34" charset="-120"/>
+              </a:rPr>
+              <a:t>26</a:t>
+            </a:r>
+            <a:endParaRPr lang="en-US" sz="1200" dirty="0"/>
+          </a:p>
+        </p:txBody>
+      </p:sp>
+      <p:sp>
+        <p:nvSpPr>
+          <p:cNvPr id="163" name="Text 161"/>
+          <p:cNvSpPr txBox="1"/>
+          <p:nvPr/>
+        </p:nvSpPr>
+        <p:spPr>
+          <a:xfrm>
+            <a:off x="6565392" y="3688797"/>
+            <a:ext cx="1783080" cy="248502"/>
           </a:xfrm>
           <a:prstGeom prst="rect">
             <a:avLst/>
@@ -6998,14 +8012,14 @@
       </p:sp>
       <p:sp>
         <p:nvSpPr>
-          <p:cNvPr id="138" name="Shape 136"/>
+          <p:cNvPr id="164" name="Shape 162"/>
           <p:cNvSpPr/>
           <p:nvPr/>
         </p:nvSpPr>
         <p:spPr>
           <a:xfrm>
-            <a:off x="8220456" y="3744710"/>
-            <a:ext cx="174696" cy="136676"/>
+            <a:off x="8421624" y="3744710"/>
+            <a:ext cx="148645" cy="136676"/>
           </a:xfrm>
           <a:prstGeom prst="rect">
             <a:avLst/>
@@ -7018,13 +8032,13 @@
       </p:sp>
       <p:sp>
         <p:nvSpPr>
-          <p:cNvPr id="139" name="Text 137"/>
-          <p:cNvSpPr txBox="1"/>
-          <p:nvPr/>
-        </p:nvSpPr>
-        <p:spPr>
-          <a:xfrm>
-            <a:off x="9317736" y="3688797"/>
+          <p:cNvPr id="165" name="Text 163"/>
+          <p:cNvSpPr txBox="1"/>
+          <p:nvPr/>
+        </p:nvSpPr>
+        <p:spPr>
+          <a:xfrm>
+            <a:off x="9363456" y="3688797"/>
             <a:ext cx="786384" cy="248502"/>
           </a:xfrm>
           <a:prstGeom prst="rect">
@@ -7057,13 +8071,13 @@
       </p:sp>
       <p:sp>
         <p:nvSpPr>
-          <p:cNvPr id="140" name="Text 138"/>
-          <p:cNvSpPr txBox="1"/>
-          <p:nvPr/>
-        </p:nvSpPr>
-        <p:spPr>
-          <a:xfrm>
-            <a:off x="10104120" y="3688797"/>
+          <p:cNvPr id="166" name="Text 164"/>
+          <p:cNvSpPr txBox="1"/>
+          <p:nvPr/>
+        </p:nvSpPr>
+        <p:spPr>
+          <a:xfrm>
+            <a:off x="10149840" y="3688797"/>
             <a:ext cx="566928" cy="248502"/>
           </a:xfrm>
           <a:prstGeom prst="rect">
@@ -7096,13 +8110,13 @@
       </p:sp>
       <p:sp>
         <p:nvSpPr>
-          <p:cNvPr id="141" name="Text 139"/>
-          <p:cNvSpPr txBox="1"/>
-          <p:nvPr/>
-        </p:nvSpPr>
-        <p:spPr>
-          <a:xfrm>
-            <a:off x="10671048" y="3688797"/>
+          <p:cNvPr id="167" name="Text 165"/>
+          <p:cNvSpPr txBox="1"/>
+          <p:nvPr/>
+        </p:nvSpPr>
+        <p:spPr>
+          <a:xfrm>
+            <a:off x="10716768" y="3688797"/>
             <a:ext cx="749808" cy="248502"/>
           </a:xfrm>
           <a:prstGeom prst="rect">
@@ -7135,14 +8149,53 @@
       </p:sp>
       <p:sp>
         <p:nvSpPr>
-          <p:cNvPr id="142" name="Text 140"/>
+          <p:cNvPr id="168" name="Text 166"/>
           <p:cNvSpPr txBox="1"/>
           <p:nvPr/>
         </p:nvSpPr>
         <p:spPr>
           <a:xfrm>
             <a:off x="6208776" y="3937299"/>
-            <a:ext cx="1938528" cy="248502"/>
+            <a:ext cx="310896" cy="248502"/>
+          </a:xfrm>
+          <a:prstGeom prst="rect">
+            <a:avLst/>
+          </a:prstGeom>
+          <a:noFill/>
+          <a:ln/>
+        </p:spPr>
+        <p:txBody>
+          <a:bodyPr wrap="square" lIns="0" tIns="0" rIns="0" bIns="0" rtlCol="0" anchor="ctr"/>
+          <a:lstStyle/>
+          <a:p>
+            <a:pPr algn="r" indent="0" marL="0">
+              <a:buNone/>
+            </a:pPr>
+            <a:r>
+              <a:rPr lang="en-US" sz="1200" dirty="0">
+                <a:solidFill>
+                  <a:srgbClr val="9AA3AD"/>
+                </a:solidFill>
+                <a:latin typeface="Inter" pitchFamily="34" charset="0"/>
+                <a:ea typeface="Inter" pitchFamily="34" charset="-122"/>
+                <a:cs typeface="Inter" pitchFamily="34" charset="-120"/>
+              </a:rPr>
+              <a:t>27</a:t>
+            </a:r>
+            <a:endParaRPr lang="en-US" sz="1200" dirty="0"/>
+          </a:p>
+        </p:txBody>
+      </p:sp>
+      <p:sp>
+        <p:nvSpPr>
+          <p:cNvPr id="169" name="Text 167"/>
+          <p:cNvSpPr txBox="1"/>
+          <p:nvPr/>
+        </p:nvSpPr>
+        <p:spPr>
+          <a:xfrm>
+            <a:off x="6565392" y="3937299"/>
+            <a:ext cx="1783080" cy="248502"/>
           </a:xfrm>
           <a:prstGeom prst="rect">
             <a:avLst/>
@@ -7174,14 +8227,14 @@
       </p:sp>
       <p:sp>
         <p:nvSpPr>
-          <p:cNvPr id="143" name="Shape 141"/>
+          <p:cNvPr id="170" name="Shape 168"/>
           <p:cNvSpPr/>
           <p:nvPr/>
         </p:nvSpPr>
         <p:spPr>
           <a:xfrm>
-            <a:off x="8220456" y="3993212"/>
-            <a:ext cx="174121" cy="136676"/>
+            <a:off x="8421624" y="3993212"/>
+            <a:ext cx="148155" cy="136676"/>
           </a:xfrm>
           <a:prstGeom prst="rect">
             <a:avLst/>
@@ -7194,13 +8247,13 @@
       </p:sp>
       <p:sp>
         <p:nvSpPr>
-          <p:cNvPr id="144" name="Text 142"/>
-          <p:cNvSpPr txBox="1"/>
-          <p:nvPr/>
-        </p:nvSpPr>
-        <p:spPr>
-          <a:xfrm>
-            <a:off x="9317736" y="3937299"/>
+          <p:cNvPr id="171" name="Text 169"/>
+          <p:cNvSpPr txBox="1"/>
+          <p:nvPr/>
+        </p:nvSpPr>
+        <p:spPr>
+          <a:xfrm>
+            <a:off x="9363456" y="3937299"/>
             <a:ext cx="786384" cy="248502"/>
           </a:xfrm>
           <a:prstGeom prst="rect">
@@ -7233,13 +8286,13 @@
       </p:sp>
       <p:sp>
         <p:nvSpPr>
-          <p:cNvPr id="145" name="Text 143"/>
-          <p:cNvSpPr txBox="1"/>
-          <p:nvPr/>
-        </p:nvSpPr>
-        <p:spPr>
-          <a:xfrm>
-            <a:off x="10104120" y="3937299"/>
+          <p:cNvPr id="172" name="Text 170"/>
+          <p:cNvSpPr txBox="1"/>
+          <p:nvPr/>
+        </p:nvSpPr>
+        <p:spPr>
+          <a:xfrm>
+            <a:off x="10149840" y="3937299"/>
             <a:ext cx="566928" cy="248502"/>
           </a:xfrm>
           <a:prstGeom prst="rect">
@@ -7272,13 +8325,13 @@
       </p:sp>
       <p:sp>
         <p:nvSpPr>
-          <p:cNvPr id="146" name="Text 144"/>
-          <p:cNvSpPr txBox="1"/>
-          <p:nvPr/>
-        </p:nvSpPr>
-        <p:spPr>
-          <a:xfrm>
-            <a:off x="10671048" y="3937299"/>
+          <p:cNvPr id="173" name="Text 171"/>
+          <p:cNvSpPr txBox="1"/>
+          <p:nvPr/>
+        </p:nvSpPr>
+        <p:spPr>
+          <a:xfrm>
+            <a:off x="10716768" y="3937299"/>
             <a:ext cx="749808" cy="248502"/>
           </a:xfrm>
           <a:prstGeom prst="rect">
@@ -7311,14 +8364,53 @@
       </p:sp>
       <p:sp>
         <p:nvSpPr>
-          <p:cNvPr id="147" name="Text 145"/>
+          <p:cNvPr id="174" name="Text 172"/>
           <p:cNvSpPr txBox="1"/>
           <p:nvPr/>
         </p:nvSpPr>
         <p:spPr>
           <a:xfrm>
             <a:off x="6208776" y="4185800"/>
-            <a:ext cx="1938528" cy="248502"/>
+            <a:ext cx="310896" cy="248502"/>
+          </a:xfrm>
+          <a:prstGeom prst="rect">
+            <a:avLst/>
+          </a:prstGeom>
+          <a:noFill/>
+          <a:ln/>
+        </p:spPr>
+        <p:txBody>
+          <a:bodyPr wrap="square" lIns="0" tIns="0" rIns="0" bIns="0" rtlCol="0" anchor="ctr"/>
+          <a:lstStyle/>
+          <a:p>
+            <a:pPr algn="r" indent="0" marL="0">
+              <a:buNone/>
+            </a:pPr>
+            <a:r>
+              <a:rPr lang="en-US" sz="1200" dirty="0">
+                <a:solidFill>
+                  <a:srgbClr val="9AA3AD"/>
+                </a:solidFill>
+                <a:latin typeface="Inter" pitchFamily="34" charset="0"/>
+                <a:ea typeface="Inter" pitchFamily="34" charset="-122"/>
+                <a:cs typeface="Inter" pitchFamily="34" charset="-120"/>
+              </a:rPr>
+              <a:t>28</a:t>
+            </a:r>
+            <a:endParaRPr lang="en-US" sz="1200" dirty="0"/>
+          </a:p>
+        </p:txBody>
+      </p:sp>
+      <p:sp>
+        <p:nvSpPr>
+          <p:cNvPr id="175" name="Text 173"/>
+          <p:cNvSpPr txBox="1"/>
+          <p:nvPr/>
+        </p:nvSpPr>
+        <p:spPr>
+          <a:xfrm>
+            <a:off x="6565392" y="4185800"/>
+            <a:ext cx="1783080" cy="248502"/>
           </a:xfrm>
           <a:prstGeom prst="rect">
             <a:avLst/>
@@ -7350,14 +8442,14 @@
       </p:sp>
       <p:sp>
         <p:nvSpPr>
-          <p:cNvPr id="148" name="Shape 146"/>
+          <p:cNvPr id="176" name="Shape 174"/>
           <p:cNvSpPr/>
           <p:nvPr/>
         </p:nvSpPr>
         <p:spPr>
           <a:xfrm>
-            <a:off x="8220456" y="4241713"/>
-            <a:ext cx="172098" cy="136676"/>
+            <a:off x="8421624" y="4241713"/>
+            <a:ext cx="146434" cy="136676"/>
           </a:xfrm>
           <a:prstGeom prst="rect">
             <a:avLst/>
@@ -7370,13 +8462,13 @@
       </p:sp>
       <p:sp>
         <p:nvSpPr>
-          <p:cNvPr id="149" name="Text 147"/>
-          <p:cNvSpPr txBox="1"/>
-          <p:nvPr/>
-        </p:nvSpPr>
-        <p:spPr>
-          <a:xfrm>
-            <a:off x="9317736" y="4185800"/>
+          <p:cNvPr id="177" name="Text 175"/>
+          <p:cNvSpPr txBox="1"/>
+          <p:nvPr/>
+        </p:nvSpPr>
+        <p:spPr>
+          <a:xfrm>
+            <a:off x="9363456" y="4185800"/>
             <a:ext cx="786384" cy="248502"/>
           </a:xfrm>
           <a:prstGeom prst="rect">
@@ -7409,13 +8501,13 @@
       </p:sp>
       <p:sp>
         <p:nvSpPr>
-          <p:cNvPr id="150" name="Text 148"/>
-          <p:cNvSpPr txBox="1"/>
-          <p:nvPr/>
-        </p:nvSpPr>
-        <p:spPr>
-          <a:xfrm>
-            <a:off x="10104120" y="4185800"/>
+          <p:cNvPr id="178" name="Text 176"/>
+          <p:cNvSpPr txBox="1"/>
+          <p:nvPr/>
+        </p:nvSpPr>
+        <p:spPr>
+          <a:xfrm>
+            <a:off x="10149840" y="4185800"/>
             <a:ext cx="566928" cy="248502"/>
           </a:xfrm>
           <a:prstGeom prst="rect">
@@ -7448,13 +8540,13 @@
       </p:sp>
       <p:sp>
         <p:nvSpPr>
-          <p:cNvPr id="151" name="Text 149"/>
-          <p:cNvSpPr txBox="1"/>
-          <p:nvPr/>
-        </p:nvSpPr>
-        <p:spPr>
-          <a:xfrm>
-            <a:off x="10671048" y="4185800"/>
+          <p:cNvPr id="179" name="Text 177"/>
+          <p:cNvSpPr txBox="1"/>
+          <p:nvPr/>
+        </p:nvSpPr>
+        <p:spPr>
+          <a:xfrm>
+            <a:off x="10716768" y="4185800"/>
             <a:ext cx="749808" cy="248502"/>
           </a:xfrm>
           <a:prstGeom prst="rect">
@@ -7487,14 +8579,53 @@
       </p:sp>
       <p:sp>
         <p:nvSpPr>
-          <p:cNvPr id="152" name="Text 150"/>
+          <p:cNvPr id="180" name="Text 178"/>
           <p:cNvSpPr txBox="1"/>
           <p:nvPr/>
         </p:nvSpPr>
         <p:spPr>
           <a:xfrm>
             <a:off x="6208776" y="4434302"/>
-            <a:ext cx="1938528" cy="248502"/>
+            <a:ext cx="310896" cy="248502"/>
+          </a:xfrm>
+          <a:prstGeom prst="rect">
+            <a:avLst/>
+          </a:prstGeom>
+          <a:noFill/>
+          <a:ln/>
+        </p:spPr>
+        <p:txBody>
+          <a:bodyPr wrap="square" lIns="0" tIns="0" rIns="0" bIns="0" rtlCol="0" anchor="ctr"/>
+          <a:lstStyle/>
+          <a:p>
+            <a:pPr algn="r" indent="0" marL="0">
+              <a:buNone/>
+            </a:pPr>
+            <a:r>
+              <a:rPr lang="en-US" sz="1200" dirty="0">
+                <a:solidFill>
+                  <a:srgbClr val="9AA3AD"/>
+                </a:solidFill>
+                <a:latin typeface="Inter" pitchFamily="34" charset="0"/>
+                <a:ea typeface="Inter" pitchFamily="34" charset="-122"/>
+                <a:cs typeface="Inter" pitchFamily="34" charset="-120"/>
+              </a:rPr>
+              <a:t>29</a:t>
+            </a:r>
+            <a:endParaRPr lang="en-US" sz="1200" dirty="0"/>
+          </a:p>
+        </p:txBody>
+      </p:sp>
+      <p:sp>
+        <p:nvSpPr>
+          <p:cNvPr id="181" name="Text 179"/>
+          <p:cNvSpPr txBox="1"/>
+          <p:nvPr/>
+        </p:nvSpPr>
+        <p:spPr>
+          <a:xfrm>
+            <a:off x="6565392" y="4434302"/>
+            <a:ext cx="1783080" cy="248502"/>
           </a:xfrm>
           <a:prstGeom prst="rect">
             <a:avLst/>
@@ -7526,14 +8657,14 @@
       </p:sp>
       <p:sp>
         <p:nvSpPr>
-          <p:cNvPr id="153" name="Shape 151"/>
+          <p:cNvPr id="182" name="Shape 180"/>
           <p:cNvSpPr/>
           <p:nvPr/>
         </p:nvSpPr>
         <p:spPr>
           <a:xfrm>
-            <a:off x="8220456" y="4490215"/>
-            <a:ext cx="158631" cy="136676"/>
+            <a:off x="8421624" y="4490215"/>
+            <a:ext cx="134976" cy="136676"/>
           </a:xfrm>
           <a:prstGeom prst="rect">
             <a:avLst/>
@@ -7546,13 +8677,13 @@
       </p:sp>
       <p:sp>
         <p:nvSpPr>
-          <p:cNvPr id="154" name="Text 152"/>
-          <p:cNvSpPr txBox="1"/>
-          <p:nvPr/>
-        </p:nvSpPr>
-        <p:spPr>
-          <a:xfrm>
-            <a:off x="9317736" y="4434302"/>
+          <p:cNvPr id="183" name="Text 181"/>
+          <p:cNvSpPr txBox="1"/>
+          <p:nvPr/>
+        </p:nvSpPr>
+        <p:spPr>
+          <a:xfrm>
+            <a:off x="9363456" y="4434302"/>
             <a:ext cx="786384" cy="248502"/>
           </a:xfrm>
           <a:prstGeom prst="rect">
@@ -7585,13 +8716,13 @@
       </p:sp>
       <p:sp>
         <p:nvSpPr>
-          <p:cNvPr id="155" name="Text 153"/>
-          <p:cNvSpPr txBox="1"/>
-          <p:nvPr/>
-        </p:nvSpPr>
-        <p:spPr>
-          <a:xfrm>
-            <a:off x="10104120" y="4434302"/>
+          <p:cNvPr id="184" name="Text 182"/>
+          <p:cNvSpPr txBox="1"/>
+          <p:nvPr/>
+        </p:nvSpPr>
+        <p:spPr>
+          <a:xfrm>
+            <a:off x="10149840" y="4434302"/>
             <a:ext cx="566928" cy="248502"/>
           </a:xfrm>
           <a:prstGeom prst="rect">
@@ -7624,13 +8755,13 @@
       </p:sp>
       <p:sp>
         <p:nvSpPr>
-          <p:cNvPr id="156" name="Text 154"/>
-          <p:cNvSpPr txBox="1"/>
-          <p:nvPr/>
-        </p:nvSpPr>
-        <p:spPr>
-          <a:xfrm>
-            <a:off x="10671048" y="4434302"/>
+          <p:cNvPr id="185" name="Text 183"/>
+          <p:cNvSpPr txBox="1"/>
+          <p:nvPr/>
+        </p:nvSpPr>
+        <p:spPr>
+          <a:xfrm>
+            <a:off x="10716768" y="4434302"/>
             <a:ext cx="749808" cy="248502"/>
           </a:xfrm>
           <a:prstGeom prst="rect">
@@ -7663,14 +8794,53 @@
       </p:sp>
       <p:sp>
         <p:nvSpPr>
-          <p:cNvPr id="157" name="Text 155"/>
+          <p:cNvPr id="186" name="Text 184"/>
           <p:cNvSpPr txBox="1"/>
           <p:nvPr/>
         </p:nvSpPr>
         <p:spPr>
           <a:xfrm>
             <a:off x="6208776" y="4682804"/>
-            <a:ext cx="1938528" cy="248502"/>
+            <a:ext cx="310896" cy="248502"/>
+          </a:xfrm>
+          <a:prstGeom prst="rect">
+            <a:avLst/>
+          </a:prstGeom>
+          <a:noFill/>
+          <a:ln/>
+        </p:spPr>
+        <p:txBody>
+          <a:bodyPr wrap="square" lIns="0" tIns="0" rIns="0" bIns="0" rtlCol="0" anchor="ctr"/>
+          <a:lstStyle/>
+          <a:p>
+            <a:pPr algn="r" indent="0" marL="0">
+              <a:buNone/>
+            </a:pPr>
+            <a:r>
+              <a:rPr lang="en-US" sz="1200" dirty="0">
+                <a:solidFill>
+                  <a:srgbClr val="9AA3AD"/>
+                </a:solidFill>
+                <a:latin typeface="Inter" pitchFamily="34" charset="0"/>
+                <a:ea typeface="Inter" pitchFamily="34" charset="-122"/>
+                <a:cs typeface="Inter" pitchFamily="34" charset="-120"/>
+              </a:rPr>
+              <a:t>30</a:t>
+            </a:r>
+            <a:endParaRPr lang="en-US" sz="1200" dirty="0"/>
+          </a:p>
+        </p:txBody>
+      </p:sp>
+      <p:sp>
+        <p:nvSpPr>
+          <p:cNvPr id="187" name="Text 185"/>
+          <p:cNvSpPr txBox="1"/>
+          <p:nvPr/>
+        </p:nvSpPr>
+        <p:spPr>
+          <a:xfrm>
+            <a:off x="6565392" y="4682804"/>
+            <a:ext cx="1783080" cy="248502"/>
           </a:xfrm>
           <a:prstGeom prst="rect">
             <a:avLst/>
@@ -7702,14 +8872,14 @@
       </p:sp>
       <p:sp>
         <p:nvSpPr>
-          <p:cNvPr id="158" name="Shape 156"/>
+          <p:cNvPr id="188" name="Shape 186"/>
           <p:cNvSpPr/>
           <p:nvPr/>
         </p:nvSpPr>
         <p:spPr>
           <a:xfrm>
-            <a:off x="8220456" y="4738717"/>
-            <a:ext cx="156929" cy="136676"/>
+            <a:off x="8421624" y="4738717"/>
+            <a:ext cx="133528" cy="136676"/>
           </a:xfrm>
           <a:prstGeom prst="rect">
             <a:avLst/>
@@ -7722,13 +8892,13 @@
       </p:sp>
       <p:sp>
         <p:nvSpPr>
-          <p:cNvPr id="159" name="Text 157"/>
-          <p:cNvSpPr txBox="1"/>
-          <p:nvPr/>
-        </p:nvSpPr>
-        <p:spPr>
-          <a:xfrm>
-            <a:off x="9317736" y="4682804"/>
+          <p:cNvPr id="189" name="Text 187"/>
+          <p:cNvSpPr txBox="1"/>
+          <p:nvPr/>
+        </p:nvSpPr>
+        <p:spPr>
+          <a:xfrm>
+            <a:off x="9363456" y="4682804"/>
             <a:ext cx="786384" cy="248502"/>
           </a:xfrm>
           <a:prstGeom prst="rect">
@@ -7761,13 +8931,13 @@
       </p:sp>
       <p:sp>
         <p:nvSpPr>
-          <p:cNvPr id="160" name="Text 158"/>
-          <p:cNvSpPr txBox="1"/>
-          <p:nvPr/>
-        </p:nvSpPr>
-        <p:spPr>
-          <a:xfrm>
-            <a:off x="10104120" y="4682804"/>
+          <p:cNvPr id="190" name="Text 188"/>
+          <p:cNvSpPr txBox="1"/>
+          <p:nvPr/>
+        </p:nvSpPr>
+        <p:spPr>
+          <a:xfrm>
+            <a:off x="10149840" y="4682804"/>
             <a:ext cx="566928" cy="248502"/>
           </a:xfrm>
           <a:prstGeom prst="rect">
@@ -7800,13 +8970,13 @@
       </p:sp>
       <p:sp>
         <p:nvSpPr>
-          <p:cNvPr id="161" name="Text 159"/>
-          <p:cNvSpPr txBox="1"/>
-          <p:nvPr/>
-        </p:nvSpPr>
-        <p:spPr>
-          <a:xfrm>
-            <a:off x="10671048" y="4682804"/>
+          <p:cNvPr id="191" name="Text 189"/>
+          <p:cNvSpPr txBox="1"/>
+          <p:nvPr/>
+        </p:nvSpPr>
+        <p:spPr>
+          <a:xfrm>
+            <a:off x="10716768" y="4682804"/>
             <a:ext cx="749808" cy="248502"/>
           </a:xfrm>
           <a:prstGeom prst="rect">
@@ -7839,14 +9009,53 @@
       </p:sp>
       <p:sp>
         <p:nvSpPr>
-          <p:cNvPr id="162" name="Text 160"/>
+          <p:cNvPr id="192" name="Text 190"/>
           <p:cNvSpPr txBox="1"/>
           <p:nvPr/>
         </p:nvSpPr>
         <p:spPr>
           <a:xfrm>
             <a:off x="6208776" y="4931305"/>
-            <a:ext cx="1938528" cy="248502"/>
+            <a:ext cx="310896" cy="248502"/>
+          </a:xfrm>
+          <a:prstGeom prst="rect">
+            <a:avLst/>
+          </a:prstGeom>
+          <a:noFill/>
+          <a:ln/>
+        </p:spPr>
+        <p:txBody>
+          <a:bodyPr wrap="square" lIns="0" tIns="0" rIns="0" bIns="0" rtlCol="0" anchor="ctr"/>
+          <a:lstStyle/>
+          <a:p>
+            <a:pPr algn="r" indent="0" marL="0">
+              <a:buNone/>
+            </a:pPr>
+            <a:r>
+              <a:rPr lang="en-US" sz="1200" dirty="0">
+                <a:solidFill>
+                  <a:srgbClr val="9AA3AD"/>
+                </a:solidFill>
+                <a:latin typeface="Inter" pitchFamily="34" charset="0"/>
+                <a:ea typeface="Inter" pitchFamily="34" charset="-122"/>
+                <a:cs typeface="Inter" pitchFamily="34" charset="-120"/>
+              </a:rPr>
+              <a:t>31</a:t>
+            </a:r>
+            <a:endParaRPr lang="en-US" sz="1200" dirty="0"/>
+          </a:p>
+        </p:txBody>
+      </p:sp>
+      <p:sp>
+        <p:nvSpPr>
+          <p:cNvPr id="193" name="Text 191"/>
+          <p:cNvSpPr txBox="1"/>
+          <p:nvPr/>
+        </p:nvSpPr>
+        <p:spPr>
+          <a:xfrm>
+            <a:off x="6565392" y="4931305"/>
+            <a:ext cx="1783080" cy="248502"/>
           </a:xfrm>
           <a:prstGeom prst="rect">
             <a:avLst/>
@@ -7878,14 +9087,14 @@
       </p:sp>
       <p:sp>
         <p:nvSpPr>
-          <p:cNvPr id="163" name="Shape 161"/>
+          <p:cNvPr id="194" name="Shape 192"/>
           <p:cNvSpPr/>
           <p:nvPr/>
         </p:nvSpPr>
         <p:spPr>
           <a:xfrm>
-            <a:off x="8220456" y="4987218"/>
-            <a:ext cx="127568" cy="136676"/>
+            <a:off x="8421624" y="4987218"/>
+            <a:ext cx="108545" cy="136676"/>
           </a:xfrm>
           <a:prstGeom prst="rect">
             <a:avLst/>
@@ -7898,13 +9107,13 @@
       </p:sp>
       <p:sp>
         <p:nvSpPr>
-          <p:cNvPr id="164" name="Text 162"/>
-          <p:cNvSpPr txBox="1"/>
-          <p:nvPr/>
-        </p:nvSpPr>
-        <p:spPr>
-          <a:xfrm>
-            <a:off x="9317736" y="4931305"/>
+          <p:cNvPr id="195" name="Text 193"/>
+          <p:cNvSpPr txBox="1"/>
+          <p:nvPr/>
+        </p:nvSpPr>
+        <p:spPr>
+          <a:xfrm>
+            <a:off x="9363456" y="4931305"/>
             <a:ext cx="786384" cy="248502"/>
           </a:xfrm>
           <a:prstGeom prst="rect">
@@ -7937,13 +9146,13 @@
       </p:sp>
       <p:sp>
         <p:nvSpPr>
-          <p:cNvPr id="165" name="Text 163"/>
-          <p:cNvSpPr txBox="1"/>
-          <p:nvPr/>
-        </p:nvSpPr>
-        <p:spPr>
-          <a:xfrm>
-            <a:off x="10104120" y="4931305"/>
+          <p:cNvPr id="196" name="Text 194"/>
+          <p:cNvSpPr txBox="1"/>
+          <p:nvPr/>
+        </p:nvSpPr>
+        <p:spPr>
+          <a:xfrm>
+            <a:off x="10149840" y="4931305"/>
             <a:ext cx="566928" cy="248502"/>
           </a:xfrm>
           <a:prstGeom prst="rect">
@@ -7976,13 +9185,13 @@
       </p:sp>
       <p:sp>
         <p:nvSpPr>
-          <p:cNvPr id="166" name="Text 164"/>
-          <p:cNvSpPr txBox="1"/>
-          <p:nvPr/>
-        </p:nvSpPr>
-        <p:spPr>
-          <a:xfrm>
-            <a:off x="10671048" y="4931305"/>
+          <p:cNvPr id="197" name="Text 195"/>
+          <p:cNvSpPr txBox="1"/>
+          <p:nvPr/>
+        </p:nvSpPr>
+        <p:spPr>
+          <a:xfrm>
+            <a:off x="10716768" y="4931305"/>
             <a:ext cx="749808" cy="248502"/>
           </a:xfrm>
           <a:prstGeom prst="rect">
@@ -8015,14 +9224,53 @@
       </p:sp>
       <p:sp>
         <p:nvSpPr>
-          <p:cNvPr id="167" name="Text 165"/>
+          <p:cNvPr id="198" name="Text 196"/>
           <p:cNvSpPr txBox="1"/>
           <p:nvPr/>
         </p:nvSpPr>
         <p:spPr>
           <a:xfrm>
             <a:off x="6208776" y="5179807"/>
-            <a:ext cx="1938528" cy="248502"/>
+            <a:ext cx="310896" cy="248502"/>
+          </a:xfrm>
+          <a:prstGeom prst="rect">
+            <a:avLst/>
+          </a:prstGeom>
+          <a:noFill/>
+          <a:ln/>
+        </p:spPr>
+        <p:txBody>
+          <a:bodyPr wrap="square" lIns="0" tIns="0" rIns="0" bIns="0" rtlCol="0" anchor="ctr"/>
+          <a:lstStyle/>
+          <a:p>
+            <a:pPr algn="r" indent="0" marL="0">
+              <a:buNone/>
+            </a:pPr>
+            <a:r>
+              <a:rPr lang="en-US" sz="1200" dirty="0">
+                <a:solidFill>
+                  <a:srgbClr val="9AA3AD"/>
+                </a:solidFill>
+                <a:latin typeface="Inter" pitchFamily="34" charset="0"/>
+                <a:ea typeface="Inter" pitchFamily="34" charset="-122"/>
+                <a:cs typeface="Inter" pitchFamily="34" charset="-120"/>
+              </a:rPr>
+              <a:t>32</a:t>
+            </a:r>
+            <a:endParaRPr lang="en-US" sz="1200" dirty="0"/>
+          </a:p>
+        </p:txBody>
+      </p:sp>
+      <p:sp>
+        <p:nvSpPr>
+          <p:cNvPr id="199" name="Text 197"/>
+          <p:cNvSpPr txBox="1"/>
+          <p:nvPr/>
+        </p:nvSpPr>
+        <p:spPr>
+          <a:xfrm>
+            <a:off x="6565392" y="5179807"/>
+            <a:ext cx="1783080" cy="248502"/>
           </a:xfrm>
           <a:prstGeom prst="rect">
             <a:avLst/>
@@ -8054,14 +9302,14 @@
       </p:sp>
       <p:sp>
         <p:nvSpPr>
-          <p:cNvPr id="168" name="Shape 166"/>
+          <p:cNvPr id="200" name="Shape 198"/>
           <p:cNvSpPr/>
           <p:nvPr/>
         </p:nvSpPr>
         <p:spPr>
           <a:xfrm>
-            <a:off x="8220456" y="5235720"/>
-            <a:ext cx="104440" cy="136676"/>
+            <a:off x="8421624" y="5235720"/>
+            <a:ext cx="88865" cy="136676"/>
           </a:xfrm>
           <a:prstGeom prst="rect">
             <a:avLst/>
@@ -8074,13 +9322,13 @@
       </p:sp>
       <p:sp>
         <p:nvSpPr>
-          <p:cNvPr id="169" name="Text 167"/>
-          <p:cNvSpPr txBox="1"/>
-          <p:nvPr/>
-        </p:nvSpPr>
-        <p:spPr>
-          <a:xfrm>
-            <a:off x="9317736" y="5179807"/>
+          <p:cNvPr id="201" name="Text 199"/>
+          <p:cNvSpPr txBox="1"/>
+          <p:nvPr/>
+        </p:nvSpPr>
+        <p:spPr>
+          <a:xfrm>
+            <a:off x="9363456" y="5179807"/>
             <a:ext cx="786384" cy="248502"/>
           </a:xfrm>
           <a:prstGeom prst="rect">
@@ -8113,13 +9361,13 @@
       </p:sp>
       <p:sp>
         <p:nvSpPr>
-          <p:cNvPr id="170" name="Text 168"/>
-          <p:cNvSpPr txBox="1"/>
-          <p:nvPr/>
-        </p:nvSpPr>
-        <p:spPr>
-          <a:xfrm>
-            <a:off x="10104120" y="5179807"/>
+          <p:cNvPr id="202" name="Text 200"/>
+          <p:cNvSpPr txBox="1"/>
+          <p:nvPr/>
+        </p:nvSpPr>
+        <p:spPr>
+          <a:xfrm>
+            <a:off x="10149840" y="5179807"/>
             <a:ext cx="566928" cy="248502"/>
           </a:xfrm>
           <a:prstGeom prst="rect">
@@ -8152,13 +9400,13 @@
       </p:sp>
       <p:sp>
         <p:nvSpPr>
-          <p:cNvPr id="171" name="Text 169"/>
-          <p:cNvSpPr txBox="1"/>
-          <p:nvPr/>
-        </p:nvSpPr>
-        <p:spPr>
-          <a:xfrm>
-            <a:off x="10671048" y="5179807"/>
+          <p:cNvPr id="203" name="Text 201"/>
+          <p:cNvSpPr txBox="1"/>
+          <p:nvPr/>
+        </p:nvSpPr>
+        <p:spPr>
+          <a:xfrm>
+            <a:off x="10716768" y="5179807"/>
             <a:ext cx="749808" cy="248502"/>
           </a:xfrm>
           <a:prstGeom prst="rect">
@@ -8191,14 +9439,53 @@
       </p:sp>
       <p:sp>
         <p:nvSpPr>
-          <p:cNvPr id="172" name="Text 170"/>
+          <p:cNvPr id="204" name="Text 202"/>
           <p:cNvSpPr txBox="1"/>
           <p:nvPr/>
         </p:nvSpPr>
         <p:spPr>
           <a:xfrm>
             <a:off x="6208776" y="5428309"/>
-            <a:ext cx="1938528" cy="248502"/>
+            <a:ext cx="310896" cy="248502"/>
+          </a:xfrm>
+          <a:prstGeom prst="rect">
+            <a:avLst/>
+          </a:prstGeom>
+          <a:noFill/>
+          <a:ln/>
+        </p:spPr>
+        <p:txBody>
+          <a:bodyPr wrap="square" lIns="0" tIns="0" rIns="0" bIns="0" rtlCol="0" anchor="ctr"/>
+          <a:lstStyle/>
+          <a:p>
+            <a:pPr algn="r" indent="0" marL="0">
+              <a:buNone/>
+            </a:pPr>
+            <a:r>
+              <a:rPr lang="en-US" sz="1200" dirty="0">
+                <a:solidFill>
+                  <a:srgbClr val="9AA3AD"/>
+                </a:solidFill>
+                <a:latin typeface="Inter" pitchFamily="34" charset="0"/>
+                <a:ea typeface="Inter" pitchFamily="34" charset="-122"/>
+                <a:cs typeface="Inter" pitchFamily="34" charset="-120"/>
+              </a:rPr>
+              <a:t>33</a:t>
+            </a:r>
+            <a:endParaRPr lang="en-US" sz="1200" dirty="0"/>
+          </a:p>
+        </p:txBody>
+      </p:sp>
+      <p:sp>
+        <p:nvSpPr>
+          <p:cNvPr id="205" name="Text 203"/>
+          <p:cNvSpPr txBox="1"/>
+          <p:nvPr/>
+        </p:nvSpPr>
+        <p:spPr>
+          <a:xfrm>
+            <a:off x="6565392" y="5428309"/>
+            <a:ext cx="1783080" cy="248502"/>
           </a:xfrm>
           <a:prstGeom prst="rect">
             <a:avLst/>
@@ -8230,14 +9517,14 @@
       </p:sp>
       <p:sp>
         <p:nvSpPr>
-          <p:cNvPr id="173" name="Shape 171"/>
+          <p:cNvPr id="206" name="Shape 204"/>
           <p:cNvSpPr/>
           <p:nvPr/>
         </p:nvSpPr>
         <p:spPr>
           <a:xfrm>
-            <a:off x="8220456" y="5484222"/>
-            <a:ext cx="83338" cy="136676"/>
+            <a:off x="8421624" y="5484222"/>
+            <a:ext cx="70911" cy="136676"/>
           </a:xfrm>
           <a:prstGeom prst="rect">
             <a:avLst/>
@@ -8250,13 +9537,13 @@
       </p:sp>
       <p:sp>
         <p:nvSpPr>
-          <p:cNvPr id="174" name="Text 172"/>
-          <p:cNvSpPr txBox="1"/>
-          <p:nvPr/>
-        </p:nvSpPr>
-        <p:spPr>
-          <a:xfrm>
-            <a:off x="9317736" y="5428309"/>
+          <p:cNvPr id="207" name="Text 205"/>
+          <p:cNvSpPr txBox="1"/>
+          <p:nvPr/>
+        </p:nvSpPr>
+        <p:spPr>
+          <a:xfrm>
+            <a:off x="9363456" y="5428309"/>
             <a:ext cx="786384" cy="248502"/>
           </a:xfrm>
           <a:prstGeom prst="rect">
@@ -8289,13 +9576,13 @@
       </p:sp>
       <p:sp>
         <p:nvSpPr>
-          <p:cNvPr id="175" name="Text 173"/>
-          <p:cNvSpPr txBox="1"/>
-          <p:nvPr/>
-        </p:nvSpPr>
-        <p:spPr>
-          <a:xfrm>
-            <a:off x="10104120" y="5428309"/>
+          <p:cNvPr id="208" name="Text 206"/>
+          <p:cNvSpPr txBox="1"/>
+          <p:nvPr/>
+        </p:nvSpPr>
+        <p:spPr>
+          <a:xfrm>
+            <a:off x="10149840" y="5428309"/>
             <a:ext cx="566928" cy="248502"/>
           </a:xfrm>
           <a:prstGeom prst="rect">
@@ -8328,13 +9615,13 @@
       </p:sp>
       <p:sp>
         <p:nvSpPr>
-          <p:cNvPr id="176" name="Text 174"/>
-          <p:cNvSpPr txBox="1"/>
-          <p:nvPr/>
-        </p:nvSpPr>
-        <p:spPr>
-          <a:xfrm>
-            <a:off x="10671048" y="5428309"/>
+          <p:cNvPr id="209" name="Text 207"/>
+          <p:cNvSpPr txBox="1"/>
+          <p:nvPr/>
+        </p:nvSpPr>
+        <p:spPr>
+          <a:xfrm>
+            <a:off x="10716768" y="5428309"/>
             <a:ext cx="749808" cy="248502"/>
           </a:xfrm>
           <a:prstGeom prst="rect">
@@ -8367,7 +9654,27 @@
       </p:sp>
       <p:sp>
         <p:nvSpPr>
-          <p:cNvPr id="177" name="Shape 175"/>
+          <p:cNvPr id="210" name="Shape 208"/>
+          <p:cNvSpPr/>
+          <p:nvPr/>
+        </p:nvSpPr>
+        <p:spPr>
+          <a:xfrm>
+            <a:off x="6085332" y="1700784"/>
+            <a:ext cx="10973" cy="4224528"/>
+          </a:xfrm>
+          <a:prstGeom prst="rect">
+            <a:avLst/>
+          </a:prstGeom>
+          <a:solidFill>
+            <a:srgbClr val="D9D9D9"/>
+          </a:solidFill>
+          <a:ln/>
+        </p:spPr>
+      </p:sp>
+      <p:sp>
+        <p:nvSpPr>
+          <p:cNvPr id="211" name="Shape 209"/>
           <p:cNvSpPr/>
           <p:nvPr/>
         </p:nvSpPr>
@@ -8387,7 +9694,7 @@
       </p:sp>
       <p:sp>
         <p:nvSpPr>
-          <p:cNvPr id="178" name="Text 176"/>
+          <p:cNvPr id="212" name="Text 210"/>
           <p:cNvSpPr txBox="1"/>
           <p:nvPr/>
         </p:nvSpPr>

--- a/day2-deck/decks/Tech Minute - Review.pptx
+++ b/day2-deck/decks/Tech Minute - Review.pptx
@@ -2621,7 +2621,7 @@
               <a:buNone/>
             </a:pPr>
             <a:r>
-              <a:rPr lang="en-US" sz="1300" dirty="0">
+              <a:rPr lang="en-US" sz="1200" dirty="0">
                 <a:solidFill>
                   <a:srgbClr val="1A1A1A"/>
                 </a:solidFill>
@@ -2631,7 +2631,7 @@
               </a:rPr>
               <a:t>TOYOTA HENDERSON</a:t>
             </a:r>
-            <a:endParaRPr lang="en-US" sz="1300" dirty="0"/>
+            <a:endParaRPr lang="en-US" sz="1200" dirty="0"/>
           </a:p>
         </p:txBody>
       </p:sp>
@@ -2836,7 +2836,7 @@
               <a:buNone/>
             </a:pPr>
             <a:r>
-              <a:rPr lang="en-US" sz="1300" dirty="0">
+              <a:rPr lang="en-US" sz="1200" dirty="0">
                 <a:solidFill>
                   <a:srgbClr val="1A1A1A"/>
                 </a:solidFill>
@@ -2846,7 +2846,7 @@
               </a:rPr>
               <a:t>CHEVY LV</a:t>
             </a:r>
-            <a:endParaRPr lang="en-US" sz="1300" dirty="0"/>
+            <a:endParaRPr lang="en-US" sz="1200" dirty="0"/>
           </a:p>
         </p:txBody>
       </p:sp>
@@ -3051,7 +3051,7 @@
               <a:buNone/>
             </a:pPr>
             <a:r>
-              <a:rPr lang="en-US" sz="1300" dirty="0">
+              <a:rPr lang="en-US" sz="1200" dirty="0">
                 <a:solidFill>
                   <a:srgbClr val="1A1A1A"/>
                 </a:solidFill>
@@ -3061,7 +3061,7 @@
               </a:rPr>
               <a:t>CADILLAC</a:t>
             </a:r>
-            <a:endParaRPr lang="en-US" sz="1300" dirty="0"/>
+            <a:endParaRPr lang="en-US" sz="1200" dirty="0"/>
           </a:p>
         </p:txBody>
       </p:sp>
@@ -3266,7 +3266,7 @@
               <a:buNone/>
             </a:pPr>
             <a:r>
-              <a:rPr lang="en-US" sz="1300" dirty="0">
+              <a:rPr lang="en-US" sz="1200" dirty="0">
                 <a:solidFill>
                   <a:srgbClr val="1A1A1A"/>
                 </a:solidFill>
@@ -3276,7 +3276,7 @@
               </a:rPr>
               <a:t>AUDI HENDERSON</a:t>
             </a:r>
-            <a:endParaRPr lang="en-US" sz="1300" dirty="0"/>
+            <a:endParaRPr lang="en-US" sz="1200" dirty="0"/>
           </a:p>
         </p:txBody>
       </p:sp>
@@ -3481,7 +3481,7 @@
               <a:buNone/>
             </a:pPr>
             <a:r>
-              <a:rPr lang="en-US" sz="1300" dirty="0">
+              <a:rPr lang="en-US" sz="1200" dirty="0">
                 <a:solidFill>
                   <a:srgbClr val="1A1A1A"/>
                 </a:solidFill>
@@ -3491,7 +3491,7 @@
               </a:rPr>
               <a:t>HONDA HENDERSON</a:t>
             </a:r>
-            <a:endParaRPr lang="en-US" sz="1300" dirty="0"/>
+            <a:endParaRPr lang="en-US" sz="1200" dirty="0"/>
           </a:p>
         </p:txBody>
       </p:sp>
@@ -3696,7 +3696,7 @@
               <a:buNone/>
             </a:pPr>
             <a:r>
-              <a:rPr lang="en-US" sz="1300" dirty="0">
+              <a:rPr lang="en-US" sz="1200" dirty="0">
                 <a:solidFill>
                   <a:srgbClr val="1A1A1A"/>
                 </a:solidFill>
@@ -3706,7 +3706,7 @@
               </a:rPr>
               <a:t>SUBARU LV</a:t>
             </a:r>
-            <a:endParaRPr lang="en-US" sz="1300" dirty="0"/>
+            <a:endParaRPr lang="en-US" sz="1200" dirty="0"/>
           </a:p>
         </p:txBody>
       </p:sp>
@@ -3911,7 +3911,7 @@
               <a:buNone/>
             </a:pPr>
             <a:r>
-              <a:rPr lang="en-US" sz="1300" dirty="0">
+              <a:rPr lang="en-US" sz="1200" dirty="0">
                 <a:solidFill>
                   <a:srgbClr val="1A1A1A"/>
                 </a:solidFill>
@@ -3921,7 +3921,7 @@
               </a:rPr>
               <a:t>LR LV</a:t>
             </a:r>
-            <a:endParaRPr lang="en-US" sz="1300" dirty="0"/>
+            <a:endParaRPr lang="en-US" sz="1200" dirty="0"/>
           </a:p>
         </p:txBody>
       </p:sp>
@@ -4126,7 +4126,7 @@
               <a:buNone/>
             </a:pPr>
             <a:r>
-              <a:rPr lang="en-US" sz="1300" dirty="0">
+              <a:rPr lang="en-US" sz="1200" dirty="0">
                 <a:solidFill>
                   <a:srgbClr val="1A1A1A"/>
                 </a:solidFill>
@@ -4136,7 +4136,7 @@
               </a:rPr>
               <a:t>TOYOTA PRESCOTT</a:t>
             </a:r>
-            <a:endParaRPr lang="en-US" sz="1300" dirty="0"/>
+            <a:endParaRPr lang="en-US" sz="1200" dirty="0"/>
           </a:p>
         </p:txBody>
       </p:sp>
@@ -4341,7 +4341,7 @@
               <a:buNone/>
             </a:pPr>
             <a:r>
-              <a:rPr lang="en-US" sz="1300" dirty="0">
+              <a:rPr lang="en-US" sz="1200" dirty="0">
                 <a:solidFill>
                   <a:srgbClr val="1A1A1A"/>
                 </a:solidFill>
@@ -4351,7 +4351,7 @@
               </a:rPr>
               <a:t>HONDA NORTH</a:t>
             </a:r>
-            <a:endParaRPr lang="en-US" sz="1300" dirty="0"/>
+            <a:endParaRPr lang="en-US" sz="1200" dirty="0"/>
           </a:p>
         </p:txBody>
       </p:sp>
@@ -4556,7 +4556,7 @@
               <a:buNone/>
             </a:pPr>
             <a:r>
-              <a:rPr lang="en-US" sz="1300" dirty="0">
+              <a:rPr lang="en-US" sz="1200" dirty="0">
                 <a:solidFill>
                   <a:srgbClr val="1A1A1A"/>
                 </a:solidFill>
@@ -4566,7 +4566,7 @@
               </a:rPr>
               <a:t>KIA LV</a:t>
             </a:r>
-            <a:endParaRPr lang="en-US" sz="1300" dirty="0"/>
+            <a:endParaRPr lang="en-US" sz="1200" dirty="0"/>
           </a:p>
         </p:txBody>
       </p:sp>
@@ -4771,7 +4771,7 @@
               <a:buNone/>
             </a:pPr>
             <a:r>
-              <a:rPr lang="en-US" sz="1300" dirty="0">
+              <a:rPr lang="en-US" sz="1200" dirty="0">
                 <a:solidFill>
                   <a:srgbClr val="1A1A1A"/>
                 </a:solidFill>
@@ -4781,7 +4781,7 @@
               </a:rPr>
               <a:t>CHEVY GMC BULLHEAD</a:t>
             </a:r>
-            <a:endParaRPr lang="en-US" sz="1300" dirty="0"/>
+            <a:endParaRPr lang="en-US" sz="1200" dirty="0"/>
           </a:p>
         </p:txBody>
       </p:sp>
@@ -4986,7 +4986,7 @@
               <a:buNone/>
             </a:pPr>
             <a:r>
-              <a:rPr lang="en-US" sz="1300" dirty="0">
+              <a:rPr lang="en-US" sz="1200" dirty="0">
                 <a:solidFill>
                   <a:srgbClr val="1A1A1A"/>
                 </a:solidFill>
@@ -4996,7 +4996,7 @@
               </a:rPr>
               <a:t>TOYOTA SPOKANE</a:t>
             </a:r>
-            <a:endParaRPr lang="en-US" sz="1300" dirty="0"/>
+            <a:endParaRPr lang="en-US" sz="1200" dirty="0"/>
           </a:p>
         </p:txBody>
       </p:sp>
@@ -5201,7 +5201,7 @@
               <a:buNone/>
             </a:pPr>
             <a:r>
-              <a:rPr lang="en-US" sz="1300" dirty="0">
+              <a:rPr lang="en-US" sz="1200" dirty="0">
                 <a:solidFill>
                   <a:srgbClr val="1A1A1A"/>
                 </a:solidFill>
@@ -5211,7 +5211,7 @@
               </a:rPr>
               <a:t>NISSAN</a:t>
             </a:r>
-            <a:endParaRPr lang="en-US" sz="1300" dirty="0"/>
+            <a:endParaRPr lang="en-US" sz="1200" dirty="0"/>
           </a:p>
         </p:txBody>
       </p:sp>
@@ -5416,7 +5416,7 @@
               <a:buNone/>
             </a:pPr>
             <a:r>
-              <a:rPr lang="en-US" sz="1300" dirty="0">
+              <a:rPr lang="en-US" sz="1200" dirty="0">
                 <a:solidFill>
                   <a:srgbClr val="1A1A1A"/>
                 </a:solidFill>
@@ -5426,7 +5426,7 @@
               </a:rPr>
               <a:t>TOYOTA FLAGSTAFF</a:t>
             </a:r>
-            <a:endParaRPr lang="en-US" sz="1300" dirty="0"/>
+            <a:endParaRPr lang="en-US" sz="1200" dirty="0"/>
           </a:p>
         </p:txBody>
       </p:sp>
@@ -5631,7 +5631,7 @@
               <a:buNone/>
             </a:pPr>
             <a:r>
-              <a:rPr lang="en-US" sz="1300" dirty="0">
+              <a:rPr lang="en-US" sz="1200" dirty="0">
                 <a:solidFill>
                   <a:srgbClr val="1A1A1A"/>
                 </a:solidFill>
@@ -5641,7 +5641,7 @@
               </a:rPr>
               <a:t>VW HENDERSON</a:t>
             </a:r>
-            <a:endParaRPr lang="en-US" sz="1300" dirty="0"/>
+            <a:endParaRPr lang="en-US" sz="1200" dirty="0"/>
           </a:p>
         </p:txBody>
       </p:sp>
@@ -5846,7 +5846,7 @@
               <a:buNone/>
             </a:pPr>
             <a:r>
-              <a:rPr lang="en-US" sz="1300" dirty="0">
+              <a:rPr lang="en-US" sz="1200" dirty="0">
                 <a:solidFill>
                   <a:srgbClr val="1A1A1A"/>
                 </a:solidFill>
@@ -5856,7 +5856,7 @@
               </a:rPr>
               <a:t>VOLVO</a:t>
             </a:r>
-            <a:endParaRPr lang="en-US" sz="1300" dirty="0"/>
+            <a:endParaRPr lang="en-US" sz="1200" dirty="0"/>
           </a:p>
         </p:txBody>
       </p:sp>
@@ -6061,7 +6061,7 @@
               <a:buNone/>
             </a:pPr>
             <a:r>
-              <a:rPr lang="en-US" sz="1300" dirty="0">
+              <a:rPr lang="en-US" sz="1200" dirty="0">
                 <a:solidFill>
                   <a:srgbClr val="1A1A1A"/>
                 </a:solidFill>
@@ -6071,7 +6071,7 @@
               </a:rPr>
               <a:t>ACURA</a:t>
             </a:r>
-            <a:endParaRPr lang="en-US" sz="1300" dirty="0"/>
+            <a:endParaRPr lang="en-US" sz="1200" dirty="0"/>
           </a:p>
         </p:txBody>
       </p:sp>
@@ -6276,7 +6276,7 @@
               <a:buNone/>
             </a:pPr>
             <a:r>
-              <a:rPr lang="en-US" sz="1300" dirty="0">
+              <a:rPr lang="en-US" sz="1200" dirty="0">
                 <a:solidFill>
                   <a:srgbClr val="1A1A1A"/>
                 </a:solidFill>
@@ -6286,7 +6286,7 @@
               </a:rPr>
               <a:t>CDJR POST FALLS</a:t>
             </a:r>
-            <a:endParaRPr lang="en-US" sz="1300" dirty="0"/>
+            <a:endParaRPr lang="en-US" sz="1200" dirty="0"/>
           </a:p>
         </p:txBody>
       </p:sp>
@@ -6491,7 +6491,7 @@
               <a:buNone/>
             </a:pPr>
             <a:r>
-              <a:rPr lang="en-US" sz="1300" dirty="0">
+              <a:rPr lang="en-US" sz="1200" dirty="0">
                 <a:solidFill>
                   <a:srgbClr val="1A1A1A"/>
                 </a:solidFill>
@@ -6501,7 +6501,7 @@
               </a:rPr>
               <a:t>KIA ST GEORGE</a:t>
             </a:r>
-            <a:endParaRPr lang="en-US" sz="1300" dirty="0"/>
+            <a:endParaRPr lang="en-US" sz="1200" dirty="0"/>
           </a:p>
         </p:txBody>
       </p:sp>
@@ -6706,7 +6706,7 @@
               <a:buNone/>
             </a:pPr>
             <a:r>
-              <a:rPr lang="en-US" sz="1300" dirty="0">
+              <a:rPr lang="en-US" sz="1200" dirty="0">
                 <a:solidFill>
                   <a:srgbClr val="1A1A1A"/>
                 </a:solidFill>
@@ -6716,7 +6716,7 @@
               </a:rPr>
               <a:t>LEXUS</a:t>
             </a:r>
-            <a:endParaRPr lang="en-US" sz="1300" dirty="0"/>
+            <a:endParaRPr lang="en-US" sz="1200" dirty="0"/>
           </a:p>
         </p:txBody>
       </p:sp>
@@ -6921,7 +6921,7 @@
               <a:buNone/>
             </a:pPr>
             <a:r>
-              <a:rPr lang="en-US" sz="1300" dirty="0">
+              <a:rPr lang="en-US" sz="1200" dirty="0">
                 <a:solidFill>
                   <a:srgbClr val="1A1A1A"/>
                 </a:solidFill>
@@ -6931,7 +6931,7 @@
               </a:rPr>
               <a:t>SUBARU ST GEORGE</a:t>
             </a:r>
-            <a:endParaRPr lang="en-US" sz="1300" dirty="0"/>
+            <a:endParaRPr lang="en-US" sz="1200" dirty="0"/>
           </a:p>
         </p:txBody>
       </p:sp>
@@ -7136,7 +7136,7 @@
               <a:buNone/>
             </a:pPr>
             <a:r>
-              <a:rPr lang="en-US" sz="1300" dirty="0">
+              <a:rPr lang="en-US" sz="1200" dirty="0">
                 <a:solidFill>
                   <a:srgbClr val="1A1A1A"/>
                 </a:solidFill>
@@ -7146,7 +7146,7 @@
               </a:rPr>
               <a:t>AUDI RENO</a:t>
             </a:r>
-            <a:endParaRPr lang="en-US" sz="1300" dirty="0"/>
+            <a:endParaRPr lang="en-US" sz="1200" dirty="0"/>
           </a:p>
         </p:txBody>
       </p:sp>
@@ -7351,7 +7351,7 @@
               <a:buNone/>
             </a:pPr>
             <a:r>
-              <a:rPr lang="en-US" sz="1300" dirty="0">
+              <a:rPr lang="en-US" sz="1200" dirty="0">
                 <a:solidFill>
                   <a:srgbClr val="1A1A1A"/>
                 </a:solidFill>
@@ -7361,7 +7361,7 @@
               </a:rPr>
               <a:t>LINCOLN</a:t>
             </a:r>
-            <a:endParaRPr lang="en-US" sz="1300" dirty="0"/>
+            <a:endParaRPr lang="en-US" sz="1200" dirty="0"/>
           </a:p>
         </p:txBody>
       </p:sp>
@@ -7566,7 +7566,7 @@
               <a:buNone/>
             </a:pPr>
             <a:r>
-              <a:rPr lang="en-US" sz="1300" dirty="0">
+              <a:rPr lang="en-US" sz="1200" dirty="0">
                 <a:solidFill>
                   <a:srgbClr val="1A1A1A"/>
                 </a:solidFill>
@@ -7576,7 +7576,7 @@
               </a:rPr>
               <a:t>HYUNDAI ST GEORGE</a:t>
             </a:r>
-            <a:endParaRPr lang="en-US" sz="1300" dirty="0"/>
+            <a:endParaRPr lang="en-US" sz="1200" dirty="0"/>
           </a:p>
         </p:txBody>
       </p:sp>
@@ -7781,7 +7781,7 @@
               <a:buNone/>
             </a:pPr>
             <a:r>
-              <a:rPr lang="en-US" sz="1300" dirty="0">
+              <a:rPr lang="en-US" sz="1200" dirty="0">
                 <a:solidFill>
                   <a:srgbClr val="1A1A1A"/>
                 </a:solidFill>
@@ -7791,7 +7791,7 @@
               </a:rPr>
               <a:t>MAZDA</a:t>
             </a:r>
-            <a:endParaRPr lang="en-US" sz="1300" dirty="0"/>
+            <a:endParaRPr lang="en-US" sz="1200" dirty="0"/>
           </a:p>
         </p:txBody>
       </p:sp>
@@ -7996,7 +7996,7 @@
               <a:buNone/>
             </a:pPr>
             <a:r>
-              <a:rPr lang="en-US" sz="1300" dirty="0">
+              <a:rPr lang="en-US" sz="1200" dirty="0">
                 <a:solidFill>
                   <a:srgbClr val="1A1A1A"/>
                 </a:solidFill>
@@ -8006,7 +8006,7 @@
               </a:rPr>
               <a:t>SUBARU PRESCOTT</a:t>
             </a:r>
-            <a:endParaRPr lang="en-US" sz="1300" dirty="0"/>
+            <a:endParaRPr lang="en-US" sz="1200" dirty="0"/>
           </a:p>
         </p:txBody>
       </p:sp>
@@ -8211,7 +8211,7 @@
               <a:buNone/>
             </a:pPr>
             <a:r>
-              <a:rPr lang="en-US" sz="1300" dirty="0">
+              <a:rPr lang="en-US" sz="1200" dirty="0">
                 <a:solidFill>
                   <a:srgbClr val="1A1A1A"/>
                 </a:solidFill>
@@ -8221,7 +8221,7 @@
               </a:rPr>
               <a:t>HONDA SPOKANE</a:t>
             </a:r>
-            <a:endParaRPr lang="en-US" sz="1300" dirty="0"/>
+            <a:endParaRPr lang="en-US" sz="1200" dirty="0"/>
           </a:p>
         </p:txBody>
       </p:sp>
@@ -8426,7 +8426,7 @@
               <a:buNone/>
             </a:pPr>
             <a:r>
-              <a:rPr lang="en-US" sz="1300" dirty="0">
+              <a:rPr lang="en-US" sz="1200" dirty="0">
                 <a:solidFill>
                   <a:srgbClr val="1A1A1A"/>
                 </a:solidFill>
@@ -8436,7 +8436,7 @@
               </a:rPr>
               <a:t>LR HENDERSON</a:t>
             </a:r>
-            <a:endParaRPr lang="en-US" sz="1300" dirty="0"/>
+            <a:endParaRPr lang="en-US" sz="1200" dirty="0"/>
           </a:p>
         </p:txBody>
       </p:sp>
@@ -8641,7 +8641,7 @@
               <a:buNone/>
             </a:pPr>
             <a:r>
-              <a:rPr lang="en-US" sz="1300" dirty="0">
+              <a:rPr lang="en-US" sz="1200" dirty="0">
                 <a:solidFill>
                   <a:srgbClr val="1A1A1A"/>
                 </a:solidFill>
@@ -8651,7 +8651,7 @@
               </a:rPr>
               <a:t>LR RENO</a:t>
             </a:r>
-            <a:endParaRPr lang="en-US" sz="1300" dirty="0"/>
+            <a:endParaRPr lang="en-US" sz="1200" dirty="0"/>
           </a:p>
         </p:txBody>
       </p:sp>
@@ -8856,7 +8856,7 @@
               <a:buNone/>
             </a:pPr>
             <a:r>
-              <a:rPr lang="en-US" sz="1300" dirty="0">
+              <a:rPr lang="en-US" sz="1200" dirty="0">
                 <a:solidFill>
                   <a:srgbClr val="1A1A1A"/>
                 </a:solidFill>
@@ -8866,7 +8866,7 @@
               </a:rPr>
               <a:t>GMC PRESCOTT</a:t>
             </a:r>
-            <a:endParaRPr lang="en-US" sz="1300" dirty="0"/>
+            <a:endParaRPr lang="en-US" sz="1200" dirty="0"/>
           </a:p>
         </p:txBody>
       </p:sp>
@@ -9071,7 +9071,7 @@
               <a:buNone/>
             </a:pPr>
             <a:r>
-              <a:rPr lang="en-US" sz="1300" dirty="0">
+              <a:rPr lang="en-US" sz="1200" dirty="0">
                 <a:solidFill>
                   <a:srgbClr val="1A1A1A"/>
                 </a:solidFill>
@@ -9081,7 +9081,7 @@
               </a:rPr>
               <a:t>HYUNDAI PRESCOTT</a:t>
             </a:r>
-            <a:endParaRPr lang="en-US" sz="1300" dirty="0"/>
+            <a:endParaRPr lang="en-US" sz="1200" dirty="0"/>
           </a:p>
         </p:txBody>
       </p:sp>
@@ -9286,7 +9286,7 @@
               <a:buNone/>
             </a:pPr>
             <a:r>
-              <a:rPr lang="en-US" sz="1300" dirty="0">
+              <a:rPr lang="en-US" sz="1200" dirty="0">
                 <a:solidFill>
                   <a:srgbClr val="1A1A1A"/>
                 </a:solidFill>
@@ -9296,7 +9296,7 @@
               </a:rPr>
               <a:t>HONDA FLAGSTAFF</a:t>
             </a:r>
-            <a:endParaRPr lang="en-US" sz="1300" dirty="0"/>
+            <a:endParaRPr lang="en-US" sz="1200" dirty="0"/>
           </a:p>
         </p:txBody>
       </p:sp>
@@ -9501,7 +9501,7 @@
               <a:buNone/>
             </a:pPr>
             <a:r>
-              <a:rPr lang="en-US" sz="1300" dirty="0">
+              <a:rPr lang="en-US" sz="1200" dirty="0">
                 <a:solidFill>
                   <a:srgbClr val="1A1A1A"/>
                 </a:solidFill>
@@ -9511,7 +9511,7 @@
               </a:rPr>
               <a:t>VW ST GEORGE</a:t>
             </a:r>
-            <a:endParaRPr lang="en-US" sz="1300" dirty="0"/>
+            <a:endParaRPr lang="en-US" sz="1200" dirty="0"/>
           </a:p>
         </p:txBody>
       </p:sp>

--- a/day2-deck/decks/Tech Minute - Review.pptx
+++ b/day2-deck/decks/Tech Minute - Review.pptx
@@ -2353,22 +2353,33 @@
         </p:nvSpPr>
         <p:spPr>
           <a:xfrm>
-            <a:off x="3813048" y="1316736"/>
-            <a:ext cx="786384" cy="329184"/>
-          </a:xfrm>
-          <a:prstGeom prst="rect">
-            <a:avLst/>
-          </a:prstGeom>
-          <a:noFill/>
-          <a:ln/>
-        </p:spPr>
-        <p:txBody>
-          <a:bodyPr wrap="square" lIns="0" tIns="0" rIns="0" bIns="0" rtlCol="0" anchor="ctr"/>
-          <a:lstStyle/>
-          <a:p>
-            <a:pPr algn="r" indent="0" marL="0">
-              <a:buNone/>
-            </a:pPr>
+            <a:off x="3474720" y="1316736"/>
+            <a:ext cx="960120" cy="329184"/>
+          </a:xfrm>
+          <a:prstGeom prst="rect">
+            <a:avLst/>
+          </a:prstGeom>
+          <a:noFill/>
+          <a:ln/>
+        </p:spPr>
+        <p:txBody>
+          <a:bodyPr wrap="square" lIns="0" tIns="0" rIns="0" bIns="0" rtlCol="0" anchor="ctr"/>
+          <a:lstStyle/>
+          <a:p>
+            <a:pPr algn="r" indent="0" marL="0">
+              <a:buNone/>
+            </a:pPr>
+            <a:r>
+              <a:rPr lang="en-US" sz="1400" b="1" dirty="0">
+                <a:solidFill>
+                  <a:srgbClr val="595959"/>
+                </a:solidFill>
+                <a:latin typeface="Inter" pitchFamily="34" charset="0"/>
+                <a:ea typeface="Inter" pitchFamily="34" charset="-122"/>
+                <a:cs typeface="Inter" pitchFamily="34" charset="-120"/>
+              </a:rPr>
+              <a:t>A year</a:t>
+            </a:r>
             <a:endParaRPr lang="en-US" sz="1400" dirty="0"/>
           </a:p>
         </p:txBody>
@@ -2381,8 +2392,8 @@
         </p:nvSpPr>
         <p:spPr>
           <a:xfrm>
-            <a:off x="4599432" y="1316736"/>
-            <a:ext cx="566928" cy="329184"/>
+            <a:off x="4434840" y="1316736"/>
+            <a:ext cx="731520" cy="329184"/>
           </a:xfrm>
           <a:prstGeom prst="rect">
             <a:avLst/>
@@ -2459,22 +2470,33 @@
         </p:nvSpPr>
         <p:spPr>
           <a:xfrm>
-            <a:off x="9363456" y="1316736"/>
-            <a:ext cx="786384" cy="329184"/>
-          </a:xfrm>
-          <a:prstGeom prst="rect">
-            <a:avLst/>
-          </a:prstGeom>
-          <a:noFill/>
-          <a:ln/>
-        </p:spPr>
-        <p:txBody>
-          <a:bodyPr wrap="square" lIns="0" tIns="0" rIns="0" bIns="0" rtlCol="0" anchor="ctr"/>
-          <a:lstStyle/>
-          <a:p>
-            <a:pPr algn="r" indent="0" marL="0">
-              <a:buNone/>
-            </a:pPr>
+            <a:off x="9025128" y="1316736"/>
+            <a:ext cx="960120" cy="329184"/>
+          </a:xfrm>
+          <a:prstGeom prst="rect">
+            <a:avLst/>
+          </a:prstGeom>
+          <a:noFill/>
+          <a:ln/>
+        </p:spPr>
+        <p:txBody>
+          <a:bodyPr wrap="square" lIns="0" tIns="0" rIns="0" bIns="0" rtlCol="0" anchor="ctr"/>
+          <a:lstStyle/>
+          <a:p>
+            <a:pPr algn="r" indent="0" marL="0">
+              <a:buNone/>
+            </a:pPr>
+            <a:r>
+              <a:rPr lang="en-US" sz="1400" b="1" dirty="0">
+                <a:solidFill>
+                  <a:srgbClr val="595959"/>
+                </a:solidFill>
+                <a:latin typeface="Inter" pitchFamily="34" charset="0"/>
+                <a:ea typeface="Inter" pitchFamily="34" charset="-122"/>
+                <a:cs typeface="Inter" pitchFamily="34" charset="-120"/>
+              </a:rPr>
+              <a:t>A year</a:t>
+            </a:r>
             <a:endParaRPr lang="en-US" sz="1400" dirty="0"/>
           </a:p>
         </p:txBody>
@@ -2487,8 +2509,8 @@
         </p:nvSpPr>
         <p:spPr>
           <a:xfrm>
-            <a:off x="10149840" y="1316736"/>
-            <a:ext cx="566928" cy="329184"/>
+            <a:off x="9985248" y="1316736"/>
+            <a:ext cx="731520" cy="329184"/>
           </a:xfrm>
           <a:prstGeom prst="rect">
             <a:avLst/>
@@ -2644,7 +2666,7 @@
         <p:spPr>
           <a:xfrm>
             <a:off x="2871216" y="1756697"/>
-            <a:ext cx="886968" cy="136676"/>
+            <a:ext cx="548640" cy="136676"/>
           </a:xfrm>
           <a:prstGeom prst="rect">
             <a:avLst/>
@@ -2663,8 +2685,8 @@
         </p:nvSpPr>
         <p:spPr>
           <a:xfrm>
-            <a:off x="3813048" y="1700784"/>
-            <a:ext cx="786384" cy="248502"/>
+            <a:off x="3474720" y="1700784"/>
+            <a:ext cx="960120" cy="248502"/>
           </a:xfrm>
           <a:prstGeom prst="rect">
             <a:avLst/>
@@ -2682,13 +2704,13 @@
             <a:r>
               <a:rPr lang="en-US" sz="1300" b="1" dirty="0">
                 <a:solidFill>
-                  <a:srgbClr val="1A1A1A"/>
-                </a:solidFill>
-                <a:latin typeface="Inter" pitchFamily="34" charset="0"/>
-                <a:ea typeface="Inter" pitchFamily="34" charset="-122"/>
-                <a:cs typeface="Inter" pitchFamily="34" charset="-120"/>
-              </a:rPr>
-              <a:t>$43.3K</a:t>
+                  <a:srgbClr val="0B2C4A"/>
+                </a:solidFill>
+                <a:latin typeface="Inter" pitchFamily="34" charset="0"/>
+                <a:ea typeface="Inter" pitchFamily="34" charset="-122"/>
+                <a:cs typeface="Inter" pitchFamily="34" charset="-120"/>
+              </a:rPr>
+              <a:t>$43,256</a:t>
             </a:r>
             <a:endParaRPr lang="en-US" sz="1300" dirty="0"/>
           </a:p>
@@ -2702,8 +2724,8 @@
         </p:nvSpPr>
         <p:spPr>
           <a:xfrm>
-            <a:off x="4599432" y="1700784"/>
-            <a:ext cx="566928" cy="248502"/>
+            <a:off x="4434840" y="1700784"/>
+            <a:ext cx="731520" cy="248502"/>
           </a:xfrm>
           <a:prstGeom prst="rect">
             <a:avLst/>
@@ -2859,7 +2881,7 @@
         <p:spPr>
           <a:xfrm>
             <a:off x="2871216" y="2005199"/>
-            <a:ext cx="692398" cy="136676"/>
+            <a:ext cx="428287" cy="136676"/>
           </a:xfrm>
           <a:prstGeom prst="rect">
             <a:avLst/>
@@ -2878,8 +2900,8 @@
         </p:nvSpPr>
         <p:spPr>
           <a:xfrm>
-            <a:off x="3813048" y="1949286"/>
-            <a:ext cx="786384" cy="248502"/>
+            <a:off x="3474720" y="1949286"/>
+            <a:ext cx="960120" cy="248502"/>
           </a:xfrm>
           <a:prstGeom prst="rect">
             <a:avLst/>
@@ -2897,13 +2919,13 @@
             <a:r>
               <a:rPr lang="en-US" sz="1300" b="1" dirty="0">
                 <a:solidFill>
-                  <a:srgbClr val="1A1A1A"/>
-                </a:solidFill>
-                <a:latin typeface="Inter" pitchFamily="34" charset="0"/>
-                <a:ea typeface="Inter" pitchFamily="34" charset="-122"/>
-                <a:cs typeface="Inter" pitchFamily="34" charset="-120"/>
-              </a:rPr>
-              <a:t>$33.8K</a:t>
+                  <a:srgbClr val="0B2C4A"/>
+                </a:solidFill>
+                <a:latin typeface="Inter" pitchFamily="34" charset="0"/>
+                <a:ea typeface="Inter" pitchFamily="34" charset="-122"/>
+                <a:cs typeface="Inter" pitchFamily="34" charset="-120"/>
+              </a:rPr>
+              <a:t>$33,767</a:t>
             </a:r>
             <a:endParaRPr lang="en-US" sz="1300" dirty="0"/>
           </a:p>
@@ -2917,8 +2939,8 @@
         </p:nvSpPr>
         <p:spPr>
           <a:xfrm>
-            <a:off x="4599432" y="1949286"/>
-            <a:ext cx="566928" cy="248502"/>
+            <a:off x="4434840" y="1949286"/>
+            <a:ext cx="731520" cy="248502"/>
           </a:xfrm>
           <a:prstGeom prst="rect">
             <a:avLst/>
@@ -3074,7 +3096,7 @@
         <p:spPr>
           <a:xfrm>
             <a:off x="2871216" y="2253700"/>
-            <a:ext cx="581679" cy="136676"/>
+            <a:ext cx="359802" cy="136676"/>
           </a:xfrm>
           <a:prstGeom prst="rect">
             <a:avLst/>
@@ -3093,8 +3115,8 @@
         </p:nvSpPr>
         <p:spPr>
           <a:xfrm>
-            <a:off x="3813048" y="2197787"/>
-            <a:ext cx="786384" cy="248502"/>
+            <a:off x="3474720" y="2197787"/>
+            <a:ext cx="960120" cy="248502"/>
           </a:xfrm>
           <a:prstGeom prst="rect">
             <a:avLst/>
@@ -3112,13 +3134,13 @@
             <a:r>
               <a:rPr lang="en-US" sz="1300" b="1" dirty="0">
                 <a:solidFill>
-                  <a:srgbClr val="1A1A1A"/>
-                </a:solidFill>
-                <a:latin typeface="Inter" pitchFamily="34" charset="0"/>
-                <a:ea typeface="Inter" pitchFamily="34" charset="-122"/>
-                <a:cs typeface="Inter" pitchFamily="34" charset="-120"/>
-              </a:rPr>
-              <a:t>$28.4K</a:t>
+                  <a:srgbClr val="0B2C4A"/>
+                </a:solidFill>
+                <a:latin typeface="Inter" pitchFamily="34" charset="0"/>
+                <a:ea typeface="Inter" pitchFamily="34" charset="-122"/>
+                <a:cs typeface="Inter" pitchFamily="34" charset="-120"/>
+              </a:rPr>
+              <a:t>$28,367</a:t>
             </a:r>
             <a:endParaRPr lang="en-US" sz="1300" dirty="0"/>
           </a:p>
@@ -3132,8 +3154,8 @@
         </p:nvSpPr>
         <p:spPr>
           <a:xfrm>
-            <a:off x="4599432" y="2197787"/>
-            <a:ext cx="566928" cy="248502"/>
+            <a:off x="4434840" y="2197787"/>
+            <a:ext cx="731520" cy="248502"/>
           </a:xfrm>
           <a:prstGeom prst="rect">
             <a:avLst/>
@@ -3289,7 +3311,7 @@
         <p:spPr>
           <a:xfrm>
             <a:off x="2871216" y="2502202"/>
-            <a:ext cx="558837" cy="136676"/>
+            <a:ext cx="345673" cy="136676"/>
           </a:xfrm>
           <a:prstGeom prst="rect">
             <a:avLst/>
@@ -3308,8 +3330,8 @@
         </p:nvSpPr>
         <p:spPr>
           <a:xfrm>
-            <a:off x="3813048" y="2446289"/>
-            <a:ext cx="786384" cy="248502"/>
+            <a:off x="3474720" y="2446289"/>
+            <a:ext cx="960120" cy="248502"/>
           </a:xfrm>
           <a:prstGeom prst="rect">
             <a:avLst/>
@@ -3327,13 +3349,13 @@
             <a:r>
               <a:rPr lang="en-US" sz="1300" b="1" dirty="0">
                 <a:solidFill>
-                  <a:srgbClr val="1A1A1A"/>
-                </a:solidFill>
-                <a:latin typeface="Inter" pitchFamily="34" charset="0"/>
-                <a:ea typeface="Inter" pitchFamily="34" charset="-122"/>
-                <a:cs typeface="Inter" pitchFamily="34" charset="-120"/>
-              </a:rPr>
-              <a:t>$27.3K</a:t>
+                  <a:srgbClr val="0B2C4A"/>
+                </a:solidFill>
+                <a:latin typeface="Inter" pitchFamily="34" charset="0"/>
+                <a:ea typeface="Inter" pitchFamily="34" charset="-122"/>
+                <a:cs typeface="Inter" pitchFamily="34" charset="-120"/>
+              </a:rPr>
+              <a:t>$27,253</a:t>
             </a:r>
             <a:endParaRPr lang="en-US" sz="1300" dirty="0"/>
           </a:p>
@@ -3347,8 +3369,8 @@
         </p:nvSpPr>
         <p:spPr>
           <a:xfrm>
-            <a:off x="4599432" y="2446289"/>
-            <a:ext cx="566928" cy="248502"/>
+            <a:off x="4434840" y="2446289"/>
+            <a:ext cx="731520" cy="248502"/>
           </a:xfrm>
           <a:prstGeom prst="rect">
             <a:avLst/>
@@ -3504,7 +3526,7 @@
         <p:spPr>
           <a:xfrm>
             <a:off x="2871216" y="2750703"/>
-            <a:ext cx="510915" cy="136676"/>
+            <a:ext cx="316030" cy="136676"/>
           </a:xfrm>
           <a:prstGeom prst="rect">
             <a:avLst/>
@@ -3523,8 +3545,8 @@
         </p:nvSpPr>
         <p:spPr>
           <a:xfrm>
-            <a:off x="3813048" y="2694791"/>
-            <a:ext cx="786384" cy="248502"/>
+            <a:off x="3474720" y="2694791"/>
+            <a:ext cx="960120" cy="248502"/>
           </a:xfrm>
           <a:prstGeom prst="rect">
             <a:avLst/>
@@ -3542,13 +3564,13 @@
             <a:r>
               <a:rPr lang="en-US" sz="1300" b="1" dirty="0">
                 <a:solidFill>
-                  <a:srgbClr val="1A1A1A"/>
-                </a:solidFill>
-                <a:latin typeface="Inter" pitchFamily="34" charset="0"/>
-                <a:ea typeface="Inter" pitchFamily="34" charset="-122"/>
-                <a:cs typeface="Inter" pitchFamily="34" charset="-120"/>
-              </a:rPr>
-              <a:t>$24.9K</a:t>
+                  <a:srgbClr val="0B2C4A"/>
+                </a:solidFill>
+                <a:latin typeface="Inter" pitchFamily="34" charset="0"/>
+                <a:ea typeface="Inter" pitchFamily="34" charset="-122"/>
+                <a:cs typeface="Inter" pitchFamily="34" charset="-120"/>
+              </a:rPr>
+              <a:t>$24,916</a:t>
             </a:r>
             <a:endParaRPr lang="en-US" sz="1300" dirty="0"/>
           </a:p>
@@ -3562,8 +3584,8 @@
         </p:nvSpPr>
         <p:spPr>
           <a:xfrm>
-            <a:off x="4599432" y="2694791"/>
-            <a:ext cx="566928" cy="248502"/>
+            <a:off x="4434840" y="2694791"/>
+            <a:ext cx="731520" cy="248502"/>
           </a:xfrm>
           <a:prstGeom prst="rect">
             <a:avLst/>
@@ -3719,7 +3741,7 @@
         <p:spPr>
           <a:xfrm>
             <a:off x="2871216" y="2999205"/>
-            <a:ext cx="467039" cy="136676"/>
+            <a:ext cx="288890" cy="136676"/>
           </a:xfrm>
           <a:prstGeom prst="rect">
             <a:avLst/>
@@ -3738,8 +3760,8 @@
         </p:nvSpPr>
         <p:spPr>
           <a:xfrm>
-            <a:off x="3813048" y="2943292"/>
-            <a:ext cx="786384" cy="248502"/>
+            <a:off x="3474720" y="2943292"/>
+            <a:ext cx="960120" cy="248502"/>
           </a:xfrm>
           <a:prstGeom prst="rect">
             <a:avLst/>
@@ -3757,13 +3779,13 @@
             <a:r>
               <a:rPr lang="en-US" sz="1300" b="1" dirty="0">
                 <a:solidFill>
-                  <a:srgbClr val="1A1A1A"/>
-                </a:solidFill>
-                <a:latin typeface="Inter" pitchFamily="34" charset="0"/>
-                <a:ea typeface="Inter" pitchFamily="34" charset="-122"/>
-                <a:cs typeface="Inter" pitchFamily="34" charset="-120"/>
-              </a:rPr>
-              <a:t>$22.8K</a:t>
+                  <a:srgbClr val="0B2C4A"/>
+                </a:solidFill>
+                <a:latin typeface="Inter" pitchFamily="34" charset="0"/>
+                <a:ea typeface="Inter" pitchFamily="34" charset="-122"/>
+                <a:cs typeface="Inter" pitchFamily="34" charset="-120"/>
+              </a:rPr>
+              <a:t>$22,777</a:t>
             </a:r>
             <a:endParaRPr lang="en-US" sz="1300" dirty="0"/>
           </a:p>
@@ -3777,8 +3799,8 @@
         </p:nvSpPr>
         <p:spPr>
           <a:xfrm>
-            <a:off x="4599432" y="2943292"/>
-            <a:ext cx="566928" cy="248502"/>
+            <a:off x="4434840" y="2943292"/>
+            <a:ext cx="731520" cy="248502"/>
           </a:xfrm>
           <a:prstGeom prst="rect">
             <a:avLst/>
@@ -3934,7 +3956,7 @@
         <p:spPr>
           <a:xfrm>
             <a:off x="2871216" y="3247707"/>
-            <a:ext cx="334545" cy="136676"/>
+            <a:ext cx="206935" cy="136676"/>
           </a:xfrm>
           <a:prstGeom prst="rect">
             <a:avLst/>
@@ -3953,8 +3975,8 @@
         </p:nvSpPr>
         <p:spPr>
           <a:xfrm>
-            <a:off x="3813048" y="3191794"/>
-            <a:ext cx="786384" cy="248502"/>
+            <a:off x="3474720" y="3191794"/>
+            <a:ext cx="960120" cy="248502"/>
           </a:xfrm>
           <a:prstGeom prst="rect">
             <a:avLst/>
@@ -3972,13 +3994,13 @@
             <a:r>
               <a:rPr lang="en-US" sz="1300" b="1" dirty="0">
                 <a:solidFill>
-                  <a:srgbClr val="1A1A1A"/>
-                </a:solidFill>
-                <a:latin typeface="Inter" pitchFamily="34" charset="0"/>
-                <a:ea typeface="Inter" pitchFamily="34" charset="-122"/>
-                <a:cs typeface="Inter" pitchFamily="34" charset="-120"/>
-              </a:rPr>
-              <a:t>$16.3K</a:t>
+                  <a:srgbClr val="0B2C4A"/>
+                </a:solidFill>
+                <a:latin typeface="Inter" pitchFamily="34" charset="0"/>
+                <a:ea typeface="Inter" pitchFamily="34" charset="-122"/>
+                <a:cs typeface="Inter" pitchFamily="34" charset="-120"/>
+              </a:rPr>
+              <a:t>$16,315</a:t>
             </a:r>
             <a:endParaRPr lang="en-US" sz="1300" dirty="0"/>
           </a:p>
@@ -3992,8 +4014,8 @@
         </p:nvSpPr>
         <p:spPr>
           <a:xfrm>
-            <a:off x="4599432" y="3191794"/>
-            <a:ext cx="566928" cy="248502"/>
+            <a:off x="4434840" y="3191794"/>
+            <a:ext cx="731520" cy="248502"/>
           </a:xfrm>
           <a:prstGeom prst="rect">
             <a:avLst/>
@@ -4149,7 +4171,7 @@
         <p:spPr>
           <a:xfrm>
             <a:off x="2871216" y="3496208"/>
-            <a:ext cx="333005" cy="136676"/>
+            <a:ext cx="205982" cy="136676"/>
           </a:xfrm>
           <a:prstGeom prst="rect">
             <a:avLst/>
@@ -4168,8 +4190,8 @@
         </p:nvSpPr>
         <p:spPr>
           <a:xfrm>
-            <a:off x="3813048" y="3440296"/>
-            <a:ext cx="786384" cy="248502"/>
+            <a:off x="3474720" y="3440296"/>
+            <a:ext cx="960120" cy="248502"/>
           </a:xfrm>
           <a:prstGeom prst="rect">
             <a:avLst/>
@@ -4187,13 +4209,13 @@
             <a:r>
               <a:rPr lang="en-US" sz="1300" b="1" dirty="0">
                 <a:solidFill>
-                  <a:srgbClr val="1A1A1A"/>
-                </a:solidFill>
-                <a:latin typeface="Inter" pitchFamily="34" charset="0"/>
-                <a:ea typeface="Inter" pitchFamily="34" charset="-122"/>
-                <a:cs typeface="Inter" pitchFamily="34" charset="-120"/>
-              </a:rPr>
-              <a:t>$16.2K</a:t>
+                  <a:srgbClr val="0B2C4A"/>
+                </a:solidFill>
+                <a:latin typeface="Inter" pitchFamily="34" charset="0"/>
+                <a:ea typeface="Inter" pitchFamily="34" charset="-122"/>
+                <a:cs typeface="Inter" pitchFamily="34" charset="-120"/>
+              </a:rPr>
+              <a:t>$16,240</a:t>
             </a:r>
             <a:endParaRPr lang="en-US" sz="1300" dirty="0"/>
           </a:p>
@@ -4207,8 +4229,8 @@
         </p:nvSpPr>
         <p:spPr>
           <a:xfrm>
-            <a:off x="4599432" y="3440296"/>
-            <a:ext cx="566928" cy="248502"/>
+            <a:off x="4434840" y="3440296"/>
+            <a:ext cx="731520" cy="248502"/>
           </a:xfrm>
           <a:prstGeom prst="rect">
             <a:avLst/>
@@ -4364,7 +4386,7 @@
         <p:spPr>
           <a:xfrm>
             <a:off x="2871216" y="3744710"/>
-            <a:ext cx="312594" cy="136676"/>
+            <a:ext cx="193357" cy="136676"/>
           </a:xfrm>
           <a:prstGeom prst="rect">
             <a:avLst/>
@@ -4383,8 +4405,8 @@
         </p:nvSpPr>
         <p:spPr>
           <a:xfrm>
-            <a:off x="3813048" y="3688797"/>
-            <a:ext cx="786384" cy="248502"/>
+            <a:off x="3474720" y="3688797"/>
+            <a:ext cx="960120" cy="248502"/>
           </a:xfrm>
           <a:prstGeom prst="rect">
             <a:avLst/>
@@ -4402,13 +4424,13 @@
             <a:r>
               <a:rPr lang="en-US" sz="1300" b="1" dirty="0">
                 <a:solidFill>
-                  <a:srgbClr val="1A1A1A"/>
-                </a:solidFill>
-                <a:latin typeface="Inter" pitchFamily="34" charset="0"/>
-                <a:ea typeface="Inter" pitchFamily="34" charset="-122"/>
-                <a:cs typeface="Inter" pitchFamily="34" charset="-120"/>
-              </a:rPr>
-              <a:t>$15.2K</a:t>
+                  <a:srgbClr val="0B2C4A"/>
+                </a:solidFill>
+                <a:latin typeface="Inter" pitchFamily="34" charset="0"/>
+                <a:ea typeface="Inter" pitchFamily="34" charset="-122"/>
+                <a:cs typeface="Inter" pitchFamily="34" charset="-120"/>
+              </a:rPr>
+              <a:t>$15,245</a:t>
             </a:r>
             <a:endParaRPr lang="en-US" sz="1300" dirty="0"/>
           </a:p>
@@ -4422,8 +4444,8 @@
         </p:nvSpPr>
         <p:spPr>
           <a:xfrm>
-            <a:off x="4599432" y="3688797"/>
-            <a:ext cx="566928" cy="248502"/>
+            <a:off x="4434840" y="3688797"/>
+            <a:ext cx="731520" cy="248502"/>
           </a:xfrm>
           <a:prstGeom prst="rect">
             <a:avLst/>
@@ -4579,7 +4601,7 @@
         <p:spPr>
           <a:xfrm>
             <a:off x="2871216" y="3993212"/>
-            <a:ext cx="302272" cy="136676"/>
+            <a:ext cx="186973" cy="136676"/>
           </a:xfrm>
           <a:prstGeom prst="rect">
             <a:avLst/>
@@ -4598,8 +4620,8 @@
         </p:nvSpPr>
         <p:spPr>
           <a:xfrm>
-            <a:off x="3813048" y="3937299"/>
-            <a:ext cx="786384" cy="248502"/>
+            <a:off x="3474720" y="3937299"/>
+            <a:ext cx="960120" cy="248502"/>
           </a:xfrm>
           <a:prstGeom prst="rect">
             <a:avLst/>
@@ -4617,13 +4639,13 @@
             <a:r>
               <a:rPr lang="en-US" sz="1300" b="1" dirty="0">
                 <a:solidFill>
-                  <a:srgbClr val="1A1A1A"/>
-                </a:solidFill>
-                <a:latin typeface="Inter" pitchFamily="34" charset="0"/>
-                <a:ea typeface="Inter" pitchFamily="34" charset="-122"/>
-                <a:cs typeface="Inter" pitchFamily="34" charset="-120"/>
-              </a:rPr>
-              <a:t>$14.7K</a:t>
+                  <a:srgbClr val="0B2C4A"/>
+                </a:solidFill>
+                <a:latin typeface="Inter" pitchFamily="34" charset="0"/>
+                <a:ea typeface="Inter" pitchFamily="34" charset="-122"/>
+                <a:cs typeface="Inter" pitchFamily="34" charset="-120"/>
+              </a:rPr>
+              <a:t>$14,741</a:t>
             </a:r>
             <a:endParaRPr lang="en-US" sz="1300" dirty="0"/>
           </a:p>
@@ -4637,8 +4659,8 @@
         </p:nvSpPr>
         <p:spPr>
           <a:xfrm>
-            <a:off x="4599432" y="3937299"/>
-            <a:ext cx="566928" cy="248502"/>
+            <a:off x="4434840" y="3937299"/>
+            <a:ext cx="731520" cy="248502"/>
           </a:xfrm>
           <a:prstGeom prst="rect">
             <a:avLst/>
@@ -4794,7 +4816,7 @@
         <p:spPr>
           <a:xfrm>
             <a:off x="2871216" y="4241713"/>
-            <a:ext cx="288162" cy="136676"/>
+            <a:ext cx="178245" cy="136676"/>
           </a:xfrm>
           <a:prstGeom prst="rect">
             <a:avLst/>
@@ -4813,8 +4835,8 @@
         </p:nvSpPr>
         <p:spPr>
           <a:xfrm>
-            <a:off x="3813048" y="4185800"/>
-            <a:ext cx="786384" cy="248502"/>
+            <a:off x="3474720" y="4185800"/>
+            <a:ext cx="960120" cy="248502"/>
           </a:xfrm>
           <a:prstGeom prst="rect">
             <a:avLst/>
@@ -4832,13 +4854,13 @@
             <a:r>
               <a:rPr lang="en-US" sz="1300" b="1" dirty="0">
                 <a:solidFill>
-                  <a:srgbClr val="1A1A1A"/>
-                </a:solidFill>
-                <a:latin typeface="Inter" pitchFamily="34" charset="0"/>
-                <a:ea typeface="Inter" pitchFamily="34" charset="-122"/>
-                <a:cs typeface="Inter" pitchFamily="34" charset="-120"/>
-              </a:rPr>
-              <a:t>$14.1K</a:t>
+                  <a:srgbClr val="0B2C4A"/>
+                </a:solidFill>
+                <a:latin typeface="Inter" pitchFamily="34" charset="0"/>
+                <a:ea typeface="Inter" pitchFamily="34" charset="-122"/>
+                <a:cs typeface="Inter" pitchFamily="34" charset="-120"/>
+              </a:rPr>
+              <a:t>$14,053</a:t>
             </a:r>
             <a:endParaRPr lang="en-US" sz="1300" dirty="0"/>
           </a:p>
@@ -4852,8 +4874,8 @@
         </p:nvSpPr>
         <p:spPr>
           <a:xfrm>
-            <a:off x="4599432" y="4185800"/>
-            <a:ext cx="566928" cy="248502"/>
+            <a:off x="4434840" y="4185800"/>
+            <a:ext cx="731520" cy="248502"/>
           </a:xfrm>
           <a:prstGeom prst="rect">
             <a:avLst/>
@@ -5009,7 +5031,7 @@
         <p:spPr>
           <a:xfrm>
             <a:off x="2871216" y="4490215"/>
-            <a:ext cx="260095" cy="136676"/>
+            <a:ext cx="160884" cy="136676"/>
           </a:xfrm>
           <a:prstGeom prst="rect">
             <a:avLst/>
@@ -5028,8 +5050,8 @@
         </p:nvSpPr>
         <p:spPr>
           <a:xfrm>
-            <a:off x="3813048" y="4434302"/>
-            <a:ext cx="786384" cy="248502"/>
+            <a:off x="3474720" y="4434302"/>
+            <a:ext cx="960120" cy="248502"/>
           </a:xfrm>
           <a:prstGeom prst="rect">
             <a:avLst/>
@@ -5047,13 +5069,13 @@
             <a:r>
               <a:rPr lang="en-US" sz="1300" b="1" dirty="0">
                 <a:solidFill>
-                  <a:srgbClr val="1A1A1A"/>
-                </a:solidFill>
-                <a:latin typeface="Inter" pitchFamily="34" charset="0"/>
-                <a:ea typeface="Inter" pitchFamily="34" charset="-122"/>
-                <a:cs typeface="Inter" pitchFamily="34" charset="-120"/>
-              </a:rPr>
-              <a:t>$12.7K</a:t>
+                  <a:srgbClr val="0B2C4A"/>
+                </a:solidFill>
+                <a:latin typeface="Inter" pitchFamily="34" charset="0"/>
+                <a:ea typeface="Inter" pitchFamily="34" charset="-122"/>
+                <a:cs typeface="Inter" pitchFamily="34" charset="-120"/>
+              </a:rPr>
+              <a:t>$12,684</a:t>
             </a:r>
             <a:endParaRPr lang="en-US" sz="1300" dirty="0"/>
           </a:p>
@@ -5067,8 +5089,8 @@
         </p:nvSpPr>
         <p:spPr>
           <a:xfrm>
-            <a:off x="4599432" y="4434302"/>
-            <a:ext cx="566928" cy="248502"/>
+            <a:off x="4434840" y="4434302"/>
+            <a:ext cx="731520" cy="248502"/>
           </a:xfrm>
           <a:prstGeom prst="rect">
             <a:avLst/>
@@ -5224,7 +5246,7 @@
         <p:spPr>
           <a:xfrm>
             <a:off x="2871216" y="4738717"/>
-            <a:ext cx="257823" cy="136676"/>
+            <a:ext cx="159478" cy="136676"/>
           </a:xfrm>
           <a:prstGeom prst="rect">
             <a:avLst/>
@@ -5243,8 +5265,8 @@
         </p:nvSpPr>
         <p:spPr>
           <a:xfrm>
-            <a:off x="3813048" y="4682804"/>
-            <a:ext cx="786384" cy="248502"/>
+            <a:off x="3474720" y="4682804"/>
+            <a:ext cx="960120" cy="248502"/>
           </a:xfrm>
           <a:prstGeom prst="rect">
             <a:avLst/>
@@ -5262,13 +5284,13 @@
             <a:r>
               <a:rPr lang="en-US" sz="1300" b="1" dirty="0">
                 <a:solidFill>
-                  <a:srgbClr val="1A1A1A"/>
-                </a:solidFill>
-                <a:latin typeface="Inter" pitchFamily="34" charset="0"/>
-                <a:ea typeface="Inter" pitchFamily="34" charset="-122"/>
-                <a:cs typeface="Inter" pitchFamily="34" charset="-120"/>
-              </a:rPr>
-              <a:t>$12.6K</a:t>
+                  <a:srgbClr val="0B2C4A"/>
+                </a:solidFill>
+                <a:latin typeface="Inter" pitchFamily="34" charset="0"/>
+                <a:ea typeface="Inter" pitchFamily="34" charset="-122"/>
+                <a:cs typeface="Inter" pitchFamily="34" charset="-120"/>
+              </a:rPr>
+              <a:t>$12,574</a:t>
             </a:r>
             <a:endParaRPr lang="en-US" sz="1300" dirty="0"/>
           </a:p>
@@ -5282,8 +5304,8 @@
         </p:nvSpPr>
         <p:spPr>
           <a:xfrm>
-            <a:off x="4599432" y="4682804"/>
-            <a:ext cx="566928" cy="248502"/>
+            <a:off x="4434840" y="4682804"/>
+            <a:ext cx="731520" cy="248502"/>
           </a:xfrm>
           <a:prstGeom prst="rect">
             <a:avLst/>
@@ -5439,7 +5461,7 @@
         <p:spPr>
           <a:xfrm>
             <a:off x="2871216" y="4987218"/>
-            <a:ext cx="252824" cy="136676"/>
+            <a:ext cx="156386" cy="136676"/>
           </a:xfrm>
           <a:prstGeom prst="rect">
             <a:avLst/>
@@ -5458,8 +5480,8 @@
         </p:nvSpPr>
         <p:spPr>
           <a:xfrm>
-            <a:off x="3813048" y="4931305"/>
-            <a:ext cx="786384" cy="248502"/>
+            <a:off x="3474720" y="4931305"/>
+            <a:ext cx="960120" cy="248502"/>
           </a:xfrm>
           <a:prstGeom prst="rect">
             <a:avLst/>
@@ -5477,13 +5499,13 @@
             <a:r>
               <a:rPr lang="en-US" sz="1300" b="1" dirty="0">
                 <a:solidFill>
-                  <a:srgbClr val="1A1A1A"/>
-                </a:solidFill>
-                <a:latin typeface="Inter" pitchFamily="34" charset="0"/>
-                <a:ea typeface="Inter" pitchFamily="34" charset="-122"/>
-                <a:cs typeface="Inter" pitchFamily="34" charset="-120"/>
-              </a:rPr>
-              <a:t>$12.3K</a:t>
+                  <a:srgbClr val="0B2C4A"/>
+                </a:solidFill>
+                <a:latin typeface="Inter" pitchFamily="34" charset="0"/>
+                <a:ea typeface="Inter" pitchFamily="34" charset="-122"/>
+                <a:cs typeface="Inter" pitchFamily="34" charset="-120"/>
+              </a:rPr>
+              <a:t>$12,330</a:t>
             </a:r>
             <a:endParaRPr lang="en-US" sz="1300" dirty="0"/>
           </a:p>
@@ -5497,8 +5519,8 @@
         </p:nvSpPr>
         <p:spPr>
           <a:xfrm>
-            <a:off x="4599432" y="4931305"/>
-            <a:ext cx="566928" cy="248502"/>
+            <a:off x="4434840" y="4931305"/>
+            <a:ext cx="731520" cy="248502"/>
           </a:xfrm>
           <a:prstGeom prst="rect">
             <a:avLst/>
@@ -5654,7 +5676,7 @@
         <p:spPr>
           <a:xfrm>
             <a:off x="2871216" y="5235720"/>
-            <a:ext cx="244879" cy="136676"/>
+            <a:ext cx="151472" cy="136676"/>
           </a:xfrm>
           <a:prstGeom prst="rect">
             <a:avLst/>
@@ -5673,8 +5695,8 @@
         </p:nvSpPr>
         <p:spPr>
           <a:xfrm>
-            <a:off x="3813048" y="5179807"/>
-            <a:ext cx="786384" cy="248502"/>
+            <a:off x="3474720" y="5179807"/>
+            <a:ext cx="960120" cy="248502"/>
           </a:xfrm>
           <a:prstGeom prst="rect">
             <a:avLst/>
@@ -5692,13 +5714,13 @@
             <a:r>
               <a:rPr lang="en-US" sz="1300" b="1" dirty="0">
                 <a:solidFill>
-                  <a:srgbClr val="1A1A1A"/>
-                </a:solidFill>
-                <a:latin typeface="Inter" pitchFamily="34" charset="0"/>
-                <a:ea typeface="Inter" pitchFamily="34" charset="-122"/>
-                <a:cs typeface="Inter" pitchFamily="34" charset="-120"/>
-              </a:rPr>
-              <a:t>$11.9K</a:t>
+                  <a:srgbClr val="0B2C4A"/>
+                </a:solidFill>
+                <a:latin typeface="Inter" pitchFamily="34" charset="0"/>
+                <a:ea typeface="Inter" pitchFamily="34" charset="-122"/>
+                <a:cs typeface="Inter" pitchFamily="34" charset="-120"/>
+              </a:rPr>
+              <a:t>$11,942</a:t>
             </a:r>
             <a:endParaRPr lang="en-US" sz="1300" dirty="0"/>
           </a:p>
@@ -5712,8 +5734,8 @@
         </p:nvSpPr>
         <p:spPr>
           <a:xfrm>
-            <a:off x="4599432" y="5179807"/>
-            <a:ext cx="566928" cy="248502"/>
+            <a:off x="4434840" y="5179807"/>
+            <a:ext cx="731520" cy="248502"/>
           </a:xfrm>
           <a:prstGeom prst="rect">
             <a:avLst/>
@@ -5869,7 +5891,7 @@
         <p:spPr>
           <a:xfrm>
             <a:off x="2871216" y="5484222"/>
-            <a:ext cx="233938" cy="136676"/>
+            <a:ext cx="144704" cy="136676"/>
           </a:xfrm>
           <a:prstGeom prst="rect">
             <a:avLst/>
@@ -5888,8 +5910,8 @@
         </p:nvSpPr>
         <p:spPr>
           <a:xfrm>
-            <a:off x="3813048" y="5428309"/>
-            <a:ext cx="786384" cy="248502"/>
+            <a:off x="3474720" y="5428309"/>
+            <a:ext cx="960120" cy="248502"/>
           </a:xfrm>
           <a:prstGeom prst="rect">
             <a:avLst/>
@@ -5907,13 +5929,13 @@
             <a:r>
               <a:rPr lang="en-US" sz="1300" b="1" dirty="0">
                 <a:solidFill>
-                  <a:srgbClr val="1A1A1A"/>
-                </a:solidFill>
-                <a:latin typeface="Inter" pitchFamily="34" charset="0"/>
-                <a:ea typeface="Inter" pitchFamily="34" charset="-122"/>
-                <a:cs typeface="Inter" pitchFamily="34" charset="-120"/>
-              </a:rPr>
-              <a:t>$11.4K</a:t>
+                  <a:srgbClr val="0B2C4A"/>
+                </a:solidFill>
+                <a:latin typeface="Inter" pitchFamily="34" charset="0"/>
+                <a:ea typeface="Inter" pitchFamily="34" charset="-122"/>
+                <a:cs typeface="Inter" pitchFamily="34" charset="-120"/>
+              </a:rPr>
+              <a:t>$11,409</a:t>
             </a:r>
             <a:endParaRPr lang="en-US" sz="1300" dirty="0"/>
           </a:p>
@@ -5927,8 +5949,8 @@
         </p:nvSpPr>
         <p:spPr>
           <a:xfrm>
-            <a:off x="4599432" y="5428309"/>
-            <a:ext cx="566928" cy="248502"/>
+            <a:off x="4434840" y="5428309"/>
+            <a:ext cx="731520" cy="248502"/>
           </a:xfrm>
           <a:prstGeom prst="rect">
             <a:avLst/>
@@ -6084,7 +6106,7 @@
         <p:spPr>
           <a:xfrm>
             <a:off x="2871216" y="5732723"/>
-            <a:ext cx="221407" cy="136676"/>
+            <a:ext cx="136953" cy="136676"/>
           </a:xfrm>
           <a:prstGeom prst="rect">
             <a:avLst/>
@@ -6103,8 +6125,8 @@
         </p:nvSpPr>
         <p:spPr>
           <a:xfrm>
-            <a:off x="3813048" y="5676810"/>
-            <a:ext cx="786384" cy="248502"/>
+            <a:off x="3474720" y="5676810"/>
+            <a:ext cx="960120" cy="248502"/>
           </a:xfrm>
           <a:prstGeom prst="rect">
             <a:avLst/>
@@ -6122,13 +6144,13 @@
             <a:r>
               <a:rPr lang="en-US" sz="1300" b="1" dirty="0">
                 <a:solidFill>
-                  <a:srgbClr val="1A1A1A"/>
-                </a:solidFill>
-                <a:latin typeface="Inter" pitchFamily="34" charset="0"/>
-                <a:ea typeface="Inter" pitchFamily="34" charset="-122"/>
-                <a:cs typeface="Inter" pitchFamily="34" charset="-120"/>
-              </a:rPr>
-              <a:t>$10.8K</a:t>
+                  <a:srgbClr val="0B2C4A"/>
+                </a:solidFill>
+                <a:latin typeface="Inter" pitchFamily="34" charset="0"/>
+                <a:ea typeface="Inter" pitchFamily="34" charset="-122"/>
+                <a:cs typeface="Inter" pitchFamily="34" charset="-120"/>
+              </a:rPr>
+              <a:t>$10,798</a:t>
             </a:r>
             <a:endParaRPr lang="en-US" sz="1300" dirty="0"/>
           </a:p>
@@ -6142,8 +6164,8 @@
         </p:nvSpPr>
         <p:spPr>
           <a:xfrm>
-            <a:off x="4599432" y="5676810"/>
-            <a:ext cx="566928" cy="248502"/>
+            <a:off x="4434840" y="5676810"/>
+            <a:ext cx="731520" cy="248502"/>
           </a:xfrm>
           <a:prstGeom prst="rect">
             <a:avLst/>
@@ -6299,7 +6321,7 @@
         <p:spPr>
           <a:xfrm>
             <a:off x="8421624" y="1756697"/>
-            <a:ext cx="209398" cy="136676"/>
+            <a:ext cx="129525" cy="136676"/>
           </a:xfrm>
           <a:prstGeom prst="rect">
             <a:avLst/>
@@ -6318,8 +6340,8 @@
         </p:nvSpPr>
         <p:spPr>
           <a:xfrm>
-            <a:off x="9363456" y="1700784"/>
-            <a:ext cx="786384" cy="248502"/>
+            <a:off x="9025128" y="1700784"/>
+            <a:ext cx="960120" cy="248502"/>
           </a:xfrm>
           <a:prstGeom prst="rect">
             <a:avLst/>
@@ -6337,13 +6359,13 @@
             <a:r>
               <a:rPr lang="en-US" sz="1300" b="1" dirty="0">
                 <a:solidFill>
-                  <a:srgbClr val="1A1A1A"/>
-                </a:solidFill>
-                <a:latin typeface="Inter" pitchFamily="34" charset="0"/>
-                <a:ea typeface="Inter" pitchFamily="34" charset="-122"/>
-                <a:cs typeface="Inter" pitchFamily="34" charset="-120"/>
-              </a:rPr>
-              <a:t>$10.2K</a:t>
+                  <a:srgbClr val="0B2C4A"/>
+                </a:solidFill>
+                <a:latin typeface="Inter" pitchFamily="34" charset="0"/>
+                <a:ea typeface="Inter" pitchFamily="34" charset="-122"/>
+                <a:cs typeface="Inter" pitchFamily="34" charset="-120"/>
+              </a:rPr>
+              <a:t>$10,212</a:t>
             </a:r>
             <a:endParaRPr lang="en-US" sz="1300" dirty="0"/>
           </a:p>
@@ -6357,8 +6379,8 @@
         </p:nvSpPr>
         <p:spPr>
           <a:xfrm>
-            <a:off x="10149840" y="1700784"/>
-            <a:ext cx="566928" cy="248502"/>
+            <a:off x="9985248" y="1700784"/>
+            <a:ext cx="731520" cy="248502"/>
           </a:xfrm>
           <a:prstGeom prst="rect">
             <a:avLst/>
@@ -6514,7 +6536,7 @@
         <p:spPr>
           <a:xfrm>
             <a:off x="8421624" y="2005199"/>
-            <a:ext cx="187702" cy="136676"/>
+            <a:ext cx="116104" cy="136676"/>
           </a:xfrm>
           <a:prstGeom prst="rect">
             <a:avLst/>
@@ -6533,8 +6555,8 @@
         </p:nvSpPr>
         <p:spPr>
           <a:xfrm>
-            <a:off x="9363456" y="1949286"/>
-            <a:ext cx="786384" cy="248502"/>
+            <a:off x="9025128" y="1949286"/>
+            <a:ext cx="960120" cy="248502"/>
           </a:xfrm>
           <a:prstGeom prst="rect">
             <a:avLst/>
@@ -6552,13 +6574,13 @@
             <a:r>
               <a:rPr lang="en-US" sz="1300" b="1" dirty="0">
                 <a:solidFill>
-                  <a:srgbClr val="1A1A1A"/>
-                </a:solidFill>
-                <a:latin typeface="Inter" pitchFamily="34" charset="0"/>
-                <a:ea typeface="Inter" pitchFamily="34" charset="-122"/>
-                <a:cs typeface="Inter" pitchFamily="34" charset="-120"/>
-              </a:rPr>
-              <a:t>$9.2K</a:t>
+                  <a:srgbClr val="0B2C4A"/>
+                </a:solidFill>
+                <a:latin typeface="Inter" pitchFamily="34" charset="0"/>
+                <a:ea typeface="Inter" pitchFamily="34" charset="-122"/>
+                <a:cs typeface="Inter" pitchFamily="34" charset="-120"/>
+              </a:rPr>
+              <a:t>$9,154</a:t>
             </a:r>
             <a:endParaRPr lang="en-US" sz="1300" dirty="0"/>
           </a:p>
@@ -6572,8 +6594,8 @@
         </p:nvSpPr>
         <p:spPr>
           <a:xfrm>
-            <a:off x="10149840" y="1949286"/>
-            <a:ext cx="566928" cy="248502"/>
+            <a:off x="9985248" y="1949286"/>
+            <a:ext cx="731520" cy="248502"/>
           </a:xfrm>
           <a:prstGeom prst="rect">
             <a:avLst/>
@@ -6729,7 +6751,7 @@
         <p:spPr>
           <a:xfrm>
             <a:off x="8421624" y="2253700"/>
-            <a:ext cx="180536" cy="136676"/>
+            <a:ext cx="111671" cy="136676"/>
           </a:xfrm>
           <a:prstGeom prst="rect">
             <a:avLst/>
@@ -6748,8 +6770,8 @@
         </p:nvSpPr>
         <p:spPr>
           <a:xfrm>
-            <a:off x="9363456" y="2197787"/>
-            <a:ext cx="786384" cy="248502"/>
+            <a:off x="9025128" y="2197787"/>
+            <a:ext cx="960120" cy="248502"/>
           </a:xfrm>
           <a:prstGeom prst="rect">
             <a:avLst/>
@@ -6767,13 +6789,13 @@
             <a:r>
               <a:rPr lang="en-US" sz="1300" b="1" dirty="0">
                 <a:solidFill>
-                  <a:srgbClr val="1A1A1A"/>
-                </a:solidFill>
-                <a:latin typeface="Inter" pitchFamily="34" charset="0"/>
-                <a:ea typeface="Inter" pitchFamily="34" charset="-122"/>
-                <a:cs typeface="Inter" pitchFamily="34" charset="-120"/>
-              </a:rPr>
-              <a:t>$8.8K</a:t>
+                  <a:srgbClr val="0B2C4A"/>
+                </a:solidFill>
+                <a:latin typeface="Inter" pitchFamily="34" charset="0"/>
+                <a:ea typeface="Inter" pitchFamily="34" charset="-122"/>
+                <a:cs typeface="Inter" pitchFamily="34" charset="-120"/>
+              </a:rPr>
+              <a:t>$8,804</a:t>
             </a:r>
             <a:endParaRPr lang="en-US" sz="1300" dirty="0"/>
           </a:p>
@@ -6787,8 +6809,8 @@
         </p:nvSpPr>
         <p:spPr>
           <a:xfrm>
-            <a:off x="10149840" y="2197787"/>
-            <a:ext cx="566928" cy="248502"/>
+            <a:off x="9985248" y="2197787"/>
+            <a:ext cx="731520" cy="248502"/>
           </a:xfrm>
           <a:prstGeom prst="rect">
             <a:avLst/>
@@ -6944,7 +6966,7 @@
         <p:spPr>
           <a:xfrm>
             <a:off x="8421624" y="2502202"/>
-            <a:ext cx="173314" cy="136676"/>
+            <a:ext cx="107204" cy="136676"/>
           </a:xfrm>
           <a:prstGeom prst="rect">
             <a:avLst/>
@@ -6963,8 +6985,8 @@
         </p:nvSpPr>
         <p:spPr>
           <a:xfrm>
-            <a:off x="9363456" y="2446289"/>
-            <a:ext cx="786384" cy="248502"/>
+            <a:off x="9025128" y="2446289"/>
+            <a:ext cx="960120" cy="248502"/>
           </a:xfrm>
           <a:prstGeom prst="rect">
             <a:avLst/>
@@ -6982,13 +7004,13 @@
             <a:r>
               <a:rPr lang="en-US" sz="1300" b="1" dirty="0">
                 <a:solidFill>
-                  <a:srgbClr val="1A1A1A"/>
-                </a:solidFill>
-                <a:latin typeface="Inter" pitchFamily="34" charset="0"/>
-                <a:ea typeface="Inter" pitchFamily="34" charset="-122"/>
-                <a:cs typeface="Inter" pitchFamily="34" charset="-120"/>
-              </a:rPr>
-              <a:t>$8.5K</a:t>
+                  <a:srgbClr val="0B2C4A"/>
+                </a:solidFill>
+                <a:latin typeface="Inter" pitchFamily="34" charset="0"/>
+                <a:ea typeface="Inter" pitchFamily="34" charset="-122"/>
+                <a:cs typeface="Inter" pitchFamily="34" charset="-120"/>
+              </a:rPr>
+              <a:t>$8,452</a:t>
             </a:r>
             <a:endParaRPr lang="en-US" sz="1300" dirty="0"/>
           </a:p>
@@ -7002,8 +7024,8 @@
         </p:nvSpPr>
         <p:spPr>
           <a:xfrm>
-            <a:off x="10149840" y="2446289"/>
-            <a:ext cx="566928" cy="248502"/>
+            <a:off x="9985248" y="2446289"/>
+            <a:ext cx="731520" cy="248502"/>
           </a:xfrm>
           <a:prstGeom prst="rect">
             <a:avLst/>
@@ -7159,7 +7181,7 @@
         <p:spPr>
           <a:xfrm>
             <a:off x="8421624" y="2750703"/>
-            <a:ext cx="169896" cy="136676"/>
+            <a:ext cx="105090" cy="136676"/>
           </a:xfrm>
           <a:prstGeom prst="rect">
             <a:avLst/>
@@ -7178,8 +7200,8 @@
         </p:nvSpPr>
         <p:spPr>
           <a:xfrm>
-            <a:off x="9363456" y="2694791"/>
-            <a:ext cx="786384" cy="248502"/>
+            <a:off x="9025128" y="2694791"/>
+            <a:ext cx="960120" cy="248502"/>
           </a:xfrm>
           <a:prstGeom prst="rect">
             <a:avLst/>
@@ -7197,13 +7219,13 @@
             <a:r>
               <a:rPr lang="en-US" sz="1300" b="1" dirty="0">
                 <a:solidFill>
-                  <a:srgbClr val="1A1A1A"/>
-                </a:solidFill>
-                <a:latin typeface="Inter" pitchFamily="34" charset="0"/>
-                <a:ea typeface="Inter" pitchFamily="34" charset="-122"/>
-                <a:cs typeface="Inter" pitchFamily="34" charset="-120"/>
-              </a:rPr>
-              <a:t>$8.3K</a:t>
+                  <a:srgbClr val="0B2C4A"/>
+                </a:solidFill>
+                <a:latin typeface="Inter" pitchFamily="34" charset="0"/>
+                <a:ea typeface="Inter" pitchFamily="34" charset="-122"/>
+                <a:cs typeface="Inter" pitchFamily="34" charset="-120"/>
+              </a:rPr>
+              <a:t>$8,285</a:t>
             </a:r>
             <a:endParaRPr lang="en-US" sz="1300" dirty="0"/>
           </a:p>
@@ -7217,8 +7239,8 @@
         </p:nvSpPr>
         <p:spPr>
           <a:xfrm>
-            <a:off x="10149840" y="2694791"/>
-            <a:ext cx="566928" cy="248502"/>
+            <a:off x="9985248" y="2694791"/>
+            <a:ext cx="731520" cy="248502"/>
           </a:xfrm>
           <a:prstGeom prst="rect">
             <a:avLst/>
@@ -7374,7 +7396,7 @@
         <p:spPr>
           <a:xfrm>
             <a:off x="8421624" y="2999205"/>
-            <a:ext cx="165457" cy="136676"/>
+            <a:ext cx="102344" cy="136676"/>
           </a:xfrm>
           <a:prstGeom prst="rect">
             <a:avLst/>
@@ -7393,8 +7415,8 @@
         </p:nvSpPr>
         <p:spPr>
           <a:xfrm>
-            <a:off x="9363456" y="2943292"/>
-            <a:ext cx="786384" cy="248502"/>
+            <a:off x="9025128" y="2943292"/>
+            <a:ext cx="960120" cy="248502"/>
           </a:xfrm>
           <a:prstGeom prst="rect">
             <a:avLst/>
@@ -7412,13 +7434,13 @@
             <a:r>
               <a:rPr lang="en-US" sz="1300" b="1" dirty="0">
                 <a:solidFill>
-                  <a:srgbClr val="1A1A1A"/>
-                </a:solidFill>
-                <a:latin typeface="Inter" pitchFamily="34" charset="0"/>
-                <a:ea typeface="Inter" pitchFamily="34" charset="-122"/>
-                <a:cs typeface="Inter" pitchFamily="34" charset="-120"/>
-              </a:rPr>
-              <a:t>$8.1K</a:t>
+                  <a:srgbClr val="0B2C4A"/>
+                </a:solidFill>
+                <a:latin typeface="Inter" pitchFamily="34" charset="0"/>
+                <a:ea typeface="Inter" pitchFamily="34" charset="-122"/>
+                <a:cs typeface="Inter" pitchFamily="34" charset="-120"/>
+              </a:rPr>
+              <a:t>$8,069</a:t>
             </a:r>
             <a:endParaRPr lang="en-US" sz="1300" dirty="0"/>
           </a:p>
@@ -7432,8 +7454,8 @@
         </p:nvSpPr>
         <p:spPr>
           <a:xfrm>
-            <a:off x="10149840" y="2943292"/>
-            <a:ext cx="566928" cy="248502"/>
+            <a:off x="9985248" y="2943292"/>
+            <a:ext cx="731520" cy="248502"/>
           </a:xfrm>
           <a:prstGeom prst="rect">
             <a:avLst/>
@@ -7589,7 +7611,7 @@
         <p:spPr>
           <a:xfrm>
             <a:off x="8421624" y="3247707"/>
-            <a:ext cx="154758" cy="136676"/>
+            <a:ext cx="95727" cy="136676"/>
           </a:xfrm>
           <a:prstGeom prst="rect">
             <a:avLst/>
@@ -7608,8 +7630,8 @@
         </p:nvSpPr>
         <p:spPr>
           <a:xfrm>
-            <a:off x="9363456" y="3191794"/>
-            <a:ext cx="786384" cy="248502"/>
+            <a:off x="9025128" y="3191794"/>
+            <a:ext cx="960120" cy="248502"/>
           </a:xfrm>
           <a:prstGeom prst="rect">
             <a:avLst/>
@@ -7627,13 +7649,13 @@
             <a:r>
               <a:rPr lang="en-US" sz="1300" b="1" dirty="0">
                 <a:solidFill>
-                  <a:srgbClr val="1A1A1A"/>
-                </a:solidFill>
-                <a:latin typeface="Inter" pitchFamily="34" charset="0"/>
-                <a:ea typeface="Inter" pitchFamily="34" charset="-122"/>
-                <a:cs typeface="Inter" pitchFamily="34" charset="-120"/>
-              </a:rPr>
-              <a:t>$7.5K</a:t>
+                  <a:srgbClr val="0B2C4A"/>
+                </a:solidFill>
+                <a:latin typeface="Inter" pitchFamily="34" charset="0"/>
+                <a:ea typeface="Inter" pitchFamily="34" charset="-122"/>
+                <a:cs typeface="Inter" pitchFamily="34" charset="-120"/>
+              </a:rPr>
+              <a:t>$7,547</a:t>
             </a:r>
             <a:endParaRPr lang="en-US" sz="1300" dirty="0"/>
           </a:p>
@@ -7647,8 +7669,8 @@
         </p:nvSpPr>
         <p:spPr>
           <a:xfrm>
-            <a:off x="10149840" y="3191794"/>
-            <a:ext cx="566928" cy="248502"/>
+            <a:off x="9985248" y="3191794"/>
+            <a:ext cx="731520" cy="248502"/>
           </a:xfrm>
           <a:prstGeom prst="rect">
             <a:avLst/>
@@ -7804,7 +7826,7 @@
         <p:spPr>
           <a:xfrm>
             <a:off x="8421624" y="3496208"/>
-            <a:ext cx="151615" cy="136676"/>
+            <a:ext cx="93782" cy="136676"/>
           </a:xfrm>
           <a:prstGeom prst="rect">
             <a:avLst/>
@@ -7823,8 +7845,8 @@
         </p:nvSpPr>
         <p:spPr>
           <a:xfrm>
-            <a:off x="9363456" y="3440296"/>
-            <a:ext cx="786384" cy="248502"/>
+            <a:off x="9025128" y="3440296"/>
+            <a:ext cx="960120" cy="248502"/>
           </a:xfrm>
           <a:prstGeom prst="rect">
             <a:avLst/>
@@ -7842,13 +7864,13 @@
             <a:r>
               <a:rPr lang="en-US" sz="1300" b="1" dirty="0">
                 <a:solidFill>
-                  <a:srgbClr val="1A1A1A"/>
-                </a:solidFill>
-                <a:latin typeface="Inter" pitchFamily="34" charset="0"/>
-                <a:ea typeface="Inter" pitchFamily="34" charset="-122"/>
-                <a:cs typeface="Inter" pitchFamily="34" charset="-120"/>
-              </a:rPr>
-              <a:t>$7.4K</a:t>
+                  <a:srgbClr val="0B2C4A"/>
+                </a:solidFill>
+                <a:latin typeface="Inter" pitchFamily="34" charset="0"/>
+                <a:ea typeface="Inter" pitchFamily="34" charset="-122"/>
+                <a:cs typeface="Inter" pitchFamily="34" charset="-120"/>
+              </a:rPr>
+              <a:t>$7,394</a:t>
             </a:r>
             <a:endParaRPr lang="en-US" sz="1300" dirty="0"/>
           </a:p>
@@ -7862,8 +7884,8 @@
         </p:nvSpPr>
         <p:spPr>
           <a:xfrm>
-            <a:off x="10149840" y="3440296"/>
-            <a:ext cx="566928" cy="248502"/>
+            <a:off x="9985248" y="3440296"/>
+            <a:ext cx="731520" cy="248502"/>
           </a:xfrm>
           <a:prstGeom prst="rect">
             <a:avLst/>
@@ -8019,7 +8041,7 @@
         <p:spPr>
           <a:xfrm>
             <a:off x="8421624" y="3744710"/>
-            <a:ext cx="148645" cy="136676"/>
+            <a:ext cx="91945" cy="136676"/>
           </a:xfrm>
           <a:prstGeom prst="rect">
             <a:avLst/>
@@ -8038,8 +8060,8 @@
         </p:nvSpPr>
         <p:spPr>
           <a:xfrm>
-            <a:off x="9363456" y="3688797"/>
-            <a:ext cx="786384" cy="248502"/>
+            <a:off x="9025128" y="3688797"/>
+            <a:ext cx="960120" cy="248502"/>
           </a:xfrm>
           <a:prstGeom prst="rect">
             <a:avLst/>
@@ -8057,13 +8079,13 @@
             <a:r>
               <a:rPr lang="en-US" sz="1300" b="1" dirty="0">
                 <a:solidFill>
-                  <a:srgbClr val="1A1A1A"/>
-                </a:solidFill>
-                <a:latin typeface="Inter" pitchFamily="34" charset="0"/>
-                <a:ea typeface="Inter" pitchFamily="34" charset="-122"/>
-                <a:cs typeface="Inter" pitchFamily="34" charset="-120"/>
-              </a:rPr>
-              <a:t>$7.2K</a:t>
+                  <a:srgbClr val="0B2C4A"/>
+                </a:solidFill>
+                <a:latin typeface="Inter" pitchFamily="34" charset="0"/>
+                <a:ea typeface="Inter" pitchFamily="34" charset="-122"/>
+                <a:cs typeface="Inter" pitchFamily="34" charset="-120"/>
+              </a:rPr>
+              <a:t>$7,249</a:t>
             </a:r>
             <a:endParaRPr lang="en-US" sz="1300" dirty="0"/>
           </a:p>
@@ -8077,8 +8099,8 @@
         </p:nvSpPr>
         <p:spPr>
           <a:xfrm>
-            <a:off x="10149840" y="3688797"/>
-            <a:ext cx="566928" cy="248502"/>
+            <a:off x="9985248" y="3688797"/>
+            <a:ext cx="731520" cy="248502"/>
           </a:xfrm>
           <a:prstGeom prst="rect">
             <a:avLst/>
@@ -8234,7 +8256,7 @@
         <p:spPr>
           <a:xfrm>
             <a:off x="8421624" y="3993212"/>
-            <a:ext cx="148155" cy="136676"/>
+            <a:ext cx="91642" cy="136676"/>
           </a:xfrm>
           <a:prstGeom prst="rect">
             <a:avLst/>
@@ -8253,8 +8275,8 @@
         </p:nvSpPr>
         <p:spPr>
           <a:xfrm>
-            <a:off x="9363456" y="3937299"/>
-            <a:ext cx="786384" cy="248502"/>
+            <a:off x="9025128" y="3937299"/>
+            <a:ext cx="960120" cy="248502"/>
           </a:xfrm>
           <a:prstGeom prst="rect">
             <a:avLst/>
@@ -8272,13 +8294,13 @@
             <a:r>
               <a:rPr lang="en-US" sz="1300" b="1" dirty="0">
                 <a:solidFill>
-                  <a:srgbClr val="1A1A1A"/>
-                </a:solidFill>
-                <a:latin typeface="Inter" pitchFamily="34" charset="0"/>
-                <a:ea typeface="Inter" pitchFamily="34" charset="-122"/>
-                <a:cs typeface="Inter" pitchFamily="34" charset="-120"/>
-              </a:rPr>
-              <a:t>$7.2K</a:t>
+                  <a:srgbClr val="0B2C4A"/>
+                </a:solidFill>
+                <a:latin typeface="Inter" pitchFamily="34" charset="0"/>
+                <a:ea typeface="Inter" pitchFamily="34" charset="-122"/>
+                <a:cs typeface="Inter" pitchFamily="34" charset="-120"/>
+              </a:rPr>
+              <a:t>$7,225</a:t>
             </a:r>
             <a:endParaRPr lang="en-US" sz="1300" dirty="0"/>
           </a:p>
@@ -8292,8 +8314,8 @@
         </p:nvSpPr>
         <p:spPr>
           <a:xfrm>
-            <a:off x="10149840" y="3937299"/>
-            <a:ext cx="566928" cy="248502"/>
+            <a:off x="9985248" y="3937299"/>
+            <a:ext cx="731520" cy="248502"/>
           </a:xfrm>
           <a:prstGeom prst="rect">
             <a:avLst/>
@@ -8449,7 +8471,7 @@
         <p:spPr>
           <a:xfrm>
             <a:off x="8421624" y="4241713"/>
-            <a:ext cx="146434" cy="136676"/>
+            <a:ext cx="90578" cy="136676"/>
           </a:xfrm>
           <a:prstGeom prst="rect">
             <a:avLst/>
@@ -8468,8 +8490,8 @@
         </p:nvSpPr>
         <p:spPr>
           <a:xfrm>
-            <a:off x="9363456" y="4185800"/>
-            <a:ext cx="786384" cy="248502"/>
+            <a:off x="9025128" y="4185800"/>
+            <a:ext cx="960120" cy="248502"/>
           </a:xfrm>
           <a:prstGeom prst="rect">
             <a:avLst/>
@@ -8487,13 +8509,13 @@
             <a:r>
               <a:rPr lang="en-US" sz="1300" b="1" dirty="0">
                 <a:solidFill>
-                  <a:srgbClr val="1A1A1A"/>
-                </a:solidFill>
-                <a:latin typeface="Inter" pitchFamily="34" charset="0"/>
-                <a:ea typeface="Inter" pitchFamily="34" charset="-122"/>
-                <a:cs typeface="Inter" pitchFamily="34" charset="-120"/>
-              </a:rPr>
-              <a:t>$7.1K</a:t>
+                  <a:srgbClr val="0B2C4A"/>
+                </a:solidFill>
+                <a:latin typeface="Inter" pitchFamily="34" charset="0"/>
+                <a:ea typeface="Inter" pitchFamily="34" charset="-122"/>
+                <a:cs typeface="Inter" pitchFamily="34" charset="-120"/>
+              </a:rPr>
+              <a:t>$7,141</a:t>
             </a:r>
             <a:endParaRPr lang="en-US" sz="1300" dirty="0"/>
           </a:p>
@@ -8507,8 +8529,8 @@
         </p:nvSpPr>
         <p:spPr>
           <a:xfrm>
-            <a:off x="10149840" y="4185800"/>
-            <a:ext cx="566928" cy="248502"/>
+            <a:off x="9985248" y="4185800"/>
+            <a:ext cx="731520" cy="248502"/>
           </a:xfrm>
           <a:prstGeom prst="rect">
             <a:avLst/>
@@ -8664,7 +8686,7 @@
         <p:spPr>
           <a:xfrm>
             <a:off x="8421624" y="4490215"/>
-            <a:ext cx="134976" cy="136676"/>
+            <a:ext cx="83490" cy="136676"/>
           </a:xfrm>
           <a:prstGeom prst="rect">
             <a:avLst/>
@@ -8683,8 +8705,8 @@
         </p:nvSpPr>
         <p:spPr>
           <a:xfrm>
-            <a:off x="9363456" y="4434302"/>
-            <a:ext cx="786384" cy="248502"/>
+            <a:off x="9025128" y="4434302"/>
+            <a:ext cx="960120" cy="248502"/>
           </a:xfrm>
           <a:prstGeom prst="rect">
             <a:avLst/>
@@ -8702,13 +8724,13 @@
             <a:r>
               <a:rPr lang="en-US" sz="1300" b="1" dirty="0">
                 <a:solidFill>
-                  <a:srgbClr val="1A1A1A"/>
-                </a:solidFill>
-                <a:latin typeface="Inter" pitchFamily="34" charset="0"/>
-                <a:ea typeface="Inter" pitchFamily="34" charset="-122"/>
-                <a:cs typeface="Inter" pitchFamily="34" charset="-120"/>
-              </a:rPr>
-              <a:t>$6.6K</a:t>
+                  <a:srgbClr val="0B2C4A"/>
+                </a:solidFill>
+                <a:latin typeface="Inter" pitchFamily="34" charset="0"/>
+                <a:ea typeface="Inter" pitchFamily="34" charset="-122"/>
+                <a:cs typeface="Inter" pitchFamily="34" charset="-120"/>
+              </a:rPr>
+              <a:t>$6,583</a:t>
             </a:r>
             <a:endParaRPr lang="en-US" sz="1300" dirty="0"/>
           </a:p>
@@ -8722,8 +8744,8 @@
         </p:nvSpPr>
         <p:spPr>
           <a:xfrm>
-            <a:off x="10149840" y="4434302"/>
-            <a:ext cx="566928" cy="248502"/>
+            <a:off x="9985248" y="4434302"/>
+            <a:ext cx="731520" cy="248502"/>
           </a:xfrm>
           <a:prstGeom prst="rect">
             <a:avLst/>
@@ -8879,7 +8901,7 @@
         <p:spPr>
           <a:xfrm>
             <a:off x="8421624" y="4738717"/>
-            <a:ext cx="133528" cy="136676"/>
+            <a:ext cx="82594" cy="136676"/>
           </a:xfrm>
           <a:prstGeom prst="rect">
             <a:avLst/>
@@ -8898,8 +8920,8 @@
         </p:nvSpPr>
         <p:spPr>
           <a:xfrm>
-            <a:off x="9363456" y="4682804"/>
-            <a:ext cx="786384" cy="248502"/>
+            <a:off x="9025128" y="4682804"/>
+            <a:ext cx="960120" cy="248502"/>
           </a:xfrm>
           <a:prstGeom prst="rect">
             <a:avLst/>
@@ -8917,13 +8939,13 @@
             <a:r>
               <a:rPr lang="en-US" sz="1300" b="1" dirty="0">
                 <a:solidFill>
-                  <a:srgbClr val="1A1A1A"/>
-                </a:solidFill>
-                <a:latin typeface="Inter" pitchFamily="34" charset="0"/>
-                <a:ea typeface="Inter" pitchFamily="34" charset="-122"/>
-                <a:cs typeface="Inter" pitchFamily="34" charset="-120"/>
-              </a:rPr>
-              <a:t>$6.5K</a:t>
+                  <a:srgbClr val="0B2C4A"/>
+                </a:solidFill>
+                <a:latin typeface="Inter" pitchFamily="34" charset="0"/>
+                <a:ea typeface="Inter" pitchFamily="34" charset="-122"/>
+                <a:cs typeface="Inter" pitchFamily="34" charset="-120"/>
+              </a:rPr>
+              <a:t>$6,512</a:t>
             </a:r>
             <a:endParaRPr lang="en-US" sz="1300" dirty="0"/>
           </a:p>
@@ -8937,8 +8959,8 @@
         </p:nvSpPr>
         <p:spPr>
           <a:xfrm>
-            <a:off x="10149840" y="4682804"/>
-            <a:ext cx="566928" cy="248502"/>
+            <a:off x="9985248" y="4682804"/>
+            <a:ext cx="731520" cy="248502"/>
           </a:xfrm>
           <a:prstGeom prst="rect">
             <a:avLst/>
@@ -9094,7 +9116,7 @@
         <p:spPr>
           <a:xfrm>
             <a:off x="8421624" y="4987218"/>
-            <a:ext cx="108545" cy="136676"/>
+            <a:ext cx="67141" cy="136676"/>
           </a:xfrm>
           <a:prstGeom prst="rect">
             <a:avLst/>
@@ -9113,8 +9135,8 @@
         </p:nvSpPr>
         <p:spPr>
           <a:xfrm>
-            <a:off x="9363456" y="4931305"/>
-            <a:ext cx="786384" cy="248502"/>
+            <a:off x="9025128" y="4931305"/>
+            <a:ext cx="960120" cy="248502"/>
           </a:xfrm>
           <a:prstGeom prst="rect">
             <a:avLst/>
@@ -9132,13 +9154,13 @@
             <a:r>
               <a:rPr lang="en-US" sz="1300" b="1" dirty="0">
                 <a:solidFill>
-                  <a:srgbClr val="1A1A1A"/>
-                </a:solidFill>
-                <a:latin typeface="Inter" pitchFamily="34" charset="0"/>
-                <a:ea typeface="Inter" pitchFamily="34" charset="-122"/>
-                <a:cs typeface="Inter" pitchFamily="34" charset="-120"/>
-              </a:rPr>
-              <a:t>$5.3K</a:t>
+                  <a:srgbClr val="0B2C4A"/>
+                </a:solidFill>
+                <a:latin typeface="Inter" pitchFamily="34" charset="0"/>
+                <a:ea typeface="Inter" pitchFamily="34" charset="-122"/>
+                <a:cs typeface="Inter" pitchFamily="34" charset="-120"/>
+              </a:rPr>
+              <a:t>$5,294</a:t>
             </a:r>
             <a:endParaRPr lang="en-US" sz="1300" dirty="0"/>
           </a:p>
@@ -9152,8 +9174,8 @@
         </p:nvSpPr>
         <p:spPr>
           <a:xfrm>
-            <a:off x="10149840" y="4931305"/>
-            <a:ext cx="566928" cy="248502"/>
+            <a:off x="9985248" y="4931305"/>
+            <a:ext cx="731520" cy="248502"/>
           </a:xfrm>
           <a:prstGeom prst="rect">
             <a:avLst/>
@@ -9309,7 +9331,7 @@
         <p:spPr>
           <a:xfrm>
             <a:off x="8421624" y="5235720"/>
-            <a:ext cx="88865" cy="136676"/>
+            <a:ext cx="54968" cy="136676"/>
           </a:xfrm>
           <a:prstGeom prst="rect">
             <a:avLst/>
@@ -9328,8 +9350,8 @@
         </p:nvSpPr>
         <p:spPr>
           <a:xfrm>
-            <a:off x="9363456" y="5179807"/>
-            <a:ext cx="786384" cy="248502"/>
+            <a:off x="9025128" y="5179807"/>
+            <a:ext cx="960120" cy="248502"/>
           </a:xfrm>
           <a:prstGeom prst="rect">
             <a:avLst/>
@@ -9347,13 +9369,13 @@
             <a:r>
               <a:rPr lang="en-US" sz="1300" b="1" dirty="0">
                 <a:solidFill>
-                  <a:srgbClr val="1A1A1A"/>
-                </a:solidFill>
-                <a:latin typeface="Inter" pitchFamily="34" charset="0"/>
-                <a:ea typeface="Inter" pitchFamily="34" charset="-122"/>
-                <a:cs typeface="Inter" pitchFamily="34" charset="-120"/>
-              </a:rPr>
-              <a:t>$4.3K</a:t>
+                  <a:srgbClr val="0B2C4A"/>
+                </a:solidFill>
+                <a:latin typeface="Inter" pitchFamily="34" charset="0"/>
+                <a:ea typeface="Inter" pitchFamily="34" charset="-122"/>
+                <a:cs typeface="Inter" pitchFamily="34" charset="-120"/>
+              </a:rPr>
+              <a:t>$4,334</a:t>
             </a:r>
             <a:endParaRPr lang="en-US" sz="1300" dirty="0"/>
           </a:p>
@@ -9367,8 +9389,8 @@
         </p:nvSpPr>
         <p:spPr>
           <a:xfrm>
-            <a:off x="10149840" y="5179807"/>
-            <a:ext cx="566928" cy="248502"/>
+            <a:off x="9985248" y="5179807"/>
+            <a:ext cx="731520" cy="248502"/>
           </a:xfrm>
           <a:prstGeom prst="rect">
             <a:avLst/>
@@ -9524,7 +9546,7 @@
         <p:spPr>
           <a:xfrm>
             <a:off x="8421624" y="5484222"/>
-            <a:ext cx="70911" cy="136676"/>
+            <a:ext cx="43862" cy="136676"/>
           </a:xfrm>
           <a:prstGeom prst="rect">
             <a:avLst/>
@@ -9543,8 +9565,8 @@
         </p:nvSpPr>
         <p:spPr>
           <a:xfrm>
-            <a:off x="9363456" y="5428309"/>
-            <a:ext cx="786384" cy="248502"/>
+            <a:off x="9025128" y="5428309"/>
+            <a:ext cx="960120" cy="248502"/>
           </a:xfrm>
           <a:prstGeom prst="rect">
             <a:avLst/>
@@ -9562,13 +9584,13 @@
             <a:r>
               <a:rPr lang="en-US" sz="1300" b="1" dirty="0">
                 <a:solidFill>
-                  <a:srgbClr val="1A1A1A"/>
-                </a:solidFill>
-                <a:latin typeface="Inter" pitchFamily="34" charset="0"/>
-                <a:ea typeface="Inter" pitchFamily="34" charset="-122"/>
-                <a:cs typeface="Inter" pitchFamily="34" charset="-120"/>
-              </a:rPr>
-              <a:t>$3.5K</a:t>
+                  <a:srgbClr val="0B2C4A"/>
+                </a:solidFill>
+                <a:latin typeface="Inter" pitchFamily="34" charset="0"/>
+                <a:ea typeface="Inter" pitchFamily="34" charset="-122"/>
+                <a:cs typeface="Inter" pitchFamily="34" charset="-120"/>
+              </a:rPr>
+              <a:t>$3,458</a:t>
             </a:r>
             <a:endParaRPr lang="en-US" sz="1300" dirty="0"/>
           </a:p>
@@ -9582,8 +9604,8 @@
         </p:nvSpPr>
         <p:spPr>
           <a:xfrm>
-            <a:off x="10149840" y="5428309"/>
-            <a:ext cx="566928" cy="248502"/>
+            <a:off x="9985248" y="5428309"/>
+            <a:ext cx="731520" cy="248502"/>
           </a:xfrm>
           <a:prstGeom prst="rect">
             <a:avLst/>

--- a/day2-deck/decks/Tech Minute - Review.pptx
+++ b/day2-deck/decks/Tech Minute - Review.pptx
@@ -592,7 +592,7 @@
           <a:p>
             <a:r>
               <a:rPr lang="en-US" dirty="0"/>
-              <a:t>Source: Value of a minute = each store's counted technicians' labor gross + parts gross per sold hour, divided by 60 (Qlik - Closed Repair Orders, all pay types, same rates as the proficiency opportunity slides). Tech-days = counted techs' worked hours (ADP) / 8 per day. Assumes each minute saved becomes a minute of flagged work. 583 counted technicians, same-store, INEOS excluded. Month = Dec 25, 2025 - Oct 9, 2026 / 9.49; year = month x 12. A year = one minute a day for every counted tech at the store, for a year. Per min = gross per tech minute.</a:t>
+              <a:t>Takeaway (off the slide): One minute a day per tech: Toyota Henderson $43,256 a year. Volvo techs are worth the most per minute at $4.99.Source: Value of a minute = each store's counted technicians' labor gross + parts gross per sold hour, divided by 60 (Qlik - Closed Repair Orders, all pay types, same rates as the proficiency opportunity slides). Tech-days = counted techs' worked hours (ADP) / 8 per day. Assumes each minute saved becomes a minute of flagged work. 583 counted technicians, same-store, INEOS excluded. Month = Dec 25, 2025 - Oct 9, 2026 / 9.49; year = month x 12. A year = one minute a day for every counted tech at the store, for a year. Per min = gross per tech minute.</a:t>
             </a:r>
             <a:endParaRPr lang="en-US" dirty="0"/>
           </a:p>
@@ -2334,7 +2334,7 @@
         <p:spPr>
           <a:xfrm>
             <a:off x="457200" y="1207008"/>
-            <a:ext cx="11274552" cy="4782312"/>
+            <a:ext cx="11274552" cy="5148072"/>
           </a:xfrm>
           <a:prstGeom prst="rect">
             <a:avLst/>
@@ -2588,7 +2588,7 @@
         <p:spPr>
           <a:xfrm>
             <a:off x="658368" y="1700784"/>
-            <a:ext cx="310896" cy="248502"/>
+            <a:ext cx="310896" cy="270017"/>
           </a:xfrm>
           <a:prstGeom prst="rect">
             <a:avLst/>
@@ -2627,7 +2627,7 @@
         <p:spPr>
           <a:xfrm>
             <a:off x="1014984" y="1700784"/>
-            <a:ext cx="1783080" cy="248502"/>
+            <a:ext cx="1783080" cy="270017"/>
           </a:xfrm>
           <a:prstGeom prst="rect">
             <a:avLst/>
@@ -2665,8 +2665,8 @@
         </p:nvSpPr>
         <p:spPr>
           <a:xfrm>
-            <a:off x="2871216" y="1756697"/>
-            <a:ext cx="548640" cy="136676"/>
+            <a:off x="2871216" y="1761538"/>
+            <a:ext cx="548640" cy="148509"/>
           </a:xfrm>
           <a:prstGeom prst="rect">
             <a:avLst/>
@@ -2686,7 +2686,7 @@
         <p:spPr>
           <a:xfrm>
             <a:off x="3474720" y="1700784"/>
-            <a:ext cx="960120" cy="248502"/>
+            <a:ext cx="960120" cy="270017"/>
           </a:xfrm>
           <a:prstGeom prst="rect">
             <a:avLst/>
@@ -2725,7 +2725,7 @@
         <p:spPr>
           <a:xfrm>
             <a:off x="4434840" y="1700784"/>
-            <a:ext cx="731520" cy="248502"/>
+            <a:ext cx="731520" cy="270017"/>
           </a:xfrm>
           <a:prstGeom prst="rect">
             <a:avLst/>
@@ -2764,7 +2764,7 @@
         <p:spPr>
           <a:xfrm>
             <a:off x="5166360" y="1700784"/>
-            <a:ext cx="749808" cy="248502"/>
+            <a:ext cx="749808" cy="270017"/>
           </a:xfrm>
           <a:prstGeom prst="rect">
             <a:avLst/>
@@ -2802,8 +2802,8 @@
         </p:nvSpPr>
         <p:spPr>
           <a:xfrm>
-            <a:off x="658368" y="1949286"/>
-            <a:ext cx="310896" cy="248502"/>
+            <a:off x="658368" y="1970801"/>
+            <a:ext cx="310896" cy="270017"/>
           </a:xfrm>
           <a:prstGeom prst="rect">
             <a:avLst/>
@@ -2841,8 +2841,8 @@
         </p:nvSpPr>
         <p:spPr>
           <a:xfrm>
-            <a:off x="1014984" y="1949286"/>
-            <a:ext cx="1783080" cy="248502"/>
+            <a:off x="1014984" y="1970801"/>
+            <a:ext cx="1783080" cy="270017"/>
           </a:xfrm>
           <a:prstGeom prst="rect">
             <a:avLst/>
@@ -2880,8 +2880,8 @@
         </p:nvSpPr>
         <p:spPr>
           <a:xfrm>
-            <a:off x="2871216" y="2005199"/>
-            <a:ext cx="428287" cy="136676"/>
+            <a:off x="2871216" y="2031555"/>
+            <a:ext cx="428287" cy="148509"/>
           </a:xfrm>
           <a:prstGeom prst="rect">
             <a:avLst/>
@@ -2900,8 +2900,8 @@
         </p:nvSpPr>
         <p:spPr>
           <a:xfrm>
-            <a:off x="3474720" y="1949286"/>
-            <a:ext cx="960120" cy="248502"/>
+            <a:off x="3474720" y="1970801"/>
+            <a:ext cx="960120" cy="270017"/>
           </a:xfrm>
           <a:prstGeom prst="rect">
             <a:avLst/>
@@ -2939,8 +2939,8 @@
         </p:nvSpPr>
         <p:spPr>
           <a:xfrm>
-            <a:off x="4434840" y="1949286"/>
-            <a:ext cx="731520" cy="248502"/>
+            <a:off x="4434840" y="1970801"/>
+            <a:ext cx="731520" cy="270017"/>
           </a:xfrm>
           <a:prstGeom prst="rect">
             <a:avLst/>
@@ -2978,8 +2978,8 @@
         </p:nvSpPr>
         <p:spPr>
           <a:xfrm>
-            <a:off x="5166360" y="1949286"/>
-            <a:ext cx="749808" cy="248502"/>
+            <a:off x="5166360" y="1970801"/>
+            <a:ext cx="749808" cy="270017"/>
           </a:xfrm>
           <a:prstGeom prst="rect">
             <a:avLst/>
@@ -3017,8 +3017,8 @@
         </p:nvSpPr>
         <p:spPr>
           <a:xfrm>
-            <a:off x="658368" y="2197787"/>
-            <a:ext cx="310896" cy="248502"/>
+            <a:off x="658368" y="2240818"/>
+            <a:ext cx="310896" cy="270017"/>
           </a:xfrm>
           <a:prstGeom prst="rect">
             <a:avLst/>
@@ -3056,8 +3056,8 @@
         </p:nvSpPr>
         <p:spPr>
           <a:xfrm>
-            <a:off x="1014984" y="2197787"/>
-            <a:ext cx="1783080" cy="248502"/>
+            <a:off x="1014984" y="2240818"/>
+            <a:ext cx="1783080" cy="270017"/>
           </a:xfrm>
           <a:prstGeom prst="rect">
             <a:avLst/>
@@ -3095,8 +3095,8 @@
         </p:nvSpPr>
         <p:spPr>
           <a:xfrm>
-            <a:off x="2871216" y="2253700"/>
-            <a:ext cx="359802" cy="136676"/>
+            <a:off x="2871216" y="2301572"/>
+            <a:ext cx="359802" cy="148509"/>
           </a:xfrm>
           <a:prstGeom prst="rect">
             <a:avLst/>
@@ -3115,8 +3115,8 @@
         </p:nvSpPr>
         <p:spPr>
           <a:xfrm>
-            <a:off x="3474720" y="2197787"/>
-            <a:ext cx="960120" cy="248502"/>
+            <a:off x="3474720" y="2240818"/>
+            <a:ext cx="960120" cy="270017"/>
           </a:xfrm>
           <a:prstGeom prst="rect">
             <a:avLst/>
@@ -3154,8 +3154,8 @@
         </p:nvSpPr>
         <p:spPr>
           <a:xfrm>
-            <a:off x="4434840" y="2197787"/>
-            <a:ext cx="731520" cy="248502"/>
+            <a:off x="4434840" y="2240818"/>
+            <a:ext cx="731520" cy="270017"/>
           </a:xfrm>
           <a:prstGeom prst="rect">
             <a:avLst/>
@@ -3193,8 +3193,8 @@
         </p:nvSpPr>
         <p:spPr>
           <a:xfrm>
-            <a:off x="5166360" y="2197787"/>
-            <a:ext cx="749808" cy="248502"/>
+            <a:off x="5166360" y="2240818"/>
+            <a:ext cx="749808" cy="270017"/>
           </a:xfrm>
           <a:prstGeom prst="rect">
             <a:avLst/>
@@ -3232,8 +3232,8 @@
         </p:nvSpPr>
         <p:spPr>
           <a:xfrm>
-            <a:off x="658368" y="2446289"/>
-            <a:ext cx="310896" cy="248502"/>
+            <a:off x="658368" y="2510835"/>
+            <a:ext cx="310896" cy="270017"/>
           </a:xfrm>
           <a:prstGeom prst="rect">
             <a:avLst/>
@@ -3271,8 +3271,8 @@
         </p:nvSpPr>
         <p:spPr>
           <a:xfrm>
-            <a:off x="1014984" y="2446289"/>
-            <a:ext cx="1783080" cy="248502"/>
+            <a:off x="1014984" y="2510835"/>
+            <a:ext cx="1783080" cy="270017"/>
           </a:xfrm>
           <a:prstGeom prst="rect">
             <a:avLst/>
@@ -3310,8 +3310,8 @@
         </p:nvSpPr>
         <p:spPr>
           <a:xfrm>
-            <a:off x="2871216" y="2502202"/>
-            <a:ext cx="345673" cy="136676"/>
+            <a:off x="2871216" y="2571589"/>
+            <a:ext cx="345673" cy="148509"/>
           </a:xfrm>
           <a:prstGeom prst="rect">
             <a:avLst/>
@@ -3330,8 +3330,8 @@
         </p:nvSpPr>
         <p:spPr>
           <a:xfrm>
-            <a:off x="3474720" y="2446289"/>
-            <a:ext cx="960120" cy="248502"/>
+            <a:off x="3474720" y="2510835"/>
+            <a:ext cx="960120" cy="270017"/>
           </a:xfrm>
           <a:prstGeom prst="rect">
             <a:avLst/>
@@ -3369,8 +3369,8 @@
         </p:nvSpPr>
         <p:spPr>
           <a:xfrm>
-            <a:off x="4434840" y="2446289"/>
-            <a:ext cx="731520" cy="248502"/>
+            <a:off x="4434840" y="2510835"/>
+            <a:ext cx="731520" cy="270017"/>
           </a:xfrm>
           <a:prstGeom prst="rect">
             <a:avLst/>
@@ -3408,8 +3408,8 @@
         </p:nvSpPr>
         <p:spPr>
           <a:xfrm>
-            <a:off x="5166360" y="2446289"/>
-            <a:ext cx="749808" cy="248502"/>
+            <a:off x="5166360" y="2510835"/>
+            <a:ext cx="749808" cy="270017"/>
           </a:xfrm>
           <a:prstGeom prst="rect">
             <a:avLst/>
@@ -3447,8 +3447,8 @@
         </p:nvSpPr>
         <p:spPr>
           <a:xfrm>
-            <a:off x="658368" y="2694791"/>
-            <a:ext cx="310896" cy="248502"/>
+            <a:off x="658368" y="2780852"/>
+            <a:ext cx="310896" cy="270017"/>
           </a:xfrm>
           <a:prstGeom prst="rect">
             <a:avLst/>
@@ -3486,8 +3486,8 @@
         </p:nvSpPr>
         <p:spPr>
           <a:xfrm>
-            <a:off x="1014984" y="2694791"/>
-            <a:ext cx="1783080" cy="248502"/>
+            <a:off x="1014984" y="2780852"/>
+            <a:ext cx="1783080" cy="270017"/>
           </a:xfrm>
           <a:prstGeom prst="rect">
             <a:avLst/>
@@ -3525,8 +3525,8 @@
         </p:nvSpPr>
         <p:spPr>
           <a:xfrm>
-            <a:off x="2871216" y="2750703"/>
-            <a:ext cx="316030" cy="136676"/>
+            <a:off x="2871216" y="2841606"/>
+            <a:ext cx="316030" cy="148509"/>
           </a:xfrm>
           <a:prstGeom prst="rect">
             <a:avLst/>
@@ -3545,8 +3545,8 @@
         </p:nvSpPr>
         <p:spPr>
           <a:xfrm>
-            <a:off x="3474720" y="2694791"/>
-            <a:ext cx="960120" cy="248502"/>
+            <a:off x="3474720" y="2780852"/>
+            <a:ext cx="960120" cy="270017"/>
           </a:xfrm>
           <a:prstGeom prst="rect">
             <a:avLst/>
@@ -3584,8 +3584,8 @@
         </p:nvSpPr>
         <p:spPr>
           <a:xfrm>
-            <a:off x="4434840" y="2694791"/>
-            <a:ext cx="731520" cy="248502"/>
+            <a:off x="4434840" y="2780852"/>
+            <a:ext cx="731520" cy="270017"/>
           </a:xfrm>
           <a:prstGeom prst="rect">
             <a:avLst/>
@@ -3623,8 +3623,8 @@
         </p:nvSpPr>
         <p:spPr>
           <a:xfrm>
-            <a:off x="5166360" y="2694791"/>
-            <a:ext cx="749808" cy="248502"/>
+            <a:off x="5166360" y="2780852"/>
+            <a:ext cx="749808" cy="270017"/>
           </a:xfrm>
           <a:prstGeom prst="rect">
             <a:avLst/>
@@ -3662,8 +3662,8 @@
         </p:nvSpPr>
         <p:spPr>
           <a:xfrm>
-            <a:off x="658368" y="2943292"/>
-            <a:ext cx="310896" cy="248502"/>
+            <a:off x="658368" y="3050869"/>
+            <a:ext cx="310896" cy="270017"/>
           </a:xfrm>
           <a:prstGeom prst="rect">
             <a:avLst/>
@@ -3701,8 +3701,8 @@
         </p:nvSpPr>
         <p:spPr>
           <a:xfrm>
-            <a:off x="1014984" y="2943292"/>
-            <a:ext cx="1783080" cy="248502"/>
+            <a:off x="1014984" y="3050869"/>
+            <a:ext cx="1783080" cy="270017"/>
           </a:xfrm>
           <a:prstGeom prst="rect">
             <a:avLst/>
@@ -3740,8 +3740,8 @@
         </p:nvSpPr>
         <p:spPr>
           <a:xfrm>
-            <a:off x="2871216" y="2999205"/>
-            <a:ext cx="288890" cy="136676"/>
+            <a:off x="2871216" y="3111623"/>
+            <a:ext cx="288890" cy="148509"/>
           </a:xfrm>
           <a:prstGeom prst="rect">
             <a:avLst/>
@@ -3760,8 +3760,8 @@
         </p:nvSpPr>
         <p:spPr>
           <a:xfrm>
-            <a:off x="3474720" y="2943292"/>
-            <a:ext cx="960120" cy="248502"/>
+            <a:off x="3474720" y="3050869"/>
+            <a:ext cx="960120" cy="270017"/>
           </a:xfrm>
           <a:prstGeom prst="rect">
             <a:avLst/>
@@ -3799,8 +3799,8 @@
         </p:nvSpPr>
         <p:spPr>
           <a:xfrm>
-            <a:off x="4434840" y="2943292"/>
-            <a:ext cx="731520" cy="248502"/>
+            <a:off x="4434840" y="3050869"/>
+            <a:ext cx="731520" cy="270017"/>
           </a:xfrm>
           <a:prstGeom prst="rect">
             <a:avLst/>
@@ -3838,8 +3838,8 @@
         </p:nvSpPr>
         <p:spPr>
           <a:xfrm>
-            <a:off x="5166360" y="2943292"/>
-            <a:ext cx="749808" cy="248502"/>
+            <a:off x="5166360" y="3050869"/>
+            <a:ext cx="749808" cy="270017"/>
           </a:xfrm>
           <a:prstGeom prst="rect">
             <a:avLst/>
@@ -3877,8 +3877,8 @@
         </p:nvSpPr>
         <p:spPr>
           <a:xfrm>
-            <a:off x="658368" y="3191794"/>
-            <a:ext cx="310896" cy="248502"/>
+            <a:off x="658368" y="3320886"/>
+            <a:ext cx="310896" cy="270017"/>
           </a:xfrm>
           <a:prstGeom prst="rect">
             <a:avLst/>
@@ -3916,8 +3916,8 @@
         </p:nvSpPr>
         <p:spPr>
           <a:xfrm>
-            <a:off x="1014984" y="3191794"/>
-            <a:ext cx="1783080" cy="248502"/>
+            <a:off x="1014984" y="3320886"/>
+            <a:ext cx="1783080" cy="270017"/>
           </a:xfrm>
           <a:prstGeom prst="rect">
             <a:avLst/>
@@ -3955,8 +3955,8 @@
         </p:nvSpPr>
         <p:spPr>
           <a:xfrm>
-            <a:off x="2871216" y="3247707"/>
-            <a:ext cx="206935" cy="136676"/>
+            <a:off x="2871216" y="3381639"/>
+            <a:ext cx="206935" cy="148509"/>
           </a:xfrm>
           <a:prstGeom prst="rect">
             <a:avLst/>
@@ -3975,8 +3975,8 @@
         </p:nvSpPr>
         <p:spPr>
           <a:xfrm>
-            <a:off x="3474720" y="3191794"/>
-            <a:ext cx="960120" cy="248502"/>
+            <a:off x="3474720" y="3320886"/>
+            <a:ext cx="960120" cy="270017"/>
           </a:xfrm>
           <a:prstGeom prst="rect">
             <a:avLst/>
@@ -4014,8 +4014,8 @@
         </p:nvSpPr>
         <p:spPr>
           <a:xfrm>
-            <a:off x="4434840" y="3191794"/>
-            <a:ext cx="731520" cy="248502"/>
+            <a:off x="4434840" y="3320886"/>
+            <a:ext cx="731520" cy="270017"/>
           </a:xfrm>
           <a:prstGeom prst="rect">
             <a:avLst/>
@@ -4053,8 +4053,8 @@
         </p:nvSpPr>
         <p:spPr>
           <a:xfrm>
-            <a:off x="5166360" y="3191794"/>
-            <a:ext cx="749808" cy="248502"/>
+            <a:off x="5166360" y="3320886"/>
+            <a:ext cx="749808" cy="270017"/>
           </a:xfrm>
           <a:prstGeom prst="rect">
             <a:avLst/>
@@ -4092,8 +4092,8 @@
         </p:nvSpPr>
         <p:spPr>
           <a:xfrm>
-            <a:off x="658368" y="3440296"/>
-            <a:ext cx="310896" cy="248502"/>
+            <a:off x="658368" y="3590903"/>
+            <a:ext cx="310896" cy="270017"/>
           </a:xfrm>
           <a:prstGeom prst="rect">
             <a:avLst/>
@@ -4131,8 +4131,8 @@
         </p:nvSpPr>
         <p:spPr>
           <a:xfrm>
-            <a:off x="1014984" y="3440296"/>
-            <a:ext cx="1783080" cy="248502"/>
+            <a:off x="1014984" y="3590903"/>
+            <a:ext cx="1783080" cy="270017"/>
           </a:xfrm>
           <a:prstGeom prst="rect">
             <a:avLst/>
@@ -4170,8 +4170,8 @@
         </p:nvSpPr>
         <p:spPr>
           <a:xfrm>
-            <a:off x="2871216" y="3496208"/>
-            <a:ext cx="205982" cy="136676"/>
+            <a:off x="2871216" y="3651656"/>
+            <a:ext cx="205982" cy="148509"/>
           </a:xfrm>
           <a:prstGeom prst="rect">
             <a:avLst/>
@@ -4190,8 +4190,8 @@
         </p:nvSpPr>
         <p:spPr>
           <a:xfrm>
-            <a:off x="3474720" y="3440296"/>
-            <a:ext cx="960120" cy="248502"/>
+            <a:off x="3474720" y="3590903"/>
+            <a:ext cx="960120" cy="270017"/>
           </a:xfrm>
           <a:prstGeom prst="rect">
             <a:avLst/>
@@ -4229,8 +4229,8 @@
         </p:nvSpPr>
         <p:spPr>
           <a:xfrm>
-            <a:off x="4434840" y="3440296"/>
-            <a:ext cx="731520" cy="248502"/>
+            <a:off x="4434840" y="3590903"/>
+            <a:ext cx="731520" cy="270017"/>
           </a:xfrm>
           <a:prstGeom prst="rect">
             <a:avLst/>
@@ -4268,8 +4268,8 @@
         </p:nvSpPr>
         <p:spPr>
           <a:xfrm>
-            <a:off x="5166360" y="3440296"/>
-            <a:ext cx="749808" cy="248502"/>
+            <a:off x="5166360" y="3590903"/>
+            <a:ext cx="749808" cy="270017"/>
           </a:xfrm>
           <a:prstGeom prst="rect">
             <a:avLst/>
@@ -4307,8 +4307,8 @@
         </p:nvSpPr>
         <p:spPr>
           <a:xfrm>
-            <a:off x="658368" y="3688797"/>
-            <a:ext cx="310896" cy="248502"/>
+            <a:off x="658368" y="3860920"/>
+            <a:ext cx="310896" cy="270017"/>
           </a:xfrm>
           <a:prstGeom prst="rect">
             <a:avLst/>
@@ -4346,8 +4346,8 @@
         </p:nvSpPr>
         <p:spPr>
           <a:xfrm>
-            <a:off x="1014984" y="3688797"/>
-            <a:ext cx="1783080" cy="248502"/>
+            <a:off x="1014984" y="3860920"/>
+            <a:ext cx="1783080" cy="270017"/>
           </a:xfrm>
           <a:prstGeom prst="rect">
             <a:avLst/>
@@ -4385,8 +4385,8 @@
         </p:nvSpPr>
         <p:spPr>
           <a:xfrm>
-            <a:off x="2871216" y="3744710"/>
-            <a:ext cx="193357" cy="136676"/>
+            <a:off x="2871216" y="3921673"/>
+            <a:ext cx="193357" cy="148509"/>
           </a:xfrm>
           <a:prstGeom prst="rect">
             <a:avLst/>
@@ -4405,8 +4405,8 @@
         </p:nvSpPr>
         <p:spPr>
           <a:xfrm>
-            <a:off x="3474720" y="3688797"/>
-            <a:ext cx="960120" cy="248502"/>
+            <a:off x="3474720" y="3860920"/>
+            <a:ext cx="960120" cy="270017"/>
           </a:xfrm>
           <a:prstGeom prst="rect">
             <a:avLst/>
@@ -4444,8 +4444,8 @@
         </p:nvSpPr>
         <p:spPr>
           <a:xfrm>
-            <a:off x="4434840" y="3688797"/>
-            <a:ext cx="731520" cy="248502"/>
+            <a:off x="4434840" y="3860920"/>
+            <a:ext cx="731520" cy="270017"/>
           </a:xfrm>
           <a:prstGeom prst="rect">
             <a:avLst/>
@@ -4483,8 +4483,8 @@
         </p:nvSpPr>
         <p:spPr>
           <a:xfrm>
-            <a:off x="5166360" y="3688797"/>
-            <a:ext cx="749808" cy="248502"/>
+            <a:off x="5166360" y="3860920"/>
+            <a:ext cx="749808" cy="270017"/>
           </a:xfrm>
           <a:prstGeom prst="rect">
             <a:avLst/>
@@ -4522,8 +4522,8 @@
         </p:nvSpPr>
         <p:spPr>
           <a:xfrm>
-            <a:off x="658368" y="3937299"/>
-            <a:ext cx="310896" cy="248502"/>
+            <a:off x="658368" y="4130936"/>
+            <a:ext cx="310896" cy="270017"/>
           </a:xfrm>
           <a:prstGeom prst="rect">
             <a:avLst/>
@@ -4561,8 +4561,8 @@
         </p:nvSpPr>
         <p:spPr>
           <a:xfrm>
-            <a:off x="1014984" y="3937299"/>
-            <a:ext cx="1783080" cy="248502"/>
+            <a:off x="1014984" y="4130936"/>
+            <a:ext cx="1783080" cy="270017"/>
           </a:xfrm>
           <a:prstGeom prst="rect">
             <a:avLst/>
@@ -4600,8 +4600,8 @@
         </p:nvSpPr>
         <p:spPr>
           <a:xfrm>
-            <a:off x="2871216" y="3993212"/>
-            <a:ext cx="186973" cy="136676"/>
+            <a:off x="2871216" y="4191690"/>
+            <a:ext cx="186973" cy="148509"/>
           </a:xfrm>
           <a:prstGeom prst="rect">
             <a:avLst/>
@@ -4620,8 +4620,8 @@
         </p:nvSpPr>
         <p:spPr>
           <a:xfrm>
-            <a:off x="3474720" y="3937299"/>
-            <a:ext cx="960120" cy="248502"/>
+            <a:off x="3474720" y="4130936"/>
+            <a:ext cx="960120" cy="270017"/>
           </a:xfrm>
           <a:prstGeom prst="rect">
             <a:avLst/>
@@ -4659,8 +4659,8 @@
         </p:nvSpPr>
         <p:spPr>
           <a:xfrm>
-            <a:off x="4434840" y="3937299"/>
-            <a:ext cx="731520" cy="248502"/>
+            <a:off x="4434840" y="4130936"/>
+            <a:ext cx="731520" cy="270017"/>
           </a:xfrm>
           <a:prstGeom prst="rect">
             <a:avLst/>
@@ -4698,8 +4698,8 @@
         </p:nvSpPr>
         <p:spPr>
           <a:xfrm>
-            <a:off x="5166360" y="3937299"/>
-            <a:ext cx="749808" cy="248502"/>
+            <a:off x="5166360" y="4130936"/>
+            <a:ext cx="749808" cy="270017"/>
           </a:xfrm>
           <a:prstGeom prst="rect">
             <a:avLst/>
@@ -4737,8 +4737,8 @@
         </p:nvSpPr>
         <p:spPr>
           <a:xfrm>
-            <a:off x="658368" y="4185800"/>
-            <a:ext cx="310896" cy="248502"/>
+            <a:off x="658368" y="4400953"/>
+            <a:ext cx="310896" cy="270017"/>
           </a:xfrm>
           <a:prstGeom prst="rect">
             <a:avLst/>
@@ -4776,8 +4776,8 @@
         </p:nvSpPr>
         <p:spPr>
           <a:xfrm>
-            <a:off x="1014984" y="4185800"/>
-            <a:ext cx="1783080" cy="248502"/>
+            <a:off x="1014984" y="4400953"/>
+            <a:ext cx="1783080" cy="270017"/>
           </a:xfrm>
           <a:prstGeom prst="rect">
             <a:avLst/>
@@ -4815,8 +4815,8 @@
         </p:nvSpPr>
         <p:spPr>
           <a:xfrm>
-            <a:off x="2871216" y="4241713"/>
-            <a:ext cx="178245" cy="136676"/>
+            <a:off x="2871216" y="4461707"/>
+            <a:ext cx="178245" cy="148509"/>
           </a:xfrm>
           <a:prstGeom prst="rect">
             <a:avLst/>
@@ -4835,8 +4835,8 @@
         </p:nvSpPr>
         <p:spPr>
           <a:xfrm>
-            <a:off x="3474720" y="4185800"/>
-            <a:ext cx="960120" cy="248502"/>
+            <a:off x="3474720" y="4400953"/>
+            <a:ext cx="960120" cy="270017"/>
           </a:xfrm>
           <a:prstGeom prst="rect">
             <a:avLst/>
@@ -4874,8 +4874,8 @@
         </p:nvSpPr>
         <p:spPr>
           <a:xfrm>
-            <a:off x="4434840" y="4185800"/>
-            <a:ext cx="731520" cy="248502"/>
+            <a:off x="4434840" y="4400953"/>
+            <a:ext cx="731520" cy="270017"/>
           </a:xfrm>
           <a:prstGeom prst="rect">
             <a:avLst/>
@@ -4913,8 +4913,8 @@
         </p:nvSpPr>
         <p:spPr>
           <a:xfrm>
-            <a:off x="5166360" y="4185800"/>
-            <a:ext cx="749808" cy="248502"/>
+            <a:off x="5166360" y="4400953"/>
+            <a:ext cx="749808" cy="270017"/>
           </a:xfrm>
           <a:prstGeom prst="rect">
             <a:avLst/>
@@ -4952,8 +4952,8 @@
         </p:nvSpPr>
         <p:spPr>
           <a:xfrm>
-            <a:off x="658368" y="4434302"/>
-            <a:ext cx="310896" cy="248502"/>
+            <a:off x="658368" y="4670970"/>
+            <a:ext cx="310896" cy="270017"/>
           </a:xfrm>
           <a:prstGeom prst="rect">
             <a:avLst/>
@@ -4991,8 +4991,8 @@
         </p:nvSpPr>
         <p:spPr>
           <a:xfrm>
-            <a:off x="1014984" y="4434302"/>
-            <a:ext cx="1783080" cy="248502"/>
+            <a:off x="1014984" y="4670970"/>
+            <a:ext cx="1783080" cy="270017"/>
           </a:xfrm>
           <a:prstGeom prst="rect">
             <a:avLst/>
@@ -5030,8 +5030,8 @@
         </p:nvSpPr>
         <p:spPr>
           <a:xfrm>
-            <a:off x="2871216" y="4490215"/>
-            <a:ext cx="160884" cy="136676"/>
+            <a:off x="2871216" y="4731724"/>
+            <a:ext cx="160884" cy="148509"/>
           </a:xfrm>
           <a:prstGeom prst="rect">
             <a:avLst/>
@@ -5050,8 +5050,8 @@
         </p:nvSpPr>
         <p:spPr>
           <a:xfrm>
-            <a:off x="3474720" y="4434302"/>
-            <a:ext cx="960120" cy="248502"/>
+            <a:off x="3474720" y="4670970"/>
+            <a:ext cx="960120" cy="270017"/>
           </a:xfrm>
           <a:prstGeom prst="rect">
             <a:avLst/>
@@ -5089,8 +5089,8 @@
         </p:nvSpPr>
         <p:spPr>
           <a:xfrm>
-            <a:off x="4434840" y="4434302"/>
-            <a:ext cx="731520" cy="248502"/>
+            <a:off x="4434840" y="4670970"/>
+            <a:ext cx="731520" cy="270017"/>
           </a:xfrm>
           <a:prstGeom prst="rect">
             <a:avLst/>
@@ -5128,8 +5128,8 @@
         </p:nvSpPr>
         <p:spPr>
           <a:xfrm>
-            <a:off x="5166360" y="4434302"/>
-            <a:ext cx="749808" cy="248502"/>
+            <a:off x="5166360" y="4670970"/>
+            <a:ext cx="749808" cy="270017"/>
           </a:xfrm>
           <a:prstGeom prst="rect">
             <a:avLst/>
@@ -5167,8 +5167,8 @@
         </p:nvSpPr>
         <p:spPr>
           <a:xfrm>
-            <a:off x="658368" y="4682804"/>
-            <a:ext cx="310896" cy="248502"/>
+            <a:off x="658368" y="4940987"/>
+            <a:ext cx="310896" cy="270017"/>
           </a:xfrm>
           <a:prstGeom prst="rect">
             <a:avLst/>
@@ -5206,8 +5206,8 @@
         </p:nvSpPr>
         <p:spPr>
           <a:xfrm>
-            <a:off x="1014984" y="4682804"/>
-            <a:ext cx="1783080" cy="248502"/>
+            <a:off x="1014984" y="4940987"/>
+            <a:ext cx="1783080" cy="270017"/>
           </a:xfrm>
           <a:prstGeom prst="rect">
             <a:avLst/>
@@ -5245,8 +5245,8 @@
         </p:nvSpPr>
         <p:spPr>
           <a:xfrm>
-            <a:off x="2871216" y="4738717"/>
-            <a:ext cx="159478" cy="136676"/>
+            <a:off x="2871216" y="5001741"/>
+            <a:ext cx="159478" cy="148509"/>
           </a:xfrm>
           <a:prstGeom prst="rect">
             <a:avLst/>
@@ -5265,8 +5265,8 @@
         </p:nvSpPr>
         <p:spPr>
           <a:xfrm>
-            <a:off x="3474720" y="4682804"/>
-            <a:ext cx="960120" cy="248502"/>
+            <a:off x="3474720" y="4940987"/>
+            <a:ext cx="960120" cy="270017"/>
           </a:xfrm>
           <a:prstGeom prst="rect">
             <a:avLst/>
@@ -5304,8 +5304,8 @@
         </p:nvSpPr>
         <p:spPr>
           <a:xfrm>
-            <a:off x="4434840" y="4682804"/>
-            <a:ext cx="731520" cy="248502"/>
+            <a:off x="4434840" y="4940987"/>
+            <a:ext cx="731520" cy="270017"/>
           </a:xfrm>
           <a:prstGeom prst="rect">
             <a:avLst/>
@@ -5343,8 +5343,8 @@
         </p:nvSpPr>
         <p:spPr>
           <a:xfrm>
-            <a:off x="5166360" y="4682804"/>
-            <a:ext cx="749808" cy="248502"/>
+            <a:off x="5166360" y="4940987"/>
+            <a:ext cx="749808" cy="270017"/>
           </a:xfrm>
           <a:prstGeom prst="rect">
             <a:avLst/>
@@ -5382,8 +5382,8 @@
         </p:nvSpPr>
         <p:spPr>
           <a:xfrm>
-            <a:off x="658368" y="4931305"/>
-            <a:ext cx="310896" cy="248502"/>
+            <a:off x="658368" y="5211004"/>
+            <a:ext cx="310896" cy="270017"/>
           </a:xfrm>
           <a:prstGeom prst="rect">
             <a:avLst/>
@@ -5421,8 +5421,8 @@
         </p:nvSpPr>
         <p:spPr>
           <a:xfrm>
-            <a:off x="1014984" y="4931305"/>
-            <a:ext cx="1783080" cy="248502"/>
+            <a:off x="1014984" y="5211004"/>
+            <a:ext cx="1783080" cy="270017"/>
           </a:xfrm>
           <a:prstGeom prst="rect">
             <a:avLst/>
@@ -5460,8 +5460,8 @@
         </p:nvSpPr>
         <p:spPr>
           <a:xfrm>
-            <a:off x="2871216" y="4987218"/>
-            <a:ext cx="156386" cy="136676"/>
+            <a:off x="2871216" y="5271758"/>
+            <a:ext cx="156386" cy="148509"/>
           </a:xfrm>
           <a:prstGeom prst="rect">
             <a:avLst/>
@@ -5480,8 +5480,8 @@
         </p:nvSpPr>
         <p:spPr>
           <a:xfrm>
-            <a:off x="3474720" y="4931305"/>
-            <a:ext cx="960120" cy="248502"/>
+            <a:off x="3474720" y="5211004"/>
+            <a:ext cx="960120" cy="270017"/>
           </a:xfrm>
           <a:prstGeom prst="rect">
             <a:avLst/>
@@ -5519,8 +5519,8 @@
         </p:nvSpPr>
         <p:spPr>
           <a:xfrm>
-            <a:off x="4434840" y="4931305"/>
-            <a:ext cx="731520" cy="248502"/>
+            <a:off x="4434840" y="5211004"/>
+            <a:ext cx="731520" cy="270017"/>
           </a:xfrm>
           <a:prstGeom prst="rect">
             <a:avLst/>
@@ -5558,8 +5558,8 @@
         </p:nvSpPr>
         <p:spPr>
           <a:xfrm>
-            <a:off x="5166360" y="4931305"/>
-            <a:ext cx="749808" cy="248502"/>
+            <a:off x="5166360" y="5211004"/>
+            <a:ext cx="749808" cy="270017"/>
           </a:xfrm>
           <a:prstGeom prst="rect">
             <a:avLst/>
@@ -5597,8 +5597,8 @@
         </p:nvSpPr>
         <p:spPr>
           <a:xfrm>
-            <a:off x="658368" y="5179807"/>
-            <a:ext cx="310896" cy="248502"/>
+            <a:off x="658368" y="5481021"/>
+            <a:ext cx="310896" cy="270017"/>
           </a:xfrm>
           <a:prstGeom prst="rect">
             <a:avLst/>
@@ -5636,8 +5636,8 @@
         </p:nvSpPr>
         <p:spPr>
           <a:xfrm>
-            <a:off x="1014984" y="5179807"/>
-            <a:ext cx="1783080" cy="248502"/>
+            <a:off x="1014984" y="5481021"/>
+            <a:ext cx="1783080" cy="270017"/>
           </a:xfrm>
           <a:prstGeom prst="rect">
             <a:avLst/>
@@ -5675,8 +5675,8 @@
         </p:nvSpPr>
         <p:spPr>
           <a:xfrm>
-            <a:off x="2871216" y="5235720"/>
-            <a:ext cx="151472" cy="136676"/>
+            <a:off x="2871216" y="5541775"/>
+            <a:ext cx="151472" cy="148509"/>
           </a:xfrm>
           <a:prstGeom prst="rect">
             <a:avLst/>
@@ -5695,8 +5695,8 @@
         </p:nvSpPr>
         <p:spPr>
           <a:xfrm>
-            <a:off x="3474720" y="5179807"/>
-            <a:ext cx="960120" cy="248502"/>
+            <a:off x="3474720" y="5481021"/>
+            <a:ext cx="960120" cy="270017"/>
           </a:xfrm>
           <a:prstGeom prst="rect">
             <a:avLst/>
@@ -5734,8 +5734,8 @@
         </p:nvSpPr>
         <p:spPr>
           <a:xfrm>
-            <a:off x="4434840" y="5179807"/>
-            <a:ext cx="731520" cy="248502"/>
+            <a:off x="4434840" y="5481021"/>
+            <a:ext cx="731520" cy="270017"/>
           </a:xfrm>
           <a:prstGeom prst="rect">
             <a:avLst/>
@@ -5773,8 +5773,8 @@
         </p:nvSpPr>
         <p:spPr>
           <a:xfrm>
-            <a:off x="5166360" y="5179807"/>
-            <a:ext cx="749808" cy="248502"/>
+            <a:off x="5166360" y="5481021"/>
+            <a:ext cx="749808" cy="270017"/>
           </a:xfrm>
           <a:prstGeom prst="rect">
             <a:avLst/>
@@ -5812,8 +5812,8 @@
         </p:nvSpPr>
         <p:spPr>
           <a:xfrm>
-            <a:off x="658368" y="5428309"/>
-            <a:ext cx="310896" cy="248502"/>
+            <a:off x="658368" y="5751038"/>
+            <a:ext cx="310896" cy="270017"/>
           </a:xfrm>
           <a:prstGeom prst="rect">
             <a:avLst/>
@@ -5851,8 +5851,8 @@
         </p:nvSpPr>
         <p:spPr>
           <a:xfrm>
-            <a:off x="1014984" y="5428309"/>
-            <a:ext cx="1783080" cy="248502"/>
+            <a:off x="1014984" y="5751038"/>
+            <a:ext cx="1783080" cy="270017"/>
           </a:xfrm>
           <a:prstGeom prst="rect">
             <a:avLst/>
@@ -5890,8 +5890,8 @@
         </p:nvSpPr>
         <p:spPr>
           <a:xfrm>
-            <a:off x="2871216" y="5484222"/>
-            <a:ext cx="144704" cy="136676"/>
+            <a:off x="2871216" y="5811792"/>
+            <a:ext cx="144704" cy="148509"/>
           </a:xfrm>
           <a:prstGeom prst="rect">
             <a:avLst/>
@@ -5910,8 +5910,8 @@
         </p:nvSpPr>
         <p:spPr>
           <a:xfrm>
-            <a:off x="3474720" y="5428309"/>
-            <a:ext cx="960120" cy="248502"/>
+            <a:off x="3474720" y="5751038"/>
+            <a:ext cx="960120" cy="270017"/>
           </a:xfrm>
           <a:prstGeom prst="rect">
             <a:avLst/>
@@ -5949,8 +5949,8 @@
         </p:nvSpPr>
         <p:spPr>
           <a:xfrm>
-            <a:off x="4434840" y="5428309"/>
-            <a:ext cx="731520" cy="248502"/>
+            <a:off x="4434840" y="5751038"/>
+            <a:ext cx="731520" cy="270017"/>
           </a:xfrm>
           <a:prstGeom prst="rect">
             <a:avLst/>
@@ -5988,8 +5988,8 @@
         </p:nvSpPr>
         <p:spPr>
           <a:xfrm>
-            <a:off x="5166360" y="5428309"/>
-            <a:ext cx="749808" cy="248502"/>
+            <a:off x="5166360" y="5751038"/>
+            <a:ext cx="749808" cy="270017"/>
           </a:xfrm>
           <a:prstGeom prst="rect">
             <a:avLst/>
@@ -6027,8 +6027,8 @@
         </p:nvSpPr>
         <p:spPr>
           <a:xfrm>
-            <a:off x="658368" y="5676810"/>
-            <a:ext cx="310896" cy="248502"/>
+            <a:off x="658368" y="6021055"/>
+            <a:ext cx="310896" cy="270017"/>
           </a:xfrm>
           <a:prstGeom prst="rect">
             <a:avLst/>
@@ -6066,8 +6066,8 @@
         </p:nvSpPr>
         <p:spPr>
           <a:xfrm>
-            <a:off x="1014984" y="5676810"/>
-            <a:ext cx="1783080" cy="248502"/>
+            <a:off x="1014984" y="6021055"/>
+            <a:ext cx="1783080" cy="270017"/>
           </a:xfrm>
           <a:prstGeom prst="rect">
             <a:avLst/>
@@ -6105,8 +6105,8 @@
         </p:nvSpPr>
         <p:spPr>
           <a:xfrm>
-            <a:off x="2871216" y="5732723"/>
-            <a:ext cx="136953" cy="136676"/>
+            <a:off x="2871216" y="6081809"/>
+            <a:ext cx="136953" cy="148509"/>
           </a:xfrm>
           <a:prstGeom prst="rect">
             <a:avLst/>
@@ -6125,8 +6125,8 @@
         </p:nvSpPr>
         <p:spPr>
           <a:xfrm>
-            <a:off x="3474720" y="5676810"/>
-            <a:ext cx="960120" cy="248502"/>
+            <a:off x="3474720" y="6021055"/>
+            <a:ext cx="960120" cy="270017"/>
           </a:xfrm>
           <a:prstGeom prst="rect">
             <a:avLst/>
@@ -6164,8 +6164,8 @@
         </p:nvSpPr>
         <p:spPr>
           <a:xfrm>
-            <a:off x="4434840" y="5676810"/>
-            <a:ext cx="731520" cy="248502"/>
+            <a:off x="4434840" y="6021055"/>
+            <a:ext cx="731520" cy="270017"/>
           </a:xfrm>
           <a:prstGeom prst="rect">
             <a:avLst/>
@@ -6203,8 +6203,8 @@
         </p:nvSpPr>
         <p:spPr>
           <a:xfrm>
-            <a:off x="5166360" y="5676810"/>
-            <a:ext cx="749808" cy="248502"/>
+            <a:off x="5166360" y="6021055"/>
+            <a:ext cx="749808" cy="270017"/>
           </a:xfrm>
           <a:prstGeom prst="rect">
             <a:avLst/>
@@ -6243,7 +6243,7 @@
         <p:spPr>
           <a:xfrm>
             <a:off x="6208776" y="1700784"/>
-            <a:ext cx="310896" cy="248502"/>
+            <a:ext cx="310896" cy="270017"/>
           </a:xfrm>
           <a:prstGeom prst="rect">
             <a:avLst/>
@@ -6282,7 +6282,7 @@
         <p:spPr>
           <a:xfrm>
             <a:off x="6565392" y="1700784"/>
-            <a:ext cx="1783080" cy="248502"/>
+            <a:ext cx="1783080" cy="270017"/>
           </a:xfrm>
           <a:prstGeom prst="rect">
             <a:avLst/>
@@ -6320,8 +6320,8 @@
         </p:nvSpPr>
         <p:spPr>
           <a:xfrm>
-            <a:off x="8421624" y="1756697"/>
-            <a:ext cx="129525" cy="136676"/>
+            <a:off x="8421624" y="1761538"/>
+            <a:ext cx="129525" cy="148509"/>
           </a:xfrm>
           <a:prstGeom prst="rect">
             <a:avLst/>
@@ -6341,7 +6341,7 @@
         <p:spPr>
           <a:xfrm>
             <a:off x="9025128" y="1700784"/>
-            <a:ext cx="960120" cy="248502"/>
+            <a:ext cx="960120" cy="270017"/>
           </a:xfrm>
           <a:prstGeom prst="rect">
             <a:avLst/>
@@ -6380,7 +6380,7 @@
         <p:spPr>
           <a:xfrm>
             <a:off x="9985248" y="1700784"/>
-            <a:ext cx="731520" cy="248502"/>
+            <a:ext cx="731520" cy="270017"/>
           </a:xfrm>
           <a:prstGeom prst="rect">
             <a:avLst/>
@@ -6419,7 +6419,7 @@
         <p:spPr>
           <a:xfrm>
             <a:off x="10716768" y="1700784"/>
-            <a:ext cx="749808" cy="248502"/>
+            <a:ext cx="749808" cy="270017"/>
           </a:xfrm>
           <a:prstGeom prst="rect">
             <a:avLst/>
@@ -6457,8 +6457,8 @@
         </p:nvSpPr>
         <p:spPr>
           <a:xfrm>
-            <a:off x="6208776" y="1949286"/>
-            <a:ext cx="310896" cy="248502"/>
+            <a:off x="6208776" y="1970801"/>
+            <a:ext cx="310896" cy="270017"/>
           </a:xfrm>
           <a:prstGeom prst="rect">
             <a:avLst/>
@@ -6496,8 +6496,8 @@
         </p:nvSpPr>
         <p:spPr>
           <a:xfrm>
-            <a:off x="6565392" y="1949286"/>
-            <a:ext cx="1783080" cy="248502"/>
+            <a:off x="6565392" y="1970801"/>
+            <a:ext cx="1783080" cy="270017"/>
           </a:xfrm>
           <a:prstGeom prst="rect">
             <a:avLst/>
@@ -6535,8 +6535,8 @@
         </p:nvSpPr>
         <p:spPr>
           <a:xfrm>
-            <a:off x="8421624" y="2005199"/>
-            <a:ext cx="116104" cy="136676"/>
+            <a:off x="8421624" y="2031555"/>
+            <a:ext cx="116104" cy="148509"/>
           </a:xfrm>
           <a:prstGeom prst="rect">
             <a:avLst/>
@@ -6555,8 +6555,8 @@
         </p:nvSpPr>
         <p:spPr>
           <a:xfrm>
-            <a:off x="9025128" y="1949286"/>
-            <a:ext cx="960120" cy="248502"/>
+            <a:off x="9025128" y="1970801"/>
+            <a:ext cx="960120" cy="270017"/>
           </a:xfrm>
           <a:prstGeom prst="rect">
             <a:avLst/>
@@ -6594,8 +6594,8 @@
         </p:nvSpPr>
         <p:spPr>
           <a:xfrm>
-            <a:off x="9985248" y="1949286"/>
-            <a:ext cx="731520" cy="248502"/>
+            <a:off x="9985248" y="1970801"/>
+            <a:ext cx="731520" cy="270017"/>
           </a:xfrm>
           <a:prstGeom prst="rect">
             <a:avLst/>
@@ -6633,8 +6633,8 @@
         </p:nvSpPr>
         <p:spPr>
           <a:xfrm>
-            <a:off x="10716768" y="1949286"/>
-            <a:ext cx="749808" cy="248502"/>
+            <a:off x="10716768" y="1970801"/>
+            <a:ext cx="749808" cy="270017"/>
           </a:xfrm>
           <a:prstGeom prst="rect">
             <a:avLst/>
@@ -6672,8 +6672,8 @@
         </p:nvSpPr>
         <p:spPr>
           <a:xfrm>
-            <a:off x="6208776" y="2197787"/>
-            <a:ext cx="310896" cy="248502"/>
+            <a:off x="6208776" y="2240818"/>
+            <a:ext cx="310896" cy="270017"/>
           </a:xfrm>
           <a:prstGeom prst="rect">
             <a:avLst/>
@@ -6711,8 +6711,8 @@
         </p:nvSpPr>
         <p:spPr>
           <a:xfrm>
-            <a:off x="6565392" y="2197787"/>
-            <a:ext cx="1783080" cy="248502"/>
+            <a:off x="6565392" y="2240818"/>
+            <a:ext cx="1783080" cy="270017"/>
           </a:xfrm>
           <a:prstGeom prst="rect">
             <a:avLst/>
@@ -6750,8 +6750,8 @@
         </p:nvSpPr>
         <p:spPr>
           <a:xfrm>
-            <a:off x="8421624" y="2253700"/>
-            <a:ext cx="111671" cy="136676"/>
+            <a:off x="8421624" y="2301572"/>
+            <a:ext cx="111671" cy="148509"/>
           </a:xfrm>
           <a:prstGeom prst="rect">
             <a:avLst/>
@@ -6770,8 +6770,8 @@
         </p:nvSpPr>
         <p:spPr>
           <a:xfrm>
-            <a:off x="9025128" y="2197787"/>
-            <a:ext cx="960120" cy="248502"/>
+            <a:off x="9025128" y="2240818"/>
+            <a:ext cx="960120" cy="270017"/>
           </a:xfrm>
           <a:prstGeom prst="rect">
             <a:avLst/>
@@ -6809,8 +6809,8 @@
         </p:nvSpPr>
         <p:spPr>
           <a:xfrm>
-            <a:off x="9985248" y="2197787"/>
-            <a:ext cx="731520" cy="248502"/>
+            <a:off x="9985248" y="2240818"/>
+            <a:ext cx="731520" cy="270017"/>
           </a:xfrm>
           <a:prstGeom prst="rect">
             <a:avLst/>
@@ -6848,8 +6848,8 @@
         </p:nvSpPr>
         <p:spPr>
           <a:xfrm>
-            <a:off x="10716768" y="2197787"/>
-            <a:ext cx="749808" cy="248502"/>
+            <a:off x="10716768" y="2240818"/>
+            <a:ext cx="749808" cy="270017"/>
           </a:xfrm>
           <a:prstGeom prst="rect">
             <a:avLst/>
@@ -6887,8 +6887,8 @@
         </p:nvSpPr>
         <p:spPr>
           <a:xfrm>
-            <a:off x="6208776" y="2446289"/>
-            <a:ext cx="310896" cy="248502"/>
+            <a:off x="6208776" y="2510835"/>
+            <a:ext cx="310896" cy="270017"/>
           </a:xfrm>
           <a:prstGeom prst="rect">
             <a:avLst/>
@@ -6926,8 +6926,8 @@
         </p:nvSpPr>
         <p:spPr>
           <a:xfrm>
-            <a:off x="6565392" y="2446289"/>
-            <a:ext cx="1783080" cy="248502"/>
+            <a:off x="6565392" y="2510835"/>
+            <a:ext cx="1783080" cy="270017"/>
           </a:xfrm>
           <a:prstGeom prst="rect">
             <a:avLst/>
@@ -6965,8 +6965,8 @@
         </p:nvSpPr>
         <p:spPr>
           <a:xfrm>
-            <a:off x="8421624" y="2502202"/>
-            <a:ext cx="107204" cy="136676"/>
+            <a:off x="8421624" y="2571589"/>
+            <a:ext cx="107204" cy="148509"/>
           </a:xfrm>
           <a:prstGeom prst="rect">
             <a:avLst/>
@@ -6985,8 +6985,8 @@
         </p:nvSpPr>
         <p:spPr>
           <a:xfrm>
-            <a:off x="9025128" y="2446289"/>
-            <a:ext cx="960120" cy="248502"/>
+            <a:off x="9025128" y="2510835"/>
+            <a:ext cx="960120" cy="270017"/>
           </a:xfrm>
           <a:prstGeom prst="rect">
             <a:avLst/>
@@ -7024,8 +7024,8 @@
         </p:nvSpPr>
         <p:spPr>
           <a:xfrm>
-            <a:off x="9985248" y="2446289"/>
-            <a:ext cx="731520" cy="248502"/>
+            <a:off x="9985248" y="2510835"/>
+            <a:ext cx="731520" cy="270017"/>
           </a:xfrm>
           <a:prstGeom prst="rect">
             <a:avLst/>
@@ -7063,8 +7063,8 @@
         </p:nvSpPr>
         <p:spPr>
           <a:xfrm>
-            <a:off x="10716768" y="2446289"/>
-            <a:ext cx="749808" cy="248502"/>
+            <a:off x="10716768" y="2510835"/>
+            <a:ext cx="749808" cy="270017"/>
           </a:xfrm>
           <a:prstGeom prst="rect">
             <a:avLst/>
@@ -7102,8 +7102,8 @@
         </p:nvSpPr>
         <p:spPr>
           <a:xfrm>
-            <a:off x="6208776" y="2694791"/>
-            <a:ext cx="310896" cy="248502"/>
+            <a:off x="6208776" y="2780852"/>
+            <a:ext cx="310896" cy="270017"/>
           </a:xfrm>
           <a:prstGeom prst="rect">
             <a:avLst/>
@@ -7141,8 +7141,8 @@
         </p:nvSpPr>
         <p:spPr>
           <a:xfrm>
-            <a:off x="6565392" y="2694791"/>
-            <a:ext cx="1783080" cy="248502"/>
+            <a:off x="6565392" y="2780852"/>
+            <a:ext cx="1783080" cy="270017"/>
           </a:xfrm>
           <a:prstGeom prst="rect">
             <a:avLst/>
@@ -7180,8 +7180,8 @@
         </p:nvSpPr>
         <p:spPr>
           <a:xfrm>
-            <a:off x="8421624" y="2750703"/>
-            <a:ext cx="105090" cy="136676"/>
+            <a:off x="8421624" y="2841606"/>
+            <a:ext cx="105090" cy="148509"/>
           </a:xfrm>
           <a:prstGeom prst="rect">
             <a:avLst/>
@@ -7200,8 +7200,8 @@
         </p:nvSpPr>
         <p:spPr>
           <a:xfrm>
-            <a:off x="9025128" y="2694791"/>
-            <a:ext cx="960120" cy="248502"/>
+            <a:off x="9025128" y="2780852"/>
+            <a:ext cx="960120" cy="270017"/>
           </a:xfrm>
           <a:prstGeom prst="rect">
             <a:avLst/>
@@ -7239,8 +7239,8 @@
         </p:nvSpPr>
         <p:spPr>
           <a:xfrm>
-            <a:off x="9985248" y="2694791"/>
-            <a:ext cx="731520" cy="248502"/>
+            <a:off x="9985248" y="2780852"/>
+            <a:ext cx="731520" cy="270017"/>
           </a:xfrm>
           <a:prstGeom prst="rect">
             <a:avLst/>
@@ -7278,8 +7278,8 @@
         </p:nvSpPr>
         <p:spPr>
           <a:xfrm>
-            <a:off x="10716768" y="2694791"/>
-            <a:ext cx="749808" cy="248502"/>
+            <a:off x="10716768" y="2780852"/>
+            <a:ext cx="749808" cy="270017"/>
           </a:xfrm>
           <a:prstGeom prst="rect">
             <a:avLst/>
@@ -7317,8 +7317,8 @@
         </p:nvSpPr>
         <p:spPr>
           <a:xfrm>
-            <a:off x="6208776" y="2943292"/>
-            <a:ext cx="310896" cy="248502"/>
+            <a:off x="6208776" y="3050869"/>
+            <a:ext cx="310896" cy="270017"/>
           </a:xfrm>
           <a:prstGeom prst="rect">
             <a:avLst/>
@@ -7356,8 +7356,8 @@
         </p:nvSpPr>
         <p:spPr>
           <a:xfrm>
-            <a:off x="6565392" y="2943292"/>
-            <a:ext cx="1783080" cy="248502"/>
+            <a:off x="6565392" y="3050869"/>
+            <a:ext cx="1783080" cy="270017"/>
           </a:xfrm>
           <a:prstGeom prst="rect">
             <a:avLst/>
@@ -7395,8 +7395,8 @@
         </p:nvSpPr>
         <p:spPr>
           <a:xfrm>
-            <a:off x="8421624" y="2999205"/>
-            <a:ext cx="102344" cy="136676"/>
+            <a:off x="8421624" y="3111623"/>
+            <a:ext cx="102344" cy="148509"/>
           </a:xfrm>
           <a:prstGeom prst="rect">
             <a:avLst/>
@@ -7415,8 +7415,8 @@
         </p:nvSpPr>
         <p:spPr>
           <a:xfrm>
-            <a:off x="9025128" y="2943292"/>
-            <a:ext cx="960120" cy="248502"/>
+            <a:off x="9025128" y="3050869"/>
+            <a:ext cx="960120" cy="270017"/>
           </a:xfrm>
           <a:prstGeom prst="rect">
             <a:avLst/>
@@ -7454,8 +7454,8 @@
         </p:nvSpPr>
         <p:spPr>
           <a:xfrm>
-            <a:off x="9985248" y="2943292"/>
-            <a:ext cx="731520" cy="248502"/>
+            <a:off x="9985248" y="3050869"/>
+            <a:ext cx="731520" cy="270017"/>
           </a:xfrm>
           <a:prstGeom prst="rect">
             <a:avLst/>
@@ -7493,8 +7493,8 @@
         </p:nvSpPr>
         <p:spPr>
           <a:xfrm>
-            <a:off x="10716768" y="2943292"/>
-            <a:ext cx="749808" cy="248502"/>
+            <a:off x="10716768" y="3050869"/>
+            <a:ext cx="749808" cy="270017"/>
           </a:xfrm>
           <a:prstGeom prst="rect">
             <a:avLst/>
@@ -7532,8 +7532,8 @@
         </p:nvSpPr>
         <p:spPr>
           <a:xfrm>
-            <a:off x="6208776" y="3191794"/>
-            <a:ext cx="310896" cy="248502"/>
+            <a:off x="6208776" y="3320886"/>
+            <a:ext cx="310896" cy="270017"/>
           </a:xfrm>
           <a:prstGeom prst="rect">
             <a:avLst/>
@@ -7571,8 +7571,8 @@
         </p:nvSpPr>
         <p:spPr>
           <a:xfrm>
-            <a:off x="6565392" y="3191794"/>
-            <a:ext cx="1783080" cy="248502"/>
+            <a:off x="6565392" y="3320886"/>
+            <a:ext cx="1783080" cy="270017"/>
           </a:xfrm>
           <a:prstGeom prst="rect">
             <a:avLst/>
@@ -7610,8 +7610,8 @@
         </p:nvSpPr>
         <p:spPr>
           <a:xfrm>
-            <a:off x="8421624" y="3247707"/>
-            <a:ext cx="95727" cy="136676"/>
+            <a:off x="8421624" y="3381639"/>
+            <a:ext cx="95727" cy="148509"/>
           </a:xfrm>
           <a:prstGeom prst="rect">
             <a:avLst/>
@@ -7630,8 +7630,8 @@
         </p:nvSpPr>
         <p:spPr>
           <a:xfrm>
-            <a:off x="9025128" y="3191794"/>
-            <a:ext cx="960120" cy="248502"/>
+            <a:off x="9025128" y="3320886"/>
+            <a:ext cx="960120" cy="270017"/>
           </a:xfrm>
           <a:prstGeom prst="rect">
             <a:avLst/>
@@ -7669,8 +7669,8 @@
         </p:nvSpPr>
         <p:spPr>
           <a:xfrm>
-            <a:off x="9985248" y="3191794"/>
-            <a:ext cx="731520" cy="248502"/>
+            <a:off x="9985248" y="3320886"/>
+            <a:ext cx="731520" cy="270017"/>
           </a:xfrm>
           <a:prstGeom prst="rect">
             <a:avLst/>
@@ -7708,8 +7708,8 @@
         </p:nvSpPr>
         <p:spPr>
           <a:xfrm>
-            <a:off x="10716768" y="3191794"/>
-            <a:ext cx="749808" cy="248502"/>
+            <a:off x="10716768" y="3320886"/>
+            <a:ext cx="749808" cy="270017"/>
           </a:xfrm>
           <a:prstGeom prst="rect">
             <a:avLst/>
@@ -7747,8 +7747,8 @@
         </p:nvSpPr>
         <p:spPr>
           <a:xfrm>
-            <a:off x="6208776" y="3440296"/>
-            <a:ext cx="310896" cy="248502"/>
+            <a:off x="6208776" y="3590903"/>
+            <a:ext cx="310896" cy="270017"/>
           </a:xfrm>
           <a:prstGeom prst="rect">
             <a:avLst/>
@@ -7786,8 +7786,8 @@
         </p:nvSpPr>
         <p:spPr>
           <a:xfrm>
-            <a:off x="6565392" y="3440296"/>
-            <a:ext cx="1783080" cy="248502"/>
+            <a:off x="6565392" y="3590903"/>
+            <a:ext cx="1783080" cy="270017"/>
           </a:xfrm>
           <a:prstGeom prst="rect">
             <a:avLst/>
@@ -7825,8 +7825,8 @@
         </p:nvSpPr>
         <p:spPr>
           <a:xfrm>
-            <a:off x="8421624" y="3496208"/>
-            <a:ext cx="93782" cy="136676"/>
+            <a:off x="8421624" y="3651656"/>
+            <a:ext cx="93782" cy="148509"/>
           </a:xfrm>
           <a:prstGeom prst="rect">
             <a:avLst/>
@@ -7845,8 +7845,8 @@
         </p:nvSpPr>
         <p:spPr>
           <a:xfrm>
-            <a:off x="9025128" y="3440296"/>
-            <a:ext cx="960120" cy="248502"/>
+            <a:off x="9025128" y="3590903"/>
+            <a:ext cx="960120" cy="270017"/>
           </a:xfrm>
           <a:prstGeom prst="rect">
             <a:avLst/>
@@ -7884,8 +7884,8 @@
         </p:nvSpPr>
         <p:spPr>
           <a:xfrm>
-            <a:off x="9985248" y="3440296"/>
-            <a:ext cx="731520" cy="248502"/>
+            <a:off x="9985248" y="3590903"/>
+            <a:ext cx="731520" cy="270017"/>
           </a:xfrm>
           <a:prstGeom prst="rect">
             <a:avLst/>
@@ -7923,8 +7923,8 @@
         </p:nvSpPr>
         <p:spPr>
           <a:xfrm>
-            <a:off x="10716768" y="3440296"/>
-            <a:ext cx="749808" cy="248502"/>
+            <a:off x="10716768" y="3590903"/>
+            <a:ext cx="749808" cy="270017"/>
           </a:xfrm>
           <a:prstGeom prst="rect">
             <a:avLst/>
@@ -7962,8 +7962,8 @@
         </p:nvSpPr>
         <p:spPr>
           <a:xfrm>
-            <a:off x="6208776" y="3688797"/>
-            <a:ext cx="310896" cy="248502"/>
+            <a:off x="6208776" y="3860920"/>
+            <a:ext cx="310896" cy="270017"/>
           </a:xfrm>
           <a:prstGeom prst="rect">
             <a:avLst/>
@@ -8001,8 +8001,8 @@
         </p:nvSpPr>
         <p:spPr>
           <a:xfrm>
-            <a:off x="6565392" y="3688797"/>
-            <a:ext cx="1783080" cy="248502"/>
+            <a:off x="6565392" y="3860920"/>
+            <a:ext cx="1783080" cy="270017"/>
           </a:xfrm>
           <a:prstGeom prst="rect">
             <a:avLst/>
@@ -8040,8 +8040,8 @@
         </p:nvSpPr>
         <p:spPr>
           <a:xfrm>
-            <a:off x="8421624" y="3744710"/>
-            <a:ext cx="91945" cy="136676"/>
+            <a:off x="8421624" y="3921673"/>
+            <a:ext cx="91945" cy="148509"/>
           </a:xfrm>
           <a:prstGeom prst="rect">
             <a:avLst/>
@@ -8060,8 +8060,8 @@
         </p:nvSpPr>
         <p:spPr>
           <a:xfrm>
-            <a:off x="9025128" y="3688797"/>
-            <a:ext cx="960120" cy="248502"/>
+            <a:off x="9025128" y="3860920"/>
+            <a:ext cx="960120" cy="270017"/>
           </a:xfrm>
           <a:prstGeom prst="rect">
             <a:avLst/>
@@ -8099,8 +8099,8 @@
         </p:nvSpPr>
         <p:spPr>
           <a:xfrm>
-            <a:off x="9985248" y="3688797"/>
-            <a:ext cx="731520" cy="248502"/>
+            <a:off x="9985248" y="3860920"/>
+            <a:ext cx="731520" cy="270017"/>
           </a:xfrm>
           <a:prstGeom prst="rect">
             <a:avLst/>
@@ -8138,8 +8138,8 @@
         </p:nvSpPr>
         <p:spPr>
           <a:xfrm>
-            <a:off x="10716768" y="3688797"/>
-            <a:ext cx="749808" cy="248502"/>
+            <a:off x="10716768" y="3860920"/>
+            <a:ext cx="749808" cy="270017"/>
           </a:xfrm>
           <a:prstGeom prst="rect">
             <a:avLst/>
@@ -8177,8 +8177,8 @@
         </p:nvSpPr>
         <p:spPr>
           <a:xfrm>
-            <a:off x="6208776" y="3937299"/>
-            <a:ext cx="310896" cy="248502"/>
+            <a:off x="6208776" y="4130936"/>
+            <a:ext cx="310896" cy="270017"/>
           </a:xfrm>
           <a:prstGeom prst="rect">
             <a:avLst/>
@@ -8216,8 +8216,8 @@
         </p:nvSpPr>
         <p:spPr>
           <a:xfrm>
-            <a:off x="6565392" y="3937299"/>
-            <a:ext cx="1783080" cy="248502"/>
+            <a:off x="6565392" y="4130936"/>
+            <a:ext cx="1783080" cy="270017"/>
           </a:xfrm>
           <a:prstGeom prst="rect">
             <a:avLst/>
@@ -8255,8 +8255,8 @@
         </p:nvSpPr>
         <p:spPr>
           <a:xfrm>
-            <a:off x="8421624" y="3993212"/>
-            <a:ext cx="91642" cy="136676"/>
+            <a:off x="8421624" y="4191690"/>
+            <a:ext cx="91642" cy="148509"/>
           </a:xfrm>
           <a:prstGeom prst="rect">
             <a:avLst/>
@@ -8275,8 +8275,8 @@
         </p:nvSpPr>
         <p:spPr>
           <a:xfrm>
-            <a:off x="9025128" y="3937299"/>
-            <a:ext cx="960120" cy="248502"/>
+            <a:off x="9025128" y="4130936"/>
+            <a:ext cx="960120" cy="270017"/>
           </a:xfrm>
           <a:prstGeom prst="rect">
             <a:avLst/>
@@ -8314,8 +8314,8 @@
         </p:nvSpPr>
         <p:spPr>
           <a:xfrm>
-            <a:off x="9985248" y="3937299"/>
-            <a:ext cx="731520" cy="248502"/>
+            <a:off x="9985248" y="4130936"/>
+            <a:ext cx="731520" cy="270017"/>
           </a:xfrm>
           <a:prstGeom prst="rect">
             <a:avLst/>
@@ -8353,8 +8353,8 @@
         </p:nvSpPr>
         <p:spPr>
           <a:xfrm>
-            <a:off x="10716768" y="3937299"/>
-            <a:ext cx="749808" cy="248502"/>
+            <a:off x="10716768" y="4130936"/>
+            <a:ext cx="749808" cy="270017"/>
           </a:xfrm>
           <a:prstGeom prst="rect">
             <a:avLst/>
@@ -8392,8 +8392,8 @@
         </p:nvSpPr>
         <p:spPr>
           <a:xfrm>
-            <a:off x="6208776" y="4185800"/>
-            <a:ext cx="310896" cy="248502"/>
+            <a:off x="6208776" y="4400953"/>
+            <a:ext cx="310896" cy="270017"/>
           </a:xfrm>
           <a:prstGeom prst="rect">
             <a:avLst/>
@@ -8431,8 +8431,8 @@
         </p:nvSpPr>
         <p:spPr>
           <a:xfrm>
-            <a:off x="6565392" y="4185800"/>
-            <a:ext cx="1783080" cy="248502"/>
+            <a:off x="6565392" y="4400953"/>
+            <a:ext cx="1783080" cy="270017"/>
           </a:xfrm>
           <a:prstGeom prst="rect">
             <a:avLst/>
@@ -8470,8 +8470,8 @@
         </p:nvSpPr>
         <p:spPr>
           <a:xfrm>
-            <a:off x="8421624" y="4241713"/>
-            <a:ext cx="90578" cy="136676"/>
+            <a:off x="8421624" y="4461707"/>
+            <a:ext cx="90578" cy="148509"/>
           </a:xfrm>
           <a:prstGeom prst="rect">
             <a:avLst/>
@@ -8490,8 +8490,8 @@
         </p:nvSpPr>
         <p:spPr>
           <a:xfrm>
-            <a:off x="9025128" y="4185800"/>
-            <a:ext cx="960120" cy="248502"/>
+            <a:off x="9025128" y="4400953"/>
+            <a:ext cx="960120" cy="270017"/>
           </a:xfrm>
           <a:prstGeom prst="rect">
             <a:avLst/>
@@ -8529,8 +8529,8 @@
         </p:nvSpPr>
         <p:spPr>
           <a:xfrm>
-            <a:off x="9985248" y="4185800"/>
-            <a:ext cx="731520" cy="248502"/>
+            <a:off x="9985248" y="4400953"/>
+            <a:ext cx="731520" cy="270017"/>
           </a:xfrm>
           <a:prstGeom prst="rect">
             <a:avLst/>
@@ -8568,8 +8568,8 @@
         </p:nvSpPr>
         <p:spPr>
           <a:xfrm>
-            <a:off x="10716768" y="4185800"/>
-            <a:ext cx="749808" cy="248502"/>
+            <a:off x="10716768" y="4400953"/>
+            <a:ext cx="749808" cy="270017"/>
           </a:xfrm>
           <a:prstGeom prst="rect">
             <a:avLst/>
@@ -8607,8 +8607,8 @@
         </p:nvSpPr>
         <p:spPr>
           <a:xfrm>
-            <a:off x="6208776" y="4434302"/>
-            <a:ext cx="310896" cy="248502"/>
+            <a:off x="6208776" y="4670970"/>
+            <a:ext cx="310896" cy="270017"/>
           </a:xfrm>
           <a:prstGeom prst="rect">
             <a:avLst/>
@@ -8646,8 +8646,8 @@
         </p:nvSpPr>
         <p:spPr>
           <a:xfrm>
-            <a:off x="6565392" y="4434302"/>
-            <a:ext cx="1783080" cy="248502"/>
+            <a:off x="6565392" y="4670970"/>
+            <a:ext cx="1783080" cy="270017"/>
           </a:xfrm>
           <a:prstGeom prst="rect">
             <a:avLst/>
@@ -8685,8 +8685,8 @@
         </p:nvSpPr>
         <p:spPr>
           <a:xfrm>
-            <a:off x="8421624" y="4490215"/>
-            <a:ext cx="83490" cy="136676"/>
+            <a:off x="8421624" y="4731724"/>
+            <a:ext cx="83490" cy="148509"/>
           </a:xfrm>
           <a:prstGeom prst="rect">
             <a:avLst/>
@@ -8705,8 +8705,8 @@
         </p:nvSpPr>
         <p:spPr>
           <a:xfrm>
-            <a:off x="9025128" y="4434302"/>
-            <a:ext cx="960120" cy="248502"/>
+            <a:off x="9025128" y="4670970"/>
+            <a:ext cx="960120" cy="270017"/>
           </a:xfrm>
           <a:prstGeom prst="rect">
             <a:avLst/>
@@ -8744,8 +8744,8 @@
         </p:nvSpPr>
         <p:spPr>
           <a:xfrm>
-            <a:off x="9985248" y="4434302"/>
-            <a:ext cx="731520" cy="248502"/>
+            <a:off x="9985248" y="4670970"/>
+            <a:ext cx="731520" cy="270017"/>
           </a:xfrm>
           <a:prstGeom prst="rect">
             <a:avLst/>
@@ -8783,8 +8783,8 @@
         </p:nvSpPr>
         <p:spPr>
           <a:xfrm>
-            <a:off x="10716768" y="4434302"/>
-            <a:ext cx="749808" cy="248502"/>
+            <a:off x="10716768" y="4670970"/>
+            <a:ext cx="749808" cy="270017"/>
           </a:xfrm>
           <a:prstGeom prst="rect">
             <a:avLst/>
@@ -8822,8 +8822,8 @@
         </p:nvSpPr>
         <p:spPr>
           <a:xfrm>
-            <a:off x="6208776" y="4682804"/>
-            <a:ext cx="310896" cy="248502"/>
+            <a:off x="6208776" y="4940987"/>
+            <a:ext cx="310896" cy="270017"/>
           </a:xfrm>
           <a:prstGeom prst="rect">
             <a:avLst/>
@@ -8861,8 +8861,8 @@
         </p:nvSpPr>
         <p:spPr>
           <a:xfrm>
-            <a:off x="6565392" y="4682804"/>
-            <a:ext cx="1783080" cy="248502"/>
+            <a:off x="6565392" y="4940987"/>
+            <a:ext cx="1783080" cy="270017"/>
           </a:xfrm>
           <a:prstGeom prst="rect">
             <a:avLst/>
@@ -8900,8 +8900,8 @@
         </p:nvSpPr>
         <p:spPr>
           <a:xfrm>
-            <a:off x="8421624" y="4738717"/>
-            <a:ext cx="82594" cy="136676"/>
+            <a:off x="8421624" y="5001741"/>
+            <a:ext cx="82594" cy="148509"/>
           </a:xfrm>
           <a:prstGeom prst="rect">
             <a:avLst/>
@@ -8920,8 +8920,8 @@
         </p:nvSpPr>
         <p:spPr>
           <a:xfrm>
-            <a:off x="9025128" y="4682804"/>
-            <a:ext cx="960120" cy="248502"/>
+            <a:off x="9025128" y="4940987"/>
+            <a:ext cx="960120" cy="270017"/>
           </a:xfrm>
           <a:prstGeom prst="rect">
             <a:avLst/>
@@ -8959,8 +8959,8 @@
         </p:nvSpPr>
         <p:spPr>
           <a:xfrm>
-            <a:off x="9985248" y="4682804"/>
-            <a:ext cx="731520" cy="248502"/>
+            <a:off x="9985248" y="4940987"/>
+            <a:ext cx="731520" cy="270017"/>
           </a:xfrm>
           <a:prstGeom prst="rect">
             <a:avLst/>
@@ -8998,8 +8998,8 @@
         </p:nvSpPr>
         <p:spPr>
           <a:xfrm>
-            <a:off x="10716768" y="4682804"/>
-            <a:ext cx="749808" cy="248502"/>
+            <a:off x="10716768" y="4940987"/>
+            <a:ext cx="749808" cy="270017"/>
           </a:xfrm>
           <a:prstGeom prst="rect">
             <a:avLst/>
@@ -9037,8 +9037,8 @@
         </p:nvSpPr>
         <p:spPr>
           <a:xfrm>
-            <a:off x="6208776" y="4931305"/>
-            <a:ext cx="310896" cy="248502"/>
+            <a:off x="6208776" y="5211004"/>
+            <a:ext cx="310896" cy="270017"/>
           </a:xfrm>
           <a:prstGeom prst="rect">
             <a:avLst/>
@@ -9076,8 +9076,8 @@
         </p:nvSpPr>
         <p:spPr>
           <a:xfrm>
-            <a:off x="6565392" y="4931305"/>
-            <a:ext cx="1783080" cy="248502"/>
+            <a:off x="6565392" y="5211004"/>
+            <a:ext cx="1783080" cy="270017"/>
           </a:xfrm>
           <a:prstGeom prst="rect">
             <a:avLst/>
@@ -9115,8 +9115,8 @@
         </p:nvSpPr>
         <p:spPr>
           <a:xfrm>
-            <a:off x="8421624" y="4987218"/>
-            <a:ext cx="67141" cy="136676"/>
+            <a:off x="8421624" y="5271758"/>
+            <a:ext cx="67141" cy="148509"/>
           </a:xfrm>
           <a:prstGeom prst="rect">
             <a:avLst/>
@@ -9135,8 +9135,8 @@
         </p:nvSpPr>
         <p:spPr>
           <a:xfrm>
-            <a:off x="9025128" y="4931305"/>
-            <a:ext cx="960120" cy="248502"/>
+            <a:off x="9025128" y="5211004"/>
+            <a:ext cx="960120" cy="270017"/>
           </a:xfrm>
           <a:prstGeom prst="rect">
             <a:avLst/>
@@ -9174,8 +9174,8 @@
         </p:nvSpPr>
         <p:spPr>
           <a:xfrm>
-            <a:off x="9985248" y="4931305"/>
-            <a:ext cx="731520" cy="248502"/>
+            <a:off x="9985248" y="5211004"/>
+            <a:ext cx="731520" cy="270017"/>
           </a:xfrm>
           <a:prstGeom prst="rect">
             <a:avLst/>
@@ -9213,8 +9213,8 @@
         </p:nvSpPr>
         <p:spPr>
           <a:xfrm>
-            <a:off x="10716768" y="4931305"/>
-            <a:ext cx="749808" cy="248502"/>
+            <a:off x="10716768" y="5211004"/>
+            <a:ext cx="749808" cy="270017"/>
           </a:xfrm>
           <a:prstGeom prst="rect">
             <a:avLst/>
@@ -9252,8 +9252,8 @@
         </p:nvSpPr>
         <p:spPr>
           <a:xfrm>
-            <a:off x="6208776" y="5179807"/>
-            <a:ext cx="310896" cy="248502"/>
+            <a:off x="6208776" y="5481021"/>
+            <a:ext cx="310896" cy="270017"/>
           </a:xfrm>
           <a:prstGeom prst="rect">
             <a:avLst/>
@@ -9291,8 +9291,8 @@
         </p:nvSpPr>
         <p:spPr>
           <a:xfrm>
-            <a:off x="6565392" y="5179807"/>
-            <a:ext cx="1783080" cy="248502"/>
+            <a:off x="6565392" y="5481021"/>
+            <a:ext cx="1783080" cy="270017"/>
           </a:xfrm>
           <a:prstGeom prst="rect">
             <a:avLst/>
@@ -9330,8 +9330,8 @@
         </p:nvSpPr>
         <p:spPr>
           <a:xfrm>
-            <a:off x="8421624" y="5235720"/>
-            <a:ext cx="54968" cy="136676"/>
+            <a:off x="8421624" y="5541775"/>
+            <a:ext cx="54968" cy="148509"/>
           </a:xfrm>
           <a:prstGeom prst="rect">
             <a:avLst/>
@@ -9350,8 +9350,8 @@
         </p:nvSpPr>
         <p:spPr>
           <a:xfrm>
-            <a:off x="9025128" y="5179807"/>
-            <a:ext cx="960120" cy="248502"/>
+            <a:off x="9025128" y="5481021"/>
+            <a:ext cx="960120" cy="270017"/>
           </a:xfrm>
           <a:prstGeom prst="rect">
             <a:avLst/>
@@ -9389,8 +9389,8 @@
         </p:nvSpPr>
         <p:spPr>
           <a:xfrm>
-            <a:off x="9985248" y="5179807"/>
-            <a:ext cx="731520" cy="248502"/>
+            <a:off x="9985248" y="5481021"/>
+            <a:ext cx="731520" cy="270017"/>
           </a:xfrm>
           <a:prstGeom prst="rect">
             <a:avLst/>
@@ -9428,8 +9428,8 @@
         </p:nvSpPr>
         <p:spPr>
           <a:xfrm>
-            <a:off x="10716768" y="5179807"/>
-            <a:ext cx="749808" cy="248502"/>
+            <a:off x="10716768" y="5481021"/>
+            <a:ext cx="749808" cy="270017"/>
           </a:xfrm>
           <a:prstGeom prst="rect">
             <a:avLst/>
@@ -9467,8 +9467,8 @@
         </p:nvSpPr>
         <p:spPr>
           <a:xfrm>
-            <a:off x="6208776" y="5428309"/>
-            <a:ext cx="310896" cy="248502"/>
+            <a:off x="6208776" y="5751038"/>
+            <a:ext cx="310896" cy="270017"/>
           </a:xfrm>
           <a:prstGeom prst="rect">
             <a:avLst/>
@@ -9506,8 +9506,8 @@
         </p:nvSpPr>
         <p:spPr>
           <a:xfrm>
-            <a:off x="6565392" y="5428309"/>
-            <a:ext cx="1783080" cy="248502"/>
+            <a:off x="6565392" y="5751038"/>
+            <a:ext cx="1783080" cy="270017"/>
           </a:xfrm>
           <a:prstGeom prst="rect">
             <a:avLst/>
@@ -9545,8 +9545,8 @@
         </p:nvSpPr>
         <p:spPr>
           <a:xfrm>
-            <a:off x="8421624" y="5484222"/>
-            <a:ext cx="43862" cy="136676"/>
+            <a:off x="8421624" y="5811792"/>
+            <a:ext cx="43862" cy="148509"/>
           </a:xfrm>
           <a:prstGeom prst="rect">
             <a:avLst/>
@@ -9565,8 +9565,8 @@
         </p:nvSpPr>
         <p:spPr>
           <a:xfrm>
-            <a:off x="9025128" y="5428309"/>
-            <a:ext cx="960120" cy="248502"/>
+            <a:off x="9025128" y="5751038"/>
+            <a:ext cx="960120" cy="270017"/>
           </a:xfrm>
           <a:prstGeom prst="rect">
             <a:avLst/>
@@ -9604,8 +9604,8 @@
         </p:nvSpPr>
         <p:spPr>
           <a:xfrm>
-            <a:off x="9985248" y="5428309"/>
-            <a:ext cx="731520" cy="248502"/>
+            <a:off x="9985248" y="5751038"/>
+            <a:ext cx="731520" cy="270017"/>
           </a:xfrm>
           <a:prstGeom prst="rect">
             <a:avLst/>
@@ -9643,8 +9643,8 @@
         </p:nvSpPr>
         <p:spPr>
           <a:xfrm>
-            <a:off x="10716768" y="5428309"/>
-            <a:ext cx="749808" cy="248502"/>
+            <a:off x="10716768" y="5751038"/>
+            <a:ext cx="749808" cy="270017"/>
           </a:xfrm>
           <a:prstGeom prst="rect">
             <a:avLst/>
@@ -9683,7 +9683,7 @@
         <p:spPr>
           <a:xfrm>
             <a:off x="6085332" y="1700784"/>
-            <a:ext cx="10973" cy="4224528"/>
+            <a:ext cx="10973" cy="4590288"/>
           </a:xfrm>
           <a:prstGeom prst="rect">
             <a:avLst/>
@@ -9693,65 +9693,6 @@
           </a:solidFill>
           <a:ln/>
         </p:spPr>
-      </p:sp>
-      <p:sp>
-        <p:nvSpPr>
-          <p:cNvPr id="211" name="Shape 209"/>
-          <p:cNvSpPr/>
-          <p:nvPr/>
-        </p:nvSpPr>
-        <p:spPr>
-          <a:xfrm>
-            <a:off x="457200" y="6126480"/>
-            <a:ext cx="11274552" cy="341376"/>
-          </a:xfrm>
-          <a:prstGeom prst="rect">
-            <a:avLst/>
-          </a:prstGeom>
-          <a:solidFill>
-            <a:srgbClr val="EDF4FA"/>
-          </a:solidFill>
-          <a:ln/>
-        </p:spPr>
-      </p:sp>
-      <p:sp>
-        <p:nvSpPr>
-          <p:cNvPr id="212" name="Text 210"/>
-          <p:cNvSpPr txBox="1"/>
-          <p:nvPr/>
-        </p:nvSpPr>
-        <p:spPr>
-          <a:xfrm>
-            <a:off x="658368" y="6144768"/>
-            <a:ext cx="10927080" cy="304800"/>
-          </a:xfrm>
-          <a:prstGeom prst="rect">
-            <a:avLst/>
-          </a:prstGeom>
-          <a:noFill/>
-          <a:ln/>
-        </p:spPr>
-        <p:txBody>
-          <a:bodyPr wrap="square" lIns="0" tIns="0" rIns="0" bIns="0" rtlCol="0" anchor="ctr"/>
-          <a:lstStyle/>
-          <a:p>
-            <a:pPr indent="0" marL="0">
-              <a:buNone/>
-            </a:pPr>
-            <a:r>
-              <a:rPr lang="en-US" sz="1400" b="1" dirty="0">
-                <a:solidFill>
-                  <a:srgbClr val="0B2C4A"/>
-                </a:solidFill>
-                <a:latin typeface="Inter" pitchFamily="34" charset="0"/>
-                <a:ea typeface="Inter" pitchFamily="34" charset="-122"/>
-                <a:cs typeface="Inter" pitchFamily="34" charset="-120"/>
-              </a:rPr>
-              <a:t>One minute a day per tech: Toyota Henderson $43,256 a year. Volvo techs are worth the most per minute at $4.99.</a:t>
-            </a:r>
-            <a:endParaRPr lang="en-US" sz="1400" dirty="0"/>
-          </a:p>
-        </p:txBody>
       </p:sp>
     </p:spTree>
   </p:cSld>

--- a/day2-deck/decks/Tech Minute - Review.pptx
+++ b/day2-deck/decks/Tech Minute - Review.pptx
@@ -592,7 +592,7 @@
           <a:p>
             <a:r>
               <a:rPr lang="en-US" dirty="0"/>
-              <a:t>Takeaway (off the slide): One minute a day per tech: Toyota Henderson $43,256 a year. Volvo techs are worth the most per minute at $4.99.Source: Value of a minute = each store's counted technicians' labor gross + parts gross per sold hour, divided by 60 (Qlik - Closed Repair Orders, all pay types, same rates as the proficiency opportunity slides). Tech-days = counted techs' worked hours (ADP) / 8 per day. Assumes each minute saved becomes a minute of flagged work. 583 counted technicians, same-store, INEOS excluded. Month = Dec 25, 2025 - Oct 9, 2026 / 9.49; year = month x 12. A year = one minute a day for every counted tech at the store, for a year. Per min = gross per tech minute.</a:t>
+              <a:t>Takeaway with the store call-outs (off the slide): One minute a day per tech: Toyota Henderson $43,256 a year. Volvo techs are worth the most per minute at $4.99.Source: Value of a minute = each store's counted technicians' labor gross + parts gross per sold hour, divided by 60 (Qlik - Closed Repair Orders, all pay types, same rates as the proficiency opportunity slides). Tech-days = counted techs' worked hours (ADP) / 8 per day. Assumes each minute saved becomes a minute of flagged work. 583 counted technicians, same-store, INEOS excluded. Month = Dec 25, 2025 - Oct 9, 2026 / 9.49; year = month x 12. A year = one minute a day for every counted tech at the store, for a year. Per min = gross per tech minute.</a:t>
             </a:r>
             <a:endParaRPr lang="en-US" dirty="0"/>
           </a:p>
